--- a/cmpsc-448/presentation/bias-variance-tradeoff.pptx
+++ b/cmpsc-448/presentation/bias-variance-tradeoff.pptx
@@ -578,7 +578,7 @@
           <a:lstStyle/>
           <a:p>
             <a:r>
-              <a:t>Keep the straight fit from slide 1 frozen. Reveal the first 25 observations from the independent 1,000-point test set; slide 3 will show exactly these same observations and axis limits. No model is refitted, and there is no distribution shift or extrapolation. The line still misses the curvature. Bias is the systematic difference between the average prediction over repeated training samples and the true regression function. Here the model family only permits straight lines, so even its average fit cannot capture curvature. The dashed curve is known because we generated this example; in practice it is hidden. Underfitting usually leaves substantial error even on training data. More samples alone will not make a straight model quadratic. Linear regression can also use polynomial features: it is the straight-line specification here that is restrictive.</a:t>
+              <a:t>Keep the straight fit from slide 1 frozen. Reveal the first 25 observations from the independent 1,000-point test set; slide 3 will show exactly these same observations and axis limits. No model is refitted, and there is no distribution shift or extrapolation. The line still misses the curvature. Bias is the systematic difference between the average prediction over repeated training samples and the true regression function. Here the model family only permits straight lines, so even its average fit cannot capture curvature. The true curve is deliberately hidden here, as it would be in practice; only the frozen model and unseen observations are shown. Underfitting usually leaves substantial error even on training data. More samples alone will not make a straight model quadratic. Linear regression can also use polynomial features: it is the straight-line specification here that is restrictive.</a:t>
             </a:r>
           </a:p>
         </p:txBody>
@@ -4005,44 +4005,9 @@
           </a:p>
         </p:txBody>
       </p:sp>
-      <p:cxnSp>
-        <p:nvCxnSpPr>
-          <p:cNvPr id="4" name="Connector 3"/>
-          <p:cNvCxnSpPr/>
-          <p:nvPr/>
-        </p:nvCxnSpPr>
-        <p:spPr>
-          <a:xfrm>
-            <a:off x="594360" y="6419088"/>
-            <a:ext cx="10972800" cy="0"/>
-          </a:xfrm>
-          <a:prstGeom prst="line">
-            <a:avLst/>
-          </a:prstGeom>
-          <a:ln w="12700">
-            <a:solidFill>
-              <a:srgbClr val="D4D6D0"/>
-            </a:solidFill>
-          </a:ln>
-        </p:spPr>
-        <p:style>
-          <a:lnRef idx="2">
-            <a:schemeClr val="accent1"/>
-          </a:lnRef>
-          <a:fillRef idx="0">
-            <a:schemeClr val="accent1"/>
-          </a:fillRef>
-          <a:effectRef idx="0">
-            <a:schemeClr val="accent1"/>
-          </a:effectRef>
-          <a:fontRef idx="minor">
-            <a:schemeClr val="tx1"/>
-          </a:fontRef>
-        </p:style>
-      </p:cxnSp>
       <p:sp>
         <p:nvSpPr>
-          <p:cNvPr id="5" name="TextBox 4"/>
+          <p:cNvPr id="4" name="TextBox 3"/>
           <p:cNvSpPr txBox="1"/>
           <p:nvPr/>
         </p:nvSpPr>
@@ -4081,7 +4046,7 @@
       </p:sp>
       <p:sp>
         <p:nvSpPr>
-          <p:cNvPr id="6" name="TextBox 5"/>
+          <p:cNvPr id="5" name="TextBox 4"/>
           <p:cNvSpPr txBox="1"/>
           <p:nvPr/>
         </p:nvSpPr>
@@ -4120,7 +4085,7 @@
       </p:sp>
       <p:cxnSp>
         <p:nvCxnSpPr>
-          <p:cNvPr id="7" name="Connector 6"/>
+          <p:cNvPr id="6" name="Connector 5"/>
           <p:cNvCxnSpPr/>
           <p:nvPr/>
         </p:nvCxnSpPr>
@@ -4155,7 +4120,7 @@
       </p:cxnSp>
       <p:cxnSp>
         <p:nvCxnSpPr>
-          <p:cNvPr id="8" name="Connector 7"/>
+          <p:cNvPr id="7" name="Connector 6"/>
           <p:cNvCxnSpPr/>
           <p:nvPr/>
         </p:nvCxnSpPr>
@@ -4190,7 +4155,7 @@
       </p:cxnSp>
       <p:sp>
         <p:nvSpPr>
-          <p:cNvPr id="9" name="TextBox 8"/>
+          <p:cNvPr id="8" name="TextBox 7"/>
           <p:cNvSpPr txBox="1"/>
           <p:nvPr/>
         </p:nvSpPr>
@@ -4229,7 +4194,7 @@
       </p:sp>
       <p:sp>
         <p:nvSpPr>
-          <p:cNvPr id="10" name="TextBox 9"/>
+          <p:cNvPr id="9" name="TextBox 8"/>
           <p:cNvSpPr txBox="1"/>
           <p:nvPr/>
         </p:nvSpPr>
@@ -4268,7 +4233,7 @@
       </p:sp>
       <p:sp>
         <p:nvSpPr>
-          <p:cNvPr id="11" name="Freeform 10"/>
+          <p:cNvPr id="10" name="Freeform 9"/>
           <p:cNvSpPr/>
           <p:nvPr/>
         </p:nvSpPr>
@@ -5519,7 +5484,7 @@
       </p:sp>
       <p:sp>
         <p:nvSpPr>
-          <p:cNvPr id="12" name="Oval 11"/>
+          <p:cNvPr id="11" name="Oval 10"/>
           <p:cNvSpPr/>
           <p:nvPr/>
         </p:nvSpPr>
@@ -5564,7 +5529,7 @@
       </p:sp>
       <p:sp>
         <p:nvSpPr>
-          <p:cNvPr id="13" name="Oval 12"/>
+          <p:cNvPr id="12" name="Oval 11"/>
           <p:cNvSpPr/>
           <p:nvPr/>
         </p:nvSpPr>
@@ -5609,7 +5574,7 @@
       </p:sp>
       <p:sp>
         <p:nvSpPr>
-          <p:cNvPr id="14" name="Oval 13"/>
+          <p:cNvPr id="13" name="Oval 12"/>
           <p:cNvSpPr/>
           <p:nvPr/>
         </p:nvSpPr>
@@ -5654,7 +5619,7 @@
       </p:sp>
       <p:sp>
         <p:nvSpPr>
-          <p:cNvPr id="15" name="Oval 14"/>
+          <p:cNvPr id="14" name="Oval 13"/>
           <p:cNvSpPr/>
           <p:nvPr/>
         </p:nvSpPr>
@@ -5699,7 +5664,7 @@
       </p:sp>
       <p:sp>
         <p:nvSpPr>
-          <p:cNvPr id="16" name="Oval 15"/>
+          <p:cNvPr id="15" name="Oval 14"/>
           <p:cNvSpPr/>
           <p:nvPr/>
         </p:nvSpPr>
@@ -5744,7 +5709,7 @@
       </p:sp>
       <p:sp>
         <p:nvSpPr>
-          <p:cNvPr id="17" name="Oval 16"/>
+          <p:cNvPr id="16" name="Oval 15"/>
           <p:cNvSpPr/>
           <p:nvPr/>
         </p:nvSpPr>
@@ -5789,7 +5754,7 @@
       </p:sp>
       <p:sp>
         <p:nvSpPr>
-          <p:cNvPr id="18" name="Oval 17"/>
+          <p:cNvPr id="17" name="Oval 16"/>
           <p:cNvSpPr/>
           <p:nvPr/>
         </p:nvSpPr>
@@ -5834,7 +5799,7 @@
       </p:sp>
       <p:sp>
         <p:nvSpPr>
-          <p:cNvPr id="19" name="Oval 18"/>
+          <p:cNvPr id="18" name="Oval 17"/>
           <p:cNvSpPr/>
           <p:nvPr/>
         </p:nvSpPr>
@@ -5879,7 +5844,7 @@
       </p:sp>
       <p:sp>
         <p:nvSpPr>
-          <p:cNvPr id="20" name="Oval 19"/>
+          <p:cNvPr id="19" name="Oval 18"/>
           <p:cNvSpPr/>
           <p:nvPr/>
         </p:nvSpPr>
@@ -5924,7 +5889,7 @@
       </p:sp>
       <p:sp>
         <p:nvSpPr>
-          <p:cNvPr id="21" name="Oval 20"/>
+          <p:cNvPr id="20" name="Oval 19"/>
           <p:cNvSpPr/>
           <p:nvPr/>
         </p:nvSpPr>
@@ -5969,7 +5934,7 @@
       </p:sp>
       <p:sp>
         <p:nvSpPr>
-          <p:cNvPr id="22" name="Oval 21"/>
+          <p:cNvPr id="21" name="Oval 20"/>
           <p:cNvSpPr/>
           <p:nvPr/>
         </p:nvSpPr>
@@ -6014,7 +5979,7 @@
       </p:sp>
       <p:sp>
         <p:nvSpPr>
-          <p:cNvPr id="23" name="Oval 22"/>
+          <p:cNvPr id="22" name="Oval 21"/>
           <p:cNvSpPr/>
           <p:nvPr/>
         </p:nvSpPr>
@@ -6059,7 +6024,7 @@
       </p:sp>
       <p:sp>
         <p:nvSpPr>
-          <p:cNvPr id="24" name="Oval 23"/>
+          <p:cNvPr id="23" name="Oval 22"/>
           <p:cNvSpPr/>
           <p:nvPr/>
         </p:nvSpPr>
@@ -6104,7 +6069,7 @@
       </p:sp>
       <p:sp>
         <p:nvSpPr>
-          <p:cNvPr id="25" name="Oval 24"/>
+          <p:cNvPr id="24" name="Oval 23"/>
           <p:cNvSpPr/>
           <p:nvPr/>
         </p:nvSpPr>
@@ -6149,7 +6114,7 @@
       </p:sp>
       <p:sp>
         <p:nvSpPr>
-          <p:cNvPr id="26" name="Oval 25"/>
+          <p:cNvPr id="25" name="Oval 24"/>
           <p:cNvSpPr/>
           <p:nvPr/>
         </p:nvSpPr>
@@ -6194,7 +6159,7 @@
       </p:sp>
       <p:sp>
         <p:nvSpPr>
-          <p:cNvPr id="27" name="Oval 26"/>
+          <p:cNvPr id="26" name="Oval 25"/>
           <p:cNvSpPr/>
           <p:nvPr/>
         </p:nvSpPr>
@@ -6239,7 +6204,7 @@
       </p:sp>
       <p:sp>
         <p:nvSpPr>
-          <p:cNvPr id="28" name="Oval 27"/>
+          <p:cNvPr id="27" name="Oval 26"/>
           <p:cNvSpPr/>
           <p:nvPr/>
         </p:nvSpPr>
@@ -6284,7 +6249,7 @@
       </p:sp>
       <p:sp>
         <p:nvSpPr>
-          <p:cNvPr id="29" name="Oval 28"/>
+          <p:cNvPr id="28" name="Oval 27"/>
           <p:cNvSpPr/>
           <p:nvPr/>
         </p:nvSpPr>
@@ -6329,7 +6294,7 @@
       </p:sp>
       <p:sp>
         <p:nvSpPr>
-          <p:cNvPr id="30" name="Oval 29"/>
+          <p:cNvPr id="29" name="Oval 28"/>
           <p:cNvSpPr/>
           <p:nvPr/>
         </p:nvSpPr>
@@ -6374,7 +6339,7 @@
       </p:sp>
       <p:sp>
         <p:nvSpPr>
-          <p:cNvPr id="31" name="Oval 30"/>
+          <p:cNvPr id="30" name="Oval 29"/>
           <p:cNvSpPr/>
           <p:nvPr/>
         </p:nvSpPr>
@@ -6419,7 +6384,7 @@
       </p:sp>
       <p:sp>
         <p:nvSpPr>
-          <p:cNvPr id="32" name="TextBox 31"/>
+          <p:cNvPr id="31" name="TextBox 30"/>
           <p:cNvSpPr txBox="1"/>
           <p:nvPr/>
         </p:nvSpPr>
@@ -6458,7 +6423,7 @@
       </p:sp>
       <p:cxnSp>
         <p:nvCxnSpPr>
-          <p:cNvPr id="33" name="Connector 32"/>
+          <p:cNvPr id="32" name="Connector 31"/>
           <p:cNvCxnSpPr/>
           <p:nvPr/>
         </p:nvCxnSpPr>
@@ -6493,7 +6458,7 @@
       </p:cxnSp>
       <p:cxnSp>
         <p:nvCxnSpPr>
-          <p:cNvPr id="34" name="Connector 33"/>
+          <p:cNvPr id="33" name="Connector 32"/>
           <p:cNvCxnSpPr/>
           <p:nvPr/>
         </p:nvCxnSpPr>
@@ -6528,7 +6493,7 @@
       </p:cxnSp>
       <p:sp>
         <p:nvSpPr>
-          <p:cNvPr id="35" name="TextBox 34"/>
+          <p:cNvPr id="34" name="TextBox 33"/>
           <p:cNvSpPr txBox="1"/>
           <p:nvPr/>
         </p:nvSpPr>
@@ -6567,7 +6532,7 @@
       </p:sp>
       <p:sp>
         <p:nvSpPr>
-          <p:cNvPr id="36" name="TextBox 35"/>
+          <p:cNvPr id="35" name="TextBox 34"/>
           <p:cNvSpPr txBox="1"/>
           <p:nvPr/>
         </p:nvSpPr>
@@ -6606,7 +6571,7 @@
       </p:sp>
       <p:sp>
         <p:nvSpPr>
-          <p:cNvPr id="37" name="Freeform 36"/>
+          <p:cNvPr id="36" name="Freeform 35"/>
           <p:cNvSpPr/>
           <p:nvPr/>
         </p:nvSpPr>
@@ -7857,7 +7822,7 @@
       </p:sp>
       <p:sp>
         <p:nvSpPr>
-          <p:cNvPr id="38" name="Oval 37"/>
+          <p:cNvPr id="37" name="Oval 36"/>
           <p:cNvSpPr/>
           <p:nvPr/>
         </p:nvSpPr>
@@ -7902,7 +7867,7 @@
       </p:sp>
       <p:sp>
         <p:nvSpPr>
-          <p:cNvPr id="39" name="Oval 38"/>
+          <p:cNvPr id="38" name="Oval 37"/>
           <p:cNvSpPr/>
           <p:nvPr/>
         </p:nvSpPr>
@@ -7947,7 +7912,7 @@
       </p:sp>
       <p:sp>
         <p:nvSpPr>
-          <p:cNvPr id="40" name="Oval 39"/>
+          <p:cNvPr id="39" name="Oval 38"/>
           <p:cNvSpPr/>
           <p:nvPr/>
         </p:nvSpPr>
@@ -7992,7 +7957,7 @@
       </p:sp>
       <p:sp>
         <p:nvSpPr>
-          <p:cNvPr id="41" name="Oval 40"/>
+          <p:cNvPr id="40" name="Oval 39"/>
           <p:cNvSpPr/>
           <p:nvPr/>
         </p:nvSpPr>
@@ -8037,7 +8002,7 @@
       </p:sp>
       <p:sp>
         <p:nvSpPr>
-          <p:cNvPr id="42" name="Oval 41"/>
+          <p:cNvPr id="41" name="Oval 40"/>
           <p:cNvSpPr/>
           <p:nvPr/>
         </p:nvSpPr>
@@ -8082,7 +8047,7 @@
       </p:sp>
       <p:sp>
         <p:nvSpPr>
-          <p:cNvPr id="43" name="Oval 42"/>
+          <p:cNvPr id="42" name="Oval 41"/>
           <p:cNvSpPr/>
           <p:nvPr/>
         </p:nvSpPr>
@@ -8127,7 +8092,7 @@
       </p:sp>
       <p:sp>
         <p:nvSpPr>
-          <p:cNvPr id="44" name="Oval 43"/>
+          <p:cNvPr id="43" name="Oval 42"/>
           <p:cNvSpPr/>
           <p:nvPr/>
         </p:nvSpPr>
@@ -8172,7 +8137,7 @@
       </p:sp>
       <p:sp>
         <p:nvSpPr>
-          <p:cNvPr id="45" name="Oval 44"/>
+          <p:cNvPr id="44" name="Oval 43"/>
           <p:cNvSpPr/>
           <p:nvPr/>
         </p:nvSpPr>
@@ -8217,7 +8182,7 @@
       </p:sp>
       <p:sp>
         <p:nvSpPr>
-          <p:cNvPr id="46" name="Oval 45"/>
+          <p:cNvPr id="45" name="Oval 44"/>
           <p:cNvSpPr/>
           <p:nvPr/>
         </p:nvSpPr>
@@ -8262,7 +8227,7 @@
       </p:sp>
       <p:sp>
         <p:nvSpPr>
-          <p:cNvPr id="47" name="Oval 46"/>
+          <p:cNvPr id="46" name="Oval 45"/>
           <p:cNvSpPr/>
           <p:nvPr/>
         </p:nvSpPr>
@@ -8307,7 +8272,7 @@
       </p:sp>
       <p:sp>
         <p:nvSpPr>
-          <p:cNvPr id="48" name="Oval 47"/>
+          <p:cNvPr id="47" name="Oval 46"/>
           <p:cNvSpPr/>
           <p:nvPr/>
         </p:nvSpPr>
@@ -8352,7 +8317,7 @@
       </p:sp>
       <p:sp>
         <p:nvSpPr>
-          <p:cNvPr id="49" name="Oval 48"/>
+          <p:cNvPr id="48" name="Oval 47"/>
           <p:cNvSpPr/>
           <p:nvPr/>
         </p:nvSpPr>
@@ -8397,7 +8362,7 @@
       </p:sp>
       <p:sp>
         <p:nvSpPr>
-          <p:cNvPr id="50" name="Oval 49"/>
+          <p:cNvPr id="49" name="Oval 48"/>
           <p:cNvSpPr/>
           <p:nvPr/>
         </p:nvSpPr>
@@ -8442,7 +8407,7 @@
       </p:sp>
       <p:sp>
         <p:nvSpPr>
-          <p:cNvPr id="51" name="Oval 50"/>
+          <p:cNvPr id="50" name="Oval 49"/>
           <p:cNvSpPr/>
           <p:nvPr/>
         </p:nvSpPr>
@@ -8487,7 +8452,7 @@
       </p:sp>
       <p:sp>
         <p:nvSpPr>
-          <p:cNvPr id="52" name="Oval 51"/>
+          <p:cNvPr id="51" name="Oval 50"/>
           <p:cNvSpPr/>
           <p:nvPr/>
         </p:nvSpPr>
@@ -8532,7 +8497,7 @@
       </p:sp>
       <p:sp>
         <p:nvSpPr>
-          <p:cNvPr id="53" name="Oval 52"/>
+          <p:cNvPr id="52" name="Oval 51"/>
           <p:cNvSpPr/>
           <p:nvPr/>
         </p:nvSpPr>
@@ -8577,7 +8542,7 @@
       </p:sp>
       <p:sp>
         <p:nvSpPr>
-          <p:cNvPr id="54" name="Oval 53"/>
+          <p:cNvPr id="53" name="Oval 52"/>
           <p:cNvSpPr/>
           <p:nvPr/>
         </p:nvSpPr>
@@ -8622,7 +8587,7 @@
       </p:sp>
       <p:sp>
         <p:nvSpPr>
-          <p:cNvPr id="55" name="Oval 54"/>
+          <p:cNvPr id="54" name="Oval 53"/>
           <p:cNvSpPr/>
           <p:nvPr/>
         </p:nvSpPr>
@@ -8667,7 +8632,7 @@
       </p:sp>
       <p:sp>
         <p:nvSpPr>
-          <p:cNvPr id="56" name="Oval 55"/>
+          <p:cNvPr id="55" name="Oval 54"/>
           <p:cNvSpPr/>
           <p:nvPr/>
         </p:nvSpPr>
@@ -8712,7 +8677,7 @@
       </p:sp>
       <p:sp>
         <p:nvSpPr>
-          <p:cNvPr id="57" name="Oval 56"/>
+          <p:cNvPr id="56" name="Oval 55"/>
           <p:cNvSpPr/>
           <p:nvPr/>
         </p:nvSpPr>
@@ -8757,7 +8722,7 @@
       </p:sp>
       <p:sp>
         <p:nvSpPr>
-          <p:cNvPr id="58" name="Oval 57"/>
+          <p:cNvPr id="57" name="Oval 56"/>
           <p:cNvSpPr/>
           <p:nvPr/>
         </p:nvSpPr>
@@ -8802,7 +8767,7 @@
       </p:sp>
       <p:sp>
         <p:nvSpPr>
-          <p:cNvPr id="59" name="TextBox 58"/>
+          <p:cNvPr id="58" name="TextBox 57"/>
           <p:cNvSpPr txBox="1"/>
           <p:nvPr/>
         </p:nvSpPr>
@@ -8841,7 +8806,7 @@
       </p:sp>
       <p:cxnSp>
         <p:nvCxnSpPr>
-          <p:cNvPr id="60" name="Connector 59"/>
+          <p:cNvPr id="59" name="Connector 58"/>
           <p:cNvCxnSpPr/>
           <p:nvPr/>
         </p:nvCxnSpPr>
@@ -8876,7 +8841,7 @@
       </p:cxnSp>
       <p:sp>
         <p:nvSpPr>
-          <p:cNvPr id="61" name="TextBox 60"/>
+          <p:cNvPr id="60" name="TextBox 59"/>
           <p:cNvSpPr txBox="1"/>
           <p:nvPr/>
         </p:nvSpPr>
@@ -8939,9 +8904,33 @@
         <p:nvPr/>
       </p:nvGrpSpPr>
       <p:grpSpPr/>
+      <p:pic>
+        <p:nvPicPr>
+          <p:cNvPr id="2" name="Picture 1" descr="image.png"/>
+          <p:cNvPicPr>
+            <a:picLocks noChangeAspect="1"/>
+          </p:cNvPicPr>
+          <p:nvPr/>
+        </p:nvPicPr>
+        <p:blipFill>
+          <a:blip r:embed="rId2"/>
+          <a:stretch>
+            <a:fillRect/>
+          </a:stretch>
+        </p:blipFill>
+        <p:spPr>
+          <a:xfrm>
+            <a:off x="11768328" y="201168"/>
+            <a:ext cx="219456" cy="6455664"/>
+          </a:xfrm>
+          <a:prstGeom prst="rect">
+            <a:avLst/>
+          </a:prstGeom>
+        </p:spPr>
+      </p:pic>
       <p:sp>
         <p:nvSpPr>
-          <p:cNvPr id="2" name="TextBox 1"/>
+          <p:cNvPr id="3" name="TextBox 2"/>
           <p:cNvSpPr txBox="1"/>
           <p:nvPr/>
         </p:nvSpPr>
@@ -8978,41 +8967,6 @@
           </a:p>
         </p:txBody>
       </p:sp>
-      <p:cxnSp>
-        <p:nvCxnSpPr>
-          <p:cNvPr id="3" name="Connector 2"/>
-          <p:cNvCxnSpPr/>
-          <p:nvPr/>
-        </p:nvCxnSpPr>
-        <p:spPr>
-          <a:xfrm>
-            <a:off x="594360" y="6419088"/>
-            <a:ext cx="10972800" cy="0"/>
-          </a:xfrm>
-          <a:prstGeom prst="line">
-            <a:avLst/>
-          </a:prstGeom>
-          <a:ln w="12700">
-            <a:solidFill>
-              <a:srgbClr val="D4D6D0"/>
-            </a:solidFill>
-          </a:ln>
-        </p:spPr>
-        <p:style>
-          <a:lnRef idx="2">
-            <a:schemeClr val="accent1"/>
-          </a:lnRef>
-          <a:fillRef idx="0">
-            <a:schemeClr val="accent1"/>
-          </a:fillRef>
-          <a:effectRef idx="0">
-            <a:schemeClr val="accent1"/>
-          </a:effectRef>
-          <a:fontRef idx="minor">
-            <a:schemeClr val="tx1"/>
-          </a:fontRef>
-        </p:style>
-      </p:cxnSp>
       <p:sp>
         <p:nvSpPr>
           <p:cNvPr id="4" name="TextBox 3"/>
@@ -9208,1258 +9162,6 @@
         </p:nvSpPr>
         <p:spPr>
           <a:xfrm>
-            <a:off x="896112" y="3099816"/>
-            <a:ext cx="6510528" cy="1582826"/>
-          </a:xfrm>
-          <a:custGeom>
-            <a:avLst/>
-            <a:gdLst/>
-            <a:ahLst/>
-            <a:cxnLst/>
-            <a:rect l="l" t="t" r="r" b="b"/>
-            <a:pathLst>
-              <a:path w="7120" h="1731">
-                <a:moveTo>
-                  <a:pt x="0" y="800"/>
-                </a:moveTo>
-                <a:lnTo>
-                  <a:pt x="18" y="811"/>
-                </a:lnTo>
-                <a:lnTo>
-                  <a:pt x="36" y="822"/>
-                </a:lnTo>
-                <a:lnTo>
-                  <a:pt x="54" y="833"/>
-                </a:lnTo>
-                <a:lnTo>
-                  <a:pt x="71" y="844"/>
-                </a:lnTo>
-                <a:lnTo>
-                  <a:pt x="89" y="854"/>
-                </a:lnTo>
-                <a:lnTo>
-                  <a:pt x="107" y="865"/>
-                </a:lnTo>
-                <a:lnTo>
-                  <a:pt x="125" y="876"/>
-                </a:lnTo>
-                <a:lnTo>
-                  <a:pt x="143" y="886"/>
-                </a:lnTo>
-                <a:lnTo>
-                  <a:pt x="161" y="897"/>
-                </a:lnTo>
-                <a:lnTo>
-                  <a:pt x="178" y="907"/>
-                </a:lnTo>
-                <a:lnTo>
-                  <a:pt x="196" y="917"/>
-                </a:lnTo>
-                <a:lnTo>
-                  <a:pt x="214" y="928"/>
-                </a:lnTo>
-                <a:lnTo>
-                  <a:pt x="232" y="938"/>
-                </a:lnTo>
-                <a:lnTo>
-                  <a:pt x="250" y="948"/>
-                </a:lnTo>
-                <a:lnTo>
-                  <a:pt x="268" y="958"/>
-                </a:lnTo>
-                <a:lnTo>
-                  <a:pt x="286" y="968"/>
-                </a:lnTo>
-                <a:lnTo>
-                  <a:pt x="303" y="978"/>
-                </a:lnTo>
-                <a:lnTo>
-                  <a:pt x="321" y="988"/>
-                </a:lnTo>
-                <a:lnTo>
-                  <a:pt x="339" y="998"/>
-                </a:lnTo>
-                <a:lnTo>
-                  <a:pt x="357" y="1007"/>
-                </a:lnTo>
-                <a:lnTo>
-                  <a:pt x="375" y="1017"/>
-                </a:lnTo>
-                <a:lnTo>
-                  <a:pt x="393" y="1027"/>
-                </a:lnTo>
-                <a:lnTo>
-                  <a:pt x="410" y="1036"/>
-                </a:lnTo>
-                <a:lnTo>
-                  <a:pt x="428" y="1046"/>
-                </a:lnTo>
-                <a:lnTo>
-                  <a:pt x="446" y="1055"/>
-                </a:lnTo>
-                <a:lnTo>
-                  <a:pt x="464" y="1065"/>
-                </a:lnTo>
-                <a:lnTo>
-                  <a:pt x="482" y="1074"/>
-                </a:lnTo>
-                <a:lnTo>
-                  <a:pt x="500" y="1083"/>
-                </a:lnTo>
-                <a:lnTo>
-                  <a:pt x="517" y="1092"/>
-                </a:lnTo>
-                <a:lnTo>
-                  <a:pt x="535" y="1101"/>
-                </a:lnTo>
-                <a:lnTo>
-                  <a:pt x="553" y="1110"/>
-                </a:lnTo>
-                <a:lnTo>
-                  <a:pt x="571" y="1119"/>
-                </a:lnTo>
-                <a:lnTo>
-                  <a:pt x="589" y="1128"/>
-                </a:lnTo>
-                <a:lnTo>
-                  <a:pt x="607" y="1137"/>
-                </a:lnTo>
-                <a:lnTo>
-                  <a:pt x="625" y="1146"/>
-                </a:lnTo>
-                <a:lnTo>
-                  <a:pt x="642" y="1155"/>
-                </a:lnTo>
-                <a:lnTo>
-                  <a:pt x="660" y="1163"/>
-                </a:lnTo>
-                <a:lnTo>
-                  <a:pt x="678" y="1172"/>
-                </a:lnTo>
-                <a:lnTo>
-                  <a:pt x="696" y="1180"/>
-                </a:lnTo>
-                <a:lnTo>
-                  <a:pt x="714" y="1189"/>
-                </a:lnTo>
-                <a:lnTo>
-                  <a:pt x="732" y="1197"/>
-                </a:lnTo>
-                <a:lnTo>
-                  <a:pt x="749" y="1206"/>
-                </a:lnTo>
-                <a:lnTo>
-                  <a:pt x="767" y="1214"/>
-                </a:lnTo>
-                <a:lnTo>
-                  <a:pt x="785" y="1222"/>
-                </a:lnTo>
-                <a:lnTo>
-                  <a:pt x="803" y="1230"/>
-                </a:lnTo>
-                <a:lnTo>
-                  <a:pt x="821" y="1238"/>
-                </a:lnTo>
-                <a:lnTo>
-                  <a:pt x="839" y="1246"/>
-                </a:lnTo>
-                <a:lnTo>
-                  <a:pt x="857" y="1254"/>
-                </a:lnTo>
-                <a:lnTo>
-                  <a:pt x="874" y="1262"/>
-                </a:lnTo>
-                <a:lnTo>
-                  <a:pt x="892" y="1270"/>
-                </a:lnTo>
-                <a:lnTo>
-                  <a:pt x="910" y="1277"/>
-                </a:lnTo>
-                <a:lnTo>
-                  <a:pt x="928" y="1285"/>
-                </a:lnTo>
-                <a:lnTo>
-                  <a:pt x="946" y="1293"/>
-                </a:lnTo>
-                <a:lnTo>
-                  <a:pt x="964" y="1300"/>
-                </a:lnTo>
-                <a:lnTo>
-                  <a:pt x="981" y="1308"/>
-                </a:lnTo>
-                <a:lnTo>
-                  <a:pt x="999" y="1315"/>
-                </a:lnTo>
-                <a:lnTo>
-                  <a:pt x="1017" y="1322"/>
-                </a:lnTo>
-                <a:lnTo>
-                  <a:pt x="1035" y="1330"/>
-                </a:lnTo>
-                <a:lnTo>
-                  <a:pt x="1053" y="1337"/>
-                </a:lnTo>
-                <a:lnTo>
-                  <a:pt x="1071" y="1344"/>
-                </a:lnTo>
-                <a:lnTo>
-                  <a:pt x="1089" y="1351"/>
-                </a:lnTo>
-                <a:lnTo>
-                  <a:pt x="1106" y="1358"/>
-                </a:lnTo>
-                <a:lnTo>
-                  <a:pt x="1124" y="1365"/>
-                </a:lnTo>
-                <a:lnTo>
-                  <a:pt x="1142" y="1372"/>
-                </a:lnTo>
-                <a:lnTo>
-                  <a:pt x="1160" y="1379"/>
-                </a:lnTo>
-                <a:lnTo>
-                  <a:pt x="1178" y="1386"/>
-                </a:lnTo>
-                <a:lnTo>
-                  <a:pt x="1196" y="1392"/>
-                </a:lnTo>
-                <a:lnTo>
-                  <a:pt x="1213" y="1399"/>
-                </a:lnTo>
-                <a:lnTo>
-                  <a:pt x="1231" y="1405"/>
-                </a:lnTo>
-                <a:lnTo>
-                  <a:pt x="1249" y="1412"/>
-                </a:lnTo>
-                <a:lnTo>
-                  <a:pt x="1267" y="1418"/>
-                </a:lnTo>
-                <a:lnTo>
-                  <a:pt x="1285" y="1425"/>
-                </a:lnTo>
-                <a:lnTo>
-                  <a:pt x="1303" y="1431"/>
-                </a:lnTo>
-                <a:lnTo>
-                  <a:pt x="1321" y="1437"/>
-                </a:lnTo>
-                <a:lnTo>
-                  <a:pt x="1338" y="1443"/>
-                </a:lnTo>
-                <a:lnTo>
-                  <a:pt x="1356" y="1449"/>
-                </a:lnTo>
-                <a:lnTo>
-                  <a:pt x="1374" y="1455"/>
-                </a:lnTo>
-                <a:lnTo>
-                  <a:pt x="1392" y="1461"/>
-                </a:lnTo>
-                <a:lnTo>
-                  <a:pt x="1410" y="1467"/>
-                </a:lnTo>
-                <a:lnTo>
-                  <a:pt x="1428" y="1473"/>
-                </a:lnTo>
-                <a:lnTo>
-                  <a:pt x="1445" y="1479"/>
-                </a:lnTo>
-                <a:lnTo>
-                  <a:pt x="1463" y="1485"/>
-                </a:lnTo>
-                <a:lnTo>
-                  <a:pt x="1481" y="1490"/>
-                </a:lnTo>
-                <a:lnTo>
-                  <a:pt x="1499" y="1496"/>
-                </a:lnTo>
-                <a:lnTo>
-                  <a:pt x="1517" y="1501"/>
-                </a:lnTo>
-                <a:lnTo>
-                  <a:pt x="1535" y="1507"/>
-                </a:lnTo>
-                <a:lnTo>
-                  <a:pt x="1552" y="1512"/>
-                </a:lnTo>
-                <a:lnTo>
-                  <a:pt x="1570" y="1517"/>
-                </a:lnTo>
-                <a:lnTo>
-                  <a:pt x="1588" y="1523"/>
-                </a:lnTo>
-                <a:lnTo>
-                  <a:pt x="1606" y="1528"/>
-                </a:lnTo>
-                <a:lnTo>
-                  <a:pt x="1624" y="1533"/>
-                </a:lnTo>
-                <a:lnTo>
-                  <a:pt x="1642" y="1538"/>
-                </a:lnTo>
-                <a:lnTo>
-                  <a:pt x="1660" y="1543"/>
-                </a:lnTo>
-                <a:lnTo>
-                  <a:pt x="1677" y="1548"/>
-                </a:lnTo>
-                <a:lnTo>
-                  <a:pt x="1695" y="1553"/>
-                </a:lnTo>
-                <a:lnTo>
-                  <a:pt x="1713" y="1558"/>
-                </a:lnTo>
-                <a:lnTo>
-                  <a:pt x="1731" y="1562"/>
-                </a:lnTo>
-                <a:lnTo>
-                  <a:pt x="1749" y="1567"/>
-                </a:lnTo>
-                <a:lnTo>
-                  <a:pt x="1767" y="1572"/>
-                </a:lnTo>
-                <a:lnTo>
-                  <a:pt x="1784" y="1576"/>
-                </a:lnTo>
-                <a:lnTo>
-                  <a:pt x="1802" y="1581"/>
-                </a:lnTo>
-                <a:lnTo>
-                  <a:pt x="1820" y="1585"/>
-                </a:lnTo>
-                <a:lnTo>
-                  <a:pt x="1838" y="1589"/>
-                </a:lnTo>
-                <a:lnTo>
-                  <a:pt x="1856" y="1594"/>
-                </a:lnTo>
-                <a:lnTo>
-                  <a:pt x="1874" y="1598"/>
-                </a:lnTo>
-                <a:lnTo>
-                  <a:pt x="1892" y="1602"/>
-                </a:lnTo>
-                <a:lnTo>
-                  <a:pt x="1909" y="1606"/>
-                </a:lnTo>
-                <a:lnTo>
-                  <a:pt x="1927" y="1610"/>
-                </a:lnTo>
-                <a:lnTo>
-                  <a:pt x="1945" y="1614"/>
-                </a:lnTo>
-                <a:lnTo>
-                  <a:pt x="1963" y="1618"/>
-                </a:lnTo>
-                <a:lnTo>
-                  <a:pt x="1981" y="1622"/>
-                </a:lnTo>
-                <a:lnTo>
-                  <a:pt x="1999" y="1625"/>
-                </a:lnTo>
-                <a:lnTo>
-                  <a:pt x="2016" y="1629"/>
-                </a:lnTo>
-                <a:lnTo>
-                  <a:pt x="2034" y="1633"/>
-                </a:lnTo>
-                <a:lnTo>
-                  <a:pt x="2052" y="1636"/>
-                </a:lnTo>
-                <a:lnTo>
-                  <a:pt x="2070" y="1640"/>
-                </a:lnTo>
-                <a:lnTo>
-                  <a:pt x="2088" y="1643"/>
-                </a:lnTo>
-                <a:lnTo>
-                  <a:pt x="2106" y="1646"/>
-                </a:lnTo>
-                <a:lnTo>
-                  <a:pt x="2124" y="1650"/>
-                </a:lnTo>
-                <a:lnTo>
-                  <a:pt x="2141" y="1653"/>
-                </a:lnTo>
-                <a:lnTo>
-                  <a:pt x="2159" y="1656"/>
-                </a:lnTo>
-                <a:lnTo>
-                  <a:pt x="2177" y="1659"/>
-                </a:lnTo>
-                <a:lnTo>
-                  <a:pt x="2195" y="1662"/>
-                </a:lnTo>
-                <a:lnTo>
-                  <a:pt x="2213" y="1665"/>
-                </a:lnTo>
-                <a:lnTo>
-                  <a:pt x="2231" y="1668"/>
-                </a:lnTo>
-                <a:lnTo>
-                  <a:pt x="2248" y="1671"/>
-                </a:lnTo>
-                <a:lnTo>
-                  <a:pt x="2266" y="1674"/>
-                </a:lnTo>
-                <a:lnTo>
-                  <a:pt x="2284" y="1676"/>
-                </a:lnTo>
-                <a:lnTo>
-                  <a:pt x="2302" y="1679"/>
-                </a:lnTo>
-                <a:lnTo>
-                  <a:pt x="2320" y="1682"/>
-                </a:lnTo>
-                <a:lnTo>
-                  <a:pt x="2338" y="1684"/>
-                </a:lnTo>
-                <a:lnTo>
-                  <a:pt x="2355" y="1687"/>
-                </a:lnTo>
-                <a:lnTo>
-                  <a:pt x="2373" y="1689"/>
-                </a:lnTo>
-                <a:lnTo>
-                  <a:pt x="2391" y="1691"/>
-                </a:lnTo>
-                <a:lnTo>
-                  <a:pt x="2409" y="1693"/>
-                </a:lnTo>
-                <a:lnTo>
-                  <a:pt x="2427" y="1696"/>
-                </a:lnTo>
-                <a:lnTo>
-                  <a:pt x="2445" y="1698"/>
-                </a:lnTo>
-                <a:lnTo>
-                  <a:pt x="2463" y="1700"/>
-                </a:lnTo>
-                <a:lnTo>
-                  <a:pt x="2480" y="1702"/>
-                </a:lnTo>
-                <a:lnTo>
-                  <a:pt x="2498" y="1704"/>
-                </a:lnTo>
-                <a:lnTo>
-                  <a:pt x="2516" y="1706"/>
-                </a:lnTo>
-                <a:lnTo>
-                  <a:pt x="2534" y="1707"/>
-                </a:lnTo>
-                <a:lnTo>
-                  <a:pt x="2552" y="1709"/>
-                </a:lnTo>
-                <a:lnTo>
-                  <a:pt x="2570" y="1711"/>
-                </a:lnTo>
-                <a:lnTo>
-                  <a:pt x="2587" y="1712"/>
-                </a:lnTo>
-                <a:lnTo>
-                  <a:pt x="2605" y="1714"/>
-                </a:lnTo>
-                <a:lnTo>
-                  <a:pt x="2623" y="1715"/>
-                </a:lnTo>
-                <a:lnTo>
-                  <a:pt x="2641" y="1717"/>
-                </a:lnTo>
-                <a:lnTo>
-                  <a:pt x="2659" y="1718"/>
-                </a:lnTo>
-                <a:lnTo>
-                  <a:pt x="2677" y="1719"/>
-                </a:lnTo>
-                <a:lnTo>
-                  <a:pt x="2695" y="1720"/>
-                </a:lnTo>
-                <a:lnTo>
-                  <a:pt x="2712" y="1722"/>
-                </a:lnTo>
-                <a:lnTo>
-                  <a:pt x="2730" y="1723"/>
-                </a:lnTo>
-                <a:lnTo>
-                  <a:pt x="2748" y="1724"/>
-                </a:lnTo>
-                <a:lnTo>
-                  <a:pt x="2766" y="1725"/>
-                </a:lnTo>
-                <a:lnTo>
-                  <a:pt x="2784" y="1725"/>
-                </a:lnTo>
-                <a:lnTo>
-                  <a:pt x="2802" y="1726"/>
-                </a:lnTo>
-                <a:lnTo>
-                  <a:pt x="2819" y="1727"/>
-                </a:lnTo>
-                <a:lnTo>
-                  <a:pt x="2837" y="1728"/>
-                </a:lnTo>
-                <a:lnTo>
-                  <a:pt x="2855" y="1728"/>
-                </a:lnTo>
-                <a:lnTo>
-                  <a:pt x="2873" y="1729"/>
-                </a:lnTo>
-                <a:lnTo>
-                  <a:pt x="2891" y="1729"/>
-                </a:lnTo>
-                <a:lnTo>
-                  <a:pt x="2909" y="1730"/>
-                </a:lnTo>
-                <a:lnTo>
-                  <a:pt x="2927" y="1730"/>
-                </a:lnTo>
-                <a:lnTo>
-                  <a:pt x="2944" y="1730"/>
-                </a:lnTo>
-                <a:lnTo>
-                  <a:pt x="2962" y="1731"/>
-                </a:lnTo>
-                <a:lnTo>
-                  <a:pt x="2980" y="1731"/>
-                </a:lnTo>
-                <a:lnTo>
-                  <a:pt x="2998" y="1731"/>
-                </a:lnTo>
-                <a:lnTo>
-                  <a:pt x="3016" y="1731"/>
-                </a:lnTo>
-                <a:lnTo>
-                  <a:pt x="3034" y="1731"/>
-                </a:lnTo>
-                <a:lnTo>
-                  <a:pt x="3051" y="1731"/>
-                </a:lnTo>
-                <a:lnTo>
-                  <a:pt x="3069" y="1730"/>
-                </a:lnTo>
-                <a:lnTo>
-                  <a:pt x="3087" y="1730"/>
-                </a:lnTo>
-                <a:lnTo>
-                  <a:pt x="3105" y="1730"/>
-                </a:lnTo>
-                <a:lnTo>
-                  <a:pt x="3123" y="1730"/>
-                </a:lnTo>
-                <a:lnTo>
-                  <a:pt x="3141" y="1729"/>
-                </a:lnTo>
-                <a:lnTo>
-                  <a:pt x="3158" y="1729"/>
-                </a:lnTo>
-                <a:lnTo>
-                  <a:pt x="3176" y="1728"/>
-                </a:lnTo>
-                <a:lnTo>
-                  <a:pt x="3194" y="1727"/>
-                </a:lnTo>
-                <a:lnTo>
-                  <a:pt x="3212" y="1727"/>
-                </a:lnTo>
-                <a:lnTo>
-                  <a:pt x="3230" y="1726"/>
-                </a:lnTo>
-                <a:lnTo>
-                  <a:pt x="3248" y="1725"/>
-                </a:lnTo>
-                <a:lnTo>
-                  <a:pt x="3266" y="1724"/>
-                </a:lnTo>
-                <a:lnTo>
-                  <a:pt x="3283" y="1723"/>
-                </a:lnTo>
-                <a:lnTo>
-                  <a:pt x="3301" y="1722"/>
-                </a:lnTo>
-                <a:lnTo>
-                  <a:pt x="3319" y="1721"/>
-                </a:lnTo>
-                <a:lnTo>
-                  <a:pt x="3337" y="1720"/>
-                </a:lnTo>
-                <a:lnTo>
-                  <a:pt x="3355" y="1719"/>
-                </a:lnTo>
-                <a:lnTo>
-                  <a:pt x="3373" y="1717"/>
-                </a:lnTo>
-                <a:lnTo>
-                  <a:pt x="3390" y="1716"/>
-                </a:lnTo>
-                <a:lnTo>
-                  <a:pt x="3408" y="1715"/>
-                </a:lnTo>
-                <a:lnTo>
-                  <a:pt x="3426" y="1713"/>
-                </a:lnTo>
-                <a:lnTo>
-                  <a:pt x="3444" y="1712"/>
-                </a:lnTo>
-                <a:lnTo>
-                  <a:pt x="3462" y="1710"/>
-                </a:lnTo>
-                <a:lnTo>
-                  <a:pt x="3480" y="1708"/>
-                </a:lnTo>
-                <a:lnTo>
-                  <a:pt x="3498" y="1707"/>
-                </a:lnTo>
-                <a:lnTo>
-                  <a:pt x="3515" y="1705"/>
-                </a:lnTo>
-                <a:lnTo>
-                  <a:pt x="3533" y="1703"/>
-                </a:lnTo>
-                <a:lnTo>
-                  <a:pt x="3551" y="1701"/>
-                </a:lnTo>
-                <a:lnTo>
-                  <a:pt x="3569" y="1699"/>
-                </a:lnTo>
-                <a:lnTo>
-                  <a:pt x="3587" y="1697"/>
-                </a:lnTo>
-                <a:lnTo>
-                  <a:pt x="3605" y="1695"/>
-                </a:lnTo>
-                <a:lnTo>
-                  <a:pt x="3622" y="1693"/>
-                </a:lnTo>
-                <a:lnTo>
-                  <a:pt x="3640" y="1690"/>
-                </a:lnTo>
-                <a:lnTo>
-                  <a:pt x="3658" y="1688"/>
-                </a:lnTo>
-                <a:lnTo>
-                  <a:pt x="3676" y="1686"/>
-                </a:lnTo>
-                <a:lnTo>
-                  <a:pt x="3694" y="1683"/>
-                </a:lnTo>
-                <a:lnTo>
-                  <a:pt x="3712" y="1681"/>
-                </a:lnTo>
-                <a:lnTo>
-                  <a:pt x="3730" y="1678"/>
-                </a:lnTo>
-                <a:lnTo>
-                  <a:pt x="3747" y="1675"/>
-                </a:lnTo>
-                <a:lnTo>
-                  <a:pt x="3765" y="1673"/>
-                </a:lnTo>
-                <a:lnTo>
-                  <a:pt x="3783" y="1670"/>
-                </a:lnTo>
-                <a:lnTo>
-                  <a:pt x="3801" y="1667"/>
-                </a:lnTo>
-                <a:lnTo>
-                  <a:pt x="3819" y="1664"/>
-                </a:lnTo>
-                <a:lnTo>
-                  <a:pt x="3837" y="1661"/>
-                </a:lnTo>
-                <a:lnTo>
-                  <a:pt x="3854" y="1658"/>
-                </a:lnTo>
-                <a:lnTo>
-                  <a:pt x="3872" y="1655"/>
-                </a:lnTo>
-                <a:lnTo>
-                  <a:pt x="3890" y="1652"/>
-                </a:lnTo>
-                <a:lnTo>
-                  <a:pt x="3908" y="1648"/>
-                </a:lnTo>
-                <a:lnTo>
-                  <a:pt x="3926" y="1645"/>
-                </a:lnTo>
-                <a:lnTo>
-                  <a:pt x="3944" y="1642"/>
-                </a:lnTo>
-                <a:lnTo>
-                  <a:pt x="3962" y="1638"/>
-                </a:lnTo>
-                <a:lnTo>
-                  <a:pt x="3979" y="1635"/>
-                </a:lnTo>
-                <a:lnTo>
-                  <a:pt x="3997" y="1631"/>
-                </a:lnTo>
-                <a:lnTo>
-                  <a:pt x="4015" y="1628"/>
-                </a:lnTo>
-                <a:lnTo>
-                  <a:pt x="4033" y="1624"/>
-                </a:lnTo>
-                <a:lnTo>
-                  <a:pt x="4051" y="1620"/>
-                </a:lnTo>
-                <a:lnTo>
-                  <a:pt x="4069" y="1616"/>
-                </a:lnTo>
-                <a:lnTo>
-                  <a:pt x="4086" y="1612"/>
-                </a:lnTo>
-                <a:lnTo>
-                  <a:pt x="4104" y="1608"/>
-                </a:lnTo>
-                <a:lnTo>
-                  <a:pt x="4122" y="1604"/>
-                </a:lnTo>
-                <a:lnTo>
-                  <a:pt x="4140" y="1600"/>
-                </a:lnTo>
-                <a:lnTo>
-                  <a:pt x="4158" y="1596"/>
-                </a:lnTo>
-                <a:lnTo>
-                  <a:pt x="4176" y="1592"/>
-                </a:lnTo>
-                <a:lnTo>
-                  <a:pt x="4193" y="1588"/>
-                </a:lnTo>
-                <a:lnTo>
-                  <a:pt x="4211" y="1583"/>
-                </a:lnTo>
-                <a:lnTo>
-                  <a:pt x="4229" y="1579"/>
-                </a:lnTo>
-                <a:lnTo>
-                  <a:pt x="4247" y="1574"/>
-                </a:lnTo>
-                <a:lnTo>
-                  <a:pt x="4265" y="1570"/>
-                </a:lnTo>
-                <a:lnTo>
-                  <a:pt x="4283" y="1565"/>
-                </a:lnTo>
-                <a:lnTo>
-                  <a:pt x="4301" y="1561"/>
-                </a:lnTo>
-                <a:lnTo>
-                  <a:pt x="4318" y="1556"/>
-                </a:lnTo>
-                <a:lnTo>
-                  <a:pt x="4336" y="1551"/>
-                </a:lnTo>
-                <a:lnTo>
-                  <a:pt x="4354" y="1546"/>
-                </a:lnTo>
-                <a:lnTo>
-                  <a:pt x="4372" y="1541"/>
-                </a:lnTo>
-                <a:lnTo>
-                  <a:pt x="4390" y="1536"/>
-                </a:lnTo>
-                <a:lnTo>
-                  <a:pt x="4408" y="1531"/>
-                </a:lnTo>
-                <a:lnTo>
-                  <a:pt x="4425" y="1526"/>
-                </a:lnTo>
-                <a:lnTo>
-                  <a:pt x="4443" y="1521"/>
-                </a:lnTo>
-                <a:lnTo>
-                  <a:pt x="4461" y="1515"/>
-                </a:lnTo>
-                <a:lnTo>
-                  <a:pt x="4479" y="1510"/>
-                </a:lnTo>
-                <a:lnTo>
-                  <a:pt x="4497" y="1505"/>
-                </a:lnTo>
-                <a:lnTo>
-                  <a:pt x="4515" y="1499"/>
-                </a:lnTo>
-                <a:lnTo>
-                  <a:pt x="4533" y="1494"/>
-                </a:lnTo>
-                <a:lnTo>
-                  <a:pt x="4550" y="1488"/>
-                </a:lnTo>
-                <a:lnTo>
-                  <a:pt x="4568" y="1482"/>
-                </a:lnTo>
-                <a:lnTo>
-                  <a:pt x="4586" y="1477"/>
-                </a:lnTo>
-                <a:lnTo>
-                  <a:pt x="4604" y="1471"/>
-                </a:lnTo>
-                <a:lnTo>
-                  <a:pt x="4622" y="1465"/>
-                </a:lnTo>
-                <a:lnTo>
-                  <a:pt x="4640" y="1459"/>
-                </a:lnTo>
-                <a:lnTo>
-                  <a:pt x="4657" y="1453"/>
-                </a:lnTo>
-                <a:lnTo>
-                  <a:pt x="4675" y="1447"/>
-                </a:lnTo>
-                <a:lnTo>
-                  <a:pt x="4693" y="1441"/>
-                </a:lnTo>
-                <a:lnTo>
-                  <a:pt x="4711" y="1435"/>
-                </a:lnTo>
-                <a:lnTo>
-                  <a:pt x="4729" y="1429"/>
-                </a:lnTo>
-                <a:lnTo>
-                  <a:pt x="4747" y="1422"/>
-                </a:lnTo>
-                <a:lnTo>
-                  <a:pt x="4765" y="1416"/>
-                </a:lnTo>
-                <a:lnTo>
-                  <a:pt x="4782" y="1409"/>
-                </a:lnTo>
-                <a:lnTo>
-                  <a:pt x="4800" y="1403"/>
-                </a:lnTo>
-                <a:lnTo>
-                  <a:pt x="4818" y="1396"/>
-                </a:lnTo>
-                <a:lnTo>
-                  <a:pt x="4836" y="1390"/>
-                </a:lnTo>
-                <a:lnTo>
-                  <a:pt x="4854" y="1383"/>
-                </a:lnTo>
-                <a:lnTo>
-                  <a:pt x="4872" y="1376"/>
-                </a:lnTo>
-                <a:lnTo>
-                  <a:pt x="4889" y="1369"/>
-                </a:lnTo>
-                <a:lnTo>
-                  <a:pt x="4907" y="1362"/>
-                </a:lnTo>
-                <a:lnTo>
-                  <a:pt x="4925" y="1355"/>
-                </a:lnTo>
-                <a:lnTo>
-                  <a:pt x="4943" y="1348"/>
-                </a:lnTo>
-                <a:lnTo>
-                  <a:pt x="4961" y="1341"/>
-                </a:lnTo>
-                <a:lnTo>
-                  <a:pt x="4979" y="1334"/>
-                </a:lnTo>
-                <a:lnTo>
-                  <a:pt x="4996" y="1327"/>
-                </a:lnTo>
-                <a:lnTo>
-                  <a:pt x="5014" y="1320"/>
-                </a:lnTo>
-                <a:lnTo>
-                  <a:pt x="5032" y="1312"/>
-                </a:lnTo>
-                <a:lnTo>
-                  <a:pt x="5050" y="1305"/>
-                </a:lnTo>
-                <a:lnTo>
-                  <a:pt x="5068" y="1297"/>
-                </a:lnTo>
-                <a:lnTo>
-                  <a:pt x="5086" y="1290"/>
-                </a:lnTo>
-                <a:lnTo>
-                  <a:pt x="5104" y="1282"/>
-                </a:lnTo>
-                <a:lnTo>
-                  <a:pt x="5121" y="1274"/>
-                </a:lnTo>
-                <a:lnTo>
-                  <a:pt x="5139" y="1267"/>
-                </a:lnTo>
-                <a:lnTo>
-                  <a:pt x="5157" y="1259"/>
-                </a:lnTo>
-                <a:lnTo>
-                  <a:pt x="5175" y="1251"/>
-                </a:lnTo>
-                <a:lnTo>
-                  <a:pt x="5193" y="1243"/>
-                </a:lnTo>
-                <a:lnTo>
-                  <a:pt x="5211" y="1235"/>
-                </a:lnTo>
-                <a:lnTo>
-                  <a:pt x="5228" y="1227"/>
-                </a:lnTo>
-                <a:lnTo>
-                  <a:pt x="5246" y="1219"/>
-                </a:lnTo>
-                <a:lnTo>
-                  <a:pt x="5264" y="1211"/>
-                </a:lnTo>
-                <a:lnTo>
-                  <a:pt x="5282" y="1202"/>
-                </a:lnTo>
-                <a:lnTo>
-                  <a:pt x="5300" y="1194"/>
-                </a:lnTo>
-                <a:lnTo>
-                  <a:pt x="5318" y="1186"/>
-                </a:lnTo>
-                <a:lnTo>
-                  <a:pt x="5336" y="1177"/>
-                </a:lnTo>
-                <a:lnTo>
-                  <a:pt x="5353" y="1169"/>
-                </a:lnTo>
-                <a:lnTo>
-                  <a:pt x="5371" y="1160"/>
-                </a:lnTo>
-                <a:lnTo>
-                  <a:pt x="5389" y="1151"/>
-                </a:lnTo>
-                <a:lnTo>
-                  <a:pt x="5407" y="1143"/>
-                </a:lnTo>
-                <a:lnTo>
-                  <a:pt x="5425" y="1134"/>
-                </a:lnTo>
-                <a:lnTo>
-                  <a:pt x="5443" y="1125"/>
-                </a:lnTo>
-                <a:lnTo>
-                  <a:pt x="5460" y="1116"/>
-                </a:lnTo>
-                <a:lnTo>
-                  <a:pt x="5478" y="1107"/>
-                </a:lnTo>
-                <a:lnTo>
-                  <a:pt x="5496" y="1098"/>
-                </a:lnTo>
-                <a:lnTo>
-                  <a:pt x="5514" y="1089"/>
-                </a:lnTo>
-                <a:lnTo>
-                  <a:pt x="5532" y="1080"/>
-                </a:lnTo>
-                <a:lnTo>
-                  <a:pt x="5550" y="1070"/>
-                </a:lnTo>
-                <a:lnTo>
-                  <a:pt x="5568" y="1061"/>
-                </a:lnTo>
-                <a:lnTo>
-                  <a:pt x="5585" y="1052"/>
-                </a:lnTo>
-                <a:lnTo>
-                  <a:pt x="5603" y="1042"/>
-                </a:lnTo>
-                <a:lnTo>
-                  <a:pt x="5621" y="1033"/>
-                </a:lnTo>
-                <a:lnTo>
-                  <a:pt x="5639" y="1023"/>
-                </a:lnTo>
-                <a:lnTo>
-                  <a:pt x="5657" y="1013"/>
-                </a:lnTo>
-                <a:lnTo>
-                  <a:pt x="5675" y="1004"/>
-                </a:lnTo>
-                <a:lnTo>
-                  <a:pt x="5692" y="994"/>
-                </a:lnTo>
-                <a:lnTo>
-                  <a:pt x="5710" y="984"/>
-                </a:lnTo>
-                <a:lnTo>
-                  <a:pt x="5728" y="974"/>
-                </a:lnTo>
-                <a:lnTo>
-                  <a:pt x="5746" y="964"/>
-                </a:lnTo>
-                <a:lnTo>
-                  <a:pt x="5764" y="954"/>
-                </a:lnTo>
-                <a:lnTo>
-                  <a:pt x="5782" y="944"/>
-                </a:lnTo>
-                <a:lnTo>
-                  <a:pt x="5799" y="934"/>
-                </a:lnTo>
-                <a:lnTo>
-                  <a:pt x="5817" y="924"/>
-                </a:lnTo>
-                <a:lnTo>
-                  <a:pt x="5835" y="913"/>
-                </a:lnTo>
-                <a:lnTo>
-                  <a:pt x="5853" y="903"/>
-                </a:lnTo>
-                <a:lnTo>
-                  <a:pt x="5871" y="893"/>
-                </a:lnTo>
-                <a:lnTo>
-                  <a:pt x="5889" y="882"/>
-                </a:lnTo>
-                <a:lnTo>
-                  <a:pt x="5907" y="872"/>
-                </a:lnTo>
-                <a:lnTo>
-                  <a:pt x="5924" y="861"/>
-                </a:lnTo>
-                <a:lnTo>
-                  <a:pt x="5942" y="850"/>
-                </a:lnTo>
-                <a:lnTo>
-                  <a:pt x="5960" y="839"/>
-                </a:lnTo>
-                <a:lnTo>
-                  <a:pt x="5978" y="829"/>
-                </a:lnTo>
-                <a:lnTo>
-                  <a:pt x="5996" y="818"/>
-                </a:lnTo>
-                <a:lnTo>
-                  <a:pt x="6014" y="807"/>
-                </a:lnTo>
-                <a:lnTo>
-                  <a:pt x="6031" y="796"/>
-                </a:lnTo>
-                <a:lnTo>
-                  <a:pt x="6049" y="785"/>
-                </a:lnTo>
-                <a:lnTo>
-                  <a:pt x="6067" y="774"/>
-                </a:lnTo>
-                <a:lnTo>
-                  <a:pt x="6085" y="762"/>
-                </a:lnTo>
-                <a:lnTo>
-                  <a:pt x="6103" y="751"/>
-                </a:lnTo>
-                <a:lnTo>
-                  <a:pt x="6121" y="740"/>
-                </a:lnTo>
-                <a:lnTo>
-                  <a:pt x="6139" y="728"/>
-                </a:lnTo>
-                <a:lnTo>
-                  <a:pt x="6156" y="717"/>
-                </a:lnTo>
-                <a:lnTo>
-                  <a:pt x="6174" y="705"/>
-                </a:lnTo>
-                <a:lnTo>
-                  <a:pt x="6192" y="694"/>
-                </a:lnTo>
-                <a:lnTo>
-                  <a:pt x="6210" y="682"/>
-                </a:lnTo>
-                <a:lnTo>
-                  <a:pt x="6228" y="670"/>
-                </a:lnTo>
-                <a:lnTo>
-                  <a:pt x="6246" y="658"/>
-                </a:lnTo>
-                <a:lnTo>
-                  <a:pt x="6263" y="647"/>
-                </a:lnTo>
-                <a:lnTo>
-                  <a:pt x="6281" y="635"/>
-                </a:lnTo>
-                <a:lnTo>
-                  <a:pt x="6299" y="623"/>
-                </a:lnTo>
-                <a:lnTo>
-                  <a:pt x="6317" y="611"/>
-                </a:lnTo>
-                <a:lnTo>
-                  <a:pt x="6335" y="598"/>
-                </a:lnTo>
-                <a:lnTo>
-                  <a:pt x="6353" y="586"/>
-                </a:lnTo>
-                <a:lnTo>
-                  <a:pt x="6371" y="574"/>
-                </a:lnTo>
-                <a:lnTo>
-                  <a:pt x="6388" y="562"/>
-                </a:lnTo>
-                <a:lnTo>
-                  <a:pt x="6406" y="549"/>
-                </a:lnTo>
-                <a:lnTo>
-                  <a:pt x="6424" y="537"/>
-                </a:lnTo>
-                <a:lnTo>
-                  <a:pt x="6442" y="524"/>
-                </a:lnTo>
-                <a:lnTo>
-                  <a:pt x="6460" y="512"/>
-                </a:lnTo>
-                <a:lnTo>
-                  <a:pt x="6478" y="499"/>
-                </a:lnTo>
-                <a:lnTo>
-                  <a:pt x="6495" y="486"/>
-                </a:lnTo>
-                <a:lnTo>
-                  <a:pt x="6513" y="474"/>
-                </a:lnTo>
-                <a:lnTo>
-                  <a:pt x="6531" y="461"/>
-                </a:lnTo>
-                <a:lnTo>
-                  <a:pt x="6549" y="448"/>
-                </a:lnTo>
-                <a:lnTo>
-                  <a:pt x="6567" y="435"/>
-                </a:lnTo>
-                <a:lnTo>
-                  <a:pt x="6585" y="422"/>
-                </a:lnTo>
-                <a:lnTo>
-                  <a:pt x="6603" y="409"/>
-                </a:lnTo>
-                <a:lnTo>
-                  <a:pt x="6620" y="395"/>
-                </a:lnTo>
-                <a:lnTo>
-                  <a:pt x="6638" y="382"/>
-                </a:lnTo>
-                <a:lnTo>
-                  <a:pt x="6656" y="369"/>
-                </a:lnTo>
-                <a:lnTo>
-                  <a:pt x="6674" y="356"/>
-                </a:lnTo>
-                <a:lnTo>
-                  <a:pt x="6692" y="342"/>
-                </a:lnTo>
-                <a:lnTo>
-                  <a:pt x="6710" y="329"/>
-                </a:lnTo>
-                <a:lnTo>
-                  <a:pt x="6727" y="315"/>
-                </a:lnTo>
-                <a:lnTo>
-                  <a:pt x="6745" y="301"/>
-                </a:lnTo>
-                <a:lnTo>
-                  <a:pt x="6763" y="288"/>
-                </a:lnTo>
-                <a:lnTo>
-                  <a:pt x="6781" y="274"/>
-                </a:lnTo>
-                <a:lnTo>
-                  <a:pt x="6799" y="260"/>
-                </a:lnTo>
-                <a:lnTo>
-                  <a:pt x="6817" y="246"/>
-                </a:lnTo>
-                <a:lnTo>
-                  <a:pt x="6834" y="232"/>
-                </a:lnTo>
-                <a:lnTo>
-                  <a:pt x="6852" y="218"/>
-                </a:lnTo>
-                <a:lnTo>
-                  <a:pt x="6870" y="204"/>
-                </a:lnTo>
-                <a:lnTo>
-                  <a:pt x="6888" y="190"/>
-                </a:lnTo>
-                <a:lnTo>
-                  <a:pt x="6906" y="176"/>
-                </a:lnTo>
-                <a:lnTo>
-                  <a:pt x="6924" y="161"/>
-                </a:lnTo>
-                <a:lnTo>
-                  <a:pt x="6942" y="147"/>
-                </a:lnTo>
-                <a:lnTo>
-                  <a:pt x="6959" y="133"/>
-                </a:lnTo>
-                <a:lnTo>
-                  <a:pt x="6977" y="118"/>
-                </a:lnTo>
-                <a:lnTo>
-                  <a:pt x="6995" y="104"/>
-                </a:lnTo>
-                <a:lnTo>
-                  <a:pt x="7013" y="89"/>
-                </a:lnTo>
-                <a:lnTo>
-                  <a:pt x="7031" y="74"/>
-                </a:lnTo>
-                <a:lnTo>
-                  <a:pt x="7049" y="60"/>
-                </a:lnTo>
-                <a:lnTo>
-                  <a:pt x="7066" y="45"/>
-                </a:lnTo>
-                <a:lnTo>
-                  <a:pt x="7084" y="30"/>
-                </a:lnTo>
-                <a:lnTo>
-                  <a:pt x="7102" y="15"/>
-                </a:lnTo>
-                <a:lnTo>
-                  <a:pt x="7120" y="0"/>
-                </a:lnTo>
-              </a:path>
-            </a:pathLst>
-          </a:custGeom>
-          <a:noFill/>
-          <a:ln w="25400">
-            <a:solidFill>
-              <a:srgbClr val="7963AF"/>
-            </a:solidFill>
-            <a:prstDash val="dash"/>
-          </a:ln>
-        </p:spPr>
-        <p:style>
-          <a:lnRef idx="1">
-            <a:schemeClr val="accent1"/>
-          </a:lnRef>
-          <a:fillRef idx="3">
-            <a:schemeClr val="accent1"/>
-          </a:fillRef>
-          <a:effectRef idx="0">
-            <a:schemeClr val="accent1"/>
-          </a:effectRef>
-          <a:fontRef idx="minor">
-            <a:schemeClr val="lt1"/>
-          </a:fontRef>
-        </p:style>
-        <p:txBody>
-          <a:bodyPr rtlCol="0" anchor="ctr"/>
-          <a:lstStyle/>
-          <a:p>
-            <a:pPr algn="ctr"/>
-          </a:p>
-        </p:txBody>
-      </p:sp>
-      <p:sp>
-        <p:nvSpPr>
-          <p:cNvPr id="10" name="Freeform 9"/>
-          <p:cNvSpPr/>
-          <p:nvPr/>
-        </p:nvSpPr>
-        <p:spPr>
-          <a:xfrm>
             <a:off x="896112" y="3765499"/>
             <a:ext cx="6510528" cy="761695"/>
           </a:xfrm>
@@ -11705,7 +10407,7 @@
       </p:sp>
       <p:sp>
         <p:nvSpPr>
-          <p:cNvPr id="11" name="Oval 10"/>
+          <p:cNvPr id="10" name="Oval 9"/>
           <p:cNvSpPr/>
           <p:nvPr/>
         </p:nvSpPr>
@@ -11750,7 +10452,7 @@
       </p:sp>
       <p:sp>
         <p:nvSpPr>
-          <p:cNvPr id="12" name="Oval 11"/>
+          <p:cNvPr id="11" name="Oval 10"/>
           <p:cNvSpPr/>
           <p:nvPr/>
         </p:nvSpPr>
@@ -11795,7 +10497,7 @@
       </p:sp>
       <p:sp>
         <p:nvSpPr>
-          <p:cNvPr id="13" name="Oval 12"/>
+          <p:cNvPr id="12" name="Oval 11"/>
           <p:cNvSpPr/>
           <p:nvPr/>
         </p:nvSpPr>
@@ -11840,7 +10542,7 @@
       </p:sp>
       <p:sp>
         <p:nvSpPr>
-          <p:cNvPr id="14" name="Oval 13"/>
+          <p:cNvPr id="13" name="Oval 12"/>
           <p:cNvSpPr/>
           <p:nvPr/>
         </p:nvSpPr>
@@ -11885,7 +10587,7 @@
       </p:sp>
       <p:sp>
         <p:nvSpPr>
-          <p:cNvPr id="15" name="Oval 14"/>
+          <p:cNvPr id="14" name="Oval 13"/>
           <p:cNvSpPr/>
           <p:nvPr/>
         </p:nvSpPr>
@@ -11930,7 +10632,7 @@
       </p:sp>
       <p:sp>
         <p:nvSpPr>
-          <p:cNvPr id="16" name="Oval 15"/>
+          <p:cNvPr id="15" name="Oval 14"/>
           <p:cNvSpPr/>
           <p:nvPr/>
         </p:nvSpPr>
@@ -11975,7 +10677,7 @@
       </p:sp>
       <p:sp>
         <p:nvSpPr>
-          <p:cNvPr id="17" name="Oval 16"/>
+          <p:cNvPr id="16" name="Oval 15"/>
           <p:cNvSpPr/>
           <p:nvPr/>
         </p:nvSpPr>
@@ -12020,7 +10722,7 @@
       </p:sp>
       <p:sp>
         <p:nvSpPr>
-          <p:cNvPr id="18" name="Oval 17"/>
+          <p:cNvPr id="17" name="Oval 16"/>
           <p:cNvSpPr/>
           <p:nvPr/>
         </p:nvSpPr>
@@ -12065,7 +10767,7 @@
       </p:sp>
       <p:sp>
         <p:nvSpPr>
-          <p:cNvPr id="19" name="Oval 18"/>
+          <p:cNvPr id="18" name="Oval 17"/>
           <p:cNvSpPr/>
           <p:nvPr/>
         </p:nvSpPr>
@@ -12110,7 +10812,7 @@
       </p:sp>
       <p:sp>
         <p:nvSpPr>
-          <p:cNvPr id="20" name="Oval 19"/>
+          <p:cNvPr id="19" name="Oval 18"/>
           <p:cNvSpPr/>
           <p:nvPr/>
         </p:nvSpPr>
@@ -12155,7 +10857,7 @@
       </p:sp>
       <p:sp>
         <p:nvSpPr>
-          <p:cNvPr id="21" name="Oval 20"/>
+          <p:cNvPr id="20" name="Oval 19"/>
           <p:cNvSpPr/>
           <p:nvPr/>
         </p:nvSpPr>
@@ -12200,7 +10902,7 @@
       </p:sp>
       <p:sp>
         <p:nvSpPr>
-          <p:cNvPr id="22" name="Oval 21"/>
+          <p:cNvPr id="21" name="Oval 20"/>
           <p:cNvSpPr/>
           <p:nvPr/>
         </p:nvSpPr>
@@ -12245,7 +10947,7 @@
       </p:sp>
       <p:sp>
         <p:nvSpPr>
-          <p:cNvPr id="23" name="Oval 22"/>
+          <p:cNvPr id="22" name="Oval 21"/>
           <p:cNvSpPr/>
           <p:nvPr/>
         </p:nvSpPr>
@@ -12290,7 +10992,7 @@
       </p:sp>
       <p:sp>
         <p:nvSpPr>
-          <p:cNvPr id="24" name="Oval 23"/>
+          <p:cNvPr id="23" name="Oval 22"/>
           <p:cNvSpPr/>
           <p:nvPr/>
         </p:nvSpPr>
@@ -12335,7 +11037,7 @@
       </p:sp>
       <p:sp>
         <p:nvSpPr>
-          <p:cNvPr id="25" name="Oval 24"/>
+          <p:cNvPr id="24" name="Oval 23"/>
           <p:cNvSpPr/>
           <p:nvPr/>
         </p:nvSpPr>
@@ -12380,7 +11082,7 @@
       </p:sp>
       <p:sp>
         <p:nvSpPr>
-          <p:cNvPr id="26" name="Oval 25"/>
+          <p:cNvPr id="25" name="Oval 24"/>
           <p:cNvSpPr/>
           <p:nvPr/>
         </p:nvSpPr>
@@ -12425,7 +11127,7 @@
       </p:sp>
       <p:sp>
         <p:nvSpPr>
-          <p:cNvPr id="27" name="Oval 26"/>
+          <p:cNvPr id="26" name="Oval 25"/>
           <p:cNvSpPr/>
           <p:nvPr/>
         </p:nvSpPr>
@@ -12470,7 +11172,7 @@
       </p:sp>
       <p:sp>
         <p:nvSpPr>
-          <p:cNvPr id="28" name="Oval 27"/>
+          <p:cNvPr id="27" name="Oval 26"/>
           <p:cNvSpPr/>
           <p:nvPr/>
         </p:nvSpPr>
@@ -12515,7 +11217,7 @@
       </p:sp>
       <p:sp>
         <p:nvSpPr>
-          <p:cNvPr id="29" name="Oval 28"/>
+          <p:cNvPr id="28" name="Oval 27"/>
           <p:cNvSpPr/>
           <p:nvPr/>
         </p:nvSpPr>
@@ -12560,7 +11262,7 @@
       </p:sp>
       <p:sp>
         <p:nvSpPr>
-          <p:cNvPr id="30" name="Oval 29"/>
+          <p:cNvPr id="29" name="Oval 28"/>
           <p:cNvSpPr/>
           <p:nvPr/>
         </p:nvSpPr>
@@ -12605,7 +11307,7 @@
       </p:sp>
       <p:sp>
         <p:nvSpPr>
-          <p:cNvPr id="31" name="Oval 30"/>
+          <p:cNvPr id="30" name="Oval 29"/>
           <p:cNvSpPr/>
           <p:nvPr/>
         </p:nvSpPr>
@@ -12650,7 +11352,7 @@
       </p:sp>
       <p:sp>
         <p:nvSpPr>
-          <p:cNvPr id="32" name="Oval 31"/>
+          <p:cNvPr id="31" name="Oval 30"/>
           <p:cNvSpPr/>
           <p:nvPr/>
         </p:nvSpPr>
@@ -12695,7 +11397,7 @@
       </p:sp>
       <p:sp>
         <p:nvSpPr>
-          <p:cNvPr id="33" name="Oval 32"/>
+          <p:cNvPr id="32" name="Oval 31"/>
           <p:cNvSpPr/>
           <p:nvPr/>
         </p:nvSpPr>
@@ -12740,7 +11442,7 @@
       </p:sp>
       <p:sp>
         <p:nvSpPr>
-          <p:cNvPr id="34" name="Oval 33"/>
+          <p:cNvPr id="33" name="Oval 32"/>
           <p:cNvSpPr/>
           <p:nvPr/>
         </p:nvSpPr>
@@ -12785,7 +11487,7 @@
       </p:sp>
       <p:sp>
         <p:nvSpPr>
-          <p:cNvPr id="35" name="Oval 34"/>
+          <p:cNvPr id="34" name="Oval 33"/>
           <p:cNvSpPr/>
           <p:nvPr/>
         </p:nvSpPr>
@@ -12830,7 +11532,7 @@
       </p:sp>
       <p:sp>
         <p:nvSpPr>
-          <p:cNvPr id="36" name="TextBox 35"/>
+          <p:cNvPr id="35" name="TextBox 34"/>
           <p:cNvSpPr txBox="1"/>
           <p:nvPr/>
         </p:nvSpPr>
@@ -12869,7 +11571,7 @@
       </p:sp>
       <p:sp>
         <p:nvSpPr>
-          <p:cNvPr id="37" name="TextBox 36"/>
+          <p:cNvPr id="36" name="TextBox 35"/>
           <p:cNvSpPr txBox="1"/>
           <p:nvPr/>
         </p:nvSpPr>
@@ -12924,7 +11626,7 @@
       </p:sp>
       <p:sp>
         <p:nvSpPr>
-          <p:cNvPr id="38" name="Oval 37"/>
+          <p:cNvPr id="37" name="Oval 36"/>
           <p:cNvSpPr/>
           <p:nvPr/>
         </p:nvSpPr>
@@ -12969,7 +11671,7 @@
       </p:sp>
       <p:sp>
         <p:nvSpPr>
-          <p:cNvPr id="39" name="TextBox 38"/>
+          <p:cNvPr id="38" name="TextBox 37"/>
           <p:cNvSpPr txBox="1"/>
           <p:nvPr/>
         </p:nvSpPr>
@@ -13008,7 +11710,7 @@
       </p:sp>
       <p:cxnSp>
         <p:nvCxnSpPr>
-          <p:cNvPr id="40" name="Connector 39"/>
+          <p:cNvPr id="39" name="Connector 38"/>
           <p:cNvCxnSpPr/>
           <p:nvPr/>
         </p:nvCxnSpPr>
@@ -13043,7 +11745,7 @@
       </p:cxnSp>
       <p:sp>
         <p:nvSpPr>
-          <p:cNvPr id="41" name="TextBox 40"/>
+          <p:cNvPr id="40" name="TextBox 39"/>
           <p:cNvSpPr txBox="1"/>
           <p:nvPr/>
         </p:nvSpPr>
@@ -13080,81 +11782,6 @@
           </a:p>
         </p:txBody>
       </p:sp>
-      <p:cxnSp>
-        <p:nvCxnSpPr>
-          <p:cNvPr id="42" name="Connector 41"/>
-          <p:cNvCxnSpPr/>
-          <p:nvPr/>
-        </p:nvCxnSpPr>
-        <p:spPr>
-          <a:xfrm>
-            <a:off x="6400800" y="5989320"/>
-            <a:ext cx="256032" cy="0"/>
-          </a:xfrm>
-          <a:prstGeom prst="line">
-            <a:avLst/>
-          </a:prstGeom>
-          <a:ln w="25400">
-            <a:solidFill>
-              <a:srgbClr val="7963AF"/>
-            </a:solidFill>
-            <a:prstDash val="dash"/>
-          </a:ln>
-        </p:spPr>
-        <p:style>
-          <a:lnRef idx="2">
-            <a:schemeClr val="accent1"/>
-          </a:lnRef>
-          <a:fillRef idx="0">
-            <a:schemeClr val="accent1"/>
-          </a:fillRef>
-          <a:effectRef idx="0">
-            <a:schemeClr val="accent1"/>
-          </a:effectRef>
-          <a:fontRef idx="minor">
-            <a:schemeClr val="tx1"/>
-          </a:fontRef>
-        </p:style>
-      </p:cxnSp>
-      <p:sp>
-        <p:nvSpPr>
-          <p:cNvPr id="43" name="TextBox 42"/>
-          <p:cNvSpPr txBox="1"/>
-          <p:nvPr/>
-        </p:nvSpPr>
-        <p:spPr>
-          <a:xfrm>
-            <a:off x="6757416" y="5870448"/>
-            <a:ext cx="2468880" cy="320040"/>
-          </a:xfrm>
-          <a:prstGeom prst="rect">
-            <a:avLst/>
-          </a:prstGeom>
-          <a:noFill/>
-        </p:spPr>
-        <p:txBody>
-          <a:bodyPr wrap="square" lIns="0" rIns="0" tIns="0" bIns="0">
-            <a:spAutoFit/>
-          </a:bodyPr>
-          <a:lstStyle/>
-          <a:p>
-            <a:pPr>
-              <a:spcAft>
-                <a:spcPts val="0"/>
-              </a:spcAft>
-              <a:defRPr sz="1300" b="0">
-                <a:solidFill>
-                  <a:srgbClr val="686C66"/>
-                </a:solidFill>
-                <a:latin typeface="Arial"/>
-              </a:defRPr>
-            </a:pPr>
-            <a:r>
-              <a:t>true pattern</a:t>
-            </a:r>
-          </a:p>
-        </p:txBody>
-      </p:sp>
     </p:spTree>
   </p:cSld>
   <p:clrMapOvr>
@@ -13181,9 +11808,33 @@
         <p:nvPr/>
       </p:nvGrpSpPr>
       <p:grpSpPr/>
+      <p:pic>
+        <p:nvPicPr>
+          <p:cNvPr id="2" name="Picture 1" descr="image.png"/>
+          <p:cNvPicPr>
+            <a:picLocks noChangeAspect="1"/>
+          </p:cNvPicPr>
+          <p:nvPr/>
+        </p:nvPicPr>
+        <p:blipFill>
+          <a:blip r:embed="rId2"/>
+          <a:stretch>
+            <a:fillRect/>
+          </a:stretch>
+        </p:blipFill>
+        <p:spPr>
+          <a:xfrm>
+            <a:off x="11768328" y="201168"/>
+            <a:ext cx="219456" cy="6455664"/>
+          </a:xfrm>
+          <a:prstGeom prst="rect">
+            <a:avLst/>
+          </a:prstGeom>
+        </p:spPr>
+      </p:pic>
       <p:sp>
         <p:nvSpPr>
-          <p:cNvPr id="2" name="TextBox 1"/>
+          <p:cNvPr id="3" name="TextBox 2"/>
           <p:cNvSpPr txBox="1"/>
           <p:nvPr/>
         </p:nvSpPr>
@@ -13220,41 +11871,6 @@
           </a:p>
         </p:txBody>
       </p:sp>
-      <p:cxnSp>
-        <p:nvCxnSpPr>
-          <p:cNvPr id="3" name="Connector 2"/>
-          <p:cNvCxnSpPr/>
-          <p:nvPr/>
-        </p:nvCxnSpPr>
-        <p:spPr>
-          <a:xfrm>
-            <a:off x="594360" y="6419088"/>
-            <a:ext cx="10972800" cy="0"/>
-          </a:xfrm>
-          <a:prstGeom prst="line">
-            <a:avLst/>
-          </a:prstGeom>
-          <a:ln w="12700">
-            <a:solidFill>
-              <a:srgbClr val="D4D6D0"/>
-            </a:solidFill>
-          </a:ln>
-        </p:spPr>
-        <p:style>
-          <a:lnRef idx="2">
-            <a:schemeClr val="accent1"/>
-          </a:lnRef>
-          <a:fillRef idx="0">
-            <a:schemeClr val="accent1"/>
-          </a:fillRef>
-          <a:effectRef idx="0">
-            <a:schemeClr val="accent1"/>
-          </a:effectRef>
-          <a:fontRef idx="minor">
-            <a:schemeClr val="tx1"/>
-          </a:fontRef>
-        </p:style>
-      </p:cxnSp>
       <p:sp>
         <p:nvSpPr>
           <p:cNvPr id="4" name="TextBox 3"/>
@@ -13450,1258 +12066,6 @@
         </p:nvSpPr>
         <p:spPr>
           <a:xfrm>
-            <a:off x="896112" y="3099816"/>
-            <a:ext cx="6510528" cy="1582826"/>
-          </a:xfrm>
-          <a:custGeom>
-            <a:avLst/>
-            <a:gdLst/>
-            <a:ahLst/>
-            <a:cxnLst/>
-            <a:rect l="l" t="t" r="r" b="b"/>
-            <a:pathLst>
-              <a:path w="7120" h="1731">
-                <a:moveTo>
-                  <a:pt x="0" y="800"/>
-                </a:moveTo>
-                <a:lnTo>
-                  <a:pt x="18" y="811"/>
-                </a:lnTo>
-                <a:lnTo>
-                  <a:pt x="36" y="822"/>
-                </a:lnTo>
-                <a:lnTo>
-                  <a:pt x="54" y="833"/>
-                </a:lnTo>
-                <a:lnTo>
-                  <a:pt x="71" y="844"/>
-                </a:lnTo>
-                <a:lnTo>
-                  <a:pt x="89" y="854"/>
-                </a:lnTo>
-                <a:lnTo>
-                  <a:pt x="107" y="865"/>
-                </a:lnTo>
-                <a:lnTo>
-                  <a:pt x="125" y="876"/>
-                </a:lnTo>
-                <a:lnTo>
-                  <a:pt x="143" y="886"/>
-                </a:lnTo>
-                <a:lnTo>
-                  <a:pt x="161" y="897"/>
-                </a:lnTo>
-                <a:lnTo>
-                  <a:pt x="178" y="907"/>
-                </a:lnTo>
-                <a:lnTo>
-                  <a:pt x="196" y="917"/>
-                </a:lnTo>
-                <a:lnTo>
-                  <a:pt x="214" y="928"/>
-                </a:lnTo>
-                <a:lnTo>
-                  <a:pt x="232" y="938"/>
-                </a:lnTo>
-                <a:lnTo>
-                  <a:pt x="250" y="948"/>
-                </a:lnTo>
-                <a:lnTo>
-                  <a:pt x="268" y="958"/>
-                </a:lnTo>
-                <a:lnTo>
-                  <a:pt x="286" y="968"/>
-                </a:lnTo>
-                <a:lnTo>
-                  <a:pt x="303" y="978"/>
-                </a:lnTo>
-                <a:lnTo>
-                  <a:pt x="321" y="988"/>
-                </a:lnTo>
-                <a:lnTo>
-                  <a:pt x="339" y="998"/>
-                </a:lnTo>
-                <a:lnTo>
-                  <a:pt x="357" y="1007"/>
-                </a:lnTo>
-                <a:lnTo>
-                  <a:pt x="375" y="1017"/>
-                </a:lnTo>
-                <a:lnTo>
-                  <a:pt x="393" y="1027"/>
-                </a:lnTo>
-                <a:lnTo>
-                  <a:pt x="410" y="1036"/>
-                </a:lnTo>
-                <a:lnTo>
-                  <a:pt x="428" y="1046"/>
-                </a:lnTo>
-                <a:lnTo>
-                  <a:pt x="446" y="1055"/>
-                </a:lnTo>
-                <a:lnTo>
-                  <a:pt x="464" y="1065"/>
-                </a:lnTo>
-                <a:lnTo>
-                  <a:pt x="482" y="1074"/>
-                </a:lnTo>
-                <a:lnTo>
-                  <a:pt x="500" y="1083"/>
-                </a:lnTo>
-                <a:lnTo>
-                  <a:pt x="517" y="1092"/>
-                </a:lnTo>
-                <a:lnTo>
-                  <a:pt x="535" y="1101"/>
-                </a:lnTo>
-                <a:lnTo>
-                  <a:pt x="553" y="1110"/>
-                </a:lnTo>
-                <a:lnTo>
-                  <a:pt x="571" y="1119"/>
-                </a:lnTo>
-                <a:lnTo>
-                  <a:pt x="589" y="1128"/>
-                </a:lnTo>
-                <a:lnTo>
-                  <a:pt x="607" y="1137"/>
-                </a:lnTo>
-                <a:lnTo>
-                  <a:pt x="625" y="1146"/>
-                </a:lnTo>
-                <a:lnTo>
-                  <a:pt x="642" y="1155"/>
-                </a:lnTo>
-                <a:lnTo>
-                  <a:pt x="660" y="1163"/>
-                </a:lnTo>
-                <a:lnTo>
-                  <a:pt x="678" y="1172"/>
-                </a:lnTo>
-                <a:lnTo>
-                  <a:pt x="696" y="1180"/>
-                </a:lnTo>
-                <a:lnTo>
-                  <a:pt x="714" y="1189"/>
-                </a:lnTo>
-                <a:lnTo>
-                  <a:pt x="732" y="1197"/>
-                </a:lnTo>
-                <a:lnTo>
-                  <a:pt x="749" y="1206"/>
-                </a:lnTo>
-                <a:lnTo>
-                  <a:pt x="767" y="1214"/>
-                </a:lnTo>
-                <a:lnTo>
-                  <a:pt x="785" y="1222"/>
-                </a:lnTo>
-                <a:lnTo>
-                  <a:pt x="803" y="1230"/>
-                </a:lnTo>
-                <a:lnTo>
-                  <a:pt x="821" y="1238"/>
-                </a:lnTo>
-                <a:lnTo>
-                  <a:pt x="839" y="1246"/>
-                </a:lnTo>
-                <a:lnTo>
-                  <a:pt x="857" y="1254"/>
-                </a:lnTo>
-                <a:lnTo>
-                  <a:pt x="874" y="1262"/>
-                </a:lnTo>
-                <a:lnTo>
-                  <a:pt x="892" y="1270"/>
-                </a:lnTo>
-                <a:lnTo>
-                  <a:pt x="910" y="1277"/>
-                </a:lnTo>
-                <a:lnTo>
-                  <a:pt x="928" y="1285"/>
-                </a:lnTo>
-                <a:lnTo>
-                  <a:pt x="946" y="1293"/>
-                </a:lnTo>
-                <a:lnTo>
-                  <a:pt x="964" y="1300"/>
-                </a:lnTo>
-                <a:lnTo>
-                  <a:pt x="981" y="1308"/>
-                </a:lnTo>
-                <a:lnTo>
-                  <a:pt x="999" y="1315"/>
-                </a:lnTo>
-                <a:lnTo>
-                  <a:pt x="1017" y="1322"/>
-                </a:lnTo>
-                <a:lnTo>
-                  <a:pt x="1035" y="1330"/>
-                </a:lnTo>
-                <a:lnTo>
-                  <a:pt x="1053" y="1337"/>
-                </a:lnTo>
-                <a:lnTo>
-                  <a:pt x="1071" y="1344"/>
-                </a:lnTo>
-                <a:lnTo>
-                  <a:pt x="1089" y="1351"/>
-                </a:lnTo>
-                <a:lnTo>
-                  <a:pt x="1106" y="1358"/>
-                </a:lnTo>
-                <a:lnTo>
-                  <a:pt x="1124" y="1365"/>
-                </a:lnTo>
-                <a:lnTo>
-                  <a:pt x="1142" y="1372"/>
-                </a:lnTo>
-                <a:lnTo>
-                  <a:pt x="1160" y="1379"/>
-                </a:lnTo>
-                <a:lnTo>
-                  <a:pt x="1178" y="1386"/>
-                </a:lnTo>
-                <a:lnTo>
-                  <a:pt x="1196" y="1392"/>
-                </a:lnTo>
-                <a:lnTo>
-                  <a:pt x="1213" y="1399"/>
-                </a:lnTo>
-                <a:lnTo>
-                  <a:pt x="1231" y="1405"/>
-                </a:lnTo>
-                <a:lnTo>
-                  <a:pt x="1249" y="1412"/>
-                </a:lnTo>
-                <a:lnTo>
-                  <a:pt x="1267" y="1418"/>
-                </a:lnTo>
-                <a:lnTo>
-                  <a:pt x="1285" y="1425"/>
-                </a:lnTo>
-                <a:lnTo>
-                  <a:pt x="1303" y="1431"/>
-                </a:lnTo>
-                <a:lnTo>
-                  <a:pt x="1321" y="1437"/>
-                </a:lnTo>
-                <a:lnTo>
-                  <a:pt x="1338" y="1443"/>
-                </a:lnTo>
-                <a:lnTo>
-                  <a:pt x="1356" y="1449"/>
-                </a:lnTo>
-                <a:lnTo>
-                  <a:pt x="1374" y="1455"/>
-                </a:lnTo>
-                <a:lnTo>
-                  <a:pt x="1392" y="1461"/>
-                </a:lnTo>
-                <a:lnTo>
-                  <a:pt x="1410" y="1467"/>
-                </a:lnTo>
-                <a:lnTo>
-                  <a:pt x="1428" y="1473"/>
-                </a:lnTo>
-                <a:lnTo>
-                  <a:pt x="1445" y="1479"/>
-                </a:lnTo>
-                <a:lnTo>
-                  <a:pt x="1463" y="1485"/>
-                </a:lnTo>
-                <a:lnTo>
-                  <a:pt x="1481" y="1490"/>
-                </a:lnTo>
-                <a:lnTo>
-                  <a:pt x="1499" y="1496"/>
-                </a:lnTo>
-                <a:lnTo>
-                  <a:pt x="1517" y="1501"/>
-                </a:lnTo>
-                <a:lnTo>
-                  <a:pt x="1535" y="1507"/>
-                </a:lnTo>
-                <a:lnTo>
-                  <a:pt x="1552" y="1512"/>
-                </a:lnTo>
-                <a:lnTo>
-                  <a:pt x="1570" y="1517"/>
-                </a:lnTo>
-                <a:lnTo>
-                  <a:pt x="1588" y="1523"/>
-                </a:lnTo>
-                <a:lnTo>
-                  <a:pt x="1606" y="1528"/>
-                </a:lnTo>
-                <a:lnTo>
-                  <a:pt x="1624" y="1533"/>
-                </a:lnTo>
-                <a:lnTo>
-                  <a:pt x="1642" y="1538"/>
-                </a:lnTo>
-                <a:lnTo>
-                  <a:pt x="1660" y="1543"/>
-                </a:lnTo>
-                <a:lnTo>
-                  <a:pt x="1677" y="1548"/>
-                </a:lnTo>
-                <a:lnTo>
-                  <a:pt x="1695" y="1553"/>
-                </a:lnTo>
-                <a:lnTo>
-                  <a:pt x="1713" y="1558"/>
-                </a:lnTo>
-                <a:lnTo>
-                  <a:pt x="1731" y="1562"/>
-                </a:lnTo>
-                <a:lnTo>
-                  <a:pt x="1749" y="1567"/>
-                </a:lnTo>
-                <a:lnTo>
-                  <a:pt x="1767" y="1572"/>
-                </a:lnTo>
-                <a:lnTo>
-                  <a:pt x="1784" y="1576"/>
-                </a:lnTo>
-                <a:lnTo>
-                  <a:pt x="1802" y="1581"/>
-                </a:lnTo>
-                <a:lnTo>
-                  <a:pt x="1820" y="1585"/>
-                </a:lnTo>
-                <a:lnTo>
-                  <a:pt x="1838" y="1589"/>
-                </a:lnTo>
-                <a:lnTo>
-                  <a:pt x="1856" y="1594"/>
-                </a:lnTo>
-                <a:lnTo>
-                  <a:pt x="1874" y="1598"/>
-                </a:lnTo>
-                <a:lnTo>
-                  <a:pt x="1892" y="1602"/>
-                </a:lnTo>
-                <a:lnTo>
-                  <a:pt x="1909" y="1606"/>
-                </a:lnTo>
-                <a:lnTo>
-                  <a:pt x="1927" y="1610"/>
-                </a:lnTo>
-                <a:lnTo>
-                  <a:pt x="1945" y="1614"/>
-                </a:lnTo>
-                <a:lnTo>
-                  <a:pt x="1963" y="1618"/>
-                </a:lnTo>
-                <a:lnTo>
-                  <a:pt x="1981" y="1622"/>
-                </a:lnTo>
-                <a:lnTo>
-                  <a:pt x="1999" y="1625"/>
-                </a:lnTo>
-                <a:lnTo>
-                  <a:pt x="2016" y="1629"/>
-                </a:lnTo>
-                <a:lnTo>
-                  <a:pt x="2034" y="1633"/>
-                </a:lnTo>
-                <a:lnTo>
-                  <a:pt x="2052" y="1636"/>
-                </a:lnTo>
-                <a:lnTo>
-                  <a:pt x="2070" y="1640"/>
-                </a:lnTo>
-                <a:lnTo>
-                  <a:pt x="2088" y="1643"/>
-                </a:lnTo>
-                <a:lnTo>
-                  <a:pt x="2106" y="1646"/>
-                </a:lnTo>
-                <a:lnTo>
-                  <a:pt x="2124" y="1650"/>
-                </a:lnTo>
-                <a:lnTo>
-                  <a:pt x="2141" y="1653"/>
-                </a:lnTo>
-                <a:lnTo>
-                  <a:pt x="2159" y="1656"/>
-                </a:lnTo>
-                <a:lnTo>
-                  <a:pt x="2177" y="1659"/>
-                </a:lnTo>
-                <a:lnTo>
-                  <a:pt x="2195" y="1662"/>
-                </a:lnTo>
-                <a:lnTo>
-                  <a:pt x="2213" y="1665"/>
-                </a:lnTo>
-                <a:lnTo>
-                  <a:pt x="2231" y="1668"/>
-                </a:lnTo>
-                <a:lnTo>
-                  <a:pt x="2248" y="1671"/>
-                </a:lnTo>
-                <a:lnTo>
-                  <a:pt x="2266" y="1674"/>
-                </a:lnTo>
-                <a:lnTo>
-                  <a:pt x="2284" y="1676"/>
-                </a:lnTo>
-                <a:lnTo>
-                  <a:pt x="2302" y="1679"/>
-                </a:lnTo>
-                <a:lnTo>
-                  <a:pt x="2320" y="1682"/>
-                </a:lnTo>
-                <a:lnTo>
-                  <a:pt x="2338" y="1684"/>
-                </a:lnTo>
-                <a:lnTo>
-                  <a:pt x="2355" y="1687"/>
-                </a:lnTo>
-                <a:lnTo>
-                  <a:pt x="2373" y="1689"/>
-                </a:lnTo>
-                <a:lnTo>
-                  <a:pt x="2391" y="1691"/>
-                </a:lnTo>
-                <a:lnTo>
-                  <a:pt x="2409" y="1693"/>
-                </a:lnTo>
-                <a:lnTo>
-                  <a:pt x="2427" y="1696"/>
-                </a:lnTo>
-                <a:lnTo>
-                  <a:pt x="2445" y="1698"/>
-                </a:lnTo>
-                <a:lnTo>
-                  <a:pt x="2463" y="1700"/>
-                </a:lnTo>
-                <a:lnTo>
-                  <a:pt x="2480" y="1702"/>
-                </a:lnTo>
-                <a:lnTo>
-                  <a:pt x="2498" y="1704"/>
-                </a:lnTo>
-                <a:lnTo>
-                  <a:pt x="2516" y="1706"/>
-                </a:lnTo>
-                <a:lnTo>
-                  <a:pt x="2534" y="1707"/>
-                </a:lnTo>
-                <a:lnTo>
-                  <a:pt x="2552" y="1709"/>
-                </a:lnTo>
-                <a:lnTo>
-                  <a:pt x="2570" y="1711"/>
-                </a:lnTo>
-                <a:lnTo>
-                  <a:pt x="2587" y="1712"/>
-                </a:lnTo>
-                <a:lnTo>
-                  <a:pt x="2605" y="1714"/>
-                </a:lnTo>
-                <a:lnTo>
-                  <a:pt x="2623" y="1715"/>
-                </a:lnTo>
-                <a:lnTo>
-                  <a:pt x="2641" y="1717"/>
-                </a:lnTo>
-                <a:lnTo>
-                  <a:pt x="2659" y="1718"/>
-                </a:lnTo>
-                <a:lnTo>
-                  <a:pt x="2677" y="1719"/>
-                </a:lnTo>
-                <a:lnTo>
-                  <a:pt x="2695" y="1720"/>
-                </a:lnTo>
-                <a:lnTo>
-                  <a:pt x="2712" y="1722"/>
-                </a:lnTo>
-                <a:lnTo>
-                  <a:pt x="2730" y="1723"/>
-                </a:lnTo>
-                <a:lnTo>
-                  <a:pt x="2748" y="1724"/>
-                </a:lnTo>
-                <a:lnTo>
-                  <a:pt x="2766" y="1725"/>
-                </a:lnTo>
-                <a:lnTo>
-                  <a:pt x="2784" y="1725"/>
-                </a:lnTo>
-                <a:lnTo>
-                  <a:pt x="2802" y="1726"/>
-                </a:lnTo>
-                <a:lnTo>
-                  <a:pt x="2819" y="1727"/>
-                </a:lnTo>
-                <a:lnTo>
-                  <a:pt x="2837" y="1728"/>
-                </a:lnTo>
-                <a:lnTo>
-                  <a:pt x="2855" y="1728"/>
-                </a:lnTo>
-                <a:lnTo>
-                  <a:pt x="2873" y="1729"/>
-                </a:lnTo>
-                <a:lnTo>
-                  <a:pt x="2891" y="1729"/>
-                </a:lnTo>
-                <a:lnTo>
-                  <a:pt x="2909" y="1730"/>
-                </a:lnTo>
-                <a:lnTo>
-                  <a:pt x="2927" y="1730"/>
-                </a:lnTo>
-                <a:lnTo>
-                  <a:pt x="2944" y="1730"/>
-                </a:lnTo>
-                <a:lnTo>
-                  <a:pt x="2962" y="1731"/>
-                </a:lnTo>
-                <a:lnTo>
-                  <a:pt x="2980" y="1731"/>
-                </a:lnTo>
-                <a:lnTo>
-                  <a:pt x="2998" y="1731"/>
-                </a:lnTo>
-                <a:lnTo>
-                  <a:pt x="3016" y="1731"/>
-                </a:lnTo>
-                <a:lnTo>
-                  <a:pt x="3034" y="1731"/>
-                </a:lnTo>
-                <a:lnTo>
-                  <a:pt x="3051" y="1731"/>
-                </a:lnTo>
-                <a:lnTo>
-                  <a:pt x="3069" y="1730"/>
-                </a:lnTo>
-                <a:lnTo>
-                  <a:pt x="3087" y="1730"/>
-                </a:lnTo>
-                <a:lnTo>
-                  <a:pt x="3105" y="1730"/>
-                </a:lnTo>
-                <a:lnTo>
-                  <a:pt x="3123" y="1730"/>
-                </a:lnTo>
-                <a:lnTo>
-                  <a:pt x="3141" y="1729"/>
-                </a:lnTo>
-                <a:lnTo>
-                  <a:pt x="3158" y="1729"/>
-                </a:lnTo>
-                <a:lnTo>
-                  <a:pt x="3176" y="1728"/>
-                </a:lnTo>
-                <a:lnTo>
-                  <a:pt x="3194" y="1727"/>
-                </a:lnTo>
-                <a:lnTo>
-                  <a:pt x="3212" y="1727"/>
-                </a:lnTo>
-                <a:lnTo>
-                  <a:pt x="3230" y="1726"/>
-                </a:lnTo>
-                <a:lnTo>
-                  <a:pt x="3248" y="1725"/>
-                </a:lnTo>
-                <a:lnTo>
-                  <a:pt x="3266" y="1724"/>
-                </a:lnTo>
-                <a:lnTo>
-                  <a:pt x="3283" y="1723"/>
-                </a:lnTo>
-                <a:lnTo>
-                  <a:pt x="3301" y="1722"/>
-                </a:lnTo>
-                <a:lnTo>
-                  <a:pt x="3319" y="1721"/>
-                </a:lnTo>
-                <a:lnTo>
-                  <a:pt x="3337" y="1720"/>
-                </a:lnTo>
-                <a:lnTo>
-                  <a:pt x="3355" y="1719"/>
-                </a:lnTo>
-                <a:lnTo>
-                  <a:pt x="3373" y="1717"/>
-                </a:lnTo>
-                <a:lnTo>
-                  <a:pt x="3390" y="1716"/>
-                </a:lnTo>
-                <a:lnTo>
-                  <a:pt x="3408" y="1715"/>
-                </a:lnTo>
-                <a:lnTo>
-                  <a:pt x="3426" y="1713"/>
-                </a:lnTo>
-                <a:lnTo>
-                  <a:pt x="3444" y="1712"/>
-                </a:lnTo>
-                <a:lnTo>
-                  <a:pt x="3462" y="1710"/>
-                </a:lnTo>
-                <a:lnTo>
-                  <a:pt x="3480" y="1708"/>
-                </a:lnTo>
-                <a:lnTo>
-                  <a:pt x="3498" y="1707"/>
-                </a:lnTo>
-                <a:lnTo>
-                  <a:pt x="3515" y="1705"/>
-                </a:lnTo>
-                <a:lnTo>
-                  <a:pt x="3533" y="1703"/>
-                </a:lnTo>
-                <a:lnTo>
-                  <a:pt x="3551" y="1701"/>
-                </a:lnTo>
-                <a:lnTo>
-                  <a:pt x="3569" y="1699"/>
-                </a:lnTo>
-                <a:lnTo>
-                  <a:pt x="3587" y="1697"/>
-                </a:lnTo>
-                <a:lnTo>
-                  <a:pt x="3605" y="1695"/>
-                </a:lnTo>
-                <a:lnTo>
-                  <a:pt x="3622" y="1693"/>
-                </a:lnTo>
-                <a:lnTo>
-                  <a:pt x="3640" y="1690"/>
-                </a:lnTo>
-                <a:lnTo>
-                  <a:pt x="3658" y="1688"/>
-                </a:lnTo>
-                <a:lnTo>
-                  <a:pt x="3676" y="1686"/>
-                </a:lnTo>
-                <a:lnTo>
-                  <a:pt x="3694" y="1683"/>
-                </a:lnTo>
-                <a:lnTo>
-                  <a:pt x="3712" y="1681"/>
-                </a:lnTo>
-                <a:lnTo>
-                  <a:pt x="3730" y="1678"/>
-                </a:lnTo>
-                <a:lnTo>
-                  <a:pt x="3747" y="1675"/>
-                </a:lnTo>
-                <a:lnTo>
-                  <a:pt x="3765" y="1673"/>
-                </a:lnTo>
-                <a:lnTo>
-                  <a:pt x="3783" y="1670"/>
-                </a:lnTo>
-                <a:lnTo>
-                  <a:pt x="3801" y="1667"/>
-                </a:lnTo>
-                <a:lnTo>
-                  <a:pt x="3819" y="1664"/>
-                </a:lnTo>
-                <a:lnTo>
-                  <a:pt x="3837" y="1661"/>
-                </a:lnTo>
-                <a:lnTo>
-                  <a:pt x="3854" y="1658"/>
-                </a:lnTo>
-                <a:lnTo>
-                  <a:pt x="3872" y="1655"/>
-                </a:lnTo>
-                <a:lnTo>
-                  <a:pt x="3890" y="1652"/>
-                </a:lnTo>
-                <a:lnTo>
-                  <a:pt x="3908" y="1648"/>
-                </a:lnTo>
-                <a:lnTo>
-                  <a:pt x="3926" y="1645"/>
-                </a:lnTo>
-                <a:lnTo>
-                  <a:pt x="3944" y="1642"/>
-                </a:lnTo>
-                <a:lnTo>
-                  <a:pt x="3962" y="1638"/>
-                </a:lnTo>
-                <a:lnTo>
-                  <a:pt x="3979" y="1635"/>
-                </a:lnTo>
-                <a:lnTo>
-                  <a:pt x="3997" y="1631"/>
-                </a:lnTo>
-                <a:lnTo>
-                  <a:pt x="4015" y="1628"/>
-                </a:lnTo>
-                <a:lnTo>
-                  <a:pt x="4033" y="1624"/>
-                </a:lnTo>
-                <a:lnTo>
-                  <a:pt x="4051" y="1620"/>
-                </a:lnTo>
-                <a:lnTo>
-                  <a:pt x="4069" y="1616"/>
-                </a:lnTo>
-                <a:lnTo>
-                  <a:pt x="4086" y="1612"/>
-                </a:lnTo>
-                <a:lnTo>
-                  <a:pt x="4104" y="1608"/>
-                </a:lnTo>
-                <a:lnTo>
-                  <a:pt x="4122" y="1604"/>
-                </a:lnTo>
-                <a:lnTo>
-                  <a:pt x="4140" y="1600"/>
-                </a:lnTo>
-                <a:lnTo>
-                  <a:pt x="4158" y="1596"/>
-                </a:lnTo>
-                <a:lnTo>
-                  <a:pt x="4176" y="1592"/>
-                </a:lnTo>
-                <a:lnTo>
-                  <a:pt x="4193" y="1588"/>
-                </a:lnTo>
-                <a:lnTo>
-                  <a:pt x="4211" y="1583"/>
-                </a:lnTo>
-                <a:lnTo>
-                  <a:pt x="4229" y="1579"/>
-                </a:lnTo>
-                <a:lnTo>
-                  <a:pt x="4247" y="1574"/>
-                </a:lnTo>
-                <a:lnTo>
-                  <a:pt x="4265" y="1570"/>
-                </a:lnTo>
-                <a:lnTo>
-                  <a:pt x="4283" y="1565"/>
-                </a:lnTo>
-                <a:lnTo>
-                  <a:pt x="4301" y="1561"/>
-                </a:lnTo>
-                <a:lnTo>
-                  <a:pt x="4318" y="1556"/>
-                </a:lnTo>
-                <a:lnTo>
-                  <a:pt x="4336" y="1551"/>
-                </a:lnTo>
-                <a:lnTo>
-                  <a:pt x="4354" y="1546"/>
-                </a:lnTo>
-                <a:lnTo>
-                  <a:pt x="4372" y="1541"/>
-                </a:lnTo>
-                <a:lnTo>
-                  <a:pt x="4390" y="1536"/>
-                </a:lnTo>
-                <a:lnTo>
-                  <a:pt x="4408" y="1531"/>
-                </a:lnTo>
-                <a:lnTo>
-                  <a:pt x="4425" y="1526"/>
-                </a:lnTo>
-                <a:lnTo>
-                  <a:pt x="4443" y="1521"/>
-                </a:lnTo>
-                <a:lnTo>
-                  <a:pt x="4461" y="1515"/>
-                </a:lnTo>
-                <a:lnTo>
-                  <a:pt x="4479" y="1510"/>
-                </a:lnTo>
-                <a:lnTo>
-                  <a:pt x="4497" y="1505"/>
-                </a:lnTo>
-                <a:lnTo>
-                  <a:pt x="4515" y="1499"/>
-                </a:lnTo>
-                <a:lnTo>
-                  <a:pt x="4533" y="1494"/>
-                </a:lnTo>
-                <a:lnTo>
-                  <a:pt x="4550" y="1488"/>
-                </a:lnTo>
-                <a:lnTo>
-                  <a:pt x="4568" y="1482"/>
-                </a:lnTo>
-                <a:lnTo>
-                  <a:pt x="4586" y="1477"/>
-                </a:lnTo>
-                <a:lnTo>
-                  <a:pt x="4604" y="1471"/>
-                </a:lnTo>
-                <a:lnTo>
-                  <a:pt x="4622" y="1465"/>
-                </a:lnTo>
-                <a:lnTo>
-                  <a:pt x="4640" y="1459"/>
-                </a:lnTo>
-                <a:lnTo>
-                  <a:pt x="4657" y="1453"/>
-                </a:lnTo>
-                <a:lnTo>
-                  <a:pt x="4675" y="1447"/>
-                </a:lnTo>
-                <a:lnTo>
-                  <a:pt x="4693" y="1441"/>
-                </a:lnTo>
-                <a:lnTo>
-                  <a:pt x="4711" y="1435"/>
-                </a:lnTo>
-                <a:lnTo>
-                  <a:pt x="4729" y="1429"/>
-                </a:lnTo>
-                <a:lnTo>
-                  <a:pt x="4747" y="1422"/>
-                </a:lnTo>
-                <a:lnTo>
-                  <a:pt x="4765" y="1416"/>
-                </a:lnTo>
-                <a:lnTo>
-                  <a:pt x="4782" y="1409"/>
-                </a:lnTo>
-                <a:lnTo>
-                  <a:pt x="4800" y="1403"/>
-                </a:lnTo>
-                <a:lnTo>
-                  <a:pt x="4818" y="1396"/>
-                </a:lnTo>
-                <a:lnTo>
-                  <a:pt x="4836" y="1390"/>
-                </a:lnTo>
-                <a:lnTo>
-                  <a:pt x="4854" y="1383"/>
-                </a:lnTo>
-                <a:lnTo>
-                  <a:pt x="4872" y="1376"/>
-                </a:lnTo>
-                <a:lnTo>
-                  <a:pt x="4889" y="1369"/>
-                </a:lnTo>
-                <a:lnTo>
-                  <a:pt x="4907" y="1362"/>
-                </a:lnTo>
-                <a:lnTo>
-                  <a:pt x="4925" y="1355"/>
-                </a:lnTo>
-                <a:lnTo>
-                  <a:pt x="4943" y="1348"/>
-                </a:lnTo>
-                <a:lnTo>
-                  <a:pt x="4961" y="1341"/>
-                </a:lnTo>
-                <a:lnTo>
-                  <a:pt x="4979" y="1334"/>
-                </a:lnTo>
-                <a:lnTo>
-                  <a:pt x="4996" y="1327"/>
-                </a:lnTo>
-                <a:lnTo>
-                  <a:pt x="5014" y="1320"/>
-                </a:lnTo>
-                <a:lnTo>
-                  <a:pt x="5032" y="1312"/>
-                </a:lnTo>
-                <a:lnTo>
-                  <a:pt x="5050" y="1305"/>
-                </a:lnTo>
-                <a:lnTo>
-                  <a:pt x="5068" y="1297"/>
-                </a:lnTo>
-                <a:lnTo>
-                  <a:pt x="5086" y="1290"/>
-                </a:lnTo>
-                <a:lnTo>
-                  <a:pt x="5104" y="1282"/>
-                </a:lnTo>
-                <a:lnTo>
-                  <a:pt x="5121" y="1274"/>
-                </a:lnTo>
-                <a:lnTo>
-                  <a:pt x="5139" y="1267"/>
-                </a:lnTo>
-                <a:lnTo>
-                  <a:pt x="5157" y="1259"/>
-                </a:lnTo>
-                <a:lnTo>
-                  <a:pt x="5175" y="1251"/>
-                </a:lnTo>
-                <a:lnTo>
-                  <a:pt x="5193" y="1243"/>
-                </a:lnTo>
-                <a:lnTo>
-                  <a:pt x="5211" y="1235"/>
-                </a:lnTo>
-                <a:lnTo>
-                  <a:pt x="5228" y="1227"/>
-                </a:lnTo>
-                <a:lnTo>
-                  <a:pt x="5246" y="1219"/>
-                </a:lnTo>
-                <a:lnTo>
-                  <a:pt x="5264" y="1211"/>
-                </a:lnTo>
-                <a:lnTo>
-                  <a:pt x="5282" y="1202"/>
-                </a:lnTo>
-                <a:lnTo>
-                  <a:pt x="5300" y="1194"/>
-                </a:lnTo>
-                <a:lnTo>
-                  <a:pt x="5318" y="1186"/>
-                </a:lnTo>
-                <a:lnTo>
-                  <a:pt x="5336" y="1177"/>
-                </a:lnTo>
-                <a:lnTo>
-                  <a:pt x="5353" y="1169"/>
-                </a:lnTo>
-                <a:lnTo>
-                  <a:pt x="5371" y="1160"/>
-                </a:lnTo>
-                <a:lnTo>
-                  <a:pt x="5389" y="1151"/>
-                </a:lnTo>
-                <a:lnTo>
-                  <a:pt x="5407" y="1143"/>
-                </a:lnTo>
-                <a:lnTo>
-                  <a:pt x="5425" y="1134"/>
-                </a:lnTo>
-                <a:lnTo>
-                  <a:pt x="5443" y="1125"/>
-                </a:lnTo>
-                <a:lnTo>
-                  <a:pt x="5460" y="1116"/>
-                </a:lnTo>
-                <a:lnTo>
-                  <a:pt x="5478" y="1107"/>
-                </a:lnTo>
-                <a:lnTo>
-                  <a:pt x="5496" y="1098"/>
-                </a:lnTo>
-                <a:lnTo>
-                  <a:pt x="5514" y="1089"/>
-                </a:lnTo>
-                <a:lnTo>
-                  <a:pt x="5532" y="1080"/>
-                </a:lnTo>
-                <a:lnTo>
-                  <a:pt x="5550" y="1070"/>
-                </a:lnTo>
-                <a:lnTo>
-                  <a:pt x="5568" y="1061"/>
-                </a:lnTo>
-                <a:lnTo>
-                  <a:pt x="5585" y="1052"/>
-                </a:lnTo>
-                <a:lnTo>
-                  <a:pt x="5603" y="1042"/>
-                </a:lnTo>
-                <a:lnTo>
-                  <a:pt x="5621" y="1033"/>
-                </a:lnTo>
-                <a:lnTo>
-                  <a:pt x="5639" y="1023"/>
-                </a:lnTo>
-                <a:lnTo>
-                  <a:pt x="5657" y="1013"/>
-                </a:lnTo>
-                <a:lnTo>
-                  <a:pt x="5675" y="1004"/>
-                </a:lnTo>
-                <a:lnTo>
-                  <a:pt x="5692" y="994"/>
-                </a:lnTo>
-                <a:lnTo>
-                  <a:pt x="5710" y="984"/>
-                </a:lnTo>
-                <a:lnTo>
-                  <a:pt x="5728" y="974"/>
-                </a:lnTo>
-                <a:lnTo>
-                  <a:pt x="5746" y="964"/>
-                </a:lnTo>
-                <a:lnTo>
-                  <a:pt x="5764" y="954"/>
-                </a:lnTo>
-                <a:lnTo>
-                  <a:pt x="5782" y="944"/>
-                </a:lnTo>
-                <a:lnTo>
-                  <a:pt x="5799" y="934"/>
-                </a:lnTo>
-                <a:lnTo>
-                  <a:pt x="5817" y="924"/>
-                </a:lnTo>
-                <a:lnTo>
-                  <a:pt x="5835" y="913"/>
-                </a:lnTo>
-                <a:lnTo>
-                  <a:pt x="5853" y="903"/>
-                </a:lnTo>
-                <a:lnTo>
-                  <a:pt x="5871" y="893"/>
-                </a:lnTo>
-                <a:lnTo>
-                  <a:pt x="5889" y="882"/>
-                </a:lnTo>
-                <a:lnTo>
-                  <a:pt x="5907" y="872"/>
-                </a:lnTo>
-                <a:lnTo>
-                  <a:pt x="5924" y="861"/>
-                </a:lnTo>
-                <a:lnTo>
-                  <a:pt x="5942" y="850"/>
-                </a:lnTo>
-                <a:lnTo>
-                  <a:pt x="5960" y="839"/>
-                </a:lnTo>
-                <a:lnTo>
-                  <a:pt x="5978" y="829"/>
-                </a:lnTo>
-                <a:lnTo>
-                  <a:pt x="5996" y="818"/>
-                </a:lnTo>
-                <a:lnTo>
-                  <a:pt x="6014" y="807"/>
-                </a:lnTo>
-                <a:lnTo>
-                  <a:pt x="6031" y="796"/>
-                </a:lnTo>
-                <a:lnTo>
-                  <a:pt x="6049" y="785"/>
-                </a:lnTo>
-                <a:lnTo>
-                  <a:pt x="6067" y="774"/>
-                </a:lnTo>
-                <a:lnTo>
-                  <a:pt x="6085" y="762"/>
-                </a:lnTo>
-                <a:lnTo>
-                  <a:pt x="6103" y="751"/>
-                </a:lnTo>
-                <a:lnTo>
-                  <a:pt x="6121" y="740"/>
-                </a:lnTo>
-                <a:lnTo>
-                  <a:pt x="6139" y="728"/>
-                </a:lnTo>
-                <a:lnTo>
-                  <a:pt x="6156" y="717"/>
-                </a:lnTo>
-                <a:lnTo>
-                  <a:pt x="6174" y="705"/>
-                </a:lnTo>
-                <a:lnTo>
-                  <a:pt x="6192" y="694"/>
-                </a:lnTo>
-                <a:lnTo>
-                  <a:pt x="6210" y="682"/>
-                </a:lnTo>
-                <a:lnTo>
-                  <a:pt x="6228" y="670"/>
-                </a:lnTo>
-                <a:lnTo>
-                  <a:pt x="6246" y="658"/>
-                </a:lnTo>
-                <a:lnTo>
-                  <a:pt x="6263" y="647"/>
-                </a:lnTo>
-                <a:lnTo>
-                  <a:pt x="6281" y="635"/>
-                </a:lnTo>
-                <a:lnTo>
-                  <a:pt x="6299" y="623"/>
-                </a:lnTo>
-                <a:lnTo>
-                  <a:pt x="6317" y="611"/>
-                </a:lnTo>
-                <a:lnTo>
-                  <a:pt x="6335" y="598"/>
-                </a:lnTo>
-                <a:lnTo>
-                  <a:pt x="6353" y="586"/>
-                </a:lnTo>
-                <a:lnTo>
-                  <a:pt x="6371" y="574"/>
-                </a:lnTo>
-                <a:lnTo>
-                  <a:pt x="6388" y="562"/>
-                </a:lnTo>
-                <a:lnTo>
-                  <a:pt x="6406" y="549"/>
-                </a:lnTo>
-                <a:lnTo>
-                  <a:pt x="6424" y="537"/>
-                </a:lnTo>
-                <a:lnTo>
-                  <a:pt x="6442" y="524"/>
-                </a:lnTo>
-                <a:lnTo>
-                  <a:pt x="6460" y="512"/>
-                </a:lnTo>
-                <a:lnTo>
-                  <a:pt x="6478" y="499"/>
-                </a:lnTo>
-                <a:lnTo>
-                  <a:pt x="6495" y="486"/>
-                </a:lnTo>
-                <a:lnTo>
-                  <a:pt x="6513" y="474"/>
-                </a:lnTo>
-                <a:lnTo>
-                  <a:pt x="6531" y="461"/>
-                </a:lnTo>
-                <a:lnTo>
-                  <a:pt x="6549" y="448"/>
-                </a:lnTo>
-                <a:lnTo>
-                  <a:pt x="6567" y="435"/>
-                </a:lnTo>
-                <a:lnTo>
-                  <a:pt x="6585" y="422"/>
-                </a:lnTo>
-                <a:lnTo>
-                  <a:pt x="6603" y="409"/>
-                </a:lnTo>
-                <a:lnTo>
-                  <a:pt x="6620" y="395"/>
-                </a:lnTo>
-                <a:lnTo>
-                  <a:pt x="6638" y="382"/>
-                </a:lnTo>
-                <a:lnTo>
-                  <a:pt x="6656" y="369"/>
-                </a:lnTo>
-                <a:lnTo>
-                  <a:pt x="6674" y="356"/>
-                </a:lnTo>
-                <a:lnTo>
-                  <a:pt x="6692" y="342"/>
-                </a:lnTo>
-                <a:lnTo>
-                  <a:pt x="6710" y="329"/>
-                </a:lnTo>
-                <a:lnTo>
-                  <a:pt x="6727" y="315"/>
-                </a:lnTo>
-                <a:lnTo>
-                  <a:pt x="6745" y="301"/>
-                </a:lnTo>
-                <a:lnTo>
-                  <a:pt x="6763" y="288"/>
-                </a:lnTo>
-                <a:lnTo>
-                  <a:pt x="6781" y="274"/>
-                </a:lnTo>
-                <a:lnTo>
-                  <a:pt x="6799" y="260"/>
-                </a:lnTo>
-                <a:lnTo>
-                  <a:pt x="6817" y="246"/>
-                </a:lnTo>
-                <a:lnTo>
-                  <a:pt x="6834" y="232"/>
-                </a:lnTo>
-                <a:lnTo>
-                  <a:pt x="6852" y="218"/>
-                </a:lnTo>
-                <a:lnTo>
-                  <a:pt x="6870" y="204"/>
-                </a:lnTo>
-                <a:lnTo>
-                  <a:pt x="6888" y="190"/>
-                </a:lnTo>
-                <a:lnTo>
-                  <a:pt x="6906" y="176"/>
-                </a:lnTo>
-                <a:lnTo>
-                  <a:pt x="6924" y="161"/>
-                </a:lnTo>
-                <a:lnTo>
-                  <a:pt x="6942" y="147"/>
-                </a:lnTo>
-                <a:lnTo>
-                  <a:pt x="6959" y="133"/>
-                </a:lnTo>
-                <a:lnTo>
-                  <a:pt x="6977" y="118"/>
-                </a:lnTo>
-                <a:lnTo>
-                  <a:pt x="6995" y="104"/>
-                </a:lnTo>
-                <a:lnTo>
-                  <a:pt x="7013" y="89"/>
-                </a:lnTo>
-                <a:lnTo>
-                  <a:pt x="7031" y="74"/>
-                </a:lnTo>
-                <a:lnTo>
-                  <a:pt x="7049" y="60"/>
-                </a:lnTo>
-                <a:lnTo>
-                  <a:pt x="7066" y="45"/>
-                </a:lnTo>
-                <a:lnTo>
-                  <a:pt x="7084" y="30"/>
-                </a:lnTo>
-                <a:lnTo>
-                  <a:pt x="7102" y="15"/>
-                </a:lnTo>
-                <a:lnTo>
-                  <a:pt x="7120" y="0"/>
-                </a:lnTo>
-              </a:path>
-            </a:pathLst>
-          </a:custGeom>
-          <a:noFill/>
-          <a:ln w="25400">
-            <a:solidFill>
-              <a:srgbClr val="7963AF"/>
-            </a:solidFill>
-            <a:prstDash val="dash"/>
-          </a:ln>
-        </p:spPr>
-        <p:style>
-          <a:lnRef idx="1">
-            <a:schemeClr val="accent1"/>
-          </a:lnRef>
-          <a:fillRef idx="3">
-            <a:schemeClr val="accent1"/>
-          </a:fillRef>
-          <a:effectRef idx="0">
-            <a:schemeClr val="accent1"/>
-          </a:effectRef>
-          <a:fontRef idx="minor">
-            <a:schemeClr val="lt1"/>
-          </a:fontRef>
-        </p:style>
-        <p:txBody>
-          <a:bodyPr rtlCol="0" anchor="ctr"/>
-          <a:lstStyle/>
-          <a:p>
-            <a:pPr algn="ctr"/>
-          </a:p>
-        </p:txBody>
-      </p:sp>
-      <p:sp>
-        <p:nvSpPr>
-          <p:cNvPr id="10" name="Freeform 9"/>
-          <p:cNvSpPr/>
-          <p:nvPr/>
-        </p:nvSpPr>
-        <p:spPr>
-          <a:xfrm>
             <a:off x="896112" y="2876702"/>
             <a:ext cx="6510528" cy="2254910"/>
           </a:xfrm>
@@ -15947,7 +13311,7 @@
       </p:sp>
       <p:sp>
         <p:nvSpPr>
-          <p:cNvPr id="11" name="Oval 10"/>
+          <p:cNvPr id="10" name="Oval 9"/>
           <p:cNvSpPr/>
           <p:nvPr/>
         </p:nvSpPr>
@@ -15992,7 +13356,7 @@
       </p:sp>
       <p:sp>
         <p:nvSpPr>
-          <p:cNvPr id="12" name="Oval 11"/>
+          <p:cNvPr id="11" name="Oval 10"/>
           <p:cNvSpPr/>
           <p:nvPr/>
         </p:nvSpPr>
@@ -16037,7 +13401,7 @@
       </p:sp>
       <p:sp>
         <p:nvSpPr>
-          <p:cNvPr id="13" name="Oval 12"/>
+          <p:cNvPr id="12" name="Oval 11"/>
           <p:cNvSpPr/>
           <p:nvPr/>
         </p:nvSpPr>
@@ -16082,7 +13446,7 @@
       </p:sp>
       <p:sp>
         <p:nvSpPr>
-          <p:cNvPr id="14" name="Oval 13"/>
+          <p:cNvPr id="13" name="Oval 12"/>
           <p:cNvSpPr/>
           <p:nvPr/>
         </p:nvSpPr>
@@ -16127,7 +13491,7 @@
       </p:sp>
       <p:sp>
         <p:nvSpPr>
-          <p:cNvPr id="15" name="Oval 14"/>
+          <p:cNvPr id="14" name="Oval 13"/>
           <p:cNvSpPr/>
           <p:nvPr/>
         </p:nvSpPr>
@@ -16172,7 +13536,7 @@
       </p:sp>
       <p:sp>
         <p:nvSpPr>
-          <p:cNvPr id="16" name="Oval 15"/>
+          <p:cNvPr id="15" name="Oval 14"/>
           <p:cNvSpPr/>
           <p:nvPr/>
         </p:nvSpPr>
@@ -16217,7 +13581,7 @@
       </p:sp>
       <p:sp>
         <p:nvSpPr>
-          <p:cNvPr id="17" name="Oval 16"/>
+          <p:cNvPr id="16" name="Oval 15"/>
           <p:cNvSpPr/>
           <p:nvPr/>
         </p:nvSpPr>
@@ -16262,7 +13626,7 @@
       </p:sp>
       <p:sp>
         <p:nvSpPr>
-          <p:cNvPr id="18" name="Oval 17"/>
+          <p:cNvPr id="17" name="Oval 16"/>
           <p:cNvSpPr/>
           <p:nvPr/>
         </p:nvSpPr>
@@ -16307,7 +13671,7 @@
       </p:sp>
       <p:sp>
         <p:nvSpPr>
-          <p:cNvPr id="19" name="Oval 18"/>
+          <p:cNvPr id="18" name="Oval 17"/>
           <p:cNvSpPr/>
           <p:nvPr/>
         </p:nvSpPr>
@@ -16352,7 +13716,7 @@
       </p:sp>
       <p:sp>
         <p:nvSpPr>
-          <p:cNvPr id="20" name="Oval 19"/>
+          <p:cNvPr id="19" name="Oval 18"/>
           <p:cNvSpPr/>
           <p:nvPr/>
         </p:nvSpPr>
@@ -16397,7 +13761,7 @@
       </p:sp>
       <p:sp>
         <p:nvSpPr>
-          <p:cNvPr id="21" name="Oval 20"/>
+          <p:cNvPr id="20" name="Oval 19"/>
           <p:cNvSpPr/>
           <p:nvPr/>
         </p:nvSpPr>
@@ -16442,7 +13806,7 @@
       </p:sp>
       <p:sp>
         <p:nvSpPr>
-          <p:cNvPr id="22" name="Oval 21"/>
+          <p:cNvPr id="21" name="Oval 20"/>
           <p:cNvSpPr/>
           <p:nvPr/>
         </p:nvSpPr>
@@ -16487,7 +13851,7 @@
       </p:sp>
       <p:sp>
         <p:nvSpPr>
-          <p:cNvPr id="23" name="Oval 22"/>
+          <p:cNvPr id="22" name="Oval 21"/>
           <p:cNvSpPr/>
           <p:nvPr/>
         </p:nvSpPr>
@@ -16532,7 +13896,7 @@
       </p:sp>
       <p:sp>
         <p:nvSpPr>
-          <p:cNvPr id="24" name="Oval 23"/>
+          <p:cNvPr id="23" name="Oval 22"/>
           <p:cNvSpPr/>
           <p:nvPr/>
         </p:nvSpPr>
@@ -16577,7 +13941,7 @@
       </p:sp>
       <p:sp>
         <p:nvSpPr>
-          <p:cNvPr id="25" name="Oval 24"/>
+          <p:cNvPr id="24" name="Oval 23"/>
           <p:cNvSpPr/>
           <p:nvPr/>
         </p:nvSpPr>
@@ -16622,7 +13986,7 @@
       </p:sp>
       <p:sp>
         <p:nvSpPr>
-          <p:cNvPr id="26" name="Oval 25"/>
+          <p:cNvPr id="25" name="Oval 24"/>
           <p:cNvSpPr/>
           <p:nvPr/>
         </p:nvSpPr>
@@ -16667,7 +14031,7 @@
       </p:sp>
       <p:sp>
         <p:nvSpPr>
-          <p:cNvPr id="27" name="Oval 26"/>
+          <p:cNvPr id="26" name="Oval 25"/>
           <p:cNvSpPr/>
           <p:nvPr/>
         </p:nvSpPr>
@@ -16712,7 +14076,7 @@
       </p:sp>
       <p:sp>
         <p:nvSpPr>
-          <p:cNvPr id="28" name="Oval 27"/>
+          <p:cNvPr id="27" name="Oval 26"/>
           <p:cNvSpPr/>
           <p:nvPr/>
         </p:nvSpPr>
@@ -16757,7 +14121,7 @@
       </p:sp>
       <p:sp>
         <p:nvSpPr>
-          <p:cNvPr id="29" name="Oval 28"/>
+          <p:cNvPr id="28" name="Oval 27"/>
           <p:cNvSpPr/>
           <p:nvPr/>
         </p:nvSpPr>
@@ -16802,7 +14166,7 @@
       </p:sp>
       <p:sp>
         <p:nvSpPr>
-          <p:cNvPr id="30" name="Oval 29"/>
+          <p:cNvPr id="29" name="Oval 28"/>
           <p:cNvSpPr/>
           <p:nvPr/>
         </p:nvSpPr>
@@ -16847,7 +14211,7 @@
       </p:sp>
       <p:sp>
         <p:nvSpPr>
-          <p:cNvPr id="31" name="Oval 30"/>
+          <p:cNvPr id="30" name="Oval 29"/>
           <p:cNvSpPr/>
           <p:nvPr/>
         </p:nvSpPr>
@@ -16892,7 +14256,7 @@
       </p:sp>
       <p:sp>
         <p:nvSpPr>
-          <p:cNvPr id="32" name="Oval 31"/>
+          <p:cNvPr id="31" name="Oval 30"/>
           <p:cNvSpPr/>
           <p:nvPr/>
         </p:nvSpPr>
@@ -16937,7 +14301,7 @@
       </p:sp>
       <p:sp>
         <p:nvSpPr>
-          <p:cNvPr id="33" name="Oval 32"/>
+          <p:cNvPr id="32" name="Oval 31"/>
           <p:cNvSpPr/>
           <p:nvPr/>
         </p:nvSpPr>
@@ -16982,7 +14346,7 @@
       </p:sp>
       <p:sp>
         <p:nvSpPr>
-          <p:cNvPr id="34" name="Oval 33"/>
+          <p:cNvPr id="33" name="Oval 32"/>
           <p:cNvSpPr/>
           <p:nvPr/>
         </p:nvSpPr>
@@ -17027,7 +14391,7 @@
       </p:sp>
       <p:sp>
         <p:nvSpPr>
-          <p:cNvPr id="35" name="Oval 34"/>
+          <p:cNvPr id="34" name="Oval 33"/>
           <p:cNvSpPr/>
           <p:nvPr/>
         </p:nvSpPr>
@@ -17072,7 +14436,7 @@
       </p:sp>
       <p:sp>
         <p:nvSpPr>
-          <p:cNvPr id="36" name="TextBox 35"/>
+          <p:cNvPr id="35" name="TextBox 34"/>
           <p:cNvSpPr txBox="1"/>
           <p:nvPr/>
         </p:nvSpPr>
@@ -17111,7 +14475,7 @@
       </p:sp>
       <p:sp>
         <p:nvSpPr>
-          <p:cNvPr id="37" name="TextBox 36"/>
+          <p:cNvPr id="36" name="TextBox 35"/>
           <p:cNvSpPr txBox="1"/>
           <p:nvPr/>
         </p:nvSpPr>
@@ -17166,7 +14530,7 @@
       </p:sp>
       <p:sp>
         <p:nvSpPr>
-          <p:cNvPr id="38" name="Oval 37"/>
+          <p:cNvPr id="37" name="Oval 36"/>
           <p:cNvSpPr/>
           <p:nvPr/>
         </p:nvSpPr>
@@ -17211,7 +14575,7 @@
       </p:sp>
       <p:sp>
         <p:nvSpPr>
-          <p:cNvPr id="39" name="TextBox 38"/>
+          <p:cNvPr id="38" name="TextBox 37"/>
           <p:cNvSpPr txBox="1"/>
           <p:nvPr/>
         </p:nvSpPr>
@@ -17250,7 +14614,7 @@
       </p:sp>
       <p:cxnSp>
         <p:nvCxnSpPr>
-          <p:cNvPr id="40" name="Connector 39"/>
+          <p:cNvPr id="39" name="Connector 38"/>
           <p:cNvCxnSpPr/>
           <p:nvPr/>
         </p:nvCxnSpPr>
@@ -17285,7 +14649,7 @@
       </p:cxnSp>
       <p:sp>
         <p:nvSpPr>
-          <p:cNvPr id="41" name="TextBox 40"/>
+          <p:cNvPr id="40" name="TextBox 39"/>
           <p:cNvSpPr txBox="1"/>
           <p:nvPr/>
         </p:nvSpPr>
@@ -17322,81 +14686,6 @@
           </a:p>
         </p:txBody>
       </p:sp>
-      <p:cxnSp>
-        <p:nvCxnSpPr>
-          <p:cNvPr id="42" name="Connector 41"/>
-          <p:cNvCxnSpPr/>
-          <p:nvPr/>
-        </p:nvCxnSpPr>
-        <p:spPr>
-          <a:xfrm>
-            <a:off x="6400800" y="5989320"/>
-            <a:ext cx="256032" cy="0"/>
-          </a:xfrm>
-          <a:prstGeom prst="line">
-            <a:avLst/>
-          </a:prstGeom>
-          <a:ln w="25400">
-            <a:solidFill>
-              <a:srgbClr val="7963AF"/>
-            </a:solidFill>
-            <a:prstDash val="dash"/>
-          </a:ln>
-        </p:spPr>
-        <p:style>
-          <a:lnRef idx="2">
-            <a:schemeClr val="accent1"/>
-          </a:lnRef>
-          <a:fillRef idx="0">
-            <a:schemeClr val="accent1"/>
-          </a:fillRef>
-          <a:effectRef idx="0">
-            <a:schemeClr val="accent1"/>
-          </a:effectRef>
-          <a:fontRef idx="minor">
-            <a:schemeClr val="tx1"/>
-          </a:fontRef>
-        </p:style>
-      </p:cxnSp>
-      <p:sp>
-        <p:nvSpPr>
-          <p:cNvPr id="43" name="TextBox 42"/>
-          <p:cNvSpPr txBox="1"/>
-          <p:nvPr/>
-        </p:nvSpPr>
-        <p:spPr>
-          <a:xfrm>
-            <a:off x="6757416" y="5870448"/>
-            <a:ext cx="2468880" cy="320040"/>
-          </a:xfrm>
-          <a:prstGeom prst="rect">
-            <a:avLst/>
-          </a:prstGeom>
-          <a:noFill/>
-        </p:spPr>
-        <p:txBody>
-          <a:bodyPr wrap="square" lIns="0" rIns="0" tIns="0" bIns="0">
-            <a:spAutoFit/>
-          </a:bodyPr>
-          <a:lstStyle/>
-          <a:p>
-            <a:pPr>
-              <a:spcAft>
-                <a:spcPts val="0"/>
-              </a:spcAft>
-              <a:defRPr sz="1300" b="0">
-                <a:solidFill>
-                  <a:srgbClr val="686C66"/>
-                </a:solidFill>
-                <a:latin typeface="Arial"/>
-              </a:defRPr>
-            </a:pPr>
-            <a:r>
-              <a:t>true pattern</a:t>
-            </a:r>
-          </a:p>
-        </p:txBody>
-      </p:sp>
     </p:spTree>
   </p:cSld>
   <p:clrMapOvr>
@@ -17423,9 +14712,33 @@
         <p:nvPr/>
       </p:nvGrpSpPr>
       <p:grpSpPr/>
+      <p:pic>
+        <p:nvPicPr>
+          <p:cNvPr id="2" name="Picture 1" descr="image.png"/>
+          <p:cNvPicPr>
+            <a:picLocks noChangeAspect="1"/>
+          </p:cNvPicPr>
+          <p:nvPr/>
+        </p:nvPicPr>
+        <p:blipFill>
+          <a:blip r:embed="rId2"/>
+          <a:stretch>
+            <a:fillRect/>
+          </a:stretch>
+        </p:blipFill>
+        <p:spPr>
+          <a:xfrm>
+            <a:off x="11768328" y="201168"/>
+            <a:ext cx="219456" cy="6455664"/>
+          </a:xfrm>
+          <a:prstGeom prst="rect">
+            <a:avLst/>
+          </a:prstGeom>
+        </p:spPr>
+      </p:pic>
       <p:sp>
         <p:nvSpPr>
-          <p:cNvPr id="2" name="TextBox 1"/>
+          <p:cNvPr id="3" name="TextBox 2"/>
           <p:cNvSpPr txBox="1"/>
           <p:nvPr/>
         </p:nvSpPr>
@@ -17462,41 +14775,6 @@
           </a:p>
         </p:txBody>
       </p:sp>
-      <p:cxnSp>
-        <p:nvCxnSpPr>
-          <p:cNvPr id="3" name="Connector 2"/>
-          <p:cNvCxnSpPr/>
-          <p:nvPr/>
-        </p:nvCxnSpPr>
-        <p:spPr>
-          <a:xfrm>
-            <a:off x="594360" y="6419088"/>
-            <a:ext cx="10972800" cy="0"/>
-          </a:xfrm>
-          <a:prstGeom prst="line">
-            <a:avLst/>
-          </a:prstGeom>
-          <a:ln w="12700">
-            <a:solidFill>
-              <a:srgbClr val="D4D6D0"/>
-            </a:solidFill>
-          </a:ln>
-        </p:spPr>
-        <p:style>
-          <a:lnRef idx="2">
-            <a:schemeClr val="accent1"/>
-          </a:lnRef>
-          <a:fillRef idx="0">
-            <a:schemeClr val="accent1"/>
-          </a:fillRef>
-          <a:effectRef idx="0">
-            <a:schemeClr val="accent1"/>
-          </a:effectRef>
-          <a:fontRef idx="minor">
-            <a:schemeClr val="tx1"/>
-          </a:fontRef>
-        </p:style>
-      </p:cxnSp>
       <p:sp>
         <p:nvSpPr>
           <p:cNvPr id="4" name="TextBox 3"/>
@@ -52067,9 +49345,33 @@
         <p:nvPr/>
       </p:nvGrpSpPr>
       <p:grpSpPr/>
+      <p:pic>
+        <p:nvPicPr>
+          <p:cNvPr id="2" name="Picture 1" descr="image.png"/>
+          <p:cNvPicPr>
+            <a:picLocks noChangeAspect="1"/>
+          </p:cNvPicPr>
+          <p:nvPr/>
+        </p:nvPicPr>
+        <p:blipFill>
+          <a:blip r:embed="rId2"/>
+          <a:stretch>
+            <a:fillRect/>
+          </a:stretch>
+        </p:blipFill>
+        <p:spPr>
+          <a:xfrm>
+            <a:off x="11768328" y="201168"/>
+            <a:ext cx="219456" cy="6455664"/>
+          </a:xfrm>
+          <a:prstGeom prst="rect">
+            <a:avLst/>
+          </a:prstGeom>
+        </p:spPr>
+      </p:pic>
       <p:sp>
         <p:nvSpPr>
-          <p:cNvPr id="2" name="TextBox 1"/>
+          <p:cNvPr id="3" name="TextBox 2"/>
           <p:cNvSpPr txBox="1"/>
           <p:nvPr/>
         </p:nvSpPr>
@@ -52106,41 +49408,6 @@
           </a:p>
         </p:txBody>
       </p:sp>
-      <p:cxnSp>
-        <p:nvCxnSpPr>
-          <p:cNvPr id="3" name="Connector 2"/>
-          <p:cNvCxnSpPr/>
-          <p:nvPr/>
-        </p:nvCxnSpPr>
-        <p:spPr>
-          <a:xfrm>
-            <a:off x="594360" y="6419088"/>
-            <a:ext cx="10972800" cy="0"/>
-          </a:xfrm>
-          <a:prstGeom prst="line">
-            <a:avLst/>
-          </a:prstGeom>
-          <a:ln w="12700">
-            <a:solidFill>
-              <a:srgbClr val="D4D6D0"/>
-            </a:solidFill>
-          </a:ln>
-        </p:spPr>
-        <p:style>
-          <a:lnRef idx="2">
-            <a:schemeClr val="accent1"/>
-          </a:lnRef>
-          <a:fillRef idx="0">
-            <a:schemeClr val="accent1"/>
-          </a:fillRef>
-          <a:effectRef idx="0">
-            <a:schemeClr val="accent1"/>
-          </a:effectRef>
-          <a:fontRef idx="minor">
-            <a:schemeClr val="tx1"/>
-          </a:fontRef>
-        </p:style>
-      </p:cxnSp>
       <p:sp>
         <p:nvSpPr>
           <p:cNvPr id="4" name="TextBox 3"/>
@@ -54210,9 +51477,33 @@
         <p:nvPr/>
       </p:nvGrpSpPr>
       <p:grpSpPr/>
+      <p:pic>
+        <p:nvPicPr>
+          <p:cNvPr id="2" name="Picture 1" descr="image.png"/>
+          <p:cNvPicPr>
+            <a:picLocks noChangeAspect="1"/>
+          </p:cNvPicPr>
+          <p:nvPr/>
+        </p:nvPicPr>
+        <p:blipFill>
+          <a:blip r:embed="rId2"/>
+          <a:stretch>
+            <a:fillRect/>
+          </a:stretch>
+        </p:blipFill>
+        <p:spPr>
+          <a:xfrm>
+            <a:off x="11768328" y="201168"/>
+            <a:ext cx="219456" cy="6455664"/>
+          </a:xfrm>
+          <a:prstGeom prst="rect">
+            <a:avLst/>
+          </a:prstGeom>
+        </p:spPr>
+      </p:pic>
       <p:sp>
         <p:nvSpPr>
-          <p:cNvPr id="2" name="TextBox 1"/>
+          <p:cNvPr id="3" name="TextBox 2"/>
           <p:cNvSpPr txBox="1"/>
           <p:nvPr/>
         </p:nvSpPr>
@@ -54249,41 +51540,6 @@
           </a:p>
         </p:txBody>
       </p:sp>
-      <p:cxnSp>
-        <p:nvCxnSpPr>
-          <p:cNvPr id="3" name="Connector 2"/>
-          <p:cNvCxnSpPr/>
-          <p:nvPr/>
-        </p:nvCxnSpPr>
-        <p:spPr>
-          <a:xfrm>
-            <a:off x="594360" y="6419088"/>
-            <a:ext cx="10972800" cy="0"/>
-          </a:xfrm>
-          <a:prstGeom prst="line">
-            <a:avLst/>
-          </a:prstGeom>
-          <a:ln w="12700">
-            <a:solidFill>
-              <a:srgbClr val="D4D6D0"/>
-            </a:solidFill>
-          </a:ln>
-        </p:spPr>
-        <p:style>
-          <a:lnRef idx="2">
-            <a:schemeClr val="accent1"/>
-          </a:lnRef>
-          <a:fillRef idx="0">
-            <a:schemeClr val="accent1"/>
-          </a:fillRef>
-          <a:effectRef idx="0">
-            <a:schemeClr val="accent1"/>
-          </a:effectRef>
-          <a:fontRef idx="minor">
-            <a:schemeClr val="tx1"/>
-          </a:fontRef>
-        </p:style>
-      </p:cxnSp>
       <p:sp>
         <p:nvSpPr>
           <p:cNvPr id="4" name="TextBox 3"/>
@@ -55072,44 +52328,9 @@
           </a:p>
         </p:txBody>
       </p:sp>
-      <p:cxnSp>
-        <p:nvCxnSpPr>
-          <p:cNvPr id="4" name="Connector 3"/>
-          <p:cNvCxnSpPr/>
-          <p:nvPr/>
-        </p:nvCxnSpPr>
-        <p:spPr>
-          <a:xfrm>
-            <a:off x="594360" y="6419088"/>
-            <a:ext cx="10972800" cy="0"/>
-          </a:xfrm>
-          <a:prstGeom prst="line">
-            <a:avLst/>
-          </a:prstGeom>
-          <a:ln w="12700">
-            <a:solidFill>
-              <a:srgbClr val="D4D6D0"/>
-            </a:solidFill>
-          </a:ln>
-        </p:spPr>
-        <p:style>
-          <a:lnRef idx="2">
-            <a:schemeClr val="accent1"/>
-          </a:lnRef>
-          <a:fillRef idx="0">
-            <a:schemeClr val="accent1"/>
-          </a:fillRef>
-          <a:effectRef idx="0">
-            <a:schemeClr val="accent1"/>
-          </a:effectRef>
-          <a:fontRef idx="minor">
-            <a:schemeClr val="tx1"/>
-          </a:fontRef>
-        </p:style>
-      </p:cxnSp>
       <p:sp>
         <p:nvSpPr>
-          <p:cNvPr id="5" name="TextBox 4"/>
+          <p:cNvPr id="4" name="TextBox 3"/>
           <p:cNvSpPr txBox="1"/>
           <p:nvPr/>
         </p:nvSpPr>
@@ -55148,7 +52369,7 @@
       </p:sp>
       <p:cxnSp>
         <p:nvCxnSpPr>
-          <p:cNvPr id="6" name="Connector 5"/>
+          <p:cNvPr id="5" name="Connector 4"/>
           <p:cNvCxnSpPr/>
           <p:nvPr/>
         </p:nvCxnSpPr>
@@ -55183,7 +52404,7 @@
       </p:cxnSp>
       <p:sp>
         <p:nvSpPr>
-          <p:cNvPr id="7" name="TextBox 6"/>
+          <p:cNvPr id="6" name="TextBox 5"/>
           <p:cNvSpPr txBox="1"/>
           <p:nvPr/>
         </p:nvSpPr>
@@ -55222,7 +52443,7 @@
       </p:sp>
       <p:sp>
         <p:nvSpPr>
-          <p:cNvPr id="8" name="TextBox 7"/>
+          <p:cNvPr id="7" name="TextBox 6"/>
           <p:cNvSpPr txBox="1"/>
           <p:nvPr/>
         </p:nvSpPr>
@@ -55277,7 +52498,7 @@
       </p:sp>
       <p:cxnSp>
         <p:nvCxnSpPr>
-          <p:cNvPr id="9" name="Connector 8"/>
+          <p:cNvPr id="8" name="Connector 7"/>
           <p:cNvCxnSpPr/>
           <p:nvPr/>
         </p:nvCxnSpPr>
@@ -55312,7 +52533,7 @@
       </p:cxnSp>
       <p:sp>
         <p:nvSpPr>
-          <p:cNvPr id="10" name="TextBox 9"/>
+          <p:cNvPr id="9" name="TextBox 8"/>
           <p:cNvSpPr txBox="1"/>
           <p:nvPr/>
         </p:nvSpPr>
@@ -55351,7 +52572,7 @@
       </p:sp>
       <p:sp>
         <p:nvSpPr>
-          <p:cNvPr id="11" name="TextBox 10"/>
+          <p:cNvPr id="10" name="TextBox 9"/>
           <p:cNvSpPr txBox="1"/>
           <p:nvPr/>
         </p:nvSpPr>
@@ -55406,7 +52627,7 @@
       </p:sp>
       <p:cxnSp>
         <p:nvCxnSpPr>
-          <p:cNvPr id="12" name="Connector 11"/>
+          <p:cNvPr id="11" name="Connector 10"/>
           <p:cNvCxnSpPr/>
           <p:nvPr/>
         </p:nvCxnSpPr>
@@ -55441,7 +52662,7 @@
       </p:cxnSp>
       <p:sp>
         <p:nvSpPr>
-          <p:cNvPr id="13" name="TextBox 12"/>
+          <p:cNvPr id="12" name="TextBox 11"/>
           <p:cNvSpPr txBox="1"/>
           <p:nvPr/>
         </p:nvSpPr>
@@ -55480,7 +52701,7 @@
       </p:sp>
       <p:sp>
         <p:nvSpPr>
-          <p:cNvPr id="14" name="TextBox 13"/>
+          <p:cNvPr id="13" name="TextBox 12"/>
           <p:cNvSpPr txBox="1"/>
           <p:nvPr/>
         </p:nvSpPr>
@@ -55535,7 +52756,7 @@
       </p:sp>
       <p:sp>
         <p:nvSpPr>
-          <p:cNvPr id="15" name="TextBox 14"/>
+          <p:cNvPr id="14" name="TextBox 13"/>
           <p:cNvSpPr txBox="1"/>
           <p:nvPr/>
         </p:nvSpPr>

--- a/cmpsc-448/presentation/bias-variance-tradeoff.pptx
+++ b/cmpsc-448/presentation/bias-variance-tradeoff.pptx
@@ -11866,7 +11866,7 @@
               </a:defRPr>
             </a:pPr>
             <a:r>
-              <a:t>Flexible enough to learn the noise.</a:t>
+              <a:t>Too complex to learn the pattern.</a:t>
             </a:r>
           </a:p>
         </p:txBody>

--- a/cmpsc-448/presentation/bias-variance-tradeoff.pptx
+++ b/cmpsc-448/presentation/bias-variance-tradeoff.pptx
@@ -14770,7 +14770,7 @@
               </a:defRPr>
             </a:pPr>
             <a:r>
-              <a:t>Change the sample. Fit again.</a:t>
+              <a:t>A closer look at variance</a:t>
             </a:r>
           </a:p>
         </p:txBody>

--- a/cmpsc-448/presentation/bias-variance-tradeoff.pptx
+++ b/cmpsc-448/presentation/bias-variance-tradeoff.pptx
@@ -788,7 +788,7 @@
           <a:lstStyle/>
           <a:p>
             <a:r>
-              <a:t>This is the classic schematic, not the measured curve from our examples and not a universal law. In nested least-squares model families training loss cannot increase as flexibility grows, while expected test loss may first improve and then worsen. Under squared error, expected prediction error at x decomposes into squared bias, variance, and irreducible noise, assuming a stable data-generating process and averaging over training samples and fresh output noise. There is no guarantee of a smooth U-shape in every regime. Choose hyperparameters using a validation split or cross-validation; reserve a final test set for an honest, one-time evaluation. Do not tune on test results.</a:t>
+              <a:t>The left graph fits a degree-2 polynomial to the exact same 20 training observations used by the straight and wiggly models on slide 1. It follows the broad curvature without trying to hit every noisy point. The right graph keeps that model frozen and reveals the exact same 25 unseen observations shown on slides 2 and 3. Both graphs use identical axes. The model was not refitted on the test set. Unlike the overly rigid line, it captures the curved relationship; unlike the degree-12 fit, it avoids chasing individual noise fluctuations. Its predictions will still miss some points because the observations contain irreducible noise. Slide 6 reports its measured losses over all training points and all 1,000 test points. This degree was fixed for the demonstration; in practice choose complexity using validation data or cross-validation, then evaluate once on an untouched test set.</a:t>
             </a:r>
           </a:p>
         </p:txBody>
@@ -858,7 +858,7 @@
           <a:lstStyle/>
           <a:p>
             <a:r>
-              <a:t>All rows are actual computed results on the shared quadratic process: y = 0.3 + 0.4x + 1.3x² + noise, with noise standard deviation 0.4. Training uses 20 equally spaced x values on [-1, 1]; test uses 1,000 independently drawn uniform x values in that same range and fresh noise. Degrees 1, 2, and 12 were fixed for this demonstration, not selected by searching test loss. Mean squared error is the average of (prediction minus observed y)²; lower is better and units are squared output units. The underfit has relatively high losses on both sets. The degree-2 fit has low, similar losses. Degree 12 achieves the lowest training error, but has higher test error than degree 2. Test loss need not exceed training loss for every finite sample; note that degree 1's test loss is lower here. A single gap does not by itself prove high variance; repeated sampling supplies the conceptual evidence. The degree-1 and degree-12 rows are the frozen models shown on slides 1–3. The degree-2 row is fitted to the same original training set; slide 4 introduced this model family through fresh refits. All rows use identical training and test data. Slides 2 and 3 display only the first 25 test points for readability, while the table evaluates all 1,000.</a:t>
+              <a:t>All rows are actual computed results on the shared quadratic process: y = 0.3 + 0.4x + 1.3x² + noise, with noise standard deviation 0.4. Training uses 20 equally spaced x values on [-1, 1]; test uses 1,000 independently drawn uniform x values in that same range and fresh noise. Degrees 1, 2, and 12 were fixed for this demonstration, not selected by searching test loss. Mean squared error is the average of (prediction minus observed y)²; lower is better and units are squared output units. The underfit has relatively high losses on both sets. The degree-2 fit has low, similar losses. Degree 12 achieves the lowest training error, but has higher test error than degree 2. Test loss need not exceed training loss for every finite sample; note that degree 1's test loss is lower here. A single gap does not by itself prove high variance; repeated sampling supplies the conceptual evidence. The degree-1 and degree-12 rows are the frozen models shown on slides 1–3. The degree-2 row is the exact model shown on slide 5, fitted to the same original training set; slide 4 introduced this model family through fresh refits. All rows use identical training and test data. Slides 2, 3, and 5 display only the first 25 test points for readability, while the table evaluates all 1,000.</a:t>
             </a:r>
           </a:p>
         </p:txBody>
@@ -49403,7 +49403,7 @@
               </a:defRPr>
             </a:pPr>
             <a:r>
-              <a:t>A closer fit is not always a better model.</a:t>
+              <a:t>A balanced fit learns the pattern.</a:t>
             </a:r>
           </a:p>
         </p:txBody>
@@ -49447,16 +49447,94 @@
           </a:p>
         </p:txBody>
       </p:sp>
+      <p:sp>
+        <p:nvSpPr>
+          <p:cNvPr id="5" name="TextBox 4"/>
+          <p:cNvSpPr txBox="1"/>
+          <p:nvPr/>
+        </p:nvSpPr>
+        <p:spPr>
+          <a:xfrm>
+            <a:off x="896112" y="2423160"/>
+            <a:ext cx="3108960" cy="274320"/>
+          </a:xfrm>
+          <a:prstGeom prst="rect">
+            <a:avLst/>
+          </a:prstGeom>
+          <a:noFill/>
+        </p:spPr>
+        <p:txBody>
+          <a:bodyPr wrap="square" lIns="0" rIns="0" tIns="0" bIns="0">
+            <a:spAutoFit/>
+          </a:bodyPr>
+          <a:lstStyle/>
+          <a:p>
+            <a:pPr>
+              <a:spcAft>
+                <a:spcPts val="0"/>
+              </a:spcAft>
+              <a:defRPr sz="1600" b="0">
+                <a:solidFill>
+                  <a:srgbClr val="181D16"/>
+                </a:solidFill>
+                <a:latin typeface="Arial"/>
+              </a:defRPr>
+            </a:pPr>
+            <a:r>
+              <a:t>Training set</a:t>
+            </a:r>
+          </a:p>
+        </p:txBody>
+      </p:sp>
+      <p:sp>
+        <p:nvSpPr>
+          <p:cNvPr id="6" name="TextBox 5"/>
+          <p:cNvSpPr txBox="1"/>
+          <p:nvPr/>
+        </p:nvSpPr>
+        <p:spPr>
+          <a:xfrm>
+            <a:off x="6510528" y="2423160"/>
+            <a:ext cx="3108960" cy="274320"/>
+          </a:xfrm>
+          <a:prstGeom prst="rect">
+            <a:avLst/>
+          </a:prstGeom>
+          <a:noFill/>
+        </p:spPr>
+        <p:txBody>
+          <a:bodyPr wrap="square" lIns="0" rIns="0" tIns="0" bIns="0">
+            <a:spAutoFit/>
+          </a:bodyPr>
+          <a:lstStyle/>
+          <a:p>
+            <a:pPr>
+              <a:spcAft>
+                <a:spcPts val="0"/>
+              </a:spcAft>
+              <a:defRPr sz="1600" b="0">
+                <a:solidFill>
+                  <a:srgbClr val="181D16"/>
+                </a:solidFill>
+                <a:latin typeface="Arial"/>
+              </a:defRPr>
+            </a:pPr>
+            <a:r>
+              <a:t>Test set</a:t>
+            </a:r>
+          </a:p>
+        </p:txBody>
+      </p:sp>
       <p:cxnSp>
         <p:nvCxnSpPr>
-          <p:cNvPr id="5" name="Connector 4"/>
+          <p:cNvPr id="7" name="Connector 6"/>
           <p:cNvCxnSpPr/>
           <p:nvPr/>
         </p:nvCxnSpPr>
         <p:spPr>
           <a:xfrm>
-            <a:off x="932688" y="5330952"/>
-            <a:ext cx="6583680" cy="0"/>
+            <a:off x="896112" y="5440680"/>
+            <a:ext cx="4572000" cy="0"/>
           </a:xfrm>
           <a:prstGeom prst="line">
             <a:avLst/>
@@ -49484,14 +49562,14 @@
       </p:cxnSp>
       <p:cxnSp>
         <p:nvCxnSpPr>
-          <p:cNvPr id="6" name="Connector 5"/>
+          <p:cNvPr id="8" name="Connector 7"/>
           <p:cNvCxnSpPr/>
           <p:nvPr/>
         </p:nvCxnSpPr>
         <p:spPr>
           <a:xfrm>
-            <a:off x="932688" y="2743200"/>
-            <a:ext cx="0" cy="2587752"/>
+            <a:off x="896112" y="2834640"/>
+            <a:ext cx="0" cy="2606040"/>
           </a:xfrm>
           <a:prstGeom prst="line">
             <a:avLst/>
@@ -49519,13 +49597,13 @@
       </p:cxnSp>
       <p:sp>
         <p:nvSpPr>
-          <p:cNvPr id="7" name="TextBox 6"/>
+          <p:cNvPr id="9" name="TextBox 8"/>
           <p:cNvSpPr txBox="1"/>
           <p:nvPr/>
         </p:nvSpPr>
         <p:spPr>
           <a:xfrm>
-            <a:off x="7424928" y="5422392"/>
+            <a:off x="5376672" y="5532120"/>
             <a:ext cx="640080" cy="274320"/>
           </a:xfrm>
           <a:prstGeom prst="rect">
@@ -49550,18 +49628,21 @@
                 <a:latin typeface="Arial"/>
               </a:defRPr>
             </a:pPr>
+            <a:r>
+              <a:t>x</a:t>
+            </a:r>
           </a:p>
         </p:txBody>
       </p:sp>
       <p:sp>
         <p:nvSpPr>
-          <p:cNvPr id="8" name="TextBox 7"/>
+          <p:cNvPr id="10" name="TextBox 9"/>
           <p:cNvSpPr txBox="1"/>
           <p:nvPr/>
         </p:nvSpPr>
         <p:spPr>
           <a:xfrm>
-            <a:off x="658368" y="2560320"/>
+            <a:off x="621792" y="2651760"/>
             <a:ext cx="914400" cy="274320"/>
           </a:xfrm>
           <a:prstGeom prst="rect">
@@ -49587,21 +49668,21 @@
               </a:defRPr>
             </a:pPr>
             <a:r>
-              <a:t>loss</a:t>
+              <a:t>y</a:t>
             </a:r>
           </a:p>
         </p:txBody>
       </p:sp>
       <p:sp>
         <p:nvSpPr>
-          <p:cNvPr id="9" name="Freeform 8"/>
+          <p:cNvPr id="11" name="Freeform 10"/>
           <p:cNvSpPr/>
           <p:nvPr/>
         </p:nvSpPr>
         <p:spPr>
           <a:xfrm>
-            <a:off x="932688" y="3941064"/>
-            <a:ext cx="6583680" cy="1129284"/>
+            <a:off x="896112" y="2919679"/>
+            <a:ext cx="4572000" cy="1805026"/>
           </a:xfrm>
           <a:custGeom>
             <a:avLst/>
@@ -49610,674 +49691,1214 @@
             <a:cxnLst/>
             <a:rect l="l" t="t" r="r" b="b"/>
             <a:pathLst>
-              <a:path w="7200" h="1235">
+              <a:path w="5000" h="1974">
                 <a:moveTo>
-                  <a:pt x="0" y="0"/>
+                  <a:pt x="0" y="766"/>
                 </a:moveTo>
                 <a:lnTo>
-                  <a:pt x="33" y="23"/>
-                </a:lnTo>
-                <a:lnTo>
-                  <a:pt x="66" y="45"/>
-                </a:lnTo>
-                <a:lnTo>
-                  <a:pt x="99" y="67"/>
-                </a:lnTo>
-                <a:lnTo>
-                  <a:pt x="132" y="89"/>
-                </a:lnTo>
-                <a:lnTo>
-                  <a:pt x="164" y="110"/>
-                </a:lnTo>
-                <a:lnTo>
-                  <a:pt x="197" y="131"/>
-                </a:lnTo>
-                <a:lnTo>
-                  <a:pt x="230" y="151"/>
-                </a:lnTo>
-                <a:lnTo>
-                  <a:pt x="263" y="171"/>
-                </a:lnTo>
-                <a:lnTo>
-                  <a:pt x="296" y="191"/>
-                </a:lnTo>
-                <a:lnTo>
-                  <a:pt x="329" y="210"/>
-                </a:lnTo>
-                <a:lnTo>
-                  <a:pt x="362" y="229"/>
-                </a:lnTo>
-                <a:lnTo>
-                  <a:pt x="395" y="248"/>
-                </a:lnTo>
-                <a:lnTo>
-                  <a:pt x="427" y="266"/>
-                </a:lnTo>
-                <a:lnTo>
-                  <a:pt x="460" y="284"/>
-                </a:lnTo>
-                <a:lnTo>
-                  <a:pt x="493" y="302"/>
-                </a:lnTo>
-                <a:lnTo>
-                  <a:pt x="526" y="319"/>
-                </a:lnTo>
-                <a:lnTo>
-                  <a:pt x="559" y="336"/>
-                </a:lnTo>
-                <a:lnTo>
-                  <a:pt x="592" y="353"/>
-                </a:lnTo>
-                <a:lnTo>
-                  <a:pt x="625" y="369"/>
-                </a:lnTo>
-                <a:lnTo>
-                  <a:pt x="658" y="385"/>
-                </a:lnTo>
-                <a:lnTo>
-                  <a:pt x="690" y="401"/>
-                </a:lnTo>
-                <a:lnTo>
-                  <a:pt x="723" y="416"/>
-                </a:lnTo>
-                <a:lnTo>
-                  <a:pt x="756" y="432"/>
-                </a:lnTo>
-                <a:lnTo>
-                  <a:pt x="789" y="447"/>
-                </a:lnTo>
-                <a:lnTo>
-                  <a:pt x="822" y="461"/>
-                </a:lnTo>
-                <a:lnTo>
-                  <a:pt x="855" y="476"/>
-                </a:lnTo>
-                <a:lnTo>
-                  <a:pt x="888" y="490"/>
-                </a:lnTo>
-                <a:lnTo>
-                  <a:pt x="921" y="504"/>
-                </a:lnTo>
-                <a:lnTo>
-                  <a:pt x="953" y="517"/>
-                </a:lnTo>
-                <a:lnTo>
-                  <a:pt x="986" y="531"/>
-                </a:lnTo>
-                <a:lnTo>
-                  <a:pt x="1019" y="544"/>
-                </a:lnTo>
-                <a:lnTo>
-                  <a:pt x="1052" y="557"/>
-                </a:lnTo>
-                <a:lnTo>
-                  <a:pt x="1085" y="570"/>
-                </a:lnTo>
-                <a:lnTo>
-                  <a:pt x="1118" y="582"/>
-                </a:lnTo>
-                <a:lnTo>
-                  <a:pt x="1151" y="594"/>
-                </a:lnTo>
-                <a:lnTo>
-                  <a:pt x="1184" y="606"/>
-                </a:lnTo>
-                <a:lnTo>
-                  <a:pt x="1216" y="618"/>
-                </a:lnTo>
-                <a:lnTo>
-                  <a:pt x="1249" y="630"/>
-                </a:lnTo>
-                <a:lnTo>
-                  <a:pt x="1282" y="641"/>
-                </a:lnTo>
-                <a:lnTo>
-                  <a:pt x="1315" y="652"/>
-                </a:lnTo>
-                <a:lnTo>
-                  <a:pt x="1348" y="663"/>
-                </a:lnTo>
-                <a:lnTo>
-                  <a:pt x="1381" y="674"/>
-                </a:lnTo>
-                <a:lnTo>
-                  <a:pt x="1414" y="684"/>
-                </a:lnTo>
-                <a:lnTo>
-                  <a:pt x="1447" y="695"/>
-                </a:lnTo>
-                <a:lnTo>
-                  <a:pt x="1479" y="705"/>
-                </a:lnTo>
-                <a:lnTo>
-                  <a:pt x="1512" y="715"/>
-                </a:lnTo>
-                <a:lnTo>
-                  <a:pt x="1545" y="725"/>
-                </a:lnTo>
-                <a:lnTo>
-                  <a:pt x="1578" y="735"/>
-                </a:lnTo>
-                <a:lnTo>
-                  <a:pt x="1611" y="744"/>
-                </a:lnTo>
-                <a:lnTo>
-                  <a:pt x="1644" y="753"/>
-                </a:lnTo>
-                <a:lnTo>
-                  <a:pt x="1677" y="762"/>
-                </a:lnTo>
-                <a:lnTo>
-                  <a:pt x="1710" y="771"/>
-                </a:lnTo>
-                <a:lnTo>
-                  <a:pt x="1742" y="780"/>
-                </a:lnTo>
-                <a:lnTo>
-                  <a:pt x="1775" y="789"/>
-                </a:lnTo>
-                <a:lnTo>
-                  <a:pt x="1808" y="797"/>
-                </a:lnTo>
-                <a:lnTo>
-                  <a:pt x="1841" y="806"/>
-                </a:lnTo>
-                <a:lnTo>
-                  <a:pt x="1874" y="814"/>
-                </a:lnTo>
-                <a:lnTo>
-                  <a:pt x="1907" y="822"/>
-                </a:lnTo>
-                <a:lnTo>
-                  <a:pt x="1940" y="830"/>
-                </a:lnTo>
-                <a:lnTo>
-                  <a:pt x="1973" y="838"/>
-                </a:lnTo>
-                <a:lnTo>
-                  <a:pt x="2005" y="845"/>
-                </a:lnTo>
-                <a:lnTo>
-                  <a:pt x="2038" y="853"/>
-                </a:lnTo>
-                <a:lnTo>
-                  <a:pt x="2071" y="860"/>
-                </a:lnTo>
-                <a:lnTo>
-                  <a:pt x="2104" y="867"/>
-                </a:lnTo>
-                <a:lnTo>
-                  <a:pt x="2137" y="874"/>
-                </a:lnTo>
-                <a:lnTo>
-                  <a:pt x="2170" y="881"/>
-                </a:lnTo>
-                <a:lnTo>
-                  <a:pt x="2203" y="888"/>
-                </a:lnTo>
-                <a:lnTo>
-                  <a:pt x="2236" y="895"/>
-                </a:lnTo>
-                <a:lnTo>
-                  <a:pt x="2268" y="901"/>
-                </a:lnTo>
-                <a:lnTo>
-                  <a:pt x="2301" y="908"/>
-                </a:lnTo>
-                <a:lnTo>
-                  <a:pt x="2334" y="914"/>
-                </a:lnTo>
-                <a:lnTo>
-                  <a:pt x="2367" y="920"/>
-                </a:lnTo>
-                <a:lnTo>
-                  <a:pt x="2400" y="926"/>
-                </a:lnTo>
-                <a:lnTo>
-                  <a:pt x="2433" y="932"/>
-                </a:lnTo>
-                <a:lnTo>
-                  <a:pt x="2466" y="938"/>
-                </a:lnTo>
-                <a:lnTo>
-                  <a:pt x="2499" y="944"/>
-                </a:lnTo>
-                <a:lnTo>
-                  <a:pt x="2532" y="950"/>
-                </a:lnTo>
-                <a:lnTo>
-                  <a:pt x="2564" y="955"/>
-                </a:lnTo>
-                <a:lnTo>
-                  <a:pt x="2597" y="961"/>
-                </a:lnTo>
-                <a:lnTo>
-                  <a:pt x="2630" y="966"/>
-                </a:lnTo>
-                <a:lnTo>
-                  <a:pt x="2663" y="971"/>
-                </a:lnTo>
-                <a:lnTo>
-                  <a:pt x="2696" y="977"/>
-                </a:lnTo>
-                <a:lnTo>
-                  <a:pt x="2729" y="982"/>
-                </a:lnTo>
-                <a:lnTo>
-                  <a:pt x="2762" y="987"/>
-                </a:lnTo>
-                <a:lnTo>
-                  <a:pt x="2795" y="992"/>
-                </a:lnTo>
-                <a:lnTo>
-                  <a:pt x="2827" y="996"/>
-                </a:lnTo>
-                <a:lnTo>
-                  <a:pt x="2860" y="1001"/>
-                </a:lnTo>
-                <a:lnTo>
-                  <a:pt x="2893" y="1006"/>
-                </a:lnTo>
-                <a:lnTo>
-                  <a:pt x="2926" y="1010"/>
-                </a:lnTo>
-                <a:lnTo>
-                  <a:pt x="2959" y="1015"/>
-                </a:lnTo>
-                <a:lnTo>
-                  <a:pt x="2992" y="1019"/>
-                </a:lnTo>
-                <a:lnTo>
-                  <a:pt x="3025" y="1024"/>
-                </a:lnTo>
-                <a:lnTo>
-                  <a:pt x="3058" y="1028"/>
-                </a:lnTo>
-                <a:lnTo>
-                  <a:pt x="3090" y="1032"/>
-                </a:lnTo>
-                <a:lnTo>
-                  <a:pt x="3123" y="1036"/>
-                </a:lnTo>
-                <a:lnTo>
-                  <a:pt x="3156" y="1040"/>
-                </a:lnTo>
-                <a:lnTo>
-                  <a:pt x="3189" y="1044"/>
-                </a:lnTo>
-                <a:lnTo>
-                  <a:pt x="3222" y="1048"/>
-                </a:lnTo>
-                <a:lnTo>
-                  <a:pt x="3255" y="1052"/>
-                </a:lnTo>
-                <a:lnTo>
-                  <a:pt x="3288" y="1055"/>
-                </a:lnTo>
-                <a:lnTo>
-                  <a:pt x="3321" y="1059"/>
-                </a:lnTo>
-                <a:lnTo>
-                  <a:pt x="3353" y="1063"/>
-                </a:lnTo>
-                <a:lnTo>
-                  <a:pt x="3386" y="1066"/>
-                </a:lnTo>
-                <a:lnTo>
-                  <a:pt x="3419" y="1070"/>
-                </a:lnTo>
-                <a:lnTo>
-                  <a:pt x="3452" y="1073"/>
-                </a:lnTo>
-                <a:lnTo>
-                  <a:pt x="3485" y="1077"/>
-                </a:lnTo>
-                <a:lnTo>
-                  <a:pt x="3518" y="1080"/>
-                </a:lnTo>
-                <a:lnTo>
-                  <a:pt x="3551" y="1083"/>
-                </a:lnTo>
-                <a:lnTo>
-                  <a:pt x="3584" y="1086"/>
-                </a:lnTo>
-                <a:lnTo>
-                  <a:pt x="3616" y="1089"/>
-                </a:lnTo>
-                <a:lnTo>
-                  <a:pt x="3649" y="1092"/>
-                </a:lnTo>
-                <a:lnTo>
-                  <a:pt x="3682" y="1095"/>
-                </a:lnTo>
-                <a:lnTo>
-                  <a:pt x="3715" y="1098"/>
-                </a:lnTo>
-                <a:lnTo>
-                  <a:pt x="3748" y="1101"/>
-                </a:lnTo>
-                <a:lnTo>
-                  <a:pt x="3781" y="1104"/>
-                </a:lnTo>
-                <a:lnTo>
-                  <a:pt x="3814" y="1107"/>
-                </a:lnTo>
-                <a:lnTo>
-                  <a:pt x="3847" y="1110"/>
-                </a:lnTo>
-                <a:lnTo>
-                  <a:pt x="3879" y="1112"/>
-                </a:lnTo>
-                <a:lnTo>
-                  <a:pt x="3912" y="1115"/>
-                </a:lnTo>
-                <a:lnTo>
-                  <a:pt x="3945" y="1117"/>
-                </a:lnTo>
-                <a:lnTo>
-                  <a:pt x="3978" y="1120"/>
-                </a:lnTo>
-                <a:lnTo>
-                  <a:pt x="4011" y="1122"/>
-                </a:lnTo>
-                <a:lnTo>
-                  <a:pt x="4044" y="1125"/>
-                </a:lnTo>
-                <a:lnTo>
-                  <a:pt x="4077" y="1127"/>
-                </a:lnTo>
-                <a:lnTo>
-                  <a:pt x="4110" y="1130"/>
-                </a:lnTo>
-                <a:lnTo>
-                  <a:pt x="4142" y="1132"/>
-                </a:lnTo>
-                <a:lnTo>
-                  <a:pt x="4175" y="1134"/>
-                </a:lnTo>
-                <a:lnTo>
-                  <a:pt x="4208" y="1137"/>
-                </a:lnTo>
-                <a:lnTo>
-                  <a:pt x="4241" y="1139"/>
-                </a:lnTo>
-                <a:lnTo>
-                  <a:pt x="4274" y="1141"/>
-                </a:lnTo>
-                <a:lnTo>
-                  <a:pt x="4307" y="1143"/>
-                </a:lnTo>
-                <a:lnTo>
-                  <a:pt x="4340" y="1145"/>
-                </a:lnTo>
-                <a:lnTo>
-                  <a:pt x="4373" y="1147"/>
-                </a:lnTo>
-                <a:lnTo>
-                  <a:pt x="4405" y="1149"/>
-                </a:lnTo>
-                <a:lnTo>
-                  <a:pt x="4438" y="1151"/>
-                </a:lnTo>
-                <a:lnTo>
-                  <a:pt x="4471" y="1153"/>
-                </a:lnTo>
-                <a:lnTo>
-                  <a:pt x="4504" y="1155"/>
-                </a:lnTo>
-                <a:lnTo>
-                  <a:pt x="4537" y="1157"/>
-                </a:lnTo>
-                <a:lnTo>
-                  <a:pt x="4570" y="1159"/>
-                </a:lnTo>
-                <a:lnTo>
-                  <a:pt x="4603" y="1160"/>
-                </a:lnTo>
-                <a:lnTo>
-                  <a:pt x="4636" y="1162"/>
-                </a:lnTo>
-                <a:lnTo>
-                  <a:pt x="4668" y="1164"/>
-                </a:lnTo>
-                <a:lnTo>
-                  <a:pt x="4701" y="1166"/>
-                </a:lnTo>
-                <a:lnTo>
-                  <a:pt x="4734" y="1167"/>
-                </a:lnTo>
-                <a:lnTo>
-                  <a:pt x="4767" y="1169"/>
-                </a:lnTo>
-                <a:lnTo>
-                  <a:pt x="4800" y="1171"/>
-                </a:lnTo>
-                <a:lnTo>
-                  <a:pt x="4833" y="1172"/>
-                </a:lnTo>
-                <a:lnTo>
-                  <a:pt x="4866" y="1174"/>
-                </a:lnTo>
-                <a:lnTo>
-                  <a:pt x="4899" y="1175"/>
-                </a:lnTo>
-                <a:lnTo>
-                  <a:pt x="4932" y="1177"/>
-                </a:lnTo>
-                <a:lnTo>
-                  <a:pt x="4964" y="1178"/>
-                </a:lnTo>
-                <a:lnTo>
-                  <a:pt x="4997" y="1180"/>
-                </a:lnTo>
-                <a:lnTo>
-                  <a:pt x="5030" y="1181"/>
-                </a:lnTo>
-                <a:lnTo>
-                  <a:pt x="5063" y="1182"/>
-                </a:lnTo>
-                <a:lnTo>
-                  <a:pt x="5096" y="1184"/>
-                </a:lnTo>
-                <a:lnTo>
-                  <a:pt x="5129" y="1185"/>
-                </a:lnTo>
-                <a:lnTo>
-                  <a:pt x="5162" y="1186"/>
-                </a:lnTo>
-                <a:lnTo>
-                  <a:pt x="5195" y="1188"/>
-                </a:lnTo>
-                <a:lnTo>
-                  <a:pt x="5227" y="1189"/>
-                </a:lnTo>
-                <a:lnTo>
-                  <a:pt x="5260" y="1190"/>
-                </a:lnTo>
-                <a:lnTo>
-                  <a:pt x="5293" y="1192"/>
-                </a:lnTo>
-                <a:lnTo>
-                  <a:pt x="5326" y="1193"/>
-                </a:lnTo>
-                <a:lnTo>
-                  <a:pt x="5359" y="1194"/>
-                </a:lnTo>
-                <a:lnTo>
-                  <a:pt x="5392" y="1195"/>
-                </a:lnTo>
-                <a:lnTo>
-                  <a:pt x="5425" y="1196"/>
-                </a:lnTo>
-                <a:lnTo>
-                  <a:pt x="5458" y="1197"/>
-                </a:lnTo>
-                <a:lnTo>
-                  <a:pt x="5490" y="1198"/>
-                </a:lnTo>
-                <a:lnTo>
-                  <a:pt x="5523" y="1199"/>
-                </a:lnTo>
-                <a:lnTo>
-                  <a:pt x="5556" y="1201"/>
-                </a:lnTo>
-                <a:lnTo>
-                  <a:pt x="5589" y="1202"/>
-                </a:lnTo>
-                <a:lnTo>
-                  <a:pt x="5622" y="1203"/>
-                </a:lnTo>
-                <a:lnTo>
-                  <a:pt x="5655" y="1204"/>
-                </a:lnTo>
-                <a:lnTo>
-                  <a:pt x="5688" y="1205"/>
-                </a:lnTo>
-                <a:lnTo>
-                  <a:pt x="5721" y="1206"/>
-                </a:lnTo>
-                <a:lnTo>
-                  <a:pt x="5753" y="1207"/>
-                </a:lnTo>
-                <a:lnTo>
-                  <a:pt x="5786" y="1207"/>
-                </a:lnTo>
-                <a:lnTo>
-                  <a:pt x="5819" y="1208"/>
-                </a:lnTo>
-                <a:lnTo>
-                  <a:pt x="5852" y="1209"/>
-                </a:lnTo>
-                <a:lnTo>
-                  <a:pt x="5885" y="1210"/>
-                </a:lnTo>
-                <a:lnTo>
-                  <a:pt x="5918" y="1211"/>
-                </a:lnTo>
-                <a:lnTo>
-                  <a:pt x="5951" y="1212"/>
-                </a:lnTo>
-                <a:lnTo>
-                  <a:pt x="5984" y="1213"/>
-                </a:lnTo>
-                <a:lnTo>
-                  <a:pt x="6016" y="1214"/>
-                </a:lnTo>
-                <a:lnTo>
-                  <a:pt x="6049" y="1214"/>
-                </a:lnTo>
-                <a:lnTo>
-                  <a:pt x="6082" y="1215"/>
-                </a:lnTo>
-                <a:lnTo>
-                  <a:pt x="6115" y="1216"/>
-                </a:lnTo>
-                <a:lnTo>
-                  <a:pt x="6148" y="1217"/>
-                </a:lnTo>
-                <a:lnTo>
-                  <a:pt x="6181" y="1217"/>
-                </a:lnTo>
-                <a:lnTo>
-                  <a:pt x="6214" y="1218"/>
-                </a:lnTo>
-                <a:lnTo>
-                  <a:pt x="6247" y="1219"/>
-                </a:lnTo>
-                <a:lnTo>
-                  <a:pt x="6279" y="1220"/>
-                </a:lnTo>
-                <a:lnTo>
-                  <a:pt x="6312" y="1220"/>
-                </a:lnTo>
-                <a:lnTo>
-                  <a:pt x="6345" y="1221"/>
-                </a:lnTo>
-                <a:lnTo>
-                  <a:pt x="6378" y="1222"/>
-                </a:lnTo>
-                <a:lnTo>
-                  <a:pt x="6411" y="1222"/>
-                </a:lnTo>
-                <a:lnTo>
-                  <a:pt x="6444" y="1223"/>
-                </a:lnTo>
-                <a:lnTo>
-                  <a:pt x="6477" y="1224"/>
-                </a:lnTo>
-                <a:lnTo>
-                  <a:pt x="6510" y="1224"/>
-                </a:lnTo>
-                <a:lnTo>
-                  <a:pt x="6542" y="1225"/>
-                </a:lnTo>
-                <a:lnTo>
-                  <a:pt x="6575" y="1225"/>
-                </a:lnTo>
-                <a:lnTo>
-                  <a:pt x="6608" y="1226"/>
-                </a:lnTo>
-                <a:lnTo>
-                  <a:pt x="6641" y="1227"/>
-                </a:lnTo>
-                <a:lnTo>
-                  <a:pt x="6674" y="1227"/>
-                </a:lnTo>
-                <a:lnTo>
-                  <a:pt x="6707" y="1228"/>
-                </a:lnTo>
-                <a:lnTo>
-                  <a:pt x="6740" y="1228"/>
-                </a:lnTo>
-                <a:lnTo>
-                  <a:pt x="6773" y="1229"/>
-                </a:lnTo>
-                <a:lnTo>
-                  <a:pt x="6805" y="1229"/>
-                </a:lnTo>
-                <a:lnTo>
-                  <a:pt x="6838" y="1230"/>
-                </a:lnTo>
-                <a:lnTo>
-                  <a:pt x="6871" y="1230"/>
-                </a:lnTo>
-                <a:lnTo>
-                  <a:pt x="6904" y="1231"/>
-                </a:lnTo>
-                <a:lnTo>
-                  <a:pt x="6937" y="1231"/>
-                </a:lnTo>
-                <a:lnTo>
-                  <a:pt x="6970" y="1232"/>
-                </a:lnTo>
-                <a:lnTo>
-                  <a:pt x="7003" y="1232"/>
-                </a:lnTo>
-                <a:lnTo>
-                  <a:pt x="7036" y="1233"/>
-                </a:lnTo>
-                <a:lnTo>
-                  <a:pt x="7068" y="1233"/>
-                </a:lnTo>
-                <a:lnTo>
-                  <a:pt x="7101" y="1234"/>
-                </a:lnTo>
-                <a:lnTo>
-                  <a:pt x="7134" y="1234"/>
-                </a:lnTo>
-                <a:lnTo>
-                  <a:pt x="7167" y="1235"/>
-                </a:lnTo>
-                <a:lnTo>
-                  <a:pt x="7200" y="1235"/>
+                  <a:pt x="13" y="780"/>
+                </a:lnTo>
+                <a:lnTo>
+                  <a:pt x="25" y="794"/>
+                </a:lnTo>
+                <a:lnTo>
+                  <a:pt x="38" y="807"/>
+                </a:lnTo>
+                <a:lnTo>
+                  <a:pt x="50" y="821"/>
+                </a:lnTo>
+                <a:lnTo>
+                  <a:pt x="63" y="834"/>
+                </a:lnTo>
+                <a:lnTo>
+                  <a:pt x="75" y="848"/>
+                </a:lnTo>
+                <a:lnTo>
+                  <a:pt x="88" y="861"/>
+                </a:lnTo>
+                <a:lnTo>
+                  <a:pt x="100" y="874"/>
+                </a:lnTo>
+                <a:lnTo>
+                  <a:pt x="113" y="887"/>
+                </a:lnTo>
+                <a:lnTo>
+                  <a:pt x="125" y="900"/>
+                </a:lnTo>
+                <a:lnTo>
+                  <a:pt x="138" y="913"/>
+                </a:lnTo>
+                <a:lnTo>
+                  <a:pt x="150" y="926"/>
+                </a:lnTo>
+                <a:lnTo>
+                  <a:pt x="163" y="939"/>
+                </a:lnTo>
+                <a:lnTo>
+                  <a:pt x="175" y="952"/>
+                </a:lnTo>
+                <a:lnTo>
+                  <a:pt x="188" y="964"/>
+                </a:lnTo>
+                <a:lnTo>
+                  <a:pt x="201" y="977"/>
+                </a:lnTo>
+                <a:lnTo>
+                  <a:pt x="213" y="989"/>
+                </a:lnTo>
+                <a:lnTo>
+                  <a:pt x="226" y="1002"/>
+                </a:lnTo>
+                <a:lnTo>
+                  <a:pt x="238" y="1014"/>
+                </a:lnTo>
+                <a:lnTo>
+                  <a:pt x="251" y="1026"/>
+                </a:lnTo>
+                <a:lnTo>
+                  <a:pt x="263" y="1039"/>
+                </a:lnTo>
+                <a:lnTo>
+                  <a:pt x="276" y="1051"/>
+                </a:lnTo>
+                <a:lnTo>
+                  <a:pt x="288" y="1063"/>
+                </a:lnTo>
+                <a:lnTo>
+                  <a:pt x="301" y="1075"/>
+                </a:lnTo>
+                <a:lnTo>
+                  <a:pt x="313" y="1086"/>
+                </a:lnTo>
+                <a:lnTo>
+                  <a:pt x="326" y="1098"/>
+                </a:lnTo>
+                <a:lnTo>
+                  <a:pt x="338" y="1110"/>
+                </a:lnTo>
+                <a:lnTo>
+                  <a:pt x="351" y="1122"/>
+                </a:lnTo>
+                <a:lnTo>
+                  <a:pt x="363" y="1133"/>
+                </a:lnTo>
+                <a:lnTo>
+                  <a:pt x="376" y="1145"/>
+                </a:lnTo>
+                <a:lnTo>
+                  <a:pt x="388" y="1156"/>
+                </a:lnTo>
+                <a:lnTo>
+                  <a:pt x="401" y="1167"/>
+                </a:lnTo>
+                <a:lnTo>
+                  <a:pt x="414" y="1178"/>
+                </a:lnTo>
+                <a:lnTo>
+                  <a:pt x="426" y="1190"/>
+                </a:lnTo>
+                <a:lnTo>
+                  <a:pt x="439" y="1201"/>
+                </a:lnTo>
+                <a:lnTo>
+                  <a:pt x="451" y="1212"/>
+                </a:lnTo>
+                <a:lnTo>
+                  <a:pt x="464" y="1223"/>
+                </a:lnTo>
+                <a:lnTo>
+                  <a:pt x="476" y="1233"/>
+                </a:lnTo>
+                <a:lnTo>
+                  <a:pt x="489" y="1244"/>
+                </a:lnTo>
+                <a:lnTo>
+                  <a:pt x="501" y="1255"/>
+                </a:lnTo>
+                <a:lnTo>
+                  <a:pt x="514" y="1265"/>
+                </a:lnTo>
+                <a:lnTo>
+                  <a:pt x="526" y="1276"/>
+                </a:lnTo>
+                <a:lnTo>
+                  <a:pt x="539" y="1286"/>
+                </a:lnTo>
+                <a:lnTo>
+                  <a:pt x="551" y="1297"/>
+                </a:lnTo>
+                <a:lnTo>
+                  <a:pt x="564" y="1307"/>
+                </a:lnTo>
+                <a:lnTo>
+                  <a:pt x="576" y="1317"/>
+                </a:lnTo>
+                <a:lnTo>
+                  <a:pt x="589" y="1327"/>
+                </a:lnTo>
+                <a:lnTo>
+                  <a:pt x="602" y="1337"/>
+                </a:lnTo>
+                <a:lnTo>
+                  <a:pt x="614" y="1347"/>
+                </a:lnTo>
+                <a:lnTo>
+                  <a:pt x="627" y="1357"/>
+                </a:lnTo>
+                <a:lnTo>
+                  <a:pt x="639" y="1367"/>
+                </a:lnTo>
+                <a:lnTo>
+                  <a:pt x="652" y="1377"/>
+                </a:lnTo>
+                <a:lnTo>
+                  <a:pt x="664" y="1387"/>
+                </a:lnTo>
+                <a:lnTo>
+                  <a:pt x="677" y="1396"/>
+                </a:lnTo>
+                <a:lnTo>
+                  <a:pt x="689" y="1406"/>
+                </a:lnTo>
+                <a:lnTo>
+                  <a:pt x="702" y="1415"/>
+                </a:lnTo>
+                <a:lnTo>
+                  <a:pt x="714" y="1424"/>
+                </a:lnTo>
+                <a:lnTo>
+                  <a:pt x="727" y="1434"/>
+                </a:lnTo>
+                <a:lnTo>
+                  <a:pt x="739" y="1443"/>
+                </a:lnTo>
+                <a:lnTo>
+                  <a:pt x="752" y="1452"/>
+                </a:lnTo>
+                <a:lnTo>
+                  <a:pt x="764" y="1461"/>
+                </a:lnTo>
+                <a:lnTo>
+                  <a:pt x="777" y="1470"/>
+                </a:lnTo>
+                <a:lnTo>
+                  <a:pt x="789" y="1479"/>
+                </a:lnTo>
+                <a:lnTo>
+                  <a:pt x="802" y="1488"/>
+                </a:lnTo>
+                <a:lnTo>
+                  <a:pt x="815" y="1496"/>
+                </a:lnTo>
+                <a:lnTo>
+                  <a:pt x="827" y="1505"/>
+                </a:lnTo>
+                <a:lnTo>
+                  <a:pt x="840" y="1513"/>
+                </a:lnTo>
+                <a:lnTo>
+                  <a:pt x="852" y="1522"/>
+                </a:lnTo>
+                <a:lnTo>
+                  <a:pt x="865" y="1530"/>
+                </a:lnTo>
+                <a:lnTo>
+                  <a:pt x="877" y="1539"/>
+                </a:lnTo>
+                <a:lnTo>
+                  <a:pt x="890" y="1547"/>
+                </a:lnTo>
+                <a:lnTo>
+                  <a:pt x="902" y="1555"/>
+                </a:lnTo>
+                <a:lnTo>
+                  <a:pt x="915" y="1563"/>
+                </a:lnTo>
+                <a:lnTo>
+                  <a:pt x="927" y="1571"/>
+                </a:lnTo>
+                <a:lnTo>
+                  <a:pt x="940" y="1579"/>
+                </a:lnTo>
+                <a:lnTo>
+                  <a:pt x="952" y="1587"/>
+                </a:lnTo>
+                <a:lnTo>
+                  <a:pt x="965" y="1595"/>
+                </a:lnTo>
+                <a:lnTo>
+                  <a:pt x="977" y="1602"/>
+                </a:lnTo>
+                <a:lnTo>
+                  <a:pt x="990" y="1610"/>
+                </a:lnTo>
+                <a:lnTo>
+                  <a:pt x="1003" y="1617"/>
+                </a:lnTo>
+                <a:lnTo>
+                  <a:pt x="1015" y="1625"/>
+                </a:lnTo>
+                <a:lnTo>
+                  <a:pt x="1028" y="1632"/>
+                </a:lnTo>
+                <a:lnTo>
+                  <a:pt x="1040" y="1640"/>
+                </a:lnTo>
+                <a:lnTo>
+                  <a:pt x="1053" y="1647"/>
+                </a:lnTo>
+                <a:lnTo>
+                  <a:pt x="1065" y="1654"/>
+                </a:lnTo>
+                <a:lnTo>
+                  <a:pt x="1078" y="1661"/>
+                </a:lnTo>
+                <a:lnTo>
+                  <a:pt x="1090" y="1668"/>
+                </a:lnTo>
+                <a:lnTo>
+                  <a:pt x="1103" y="1675"/>
+                </a:lnTo>
+                <a:lnTo>
+                  <a:pt x="1115" y="1682"/>
+                </a:lnTo>
+                <a:lnTo>
+                  <a:pt x="1128" y="1688"/>
+                </a:lnTo>
+                <a:lnTo>
+                  <a:pt x="1140" y="1695"/>
+                </a:lnTo>
+                <a:lnTo>
+                  <a:pt x="1153" y="1702"/>
+                </a:lnTo>
+                <a:lnTo>
+                  <a:pt x="1165" y="1708"/>
+                </a:lnTo>
+                <a:lnTo>
+                  <a:pt x="1178" y="1715"/>
+                </a:lnTo>
+                <a:lnTo>
+                  <a:pt x="1190" y="1721"/>
+                </a:lnTo>
+                <a:lnTo>
+                  <a:pt x="1203" y="1727"/>
+                </a:lnTo>
+                <a:lnTo>
+                  <a:pt x="1216" y="1733"/>
+                </a:lnTo>
+                <a:lnTo>
+                  <a:pt x="1228" y="1740"/>
+                </a:lnTo>
+                <a:lnTo>
+                  <a:pt x="1241" y="1746"/>
+                </a:lnTo>
+                <a:lnTo>
+                  <a:pt x="1253" y="1752"/>
+                </a:lnTo>
+                <a:lnTo>
+                  <a:pt x="1266" y="1757"/>
+                </a:lnTo>
+                <a:lnTo>
+                  <a:pt x="1278" y="1763"/>
+                </a:lnTo>
+                <a:lnTo>
+                  <a:pt x="1291" y="1769"/>
+                </a:lnTo>
+                <a:lnTo>
+                  <a:pt x="1303" y="1775"/>
+                </a:lnTo>
+                <a:lnTo>
+                  <a:pt x="1316" y="1780"/>
+                </a:lnTo>
+                <a:lnTo>
+                  <a:pt x="1328" y="1786"/>
+                </a:lnTo>
+                <a:lnTo>
+                  <a:pt x="1341" y="1791"/>
+                </a:lnTo>
+                <a:lnTo>
+                  <a:pt x="1353" y="1796"/>
+                </a:lnTo>
+                <a:lnTo>
+                  <a:pt x="1366" y="1802"/>
+                </a:lnTo>
+                <a:lnTo>
+                  <a:pt x="1378" y="1807"/>
+                </a:lnTo>
+                <a:lnTo>
+                  <a:pt x="1391" y="1812"/>
+                </a:lnTo>
+                <a:lnTo>
+                  <a:pt x="1404" y="1817"/>
+                </a:lnTo>
+                <a:lnTo>
+                  <a:pt x="1416" y="1822"/>
+                </a:lnTo>
+                <a:lnTo>
+                  <a:pt x="1429" y="1827"/>
+                </a:lnTo>
+                <a:lnTo>
+                  <a:pt x="1441" y="1831"/>
+                </a:lnTo>
+                <a:lnTo>
+                  <a:pt x="1454" y="1836"/>
+                </a:lnTo>
+                <a:lnTo>
+                  <a:pt x="1466" y="1841"/>
+                </a:lnTo>
+                <a:lnTo>
+                  <a:pt x="1479" y="1845"/>
+                </a:lnTo>
+                <a:lnTo>
+                  <a:pt x="1491" y="1850"/>
+                </a:lnTo>
+                <a:lnTo>
+                  <a:pt x="1504" y="1854"/>
+                </a:lnTo>
+                <a:lnTo>
+                  <a:pt x="1516" y="1858"/>
+                </a:lnTo>
+                <a:lnTo>
+                  <a:pt x="1529" y="1863"/>
+                </a:lnTo>
+                <a:lnTo>
+                  <a:pt x="1541" y="1867"/>
+                </a:lnTo>
+                <a:lnTo>
+                  <a:pt x="1554" y="1871"/>
+                </a:lnTo>
+                <a:lnTo>
+                  <a:pt x="1566" y="1875"/>
+                </a:lnTo>
+                <a:lnTo>
+                  <a:pt x="1579" y="1879"/>
+                </a:lnTo>
+                <a:lnTo>
+                  <a:pt x="1591" y="1883"/>
+                </a:lnTo>
+                <a:lnTo>
+                  <a:pt x="1604" y="1886"/>
+                </a:lnTo>
+                <a:lnTo>
+                  <a:pt x="1617" y="1890"/>
+                </a:lnTo>
+                <a:lnTo>
+                  <a:pt x="1629" y="1894"/>
+                </a:lnTo>
+                <a:lnTo>
+                  <a:pt x="1642" y="1897"/>
+                </a:lnTo>
+                <a:lnTo>
+                  <a:pt x="1654" y="1901"/>
+                </a:lnTo>
+                <a:lnTo>
+                  <a:pt x="1667" y="1904"/>
+                </a:lnTo>
+                <a:lnTo>
+                  <a:pt x="1679" y="1907"/>
+                </a:lnTo>
+                <a:lnTo>
+                  <a:pt x="1692" y="1910"/>
+                </a:lnTo>
+                <a:lnTo>
+                  <a:pt x="1704" y="1913"/>
+                </a:lnTo>
+                <a:lnTo>
+                  <a:pt x="1717" y="1916"/>
+                </a:lnTo>
+                <a:lnTo>
+                  <a:pt x="1729" y="1919"/>
+                </a:lnTo>
+                <a:lnTo>
+                  <a:pt x="1742" y="1922"/>
+                </a:lnTo>
+                <a:lnTo>
+                  <a:pt x="1754" y="1925"/>
+                </a:lnTo>
+                <a:lnTo>
+                  <a:pt x="1767" y="1928"/>
+                </a:lnTo>
+                <a:lnTo>
+                  <a:pt x="1779" y="1931"/>
+                </a:lnTo>
+                <a:lnTo>
+                  <a:pt x="1792" y="1933"/>
+                </a:lnTo>
+                <a:lnTo>
+                  <a:pt x="1805" y="1936"/>
+                </a:lnTo>
+                <a:lnTo>
+                  <a:pt x="1817" y="1938"/>
+                </a:lnTo>
+                <a:lnTo>
+                  <a:pt x="1830" y="1940"/>
+                </a:lnTo>
+                <a:lnTo>
+                  <a:pt x="1842" y="1943"/>
+                </a:lnTo>
+                <a:lnTo>
+                  <a:pt x="1855" y="1945"/>
+                </a:lnTo>
+                <a:lnTo>
+                  <a:pt x="1867" y="1947"/>
+                </a:lnTo>
+                <a:lnTo>
+                  <a:pt x="1880" y="1949"/>
+                </a:lnTo>
+                <a:lnTo>
+                  <a:pt x="1892" y="1951"/>
+                </a:lnTo>
+                <a:lnTo>
+                  <a:pt x="1905" y="1953"/>
+                </a:lnTo>
+                <a:lnTo>
+                  <a:pt x="1917" y="1954"/>
+                </a:lnTo>
+                <a:lnTo>
+                  <a:pt x="1930" y="1956"/>
+                </a:lnTo>
+                <a:lnTo>
+                  <a:pt x="1942" y="1958"/>
+                </a:lnTo>
+                <a:lnTo>
+                  <a:pt x="1955" y="1959"/>
+                </a:lnTo>
+                <a:lnTo>
+                  <a:pt x="1967" y="1961"/>
+                </a:lnTo>
+                <a:lnTo>
+                  <a:pt x="1980" y="1962"/>
+                </a:lnTo>
+                <a:lnTo>
+                  <a:pt x="1992" y="1963"/>
+                </a:lnTo>
+                <a:lnTo>
+                  <a:pt x="2005" y="1965"/>
+                </a:lnTo>
+                <a:lnTo>
+                  <a:pt x="2018" y="1966"/>
+                </a:lnTo>
+                <a:lnTo>
+                  <a:pt x="2030" y="1967"/>
+                </a:lnTo>
+                <a:lnTo>
+                  <a:pt x="2043" y="1968"/>
+                </a:lnTo>
+                <a:lnTo>
+                  <a:pt x="2055" y="1969"/>
+                </a:lnTo>
+                <a:lnTo>
+                  <a:pt x="2068" y="1970"/>
+                </a:lnTo>
+                <a:lnTo>
+                  <a:pt x="2080" y="1970"/>
+                </a:lnTo>
+                <a:lnTo>
+                  <a:pt x="2093" y="1971"/>
+                </a:lnTo>
+                <a:lnTo>
+                  <a:pt x="2105" y="1972"/>
+                </a:lnTo>
+                <a:lnTo>
+                  <a:pt x="2118" y="1972"/>
+                </a:lnTo>
+                <a:lnTo>
+                  <a:pt x="2130" y="1973"/>
+                </a:lnTo>
+                <a:lnTo>
+                  <a:pt x="2143" y="1973"/>
+                </a:lnTo>
+                <a:lnTo>
+                  <a:pt x="2155" y="1973"/>
+                </a:lnTo>
+                <a:lnTo>
+                  <a:pt x="2168" y="1974"/>
+                </a:lnTo>
+                <a:lnTo>
+                  <a:pt x="2180" y="1974"/>
+                </a:lnTo>
+                <a:lnTo>
+                  <a:pt x="2193" y="1974"/>
+                </a:lnTo>
+                <a:lnTo>
+                  <a:pt x="2206" y="1974"/>
+                </a:lnTo>
+                <a:lnTo>
+                  <a:pt x="2218" y="1974"/>
+                </a:lnTo>
+                <a:lnTo>
+                  <a:pt x="2231" y="1973"/>
+                </a:lnTo>
+                <a:lnTo>
+                  <a:pt x="2243" y="1973"/>
+                </a:lnTo>
+                <a:lnTo>
+                  <a:pt x="2256" y="1973"/>
+                </a:lnTo>
+                <a:lnTo>
+                  <a:pt x="2268" y="1972"/>
+                </a:lnTo>
+                <a:lnTo>
+                  <a:pt x="2281" y="1972"/>
+                </a:lnTo>
+                <a:lnTo>
+                  <a:pt x="2293" y="1971"/>
+                </a:lnTo>
+                <a:lnTo>
+                  <a:pt x="2306" y="1971"/>
+                </a:lnTo>
+                <a:lnTo>
+                  <a:pt x="2318" y="1970"/>
+                </a:lnTo>
+                <a:lnTo>
+                  <a:pt x="2331" y="1969"/>
+                </a:lnTo>
+                <a:lnTo>
+                  <a:pt x="2343" y="1968"/>
+                </a:lnTo>
+                <a:lnTo>
+                  <a:pt x="2356" y="1967"/>
+                </a:lnTo>
+                <a:lnTo>
+                  <a:pt x="2368" y="1966"/>
+                </a:lnTo>
+                <a:lnTo>
+                  <a:pt x="2381" y="1965"/>
+                </a:lnTo>
+                <a:lnTo>
+                  <a:pt x="2393" y="1964"/>
+                </a:lnTo>
+                <a:lnTo>
+                  <a:pt x="2406" y="1962"/>
+                </a:lnTo>
+                <a:lnTo>
+                  <a:pt x="2419" y="1961"/>
+                </a:lnTo>
+                <a:lnTo>
+                  <a:pt x="2431" y="1960"/>
+                </a:lnTo>
+                <a:lnTo>
+                  <a:pt x="2444" y="1958"/>
+                </a:lnTo>
+                <a:lnTo>
+                  <a:pt x="2456" y="1956"/>
+                </a:lnTo>
+                <a:lnTo>
+                  <a:pt x="2469" y="1955"/>
+                </a:lnTo>
+                <a:lnTo>
+                  <a:pt x="2481" y="1953"/>
+                </a:lnTo>
+                <a:lnTo>
+                  <a:pt x="2494" y="1951"/>
+                </a:lnTo>
+                <a:lnTo>
+                  <a:pt x="2506" y="1949"/>
+                </a:lnTo>
+                <a:lnTo>
+                  <a:pt x="2519" y="1947"/>
+                </a:lnTo>
+                <a:lnTo>
+                  <a:pt x="2531" y="1945"/>
+                </a:lnTo>
+                <a:lnTo>
+                  <a:pt x="2544" y="1943"/>
+                </a:lnTo>
+                <a:lnTo>
+                  <a:pt x="2556" y="1941"/>
+                </a:lnTo>
+                <a:lnTo>
+                  <a:pt x="2569" y="1938"/>
+                </a:lnTo>
+                <a:lnTo>
+                  <a:pt x="2581" y="1936"/>
+                </a:lnTo>
+                <a:lnTo>
+                  <a:pt x="2594" y="1934"/>
+                </a:lnTo>
+                <a:lnTo>
+                  <a:pt x="2607" y="1931"/>
+                </a:lnTo>
+                <a:lnTo>
+                  <a:pt x="2619" y="1928"/>
+                </a:lnTo>
+                <a:lnTo>
+                  <a:pt x="2632" y="1926"/>
+                </a:lnTo>
+                <a:lnTo>
+                  <a:pt x="2644" y="1923"/>
+                </a:lnTo>
+                <a:lnTo>
+                  <a:pt x="2657" y="1920"/>
+                </a:lnTo>
+                <a:lnTo>
+                  <a:pt x="2669" y="1917"/>
+                </a:lnTo>
+                <a:lnTo>
+                  <a:pt x="2682" y="1914"/>
+                </a:lnTo>
+                <a:lnTo>
+                  <a:pt x="2694" y="1911"/>
+                </a:lnTo>
+                <a:lnTo>
+                  <a:pt x="2707" y="1908"/>
+                </a:lnTo>
+                <a:lnTo>
+                  <a:pt x="2719" y="1905"/>
+                </a:lnTo>
+                <a:lnTo>
+                  <a:pt x="2732" y="1901"/>
+                </a:lnTo>
+                <a:lnTo>
+                  <a:pt x="2744" y="1898"/>
+                </a:lnTo>
+                <a:lnTo>
+                  <a:pt x="2757" y="1894"/>
+                </a:lnTo>
+                <a:lnTo>
+                  <a:pt x="2769" y="1891"/>
+                </a:lnTo>
+                <a:lnTo>
+                  <a:pt x="2782" y="1887"/>
+                </a:lnTo>
+                <a:lnTo>
+                  <a:pt x="2794" y="1883"/>
+                </a:lnTo>
+                <a:lnTo>
+                  <a:pt x="2807" y="1880"/>
+                </a:lnTo>
+                <a:lnTo>
+                  <a:pt x="2820" y="1876"/>
+                </a:lnTo>
+                <a:lnTo>
+                  <a:pt x="2832" y="1872"/>
+                </a:lnTo>
+                <a:lnTo>
+                  <a:pt x="2845" y="1868"/>
+                </a:lnTo>
+                <a:lnTo>
+                  <a:pt x="2857" y="1864"/>
+                </a:lnTo>
+                <a:lnTo>
+                  <a:pt x="2870" y="1859"/>
+                </a:lnTo>
+                <a:lnTo>
+                  <a:pt x="2882" y="1855"/>
+                </a:lnTo>
+                <a:lnTo>
+                  <a:pt x="2895" y="1851"/>
+                </a:lnTo>
+                <a:lnTo>
+                  <a:pt x="2907" y="1846"/>
+                </a:lnTo>
+                <a:lnTo>
+                  <a:pt x="2920" y="1842"/>
+                </a:lnTo>
+                <a:lnTo>
+                  <a:pt x="2932" y="1837"/>
+                </a:lnTo>
+                <a:lnTo>
+                  <a:pt x="2945" y="1832"/>
+                </a:lnTo>
+                <a:lnTo>
+                  <a:pt x="2957" y="1828"/>
+                </a:lnTo>
+                <a:lnTo>
+                  <a:pt x="2970" y="1823"/>
+                </a:lnTo>
+                <a:lnTo>
+                  <a:pt x="2982" y="1818"/>
+                </a:lnTo>
+                <a:lnTo>
+                  <a:pt x="2995" y="1813"/>
+                </a:lnTo>
+                <a:lnTo>
+                  <a:pt x="3008" y="1808"/>
+                </a:lnTo>
+                <a:lnTo>
+                  <a:pt x="3020" y="1803"/>
+                </a:lnTo>
+                <a:lnTo>
+                  <a:pt x="3033" y="1797"/>
+                </a:lnTo>
+                <a:lnTo>
+                  <a:pt x="3045" y="1792"/>
+                </a:lnTo>
+                <a:lnTo>
+                  <a:pt x="3058" y="1787"/>
+                </a:lnTo>
+                <a:lnTo>
+                  <a:pt x="3070" y="1781"/>
+                </a:lnTo>
+                <a:lnTo>
+                  <a:pt x="3083" y="1776"/>
+                </a:lnTo>
+                <a:lnTo>
+                  <a:pt x="3095" y="1770"/>
+                </a:lnTo>
+                <a:lnTo>
+                  <a:pt x="3108" y="1764"/>
+                </a:lnTo>
+                <a:lnTo>
+                  <a:pt x="3120" y="1759"/>
+                </a:lnTo>
+                <a:lnTo>
+                  <a:pt x="3133" y="1753"/>
+                </a:lnTo>
+                <a:lnTo>
+                  <a:pt x="3145" y="1747"/>
+                </a:lnTo>
+                <a:lnTo>
+                  <a:pt x="3158" y="1741"/>
+                </a:lnTo>
+                <a:lnTo>
+                  <a:pt x="3170" y="1735"/>
+                </a:lnTo>
+                <a:lnTo>
+                  <a:pt x="3183" y="1729"/>
+                </a:lnTo>
+                <a:lnTo>
+                  <a:pt x="3195" y="1722"/>
+                </a:lnTo>
+                <a:lnTo>
+                  <a:pt x="3208" y="1716"/>
+                </a:lnTo>
+                <a:lnTo>
+                  <a:pt x="3221" y="1710"/>
+                </a:lnTo>
+                <a:lnTo>
+                  <a:pt x="3233" y="1703"/>
+                </a:lnTo>
+                <a:lnTo>
+                  <a:pt x="3246" y="1697"/>
+                </a:lnTo>
+                <a:lnTo>
+                  <a:pt x="3258" y="1690"/>
+                </a:lnTo>
+                <a:lnTo>
+                  <a:pt x="3271" y="1683"/>
+                </a:lnTo>
+                <a:lnTo>
+                  <a:pt x="3283" y="1676"/>
+                </a:lnTo>
+                <a:lnTo>
+                  <a:pt x="3296" y="1669"/>
+                </a:lnTo>
+                <a:lnTo>
+                  <a:pt x="3308" y="1663"/>
+                </a:lnTo>
+                <a:lnTo>
+                  <a:pt x="3321" y="1655"/>
+                </a:lnTo>
+                <a:lnTo>
+                  <a:pt x="3333" y="1648"/>
+                </a:lnTo>
+                <a:lnTo>
+                  <a:pt x="3346" y="1641"/>
+                </a:lnTo>
+                <a:lnTo>
+                  <a:pt x="3358" y="1634"/>
+                </a:lnTo>
+                <a:lnTo>
+                  <a:pt x="3371" y="1627"/>
+                </a:lnTo>
+                <a:lnTo>
+                  <a:pt x="3383" y="1619"/>
+                </a:lnTo>
+                <a:lnTo>
+                  <a:pt x="3396" y="1612"/>
+                </a:lnTo>
+                <a:lnTo>
+                  <a:pt x="3409" y="1604"/>
+                </a:lnTo>
+                <a:lnTo>
+                  <a:pt x="3421" y="1596"/>
+                </a:lnTo>
+                <a:lnTo>
+                  <a:pt x="3434" y="1589"/>
+                </a:lnTo>
+                <a:lnTo>
+                  <a:pt x="3446" y="1581"/>
+                </a:lnTo>
+                <a:lnTo>
+                  <a:pt x="3459" y="1573"/>
+                </a:lnTo>
+                <a:lnTo>
+                  <a:pt x="3471" y="1565"/>
+                </a:lnTo>
+                <a:lnTo>
+                  <a:pt x="3484" y="1557"/>
+                </a:lnTo>
+                <a:lnTo>
+                  <a:pt x="3496" y="1549"/>
+                </a:lnTo>
+                <a:lnTo>
+                  <a:pt x="3509" y="1540"/>
+                </a:lnTo>
+                <a:lnTo>
+                  <a:pt x="3521" y="1532"/>
+                </a:lnTo>
+                <a:lnTo>
+                  <a:pt x="3534" y="1524"/>
+                </a:lnTo>
+                <a:lnTo>
+                  <a:pt x="3546" y="1515"/>
+                </a:lnTo>
+                <a:lnTo>
+                  <a:pt x="3559" y="1507"/>
+                </a:lnTo>
+                <a:lnTo>
+                  <a:pt x="3571" y="1498"/>
+                </a:lnTo>
+                <a:lnTo>
+                  <a:pt x="3584" y="1489"/>
+                </a:lnTo>
+                <a:lnTo>
+                  <a:pt x="3596" y="1481"/>
+                </a:lnTo>
+                <a:lnTo>
+                  <a:pt x="3609" y="1472"/>
+                </a:lnTo>
+                <a:lnTo>
+                  <a:pt x="3622" y="1463"/>
+                </a:lnTo>
+                <a:lnTo>
+                  <a:pt x="3634" y="1454"/>
+                </a:lnTo>
+                <a:lnTo>
+                  <a:pt x="3647" y="1445"/>
+                </a:lnTo>
+                <a:lnTo>
+                  <a:pt x="3659" y="1436"/>
+                </a:lnTo>
+                <a:lnTo>
+                  <a:pt x="3672" y="1426"/>
+                </a:lnTo>
+                <a:lnTo>
+                  <a:pt x="3684" y="1417"/>
+                </a:lnTo>
+                <a:lnTo>
+                  <a:pt x="3697" y="1408"/>
+                </a:lnTo>
+                <a:lnTo>
+                  <a:pt x="3709" y="1398"/>
+                </a:lnTo>
+                <a:lnTo>
+                  <a:pt x="3722" y="1389"/>
+                </a:lnTo>
+                <a:lnTo>
+                  <a:pt x="3734" y="1379"/>
+                </a:lnTo>
+                <a:lnTo>
+                  <a:pt x="3747" y="1369"/>
+                </a:lnTo>
+                <a:lnTo>
+                  <a:pt x="3759" y="1359"/>
+                </a:lnTo>
+                <a:lnTo>
+                  <a:pt x="3772" y="1350"/>
+                </a:lnTo>
+                <a:lnTo>
+                  <a:pt x="3784" y="1340"/>
+                </a:lnTo>
+                <a:lnTo>
+                  <a:pt x="3797" y="1330"/>
+                </a:lnTo>
+                <a:lnTo>
+                  <a:pt x="3810" y="1319"/>
+                </a:lnTo>
+                <a:lnTo>
+                  <a:pt x="3822" y="1309"/>
+                </a:lnTo>
+                <a:lnTo>
+                  <a:pt x="3835" y="1299"/>
+                </a:lnTo>
+                <a:lnTo>
+                  <a:pt x="3847" y="1289"/>
+                </a:lnTo>
+                <a:lnTo>
+                  <a:pt x="3860" y="1278"/>
+                </a:lnTo>
+                <a:lnTo>
+                  <a:pt x="3872" y="1268"/>
+                </a:lnTo>
+                <a:lnTo>
+                  <a:pt x="3885" y="1257"/>
+                </a:lnTo>
+                <a:lnTo>
+                  <a:pt x="3897" y="1246"/>
+                </a:lnTo>
+                <a:lnTo>
+                  <a:pt x="3910" y="1236"/>
+                </a:lnTo>
+                <a:lnTo>
+                  <a:pt x="3922" y="1225"/>
+                </a:lnTo>
+                <a:lnTo>
+                  <a:pt x="3935" y="1214"/>
+                </a:lnTo>
+                <a:lnTo>
+                  <a:pt x="3947" y="1203"/>
+                </a:lnTo>
+                <a:lnTo>
+                  <a:pt x="3960" y="1192"/>
+                </a:lnTo>
+                <a:lnTo>
+                  <a:pt x="3972" y="1181"/>
+                </a:lnTo>
+                <a:lnTo>
+                  <a:pt x="3985" y="1170"/>
+                </a:lnTo>
+                <a:lnTo>
+                  <a:pt x="3997" y="1158"/>
+                </a:lnTo>
+                <a:lnTo>
+                  <a:pt x="4010" y="1147"/>
+                </a:lnTo>
+                <a:lnTo>
+                  <a:pt x="4023" y="1136"/>
+                </a:lnTo>
+                <a:lnTo>
+                  <a:pt x="4035" y="1124"/>
+                </a:lnTo>
+                <a:lnTo>
+                  <a:pt x="4048" y="1112"/>
+                </a:lnTo>
+                <a:lnTo>
+                  <a:pt x="4060" y="1101"/>
+                </a:lnTo>
+                <a:lnTo>
+                  <a:pt x="4073" y="1089"/>
+                </a:lnTo>
+                <a:lnTo>
+                  <a:pt x="4085" y="1077"/>
+                </a:lnTo>
+                <a:lnTo>
+                  <a:pt x="4098" y="1065"/>
+                </a:lnTo>
+                <a:lnTo>
+                  <a:pt x="4110" y="1053"/>
+                </a:lnTo>
+                <a:lnTo>
+                  <a:pt x="4123" y="1041"/>
+                </a:lnTo>
+                <a:lnTo>
+                  <a:pt x="4135" y="1029"/>
+                </a:lnTo>
+                <a:lnTo>
+                  <a:pt x="4148" y="1017"/>
+                </a:lnTo>
+                <a:lnTo>
+                  <a:pt x="4160" y="1004"/>
+                </a:lnTo>
+                <a:lnTo>
+                  <a:pt x="4173" y="992"/>
+                </a:lnTo>
+                <a:lnTo>
+                  <a:pt x="4185" y="980"/>
+                </a:lnTo>
+                <a:lnTo>
+                  <a:pt x="4198" y="967"/>
+                </a:lnTo>
+                <a:lnTo>
+                  <a:pt x="4211" y="954"/>
+                </a:lnTo>
+                <a:lnTo>
+                  <a:pt x="4223" y="942"/>
+                </a:lnTo>
+                <a:lnTo>
+                  <a:pt x="4236" y="929"/>
+                </a:lnTo>
+                <a:lnTo>
+                  <a:pt x="4248" y="916"/>
+                </a:lnTo>
+                <a:lnTo>
+                  <a:pt x="4261" y="903"/>
+                </a:lnTo>
+                <a:lnTo>
+                  <a:pt x="4273" y="890"/>
+                </a:lnTo>
+                <a:lnTo>
+                  <a:pt x="4286" y="877"/>
+                </a:lnTo>
+                <a:lnTo>
+                  <a:pt x="4298" y="864"/>
+                </a:lnTo>
+                <a:lnTo>
+                  <a:pt x="4311" y="850"/>
+                </a:lnTo>
+                <a:lnTo>
+                  <a:pt x="4323" y="837"/>
+                </a:lnTo>
+                <a:lnTo>
+                  <a:pt x="4336" y="824"/>
+                </a:lnTo>
+                <a:lnTo>
+                  <a:pt x="4348" y="810"/>
+                </a:lnTo>
+                <a:lnTo>
+                  <a:pt x="4361" y="797"/>
+                </a:lnTo>
+                <a:lnTo>
+                  <a:pt x="4373" y="783"/>
+                </a:lnTo>
+                <a:lnTo>
+                  <a:pt x="4386" y="769"/>
+                </a:lnTo>
+                <a:lnTo>
+                  <a:pt x="4398" y="755"/>
+                </a:lnTo>
+                <a:lnTo>
+                  <a:pt x="4411" y="742"/>
+                </a:lnTo>
+                <a:lnTo>
+                  <a:pt x="4424" y="728"/>
+                </a:lnTo>
+                <a:lnTo>
+                  <a:pt x="4436" y="713"/>
+                </a:lnTo>
+                <a:lnTo>
+                  <a:pt x="4449" y="699"/>
+                </a:lnTo>
+                <a:lnTo>
+                  <a:pt x="4461" y="685"/>
+                </a:lnTo>
+                <a:lnTo>
+                  <a:pt x="4474" y="671"/>
+                </a:lnTo>
+                <a:lnTo>
+                  <a:pt x="4486" y="656"/>
+                </a:lnTo>
+                <a:lnTo>
+                  <a:pt x="4499" y="642"/>
+                </a:lnTo>
+                <a:lnTo>
+                  <a:pt x="4511" y="628"/>
+                </a:lnTo>
+                <a:lnTo>
+                  <a:pt x="4524" y="613"/>
+                </a:lnTo>
+                <a:lnTo>
+                  <a:pt x="4536" y="598"/>
+                </a:lnTo>
+                <a:lnTo>
+                  <a:pt x="4549" y="583"/>
+                </a:lnTo>
+                <a:lnTo>
+                  <a:pt x="4561" y="569"/>
+                </a:lnTo>
+                <a:lnTo>
+                  <a:pt x="4574" y="554"/>
+                </a:lnTo>
+                <a:lnTo>
+                  <a:pt x="4586" y="539"/>
+                </a:lnTo>
+                <a:lnTo>
+                  <a:pt x="4599" y="524"/>
+                </a:lnTo>
+                <a:lnTo>
+                  <a:pt x="4612" y="509"/>
+                </a:lnTo>
+                <a:lnTo>
+                  <a:pt x="4624" y="493"/>
+                </a:lnTo>
+                <a:lnTo>
+                  <a:pt x="4637" y="478"/>
+                </a:lnTo>
+                <a:lnTo>
+                  <a:pt x="4649" y="463"/>
+                </a:lnTo>
+                <a:lnTo>
+                  <a:pt x="4662" y="447"/>
+                </a:lnTo>
+                <a:lnTo>
+                  <a:pt x="4674" y="432"/>
+                </a:lnTo>
+                <a:lnTo>
+                  <a:pt x="4687" y="416"/>
+                </a:lnTo>
+                <a:lnTo>
+                  <a:pt x="4699" y="400"/>
+                </a:lnTo>
+                <a:lnTo>
+                  <a:pt x="4712" y="384"/>
+                </a:lnTo>
+                <a:lnTo>
+                  <a:pt x="4724" y="369"/>
+                </a:lnTo>
+                <a:lnTo>
+                  <a:pt x="4737" y="353"/>
+                </a:lnTo>
+                <a:lnTo>
+                  <a:pt x="4749" y="337"/>
+                </a:lnTo>
+                <a:lnTo>
+                  <a:pt x="4762" y="321"/>
+                </a:lnTo>
+                <a:lnTo>
+                  <a:pt x="4774" y="304"/>
+                </a:lnTo>
+                <a:lnTo>
+                  <a:pt x="4787" y="288"/>
+                </a:lnTo>
+                <a:lnTo>
+                  <a:pt x="4799" y="272"/>
+                </a:lnTo>
+                <a:lnTo>
+                  <a:pt x="4812" y="255"/>
+                </a:lnTo>
+                <a:lnTo>
+                  <a:pt x="4825" y="239"/>
+                </a:lnTo>
+                <a:lnTo>
+                  <a:pt x="4837" y="222"/>
+                </a:lnTo>
+                <a:lnTo>
+                  <a:pt x="4850" y="206"/>
+                </a:lnTo>
+                <a:lnTo>
+                  <a:pt x="4862" y="189"/>
+                </a:lnTo>
+                <a:lnTo>
+                  <a:pt x="4875" y="172"/>
+                </a:lnTo>
+                <a:lnTo>
+                  <a:pt x="4887" y="155"/>
+                </a:lnTo>
+                <a:lnTo>
+                  <a:pt x="4900" y="138"/>
+                </a:lnTo>
+                <a:lnTo>
+                  <a:pt x="4912" y="121"/>
+                </a:lnTo>
+                <a:lnTo>
+                  <a:pt x="4925" y="104"/>
+                </a:lnTo>
+                <a:lnTo>
+                  <a:pt x="4937" y="87"/>
+                </a:lnTo>
+                <a:lnTo>
+                  <a:pt x="4950" y="70"/>
+                </a:lnTo>
+                <a:lnTo>
+                  <a:pt x="4962" y="52"/>
+                </a:lnTo>
+                <a:lnTo>
+                  <a:pt x="4975" y="35"/>
+                </a:lnTo>
+                <a:lnTo>
+                  <a:pt x="4987" y="17"/>
+                </a:lnTo>
+                <a:lnTo>
+                  <a:pt x="5000" y="0"/>
                 </a:lnTo>
               </a:path>
             </a:pathLst>
           </a:custGeom>
           <a:noFill/>
-          <a:ln w="31750">
+          <a:ln w="38100">
             <a:solidFill>
-              <a:srgbClr val="686C66"/>
+              <a:srgbClr val="C65326"/>
             </a:solidFill>
           </a:ln>
         </p:spPr>
@@ -50305,690 +50926,24 @@
       </p:sp>
       <p:sp>
         <p:nvSpPr>
-          <p:cNvPr id="10" name="Freeform 9"/>
+          <p:cNvPr id="12" name="Oval 11"/>
           <p:cNvSpPr/>
           <p:nvPr/>
         </p:nvSpPr>
         <p:spPr>
           <a:xfrm>
-            <a:off x="932688" y="3590849"/>
-            <a:ext cx="6583680" cy="1068934"/>
+            <a:off x="854964" y="3846610"/>
+            <a:ext cx="82296" cy="82296"/>
           </a:xfrm>
-          <a:custGeom>
+          <a:prstGeom prst="ellipse">
             <a:avLst/>
-            <a:gdLst/>
-            <a:ahLst/>
-            <a:cxnLst/>
-            <a:rect l="l" t="t" r="r" b="b"/>
-            <a:pathLst>
-              <a:path w="7200" h="1169">
-                <a:moveTo>
-                  <a:pt x="0" y="173"/>
-                </a:moveTo>
-                <a:lnTo>
-                  <a:pt x="33" y="192"/>
-                </a:lnTo>
-                <a:lnTo>
-                  <a:pt x="66" y="211"/>
-                </a:lnTo>
-                <a:lnTo>
-                  <a:pt x="99" y="229"/>
-                </a:lnTo>
-                <a:lnTo>
-                  <a:pt x="132" y="248"/>
-                </a:lnTo>
-                <a:lnTo>
-                  <a:pt x="164" y="266"/>
-                </a:lnTo>
-                <a:lnTo>
-                  <a:pt x="197" y="284"/>
-                </a:lnTo>
-                <a:lnTo>
-                  <a:pt x="230" y="301"/>
-                </a:lnTo>
-                <a:lnTo>
-                  <a:pt x="263" y="319"/>
-                </a:lnTo>
-                <a:lnTo>
-                  <a:pt x="296" y="336"/>
-                </a:lnTo>
-                <a:lnTo>
-                  <a:pt x="329" y="354"/>
-                </a:lnTo>
-                <a:lnTo>
-                  <a:pt x="362" y="371"/>
-                </a:lnTo>
-                <a:lnTo>
-                  <a:pt x="395" y="388"/>
-                </a:lnTo>
-                <a:lnTo>
-                  <a:pt x="427" y="404"/>
-                </a:lnTo>
-                <a:lnTo>
-                  <a:pt x="460" y="421"/>
-                </a:lnTo>
-                <a:lnTo>
-                  <a:pt x="493" y="437"/>
-                </a:lnTo>
-                <a:lnTo>
-                  <a:pt x="526" y="453"/>
-                </a:lnTo>
-                <a:lnTo>
-                  <a:pt x="559" y="469"/>
-                </a:lnTo>
-                <a:lnTo>
-                  <a:pt x="592" y="485"/>
-                </a:lnTo>
-                <a:lnTo>
-                  <a:pt x="625" y="501"/>
-                </a:lnTo>
-                <a:lnTo>
-                  <a:pt x="658" y="516"/>
-                </a:lnTo>
-                <a:lnTo>
-                  <a:pt x="690" y="531"/>
-                </a:lnTo>
-                <a:lnTo>
-                  <a:pt x="723" y="546"/>
-                </a:lnTo>
-                <a:lnTo>
-                  <a:pt x="756" y="561"/>
-                </a:lnTo>
-                <a:lnTo>
-                  <a:pt x="789" y="576"/>
-                </a:lnTo>
-                <a:lnTo>
-                  <a:pt x="822" y="591"/>
-                </a:lnTo>
-                <a:lnTo>
-                  <a:pt x="855" y="605"/>
-                </a:lnTo>
-                <a:lnTo>
-                  <a:pt x="888" y="619"/>
-                </a:lnTo>
-                <a:lnTo>
-                  <a:pt x="921" y="633"/>
-                </a:lnTo>
-                <a:lnTo>
-                  <a:pt x="953" y="647"/>
-                </a:lnTo>
-                <a:lnTo>
-                  <a:pt x="986" y="661"/>
-                </a:lnTo>
-                <a:lnTo>
-                  <a:pt x="1019" y="674"/>
-                </a:lnTo>
-                <a:lnTo>
-                  <a:pt x="1052" y="687"/>
-                </a:lnTo>
-                <a:lnTo>
-                  <a:pt x="1085" y="700"/>
-                </a:lnTo>
-                <a:lnTo>
-                  <a:pt x="1118" y="713"/>
-                </a:lnTo>
-                <a:lnTo>
-                  <a:pt x="1151" y="726"/>
-                </a:lnTo>
-                <a:lnTo>
-                  <a:pt x="1184" y="739"/>
-                </a:lnTo>
-                <a:lnTo>
-                  <a:pt x="1216" y="751"/>
-                </a:lnTo>
-                <a:lnTo>
-                  <a:pt x="1249" y="763"/>
-                </a:lnTo>
-                <a:lnTo>
-                  <a:pt x="1282" y="775"/>
-                </a:lnTo>
-                <a:lnTo>
-                  <a:pt x="1315" y="787"/>
-                </a:lnTo>
-                <a:lnTo>
-                  <a:pt x="1348" y="799"/>
-                </a:lnTo>
-                <a:lnTo>
-                  <a:pt x="1381" y="810"/>
-                </a:lnTo>
-                <a:lnTo>
-                  <a:pt x="1414" y="821"/>
-                </a:lnTo>
-                <a:lnTo>
-                  <a:pt x="1447" y="833"/>
-                </a:lnTo>
-                <a:lnTo>
-                  <a:pt x="1479" y="843"/>
-                </a:lnTo>
-                <a:lnTo>
-                  <a:pt x="1512" y="854"/>
-                </a:lnTo>
-                <a:lnTo>
-                  <a:pt x="1545" y="865"/>
-                </a:lnTo>
-                <a:lnTo>
-                  <a:pt x="1578" y="875"/>
-                </a:lnTo>
-                <a:lnTo>
-                  <a:pt x="1611" y="885"/>
-                </a:lnTo>
-                <a:lnTo>
-                  <a:pt x="1644" y="895"/>
-                </a:lnTo>
-                <a:lnTo>
-                  <a:pt x="1677" y="905"/>
-                </a:lnTo>
-                <a:lnTo>
-                  <a:pt x="1710" y="915"/>
-                </a:lnTo>
-                <a:lnTo>
-                  <a:pt x="1742" y="924"/>
-                </a:lnTo>
-                <a:lnTo>
-                  <a:pt x="1775" y="934"/>
-                </a:lnTo>
-                <a:lnTo>
-                  <a:pt x="1808" y="943"/>
-                </a:lnTo>
-                <a:lnTo>
-                  <a:pt x="1841" y="952"/>
-                </a:lnTo>
-                <a:lnTo>
-                  <a:pt x="1874" y="961"/>
-                </a:lnTo>
-                <a:lnTo>
-                  <a:pt x="1907" y="969"/>
-                </a:lnTo>
-                <a:lnTo>
-                  <a:pt x="1940" y="978"/>
-                </a:lnTo>
-                <a:lnTo>
-                  <a:pt x="1973" y="986"/>
-                </a:lnTo>
-                <a:lnTo>
-                  <a:pt x="2005" y="994"/>
-                </a:lnTo>
-                <a:lnTo>
-                  <a:pt x="2038" y="1002"/>
-                </a:lnTo>
-                <a:lnTo>
-                  <a:pt x="2071" y="1009"/>
-                </a:lnTo>
-                <a:lnTo>
-                  <a:pt x="2104" y="1017"/>
-                </a:lnTo>
-                <a:lnTo>
-                  <a:pt x="2137" y="1024"/>
-                </a:lnTo>
-                <a:lnTo>
-                  <a:pt x="2170" y="1031"/>
-                </a:lnTo>
-                <a:lnTo>
-                  <a:pt x="2203" y="1038"/>
-                </a:lnTo>
-                <a:lnTo>
-                  <a:pt x="2236" y="1045"/>
-                </a:lnTo>
-                <a:lnTo>
-                  <a:pt x="2268" y="1052"/>
-                </a:lnTo>
-                <a:lnTo>
-                  <a:pt x="2301" y="1058"/>
-                </a:lnTo>
-                <a:lnTo>
-                  <a:pt x="2334" y="1064"/>
-                </a:lnTo>
-                <a:lnTo>
-                  <a:pt x="2367" y="1070"/>
-                </a:lnTo>
-                <a:lnTo>
-                  <a:pt x="2400" y="1076"/>
-                </a:lnTo>
-                <a:lnTo>
-                  <a:pt x="2433" y="1082"/>
-                </a:lnTo>
-                <a:lnTo>
-                  <a:pt x="2466" y="1088"/>
-                </a:lnTo>
-                <a:lnTo>
-                  <a:pt x="2499" y="1093"/>
-                </a:lnTo>
-                <a:lnTo>
-                  <a:pt x="2532" y="1098"/>
-                </a:lnTo>
-                <a:lnTo>
-                  <a:pt x="2564" y="1103"/>
-                </a:lnTo>
-                <a:lnTo>
-                  <a:pt x="2597" y="1108"/>
-                </a:lnTo>
-                <a:lnTo>
-                  <a:pt x="2630" y="1112"/>
-                </a:lnTo>
-                <a:lnTo>
-                  <a:pt x="2663" y="1117"/>
-                </a:lnTo>
-                <a:lnTo>
-                  <a:pt x="2696" y="1121"/>
-                </a:lnTo>
-                <a:lnTo>
-                  <a:pt x="2729" y="1125"/>
-                </a:lnTo>
-                <a:lnTo>
-                  <a:pt x="2762" y="1129"/>
-                </a:lnTo>
-                <a:lnTo>
-                  <a:pt x="2795" y="1133"/>
-                </a:lnTo>
-                <a:lnTo>
-                  <a:pt x="2827" y="1136"/>
-                </a:lnTo>
-                <a:lnTo>
-                  <a:pt x="2860" y="1140"/>
-                </a:lnTo>
-                <a:lnTo>
-                  <a:pt x="2893" y="1143"/>
-                </a:lnTo>
-                <a:lnTo>
-                  <a:pt x="2926" y="1146"/>
-                </a:lnTo>
-                <a:lnTo>
-                  <a:pt x="2959" y="1149"/>
-                </a:lnTo>
-                <a:lnTo>
-                  <a:pt x="2992" y="1151"/>
-                </a:lnTo>
-                <a:lnTo>
-                  <a:pt x="3025" y="1154"/>
-                </a:lnTo>
-                <a:lnTo>
-                  <a:pt x="3058" y="1156"/>
-                </a:lnTo>
-                <a:lnTo>
-                  <a:pt x="3090" y="1158"/>
-                </a:lnTo>
-                <a:lnTo>
-                  <a:pt x="3123" y="1160"/>
-                </a:lnTo>
-                <a:lnTo>
-                  <a:pt x="3156" y="1162"/>
-                </a:lnTo>
-                <a:lnTo>
-                  <a:pt x="3189" y="1163"/>
-                </a:lnTo>
-                <a:lnTo>
-                  <a:pt x="3222" y="1165"/>
-                </a:lnTo>
-                <a:lnTo>
-                  <a:pt x="3255" y="1166"/>
-                </a:lnTo>
-                <a:lnTo>
-                  <a:pt x="3288" y="1167"/>
-                </a:lnTo>
-                <a:lnTo>
-                  <a:pt x="3321" y="1168"/>
-                </a:lnTo>
-                <a:lnTo>
-                  <a:pt x="3353" y="1168"/>
-                </a:lnTo>
-                <a:lnTo>
-                  <a:pt x="3386" y="1169"/>
-                </a:lnTo>
-                <a:lnTo>
-                  <a:pt x="3419" y="1169"/>
-                </a:lnTo>
-                <a:lnTo>
-                  <a:pt x="3452" y="1169"/>
-                </a:lnTo>
-                <a:lnTo>
-                  <a:pt x="3485" y="1169"/>
-                </a:lnTo>
-                <a:lnTo>
-                  <a:pt x="3518" y="1169"/>
-                </a:lnTo>
-                <a:lnTo>
-                  <a:pt x="3551" y="1169"/>
-                </a:lnTo>
-                <a:lnTo>
-                  <a:pt x="3584" y="1168"/>
-                </a:lnTo>
-                <a:lnTo>
-                  <a:pt x="3616" y="1167"/>
-                </a:lnTo>
-                <a:lnTo>
-                  <a:pt x="3649" y="1166"/>
-                </a:lnTo>
-                <a:lnTo>
-                  <a:pt x="3682" y="1165"/>
-                </a:lnTo>
-                <a:lnTo>
-                  <a:pt x="3715" y="1164"/>
-                </a:lnTo>
-                <a:lnTo>
-                  <a:pt x="3748" y="1162"/>
-                </a:lnTo>
-                <a:lnTo>
-                  <a:pt x="3781" y="1160"/>
-                </a:lnTo>
-                <a:lnTo>
-                  <a:pt x="3814" y="1159"/>
-                </a:lnTo>
-                <a:lnTo>
-                  <a:pt x="3847" y="1157"/>
-                </a:lnTo>
-                <a:lnTo>
-                  <a:pt x="3879" y="1154"/>
-                </a:lnTo>
-                <a:lnTo>
-                  <a:pt x="3912" y="1152"/>
-                </a:lnTo>
-                <a:lnTo>
-                  <a:pt x="3945" y="1149"/>
-                </a:lnTo>
-                <a:lnTo>
-                  <a:pt x="3978" y="1147"/>
-                </a:lnTo>
-                <a:lnTo>
-                  <a:pt x="4011" y="1144"/>
-                </a:lnTo>
-                <a:lnTo>
-                  <a:pt x="4044" y="1140"/>
-                </a:lnTo>
-                <a:lnTo>
-                  <a:pt x="4077" y="1137"/>
-                </a:lnTo>
-                <a:lnTo>
-                  <a:pt x="4110" y="1134"/>
-                </a:lnTo>
-                <a:lnTo>
-                  <a:pt x="4142" y="1130"/>
-                </a:lnTo>
-                <a:lnTo>
-                  <a:pt x="4175" y="1126"/>
-                </a:lnTo>
-                <a:lnTo>
-                  <a:pt x="4208" y="1122"/>
-                </a:lnTo>
-                <a:lnTo>
-                  <a:pt x="4241" y="1118"/>
-                </a:lnTo>
-                <a:lnTo>
-                  <a:pt x="4274" y="1113"/>
-                </a:lnTo>
-                <a:lnTo>
-                  <a:pt x="4307" y="1109"/>
-                </a:lnTo>
-                <a:lnTo>
-                  <a:pt x="4340" y="1104"/>
-                </a:lnTo>
-                <a:lnTo>
-                  <a:pt x="4373" y="1099"/>
-                </a:lnTo>
-                <a:lnTo>
-                  <a:pt x="4405" y="1094"/>
-                </a:lnTo>
-                <a:lnTo>
-                  <a:pt x="4438" y="1089"/>
-                </a:lnTo>
-                <a:lnTo>
-                  <a:pt x="4471" y="1083"/>
-                </a:lnTo>
-                <a:lnTo>
-                  <a:pt x="4504" y="1078"/>
-                </a:lnTo>
-                <a:lnTo>
-                  <a:pt x="4537" y="1072"/>
-                </a:lnTo>
-                <a:lnTo>
-                  <a:pt x="4570" y="1066"/>
-                </a:lnTo>
-                <a:lnTo>
-                  <a:pt x="4603" y="1060"/>
-                </a:lnTo>
-                <a:lnTo>
-                  <a:pt x="4636" y="1053"/>
-                </a:lnTo>
-                <a:lnTo>
-                  <a:pt x="4668" y="1047"/>
-                </a:lnTo>
-                <a:lnTo>
-                  <a:pt x="4701" y="1040"/>
-                </a:lnTo>
-                <a:lnTo>
-                  <a:pt x="4734" y="1033"/>
-                </a:lnTo>
-                <a:lnTo>
-                  <a:pt x="4767" y="1026"/>
-                </a:lnTo>
-                <a:lnTo>
-                  <a:pt x="4800" y="1019"/>
-                </a:lnTo>
-                <a:lnTo>
-                  <a:pt x="4833" y="1011"/>
-                </a:lnTo>
-                <a:lnTo>
-                  <a:pt x="4866" y="1004"/>
-                </a:lnTo>
-                <a:lnTo>
-                  <a:pt x="4899" y="996"/>
-                </a:lnTo>
-                <a:lnTo>
-                  <a:pt x="4932" y="988"/>
-                </a:lnTo>
-                <a:lnTo>
-                  <a:pt x="4964" y="980"/>
-                </a:lnTo>
-                <a:lnTo>
-                  <a:pt x="4997" y="971"/>
-                </a:lnTo>
-                <a:lnTo>
-                  <a:pt x="5030" y="963"/>
-                </a:lnTo>
-                <a:lnTo>
-                  <a:pt x="5063" y="954"/>
-                </a:lnTo>
-                <a:lnTo>
-                  <a:pt x="5096" y="945"/>
-                </a:lnTo>
-                <a:lnTo>
-                  <a:pt x="5129" y="936"/>
-                </a:lnTo>
-                <a:lnTo>
-                  <a:pt x="5162" y="927"/>
-                </a:lnTo>
-                <a:lnTo>
-                  <a:pt x="5195" y="917"/>
-                </a:lnTo>
-                <a:lnTo>
-                  <a:pt x="5227" y="908"/>
-                </a:lnTo>
-                <a:lnTo>
-                  <a:pt x="5260" y="898"/>
-                </a:lnTo>
-                <a:lnTo>
-                  <a:pt x="5293" y="888"/>
-                </a:lnTo>
-                <a:lnTo>
-                  <a:pt x="5326" y="878"/>
-                </a:lnTo>
-                <a:lnTo>
-                  <a:pt x="5359" y="867"/>
-                </a:lnTo>
-                <a:lnTo>
-                  <a:pt x="5392" y="857"/>
-                </a:lnTo>
-                <a:lnTo>
-                  <a:pt x="5425" y="846"/>
-                </a:lnTo>
-                <a:lnTo>
-                  <a:pt x="5458" y="835"/>
-                </a:lnTo>
-                <a:lnTo>
-                  <a:pt x="5490" y="824"/>
-                </a:lnTo>
-                <a:lnTo>
-                  <a:pt x="5523" y="813"/>
-                </a:lnTo>
-                <a:lnTo>
-                  <a:pt x="5556" y="801"/>
-                </a:lnTo>
-                <a:lnTo>
-                  <a:pt x="5589" y="790"/>
-                </a:lnTo>
-                <a:lnTo>
-                  <a:pt x="5622" y="778"/>
-                </a:lnTo>
-                <a:lnTo>
-                  <a:pt x="5655" y="766"/>
-                </a:lnTo>
-                <a:lnTo>
-                  <a:pt x="5688" y="754"/>
-                </a:lnTo>
-                <a:lnTo>
-                  <a:pt x="5721" y="742"/>
-                </a:lnTo>
-                <a:lnTo>
-                  <a:pt x="5753" y="729"/>
-                </a:lnTo>
-                <a:lnTo>
-                  <a:pt x="5786" y="716"/>
-                </a:lnTo>
-                <a:lnTo>
-                  <a:pt x="5819" y="704"/>
-                </a:lnTo>
-                <a:lnTo>
-                  <a:pt x="5852" y="690"/>
-                </a:lnTo>
-                <a:lnTo>
-                  <a:pt x="5885" y="677"/>
-                </a:lnTo>
-                <a:lnTo>
-                  <a:pt x="5918" y="664"/>
-                </a:lnTo>
-                <a:lnTo>
-                  <a:pt x="5951" y="650"/>
-                </a:lnTo>
-                <a:lnTo>
-                  <a:pt x="5984" y="636"/>
-                </a:lnTo>
-                <a:lnTo>
-                  <a:pt x="6016" y="623"/>
-                </a:lnTo>
-                <a:lnTo>
-                  <a:pt x="6049" y="608"/>
-                </a:lnTo>
-                <a:lnTo>
-                  <a:pt x="6082" y="594"/>
-                </a:lnTo>
-                <a:lnTo>
-                  <a:pt x="6115" y="580"/>
-                </a:lnTo>
-                <a:lnTo>
-                  <a:pt x="6148" y="565"/>
-                </a:lnTo>
-                <a:lnTo>
-                  <a:pt x="6181" y="550"/>
-                </a:lnTo>
-                <a:lnTo>
-                  <a:pt x="6214" y="535"/>
-                </a:lnTo>
-                <a:lnTo>
-                  <a:pt x="6247" y="520"/>
-                </a:lnTo>
-                <a:lnTo>
-                  <a:pt x="6279" y="504"/>
-                </a:lnTo>
-                <a:lnTo>
-                  <a:pt x="6312" y="489"/>
-                </a:lnTo>
-                <a:lnTo>
-                  <a:pt x="6345" y="473"/>
-                </a:lnTo>
-                <a:lnTo>
-                  <a:pt x="6378" y="457"/>
-                </a:lnTo>
-                <a:lnTo>
-                  <a:pt x="6411" y="441"/>
-                </a:lnTo>
-                <a:lnTo>
-                  <a:pt x="6444" y="425"/>
-                </a:lnTo>
-                <a:lnTo>
-                  <a:pt x="6477" y="408"/>
-                </a:lnTo>
-                <a:lnTo>
-                  <a:pt x="6510" y="392"/>
-                </a:lnTo>
-                <a:lnTo>
-                  <a:pt x="6542" y="375"/>
-                </a:lnTo>
-                <a:lnTo>
-                  <a:pt x="6575" y="358"/>
-                </a:lnTo>
-                <a:lnTo>
-                  <a:pt x="6608" y="341"/>
-                </a:lnTo>
-                <a:lnTo>
-                  <a:pt x="6641" y="323"/>
-                </a:lnTo>
-                <a:lnTo>
-                  <a:pt x="6674" y="306"/>
-                </a:lnTo>
-                <a:lnTo>
-                  <a:pt x="6707" y="288"/>
-                </a:lnTo>
-                <a:lnTo>
-                  <a:pt x="6740" y="270"/>
-                </a:lnTo>
-                <a:lnTo>
-                  <a:pt x="6773" y="252"/>
-                </a:lnTo>
-                <a:lnTo>
-                  <a:pt x="6805" y="234"/>
-                </a:lnTo>
-                <a:lnTo>
-                  <a:pt x="6838" y="215"/>
-                </a:lnTo>
-                <a:lnTo>
-                  <a:pt x="6871" y="196"/>
-                </a:lnTo>
-                <a:lnTo>
-                  <a:pt x="6904" y="178"/>
-                </a:lnTo>
-                <a:lnTo>
-                  <a:pt x="6937" y="159"/>
-                </a:lnTo>
-                <a:lnTo>
-                  <a:pt x="6970" y="140"/>
-                </a:lnTo>
-                <a:lnTo>
-                  <a:pt x="7003" y="120"/>
-                </a:lnTo>
-                <a:lnTo>
-                  <a:pt x="7036" y="101"/>
-                </a:lnTo>
-                <a:lnTo>
-                  <a:pt x="7068" y="81"/>
-                </a:lnTo>
-                <a:lnTo>
-                  <a:pt x="7101" y="61"/>
-                </a:lnTo>
-                <a:lnTo>
-                  <a:pt x="7134" y="41"/>
-                </a:lnTo>
-                <a:lnTo>
-                  <a:pt x="7167" y="21"/>
-                </a:lnTo>
-                <a:lnTo>
-                  <a:pt x="7200" y="0"/>
-                </a:lnTo>
-              </a:path>
-            </a:pathLst>
-          </a:custGeom>
-          <a:noFill/>
-          <a:ln w="38100">
+          </a:prstGeom>
+          <a:solidFill>
+            <a:srgbClr val="181D16"/>
+          </a:solidFill>
+          <a:ln w="19050">
             <a:solidFill>
-              <a:srgbClr val="C65326"/>
+              <a:srgbClr val="181D16"/>
             </a:solidFill>
           </a:ln>
         </p:spPr>
@@ -51016,14 +50971,939 @@
       </p:sp>
       <p:sp>
         <p:nvSpPr>
-          <p:cNvPr id="11" name="TextBox 10"/>
+          <p:cNvPr id="13" name="Oval 12"/>
+          <p:cNvSpPr/>
+          <p:nvPr/>
+        </p:nvSpPr>
+        <p:spPr>
+          <a:xfrm>
+            <a:off x="1095595" y="3675104"/>
+            <a:ext cx="82296" cy="82296"/>
+          </a:xfrm>
+          <a:prstGeom prst="ellipse">
+            <a:avLst/>
+          </a:prstGeom>
+          <a:solidFill>
+            <a:srgbClr val="181D16"/>
+          </a:solidFill>
+          <a:ln w="19050">
+            <a:solidFill>
+              <a:srgbClr val="181D16"/>
+            </a:solidFill>
+          </a:ln>
+        </p:spPr>
+        <p:style>
+          <a:lnRef idx="1">
+            <a:schemeClr val="accent1"/>
+          </a:lnRef>
+          <a:fillRef idx="3">
+            <a:schemeClr val="accent1"/>
+          </a:fillRef>
+          <a:effectRef idx="0">
+            <a:schemeClr val="accent1"/>
+          </a:effectRef>
+          <a:fontRef idx="minor">
+            <a:schemeClr val="lt1"/>
+          </a:fontRef>
+        </p:style>
+        <p:txBody>
+          <a:bodyPr rtlCol="0" anchor="ctr"/>
+          <a:lstStyle/>
+          <a:p>
+            <a:pPr algn="ctr"/>
+          </a:p>
+        </p:txBody>
+      </p:sp>
+      <p:sp>
+        <p:nvSpPr>
+          <p:cNvPr id="14" name="Oval 13"/>
+          <p:cNvSpPr/>
+          <p:nvPr/>
+        </p:nvSpPr>
+        <p:spPr>
+          <a:xfrm>
+            <a:off x="1336227" y="3935866"/>
+            <a:ext cx="82296" cy="82296"/>
+          </a:xfrm>
+          <a:prstGeom prst="ellipse">
+            <a:avLst/>
+          </a:prstGeom>
+          <a:solidFill>
+            <a:srgbClr val="181D16"/>
+          </a:solidFill>
+          <a:ln w="19050">
+            <a:solidFill>
+              <a:srgbClr val="181D16"/>
+            </a:solidFill>
+          </a:ln>
+        </p:spPr>
+        <p:style>
+          <a:lnRef idx="1">
+            <a:schemeClr val="accent1"/>
+          </a:lnRef>
+          <a:fillRef idx="3">
+            <a:schemeClr val="accent1"/>
+          </a:fillRef>
+          <a:effectRef idx="0">
+            <a:schemeClr val="accent1"/>
+          </a:effectRef>
+          <a:fontRef idx="minor">
+            <a:schemeClr val="lt1"/>
+          </a:fontRef>
+        </p:style>
+        <p:txBody>
+          <a:bodyPr rtlCol="0" anchor="ctr"/>
+          <a:lstStyle/>
+          <a:p>
+            <a:pPr algn="ctr"/>
+          </a:p>
+        </p:txBody>
+      </p:sp>
+      <p:sp>
+        <p:nvSpPr>
+          <p:cNvPr id="15" name="Oval 14"/>
+          <p:cNvSpPr/>
+          <p:nvPr/>
+        </p:nvSpPr>
+        <p:spPr>
+          <a:xfrm>
+            <a:off x="1576858" y="4075927"/>
+            <a:ext cx="82296" cy="82296"/>
+          </a:xfrm>
+          <a:prstGeom prst="ellipse">
+            <a:avLst/>
+          </a:prstGeom>
+          <a:solidFill>
+            <a:srgbClr val="181D16"/>
+          </a:solidFill>
+          <a:ln w="19050">
+            <a:solidFill>
+              <a:srgbClr val="181D16"/>
+            </a:solidFill>
+          </a:ln>
+        </p:spPr>
+        <p:style>
+          <a:lnRef idx="1">
+            <a:schemeClr val="accent1"/>
+          </a:lnRef>
+          <a:fillRef idx="3">
+            <a:schemeClr val="accent1"/>
+          </a:fillRef>
+          <a:effectRef idx="0">
+            <a:schemeClr val="accent1"/>
+          </a:effectRef>
+          <a:fontRef idx="minor">
+            <a:schemeClr val="lt1"/>
+          </a:fontRef>
+        </p:style>
+        <p:txBody>
+          <a:bodyPr rtlCol="0" anchor="ctr"/>
+          <a:lstStyle/>
+          <a:p>
+            <a:pPr algn="ctr"/>
+          </a:p>
+        </p:txBody>
+      </p:sp>
+      <p:sp>
+        <p:nvSpPr>
+          <p:cNvPr id="16" name="Oval 15"/>
+          <p:cNvSpPr/>
+          <p:nvPr/>
+        </p:nvSpPr>
+        <p:spPr>
+          <a:xfrm>
+            <a:off x="1817490" y="3884947"/>
+            <a:ext cx="82296" cy="82296"/>
+          </a:xfrm>
+          <a:prstGeom prst="ellipse">
+            <a:avLst/>
+          </a:prstGeom>
+          <a:solidFill>
+            <a:srgbClr val="181D16"/>
+          </a:solidFill>
+          <a:ln w="19050">
+            <a:solidFill>
+              <a:srgbClr val="181D16"/>
+            </a:solidFill>
+          </a:ln>
+        </p:spPr>
+        <p:style>
+          <a:lnRef idx="1">
+            <a:schemeClr val="accent1"/>
+          </a:lnRef>
+          <a:fillRef idx="3">
+            <a:schemeClr val="accent1"/>
+          </a:fillRef>
+          <a:effectRef idx="0">
+            <a:schemeClr val="accent1"/>
+          </a:effectRef>
+          <a:fontRef idx="minor">
+            <a:schemeClr val="lt1"/>
+          </a:fontRef>
+        </p:style>
+        <p:txBody>
+          <a:bodyPr rtlCol="0" anchor="ctr"/>
+          <a:lstStyle/>
+          <a:p>
+            <a:pPr algn="ctr"/>
+          </a:p>
+        </p:txBody>
+      </p:sp>
+      <p:sp>
+        <p:nvSpPr>
+          <p:cNvPr id="17" name="Oval 16"/>
+          <p:cNvSpPr/>
+          <p:nvPr/>
+        </p:nvSpPr>
+        <p:spPr>
+          <a:xfrm>
+            <a:off x="2058121" y="4920362"/>
+            <a:ext cx="82296" cy="82296"/>
+          </a:xfrm>
+          <a:prstGeom prst="ellipse">
+            <a:avLst/>
+          </a:prstGeom>
+          <a:solidFill>
+            <a:srgbClr val="181D16"/>
+          </a:solidFill>
+          <a:ln w="19050">
+            <a:solidFill>
+              <a:srgbClr val="181D16"/>
+            </a:solidFill>
+          </a:ln>
+        </p:spPr>
+        <p:style>
+          <a:lnRef idx="1">
+            <a:schemeClr val="accent1"/>
+          </a:lnRef>
+          <a:fillRef idx="3">
+            <a:schemeClr val="accent1"/>
+          </a:fillRef>
+          <a:effectRef idx="0">
+            <a:schemeClr val="accent1"/>
+          </a:effectRef>
+          <a:fontRef idx="minor">
+            <a:schemeClr val="lt1"/>
+          </a:fontRef>
+        </p:style>
+        <p:txBody>
+          <a:bodyPr rtlCol="0" anchor="ctr"/>
+          <a:lstStyle/>
+          <a:p>
+            <a:pPr algn="ctr"/>
+          </a:p>
+        </p:txBody>
+      </p:sp>
+      <p:sp>
+        <p:nvSpPr>
+          <p:cNvPr id="18" name="Oval 17"/>
+          <p:cNvSpPr/>
+          <p:nvPr/>
+        </p:nvSpPr>
+        <p:spPr>
+          <a:xfrm>
+            <a:off x="2298753" y="4787277"/>
+            <a:ext cx="82296" cy="82296"/>
+          </a:xfrm>
+          <a:prstGeom prst="ellipse">
+            <a:avLst/>
+          </a:prstGeom>
+          <a:solidFill>
+            <a:srgbClr val="181D16"/>
+          </a:solidFill>
+          <a:ln w="19050">
+            <a:solidFill>
+              <a:srgbClr val="181D16"/>
+            </a:solidFill>
+          </a:ln>
+        </p:spPr>
+        <p:style>
+          <a:lnRef idx="1">
+            <a:schemeClr val="accent1"/>
+          </a:lnRef>
+          <a:fillRef idx="3">
+            <a:schemeClr val="accent1"/>
+          </a:fillRef>
+          <a:effectRef idx="0">
+            <a:schemeClr val="accent1"/>
+          </a:effectRef>
+          <a:fontRef idx="minor">
+            <a:schemeClr val="lt1"/>
+          </a:fontRef>
+        </p:style>
+        <p:txBody>
+          <a:bodyPr rtlCol="0" anchor="ctr"/>
+          <a:lstStyle/>
+          <a:p>
+            <a:pPr algn="ctr"/>
+          </a:p>
+        </p:txBody>
+      </p:sp>
+      <p:sp>
+        <p:nvSpPr>
+          <p:cNvPr id="19" name="Oval 18"/>
+          <p:cNvSpPr/>
+          <p:nvPr/>
+        </p:nvSpPr>
+        <p:spPr>
+          <a:xfrm>
+            <a:off x="2539385" y="5057805"/>
+            <a:ext cx="82296" cy="82296"/>
+          </a:xfrm>
+          <a:prstGeom prst="ellipse">
+            <a:avLst/>
+          </a:prstGeom>
+          <a:solidFill>
+            <a:srgbClr val="181D16"/>
+          </a:solidFill>
+          <a:ln w="19050">
+            <a:solidFill>
+              <a:srgbClr val="181D16"/>
+            </a:solidFill>
+          </a:ln>
+        </p:spPr>
+        <p:style>
+          <a:lnRef idx="1">
+            <a:schemeClr val="accent1"/>
+          </a:lnRef>
+          <a:fillRef idx="3">
+            <a:schemeClr val="accent1"/>
+          </a:fillRef>
+          <a:effectRef idx="0">
+            <a:schemeClr val="accent1"/>
+          </a:effectRef>
+          <a:fontRef idx="minor">
+            <a:schemeClr val="lt1"/>
+          </a:fontRef>
+        </p:style>
+        <p:txBody>
+          <a:bodyPr rtlCol="0" anchor="ctr"/>
+          <a:lstStyle/>
+          <a:p>
+            <a:pPr algn="ctr"/>
+          </a:p>
+        </p:txBody>
+      </p:sp>
+      <p:sp>
+        <p:nvSpPr>
+          <p:cNvPr id="20" name="Oval 19"/>
+          <p:cNvSpPr/>
+          <p:nvPr/>
+        </p:nvSpPr>
+        <p:spPr>
+          <a:xfrm>
+            <a:off x="2780016" y="4662988"/>
+            <a:ext cx="82296" cy="82296"/>
+          </a:xfrm>
+          <a:prstGeom prst="ellipse">
+            <a:avLst/>
+          </a:prstGeom>
+          <a:solidFill>
+            <a:srgbClr val="181D16"/>
+          </a:solidFill>
+          <a:ln w="19050">
+            <a:solidFill>
+              <a:srgbClr val="181D16"/>
+            </a:solidFill>
+          </a:ln>
+        </p:spPr>
+        <p:style>
+          <a:lnRef idx="1">
+            <a:schemeClr val="accent1"/>
+          </a:lnRef>
+          <a:fillRef idx="3">
+            <a:schemeClr val="accent1"/>
+          </a:fillRef>
+          <a:effectRef idx="0">
+            <a:schemeClr val="accent1"/>
+          </a:effectRef>
+          <a:fontRef idx="minor">
+            <a:schemeClr val="lt1"/>
+          </a:fontRef>
+        </p:style>
+        <p:txBody>
+          <a:bodyPr rtlCol="0" anchor="ctr"/>
+          <a:lstStyle/>
+          <a:p>
+            <a:pPr algn="ctr"/>
+          </a:p>
+        </p:txBody>
+      </p:sp>
+      <p:sp>
+        <p:nvSpPr>
+          <p:cNvPr id="21" name="Oval 20"/>
+          <p:cNvSpPr/>
+          <p:nvPr/>
+        </p:nvSpPr>
+        <p:spPr>
+          <a:xfrm>
+            <a:off x="3020648" y="4279730"/>
+            <a:ext cx="82296" cy="82296"/>
+          </a:xfrm>
+          <a:prstGeom prst="ellipse">
+            <a:avLst/>
+          </a:prstGeom>
+          <a:solidFill>
+            <a:srgbClr val="181D16"/>
+          </a:solidFill>
+          <a:ln w="19050">
+            <a:solidFill>
+              <a:srgbClr val="181D16"/>
+            </a:solidFill>
+          </a:ln>
+        </p:spPr>
+        <p:style>
+          <a:lnRef idx="1">
+            <a:schemeClr val="accent1"/>
+          </a:lnRef>
+          <a:fillRef idx="3">
+            <a:schemeClr val="accent1"/>
+          </a:fillRef>
+          <a:effectRef idx="0">
+            <a:schemeClr val="accent1"/>
+          </a:effectRef>
+          <a:fontRef idx="minor">
+            <a:schemeClr val="lt1"/>
+          </a:fontRef>
+        </p:style>
+        <p:txBody>
+          <a:bodyPr rtlCol="0" anchor="ctr"/>
+          <a:lstStyle/>
+          <a:p>
+            <a:pPr algn="ctr"/>
+          </a:p>
+        </p:txBody>
+      </p:sp>
+      <p:sp>
+        <p:nvSpPr>
+          <p:cNvPr id="22" name="Oval 21"/>
+          <p:cNvSpPr/>
+          <p:nvPr/>
+        </p:nvSpPr>
+        <p:spPr>
+          <a:xfrm>
+            <a:off x="3261279" y="4587561"/>
+            <a:ext cx="82296" cy="82296"/>
+          </a:xfrm>
+          <a:prstGeom prst="ellipse">
+            <a:avLst/>
+          </a:prstGeom>
+          <a:solidFill>
+            <a:srgbClr val="181D16"/>
+          </a:solidFill>
+          <a:ln w="19050">
+            <a:solidFill>
+              <a:srgbClr val="181D16"/>
+            </a:solidFill>
+          </a:ln>
+        </p:spPr>
+        <p:style>
+          <a:lnRef idx="1">
+            <a:schemeClr val="accent1"/>
+          </a:lnRef>
+          <a:fillRef idx="3">
+            <a:schemeClr val="accent1"/>
+          </a:fillRef>
+          <a:effectRef idx="0">
+            <a:schemeClr val="accent1"/>
+          </a:effectRef>
+          <a:fontRef idx="minor">
+            <a:schemeClr val="lt1"/>
+          </a:fontRef>
+        </p:style>
+        <p:txBody>
+          <a:bodyPr rtlCol="0" anchor="ctr"/>
+          <a:lstStyle/>
+          <a:p>
+            <a:pPr algn="ctr"/>
+          </a:p>
+        </p:txBody>
+      </p:sp>
+      <p:sp>
+        <p:nvSpPr>
+          <p:cNvPr id="23" name="Oval 22"/>
+          <p:cNvSpPr/>
+          <p:nvPr/>
+        </p:nvSpPr>
+        <p:spPr>
+          <a:xfrm>
+            <a:off x="3501911" y="4353820"/>
+            <a:ext cx="82296" cy="82296"/>
+          </a:xfrm>
+          <a:prstGeom prst="ellipse">
+            <a:avLst/>
+          </a:prstGeom>
+          <a:solidFill>
+            <a:srgbClr val="181D16"/>
+          </a:solidFill>
+          <a:ln w="19050">
+            <a:solidFill>
+              <a:srgbClr val="181D16"/>
+            </a:solidFill>
+          </a:ln>
+        </p:spPr>
+        <p:style>
+          <a:lnRef idx="1">
+            <a:schemeClr val="accent1"/>
+          </a:lnRef>
+          <a:fillRef idx="3">
+            <a:schemeClr val="accent1"/>
+          </a:fillRef>
+          <a:effectRef idx="0">
+            <a:schemeClr val="accent1"/>
+          </a:effectRef>
+          <a:fontRef idx="minor">
+            <a:schemeClr val="lt1"/>
+          </a:fontRef>
+        </p:style>
+        <p:txBody>
+          <a:bodyPr rtlCol="0" anchor="ctr"/>
+          <a:lstStyle/>
+          <a:p>
+            <a:pPr algn="ctr"/>
+          </a:p>
+        </p:txBody>
+      </p:sp>
+      <p:sp>
+        <p:nvSpPr>
+          <p:cNvPr id="24" name="Oval 23"/>
+          <p:cNvSpPr/>
+          <p:nvPr/>
+        </p:nvSpPr>
+        <p:spPr>
+          <a:xfrm>
+            <a:off x="3742542" y="5079255"/>
+            <a:ext cx="82296" cy="82296"/>
+          </a:xfrm>
+          <a:prstGeom prst="ellipse">
+            <a:avLst/>
+          </a:prstGeom>
+          <a:solidFill>
+            <a:srgbClr val="181D16"/>
+          </a:solidFill>
+          <a:ln w="19050">
+            <a:solidFill>
+              <a:srgbClr val="181D16"/>
+            </a:solidFill>
+          </a:ln>
+        </p:spPr>
+        <p:style>
+          <a:lnRef idx="1">
+            <a:schemeClr val="accent1"/>
+          </a:lnRef>
+          <a:fillRef idx="3">
+            <a:schemeClr val="accent1"/>
+          </a:fillRef>
+          <a:effectRef idx="0">
+            <a:schemeClr val="accent1"/>
+          </a:effectRef>
+          <a:fontRef idx="minor">
+            <a:schemeClr val="lt1"/>
+          </a:fontRef>
+        </p:style>
+        <p:txBody>
+          <a:bodyPr rtlCol="0" anchor="ctr"/>
+          <a:lstStyle/>
+          <a:p>
+            <a:pPr algn="ctr"/>
+          </a:p>
+        </p:txBody>
+      </p:sp>
+      <p:sp>
+        <p:nvSpPr>
+          <p:cNvPr id="25" name="Oval 24"/>
+          <p:cNvSpPr/>
+          <p:nvPr/>
+        </p:nvSpPr>
+        <p:spPr>
+          <a:xfrm>
+            <a:off x="3983174" y="4279230"/>
+            <a:ext cx="82296" cy="82296"/>
+          </a:xfrm>
+          <a:prstGeom prst="ellipse">
+            <a:avLst/>
+          </a:prstGeom>
+          <a:solidFill>
+            <a:srgbClr val="181D16"/>
+          </a:solidFill>
+          <a:ln w="19050">
+            <a:solidFill>
+              <a:srgbClr val="181D16"/>
+            </a:solidFill>
+          </a:ln>
+        </p:spPr>
+        <p:style>
+          <a:lnRef idx="1">
+            <a:schemeClr val="accent1"/>
+          </a:lnRef>
+          <a:fillRef idx="3">
+            <a:schemeClr val="accent1"/>
+          </a:fillRef>
+          <a:effectRef idx="0">
+            <a:schemeClr val="accent1"/>
+          </a:effectRef>
+          <a:fontRef idx="minor">
+            <a:schemeClr val="lt1"/>
+          </a:fontRef>
+        </p:style>
+        <p:txBody>
+          <a:bodyPr rtlCol="0" anchor="ctr"/>
+          <a:lstStyle/>
+          <a:p>
+            <a:pPr algn="ctr"/>
+          </a:p>
+        </p:txBody>
+      </p:sp>
+      <p:sp>
+        <p:nvSpPr>
+          <p:cNvPr id="26" name="Oval 25"/>
+          <p:cNvSpPr/>
+          <p:nvPr/>
+        </p:nvSpPr>
+        <p:spPr>
+          <a:xfrm>
+            <a:off x="4223806" y="4501384"/>
+            <a:ext cx="82296" cy="82296"/>
+          </a:xfrm>
+          <a:prstGeom prst="ellipse">
+            <a:avLst/>
+          </a:prstGeom>
+          <a:solidFill>
+            <a:srgbClr val="181D16"/>
+          </a:solidFill>
+          <a:ln w="19050">
+            <a:solidFill>
+              <a:srgbClr val="181D16"/>
+            </a:solidFill>
+          </a:ln>
+        </p:spPr>
+        <p:style>
+          <a:lnRef idx="1">
+            <a:schemeClr val="accent1"/>
+          </a:lnRef>
+          <a:fillRef idx="3">
+            <a:schemeClr val="accent1"/>
+          </a:fillRef>
+          <a:effectRef idx="0">
+            <a:schemeClr val="accent1"/>
+          </a:effectRef>
+          <a:fontRef idx="minor">
+            <a:schemeClr val="lt1"/>
+          </a:fontRef>
+        </p:style>
+        <p:txBody>
+          <a:bodyPr rtlCol="0" anchor="ctr"/>
+          <a:lstStyle/>
+          <a:p>
+            <a:pPr algn="ctr"/>
+          </a:p>
+        </p:txBody>
+      </p:sp>
+      <p:sp>
+        <p:nvSpPr>
+          <p:cNvPr id="27" name="Oval 26"/>
+          <p:cNvSpPr/>
+          <p:nvPr/>
+        </p:nvSpPr>
+        <p:spPr>
+          <a:xfrm>
+            <a:off x="4464437" y="3442926"/>
+            <a:ext cx="82296" cy="82296"/>
+          </a:xfrm>
+          <a:prstGeom prst="ellipse">
+            <a:avLst/>
+          </a:prstGeom>
+          <a:solidFill>
+            <a:srgbClr val="181D16"/>
+          </a:solidFill>
+          <a:ln w="19050">
+            <a:solidFill>
+              <a:srgbClr val="181D16"/>
+            </a:solidFill>
+          </a:ln>
+        </p:spPr>
+        <p:style>
+          <a:lnRef idx="1">
+            <a:schemeClr val="accent1"/>
+          </a:lnRef>
+          <a:fillRef idx="3">
+            <a:schemeClr val="accent1"/>
+          </a:fillRef>
+          <a:effectRef idx="0">
+            <a:schemeClr val="accent1"/>
+          </a:effectRef>
+          <a:fontRef idx="minor">
+            <a:schemeClr val="lt1"/>
+          </a:fontRef>
+        </p:style>
+        <p:txBody>
+          <a:bodyPr rtlCol="0" anchor="ctr"/>
+          <a:lstStyle/>
+          <a:p>
+            <a:pPr algn="ctr"/>
+          </a:p>
+        </p:txBody>
+      </p:sp>
+      <p:sp>
+        <p:nvSpPr>
+          <p:cNvPr id="28" name="Oval 27"/>
+          <p:cNvSpPr/>
+          <p:nvPr/>
+        </p:nvSpPr>
+        <p:spPr>
+          <a:xfrm>
+            <a:off x="4705069" y="3561003"/>
+            <a:ext cx="82296" cy="82296"/>
+          </a:xfrm>
+          <a:prstGeom prst="ellipse">
+            <a:avLst/>
+          </a:prstGeom>
+          <a:solidFill>
+            <a:srgbClr val="181D16"/>
+          </a:solidFill>
+          <a:ln w="19050">
+            <a:solidFill>
+              <a:srgbClr val="181D16"/>
+            </a:solidFill>
+          </a:ln>
+        </p:spPr>
+        <p:style>
+          <a:lnRef idx="1">
+            <a:schemeClr val="accent1"/>
+          </a:lnRef>
+          <a:fillRef idx="3">
+            <a:schemeClr val="accent1"/>
+          </a:fillRef>
+          <a:effectRef idx="0">
+            <a:schemeClr val="accent1"/>
+          </a:effectRef>
+          <a:fontRef idx="minor">
+            <a:schemeClr val="lt1"/>
+          </a:fontRef>
+        </p:style>
+        <p:txBody>
+          <a:bodyPr rtlCol="0" anchor="ctr"/>
+          <a:lstStyle/>
+          <a:p>
+            <a:pPr algn="ctr"/>
+          </a:p>
+        </p:txBody>
+      </p:sp>
+      <p:sp>
+        <p:nvSpPr>
+          <p:cNvPr id="29" name="Oval 28"/>
+          <p:cNvSpPr/>
+          <p:nvPr/>
+        </p:nvSpPr>
+        <p:spPr>
+          <a:xfrm>
+            <a:off x="4945700" y="3335061"/>
+            <a:ext cx="82296" cy="82296"/>
+          </a:xfrm>
+          <a:prstGeom prst="ellipse">
+            <a:avLst/>
+          </a:prstGeom>
+          <a:solidFill>
+            <a:srgbClr val="181D16"/>
+          </a:solidFill>
+          <a:ln w="19050">
+            <a:solidFill>
+              <a:srgbClr val="181D16"/>
+            </a:solidFill>
+          </a:ln>
+        </p:spPr>
+        <p:style>
+          <a:lnRef idx="1">
+            <a:schemeClr val="accent1"/>
+          </a:lnRef>
+          <a:fillRef idx="3">
+            <a:schemeClr val="accent1"/>
+          </a:fillRef>
+          <a:effectRef idx="0">
+            <a:schemeClr val="accent1"/>
+          </a:effectRef>
+          <a:fontRef idx="minor">
+            <a:schemeClr val="lt1"/>
+          </a:fontRef>
+        </p:style>
+        <p:txBody>
+          <a:bodyPr rtlCol="0" anchor="ctr"/>
+          <a:lstStyle/>
+          <a:p>
+            <a:pPr algn="ctr"/>
+          </a:p>
+        </p:txBody>
+      </p:sp>
+      <p:sp>
+        <p:nvSpPr>
+          <p:cNvPr id="30" name="Oval 29"/>
+          <p:cNvSpPr/>
+          <p:nvPr/>
+        </p:nvSpPr>
+        <p:spPr>
+          <a:xfrm>
+            <a:off x="5186332" y="3444604"/>
+            <a:ext cx="82296" cy="82296"/>
+          </a:xfrm>
+          <a:prstGeom prst="ellipse">
+            <a:avLst/>
+          </a:prstGeom>
+          <a:solidFill>
+            <a:srgbClr val="181D16"/>
+          </a:solidFill>
+          <a:ln w="19050">
+            <a:solidFill>
+              <a:srgbClr val="181D16"/>
+            </a:solidFill>
+          </a:ln>
+        </p:spPr>
+        <p:style>
+          <a:lnRef idx="1">
+            <a:schemeClr val="accent1"/>
+          </a:lnRef>
+          <a:fillRef idx="3">
+            <a:schemeClr val="accent1"/>
+          </a:fillRef>
+          <a:effectRef idx="0">
+            <a:schemeClr val="accent1"/>
+          </a:effectRef>
+          <a:fontRef idx="minor">
+            <a:schemeClr val="lt1"/>
+          </a:fontRef>
+        </p:style>
+        <p:txBody>
+          <a:bodyPr rtlCol="0" anchor="ctr"/>
+          <a:lstStyle/>
+          <a:p>
+            <a:pPr algn="ctr"/>
+          </a:p>
+        </p:txBody>
+      </p:sp>
+      <p:sp>
+        <p:nvSpPr>
+          <p:cNvPr id="31" name="Oval 30"/>
+          <p:cNvSpPr/>
+          <p:nvPr/>
+        </p:nvSpPr>
+        <p:spPr>
+          <a:xfrm>
+            <a:off x="5426964" y="2965705"/>
+            <a:ext cx="82296" cy="82296"/>
+          </a:xfrm>
+          <a:prstGeom prst="ellipse">
+            <a:avLst/>
+          </a:prstGeom>
+          <a:solidFill>
+            <a:srgbClr val="181D16"/>
+          </a:solidFill>
+          <a:ln w="19050">
+            <a:solidFill>
+              <a:srgbClr val="181D16"/>
+            </a:solidFill>
+          </a:ln>
+        </p:spPr>
+        <p:style>
+          <a:lnRef idx="1">
+            <a:schemeClr val="accent1"/>
+          </a:lnRef>
+          <a:fillRef idx="3">
+            <a:schemeClr val="accent1"/>
+          </a:fillRef>
+          <a:effectRef idx="0">
+            <a:schemeClr val="accent1"/>
+          </a:effectRef>
+          <a:fontRef idx="minor">
+            <a:schemeClr val="lt1"/>
+          </a:fontRef>
+        </p:style>
+        <p:txBody>
+          <a:bodyPr rtlCol="0" anchor="ctr"/>
+          <a:lstStyle/>
+          <a:p>
+            <a:pPr algn="ctr"/>
+          </a:p>
+        </p:txBody>
+      </p:sp>
+      <p:cxnSp>
+        <p:nvCxnSpPr>
+          <p:cNvPr id="32" name="Connector 31"/>
+          <p:cNvCxnSpPr/>
+          <p:nvPr/>
+        </p:nvCxnSpPr>
+        <p:spPr>
+          <a:xfrm>
+            <a:off x="6510528" y="5440680"/>
+            <a:ext cx="4572000" cy="0"/>
+          </a:xfrm>
+          <a:prstGeom prst="line">
+            <a:avLst/>
+          </a:prstGeom>
+          <a:ln w="12700">
+            <a:solidFill>
+              <a:srgbClr val="D4D6D0"/>
+            </a:solidFill>
+          </a:ln>
+        </p:spPr>
+        <p:style>
+          <a:lnRef idx="2">
+            <a:schemeClr val="accent1"/>
+          </a:lnRef>
+          <a:fillRef idx="0">
+            <a:schemeClr val="accent1"/>
+          </a:fillRef>
+          <a:effectRef idx="0">
+            <a:schemeClr val="accent1"/>
+          </a:effectRef>
+          <a:fontRef idx="minor">
+            <a:schemeClr val="tx1"/>
+          </a:fontRef>
+        </p:style>
+      </p:cxnSp>
+      <p:cxnSp>
+        <p:nvCxnSpPr>
+          <p:cNvPr id="33" name="Connector 32"/>
+          <p:cNvCxnSpPr/>
+          <p:nvPr/>
+        </p:nvCxnSpPr>
+        <p:spPr>
+          <a:xfrm>
+            <a:off x="6510528" y="2834640"/>
+            <a:ext cx="0" cy="2606040"/>
+          </a:xfrm>
+          <a:prstGeom prst="line">
+            <a:avLst/>
+          </a:prstGeom>
+          <a:ln w="12700">
+            <a:solidFill>
+              <a:srgbClr val="D4D6D0"/>
+            </a:solidFill>
+          </a:ln>
+        </p:spPr>
+        <p:style>
+          <a:lnRef idx="2">
+            <a:schemeClr val="accent1"/>
+          </a:lnRef>
+          <a:fillRef idx="0">
+            <a:schemeClr val="accent1"/>
+          </a:fillRef>
+          <a:effectRef idx="0">
+            <a:schemeClr val="accent1"/>
+          </a:effectRef>
+          <a:fontRef idx="minor">
+            <a:schemeClr val="tx1"/>
+          </a:fontRef>
+        </p:style>
+      </p:cxnSp>
+      <p:sp>
+        <p:nvSpPr>
+          <p:cNvPr id="34" name="TextBox 33"/>
           <p:cNvSpPr txBox="1"/>
           <p:nvPr/>
         </p:nvSpPr>
         <p:spPr>
           <a:xfrm>
-            <a:off x="932688" y="5486400"/>
-            <a:ext cx="1828800" cy="274320"/>
+            <a:off x="10991088" y="5532120"/>
+            <a:ext cx="640080" cy="274320"/>
           </a:xfrm>
           <a:prstGeom prst="rect">
             <a:avLst/>
@@ -51048,21 +51928,21 @@
               </a:defRPr>
             </a:pPr>
             <a:r>
-              <a:t>simpler</a:t>
+              <a:t>x</a:t>
             </a:r>
           </a:p>
         </p:txBody>
       </p:sp>
       <p:sp>
         <p:nvSpPr>
-          <p:cNvPr id="12" name="TextBox 11"/>
+          <p:cNvPr id="35" name="TextBox 34"/>
           <p:cNvSpPr txBox="1"/>
           <p:nvPr/>
         </p:nvSpPr>
         <p:spPr>
           <a:xfrm>
-            <a:off x="5961888" y="5486400"/>
-            <a:ext cx="2194560" cy="274320"/>
+            <a:off x="6236208" y="2651760"/>
+            <a:ext cx="914400" cy="274320"/>
           </a:xfrm>
           <a:prstGeom prst="rect">
             <a:avLst/>
@@ -51087,221 +51967,2435 @@
               </a:defRPr>
             </a:pPr>
             <a:r>
-              <a:t>more flexible →</a:t>
+              <a:t>y</a:t>
             </a:r>
           </a:p>
         </p:txBody>
       </p:sp>
       <p:sp>
         <p:nvSpPr>
-          <p:cNvPr id="13" name="TextBox 12"/>
-          <p:cNvSpPr txBox="1"/>
+          <p:cNvPr id="36" name="Freeform 35"/>
+          <p:cNvSpPr/>
           <p:nvPr/>
         </p:nvSpPr>
         <p:spPr>
           <a:xfrm>
-            <a:off x="1051560" y="2377440"/>
-            <a:ext cx="1828800" cy="320040"/>
+            <a:off x="6510528" y="2919679"/>
+            <a:ext cx="4572000" cy="1805026"/>
           </a:xfrm>
-          <a:prstGeom prst="rect">
+          <a:custGeom>
             <a:avLst/>
-          </a:prstGeom>
+            <a:gdLst/>
+            <a:ahLst/>
+            <a:cxnLst/>
+            <a:rect l="l" t="t" r="r" b="b"/>
+            <a:pathLst>
+              <a:path w="5000" h="1974">
+                <a:moveTo>
+                  <a:pt x="0" y="766"/>
+                </a:moveTo>
+                <a:lnTo>
+                  <a:pt x="13" y="780"/>
+                </a:lnTo>
+                <a:lnTo>
+                  <a:pt x="25" y="794"/>
+                </a:lnTo>
+                <a:lnTo>
+                  <a:pt x="38" y="807"/>
+                </a:lnTo>
+                <a:lnTo>
+                  <a:pt x="50" y="821"/>
+                </a:lnTo>
+                <a:lnTo>
+                  <a:pt x="63" y="834"/>
+                </a:lnTo>
+                <a:lnTo>
+                  <a:pt x="75" y="848"/>
+                </a:lnTo>
+                <a:lnTo>
+                  <a:pt x="88" y="861"/>
+                </a:lnTo>
+                <a:lnTo>
+                  <a:pt x="100" y="874"/>
+                </a:lnTo>
+                <a:lnTo>
+                  <a:pt x="113" y="887"/>
+                </a:lnTo>
+                <a:lnTo>
+                  <a:pt x="125" y="900"/>
+                </a:lnTo>
+                <a:lnTo>
+                  <a:pt x="138" y="913"/>
+                </a:lnTo>
+                <a:lnTo>
+                  <a:pt x="150" y="926"/>
+                </a:lnTo>
+                <a:lnTo>
+                  <a:pt x="163" y="939"/>
+                </a:lnTo>
+                <a:lnTo>
+                  <a:pt x="175" y="952"/>
+                </a:lnTo>
+                <a:lnTo>
+                  <a:pt x="188" y="964"/>
+                </a:lnTo>
+                <a:lnTo>
+                  <a:pt x="201" y="977"/>
+                </a:lnTo>
+                <a:lnTo>
+                  <a:pt x="213" y="989"/>
+                </a:lnTo>
+                <a:lnTo>
+                  <a:pt x="226" y="1002"/>
+                </a:lnTo>
+                <a:lnTo>
+                  <a:pt x="238" y="1014"/>
+                </a:lnTo>
+                <a:lnTo>
+                  <a:pt x="251" y="1026"/>
+                </a:lnTo>
+                <a:lnTo>
+                  <a:pt x="263" y="1039"/>
+                </a:lnTo>
+                <a:lnTo>
+                  <a:pt x="276" y="1051"/>
+                </a:lnTo>
+                <a:lnTo>
+                  <a:pt x="288" y="1063"/>
+                </a:lnTo>
+                <a:lnTo>
+                  <a:pt x="301" y="1075"/>
+                </a:lnTo>
+                <a:lnTo>
+                  <a:pt x="313" y="1086"/>
+                </a:lnTo>
+                <a:lnTo>
+                  <a:pt x="326" y="1098"/>
+                </a:lnTo>
+                <a:lnTo>
+                  <a:pt x="338" y="1110"/>
+                </a:lnTo>
+                <a:lnTo>
+                  <a:pt x="351" y="1122"/>
+                </a:lnTo>
+                <a:lnTo>
+                  <a:pt x="363" y="1133"/>
+                </a:lnTo>
+                <a:lnTo>
+                  <a:pt x="376" y="1145"/>
+                </a:lnTo>
+                <a:lnTo>
+                  <a:pt x="388" y="1156"/>
+                </a:lnTo>
+                <a:lnTo>
+                  <a:pt x="401" y="1167"/>
+                </a:lnTo>
+                <a:lnTo>
+                  <a:pt x="414" y="1178"/>
+                </a:lnTo>
+                <a:lnTo>
+                  <a:pt x="426" y="1190"/>
+                </a:lnTo>
+                <a:lnTo>
+                  <a:pt x="439" y="1201"/>
+                </a:lnTo>
+                <a:lnTo>
+                  <a:pt x="451" y="1212"/>
+                </a:lnTo>
+                <a:lnTo>
+                  <a:pt x="464" y="1223"/>
+                </a:lnTo>
+                <a:lnTo>
+                  <a:pt x="476" y="1233"/>
+                </a:lnTo>
+                <a:lnTo>
+                  <a:pt x="489" y="1244"/>
+                </a:lnTo>
+                <a:lnTo>
+                  <a:pt x="501" y="1255"/>
+                </a:lnTo>
+                <a:lnTo>
+                  <a:pt x="514" y="1265"/>
+                </a:lnTo>
+                <a:lnTo>
+                  <a:pt x="526" y="1276"/>
+                </a:lnTo>
+                <a:lnTo>
+                  <a:pt x="539" y="1286"/>
+                </a:lnTo>
+                <a:lnTo>
+                  <a:pt x="551" y="1297"/>
+                </a:lnTo>
+                <a:lnTo>
+                  <a:pt x="564" y="1307"/>
+                </a:lnTo>
+                <a:lnTo>
+                  <a:pt x="576" y="1317"/>
+                </a:lnTo>
+                <a:lnTo>
+                  <a:pt x="589" y="1327"/>
+                </a:lnTo>
+                <a:lnTo>
+                  <a:pt x="602" y="1337"/>
+                </a:lnTo>
+                <a:lnTo>
+                  <a:pt x="614" y="1347"/>
+                </a:lnTo>
+                <a:lnTo>
+                  <a:pt x="627" y="1357"/>
+                </a:lnTo>
+                <a:lnTo>
+                  <a:pt x="639" y="1367"/>
+                </a:lnTo>
+                <a:lnTo>
+                  <a:pt x="652" y="1377"/>
+                </a:lnTo>
+                <a:lnTo>
+                  <a:pt x="664" y="1387"/>
+                </a:lnTo>
+                <a:lnTo>
+                  <a:pt x="677" y="1396"/>
+                </a:lnTo>
+                <a:lnTo>
+                  <a:pt x="689" y="1406"/>
+                </a:lnTo>
+                <a:lnTo>
+                  <a:pt x="702" y="1415"/>
+                </a:lnTo>
+                <a:lnTo>
+                  <a:pt x="714" y="1424"/>
+                </a:lnTo>
+                <a:lnTo>
+                  <a:pt x="727" y="1434"/>
+                </a:lnTo>
+                <a:lnTo>
+                  <a:pt x="739" y="1443"/>
+                </a:lnTo>
+                <a:lnTo>
+                  <a:pt x="752" y="1452"/>
+                </a:lnTo>
+                <a:lnTo>
+                  <a:pt x="764" y="1461"/>
+                </a:lnTo>
+                <a:lnTo>
+                  <a:pt x="777" y="1470"/>
+                </a:lnTo>
+                <a:lnTo>
+                  <a:pt x="789" y="1479"/>
+                </a:lnTo>
+                <a:lnTo>
+                  <a:pt x="802" y="1488"/>
+                </a:lnTo>
+                <a:lnTo>
+                  <a:pt x="815" y="1496"/>
+                </a:lnTo>
+                <a:lnTo>
+                  <a:pt x="827" y="1505"/>
+                </a:lnTo>
+                <a:lnTo>
+                  <a:pt x="840" y="1513"/>
+                </a:lnTo>
+                <a:lnTo>
+                  <a:pt x="852" y="1522"/>
+                </a:lnTo>
+                <a:lnTo>
+                  <a:pt x="865" y="1530"/>
+                </a:lnTo>
+                <a:lnTo>
+                  <a:pt x="877" y="1539"/>
+                </a:lnTo>
+                <a:lnTo>
+                  <a:pt x="890" y="1547"/>
+                </a:lnTo>
+                <a:lnTo>
+                  <a:pt x="902" y="1555"/>
+                </a:lnTo>
+                <a:lnTo>
+                  <a:pt x="915" y="1563"/>
+                </a:lnTo>
+                <a:lnTo>
+                  <a:pt x="927" y="1571"/>
+                </a:lnTo>
+                <a:lnTo>
+                  <a:pt x="940" y="1579"/>
+                </a:lnTo>
+                <a:lnTo>
+                  <a:pt x="952" y="1587"/>
+                </a:lnTo>
+                <a:lnTo>
+                  <a:pt x="965" y="1595"/>
+                </a:lnTo>
+                <a:lnTo>
+                  <a:pt x="977" y="1602"/>
+                </a:lnTo>
+                <a:lnTo>
+                  <a:pt x="990" y="1610"/>
+                </a:lnTo>
+                <a:lnTo>
+                  <a:pt x="1003" y="1617"/>
+                </a:lnTo>
+                <a:lnTo>
+                  <a:pt x="1015" y="1625"/>
+                </a:lnTo>
+                <a:lnTo>
+                  <a:pt x="1028" y="1632"/>
+                </a:lnTo>
+                <a:lnTo>
+                  <a:pt x="1040" y="1640"/>
+                </a:lnTo>
+                <a:lnTo>
+                  <a:pt x="1053" y="1647"/>
+                </a:lnTo>
+                <a:lnTo>
+                  <a:pt x="1065" y="1654"/>
+                </a:lnTo>
+                <a:lnTo>
+                  <a:pt x="1078" y="1661"/>
+                </a:lnTo>
+                <a:lnTo>
+                  <a:pt x="1090" y="1668"/>
+                </a:lnTo>
+                <a:lnTo>
+                  <a:pt x="1103" y="1675"/>
+                </a:lnTo>
+                <a:lnTo>
+                  <a:pt x="1115" y="1682"/>
+                </a:lnTo>
+                <a:lnTo>
+                  <a:pt x="1128" y="1688"/>
+                </a:lnTo>
+                <a:lnTo>
+                  <a:pt x="1140" y="1695"/>
+                </a:lnTo>
+                <a:lnTo>
+                  <a:pt x="1153" y="1702"/>
+                </a:lnTo>
+                <a:lnTo>
+                  <a:pt x="1165" y="1708"/>
+                </a:lnTo>
+                <a:lnTo>
+                  <a:pt x="1178" y="1715"/>
+                </a:lnTo>
+                <a:lnTo>
+                  <a:pt x="1190" y="1721"/>
+                </a:lnTo>
+                <a:lnTo>
+                  <a:pt x="1203" y="1727"/>
+                </a:lnTo>
+                <a:lnTo>
+                  <a:pt x="1216" y="1733"/>
+                </a:lnTo>
+                <a:lnTo>
+                  <a:pt x="1228" y="1740"/>
+                </a:lnTo>
+                <a:lnTo>
+                  <a:pt x="1241" y="1746"/>
+                </a:lnTo>
+                <a:lnTo>
+                  <a:pt x="1253" y="1752"/>
+                </a:lnTo>
+                <a:lnTo>
+                  <a:pt x="1266" y="1757"/>
+                </a:lnTo>
+                <a:lnTo>
+                  <a:pt x="1278" y="1763"/>
+                </a:lnTo>
+                <a:lnTo>
+                  <a:pt x="1291" y="1769"/>
+                </a:lnTo>
+                <a:lnTo>
+                  <a:pt x="1303" y="1775"/>
+                </a:lnTo>
+                <a:lnTo>
+                  <a:pt x="1316" y="1780"/>
+                </a:lnTo>
+                <a:lnTo>
+                  <a:pt x="1328" y="1786"/>
+                </a:lnTo>
+                <a:lnTo>
+                  <a:pt x="1341" y="1791"/>
+                </a:lnTo>
+                <a:lnTo>
+                  <a:pt x="1353" y="1796"/>
+                </a:lnTo>
+                <a:lnTo>
+                  <a:pt x="1366" y="1802"/>
+                </a:lnTo>
+                <a:lnTo>
+                  <a:pt x="1378" y="1807"/>
+                </a:lnTo>
+                <a:lnTo>
+                  <a:pt x="1391" y="1812"/>
+                </a:lnTo>
+                <a:lnTo>
+                  <a:pt x="1404" y="1817"/>
+                </a:lnTo>
+                <a:lnTo>
+                  <a:pt x="1416" y="1822"/>
+                </a:lnTo>
+                <a:lnTo>
+                  <a:pt x="1429" y="1827"/>
+                </a:lnTo>
+                <a:lnTo>
+                  <a:pt x="1441" y="1831"/>
+                </a:lnTo>
+                <a:lnTo>
+                  <a:pt x="1454" y="1836"/>
+                </a:lnTo>
+                <a:lnTo>
+                  <a:pt x="1466" y="1841"/>
+                </a:lnTo>
+                <a:lnTo>
+                  <a:pt x="1479" y="1845"/>
+                </a:lnTo>
+                <a:lnTo>
+                  <a:pt x="1491" y="1850"/>
+                </a:lnTo>
+                <a:lnTo>
+                  <a:pt x="1504" y="1854"/>
+                </a:lnTo>
+                <a:lnTo>
+                  <a:pt x="1516" y="1858"/>
+                </a:lnTo>
+                <a:lnTo>
+                  <a:pt x="1529" y="1863"/>
+                </a:lnTo>
+                <a:lnTo>
+                  <a:pt x="1541" y="1867"/>
+                </a:lnTo>
+                <a:lnTo>
+                  <a:pt x="1554" y="1871"/>
+                </a:lnTo>
+                <a:lnTo>
+                  <a:pt x="1566" y="1875"/>
+                </a:lnTo>
+                <a:lnTo>
+                  <a:pt x="1579" y="1879"/>
+                </a:lnTo>
+                <a:lnTo>
+                  <a:pt x="1591" y="1883"/>
+                </a:lnTo>
+                <a:lnTo>
+                  <a:pt x="1604" y="1886"/>
+                </a:lnTo>
+                <a:lnTo>
+                  <a:pt x="1617" y="1890"/>
+                </a:lnTo>
+                <a:lnTo>
+                  <a:pt x="1629" y="1894"/>
+                </a:lnTo>
+                <a:lnTo>
+                  <a:pt x="1642" y="1897"/>
+                </a:lnTo>
+                <a:lnTo>
+                  <a:pt x="1654" y="1901"/>
+                </a:lnTo>
+                <a:lnTo>
+                  <a:pt x="1667" y="1904"/>
+                </a:lnTo>
+                <a:lnTo>
+                  <a:pt x="1679" y="1907"/>
+                </a:lnTo>
+                <a:lnTo>
+                  <a:pt x="1692" y="1910"/>
+                </a:lnTo>
+                <a:lnTo>
+                  <a:pt x="1704" y="1913"/>
+                </a:lnTo>
+                <a:lnTo>
+                  <a:pt x="1717" y="1916"/>
+                </a:lnTo>
+                <a:lnTo>
+                  <a:pt x="1729" y="1919"/>
+                </a:lnTo>
+                <a:lnTo>
+                  <a:pt x="1742" y="1922"/>
+                </a:lnTo>
+                <a:lnTo>
+                  <a:pt x="1754" y="1925"/>
+                </a:lnTo>
+                <a:lnTo>
+                  <a:pt x="1767" y="1928"/>
+                </a:lnTo>
+                <a:lnTo>
+                  <a:pt x="1779" y="1931"/>
+                </a:lnTo>
+                <a:lnTo>
+                  <a:pt x="1792" y="1933"/>
+                </a:lnTo>
+                <a:lnTo>
+                  <a:pt x="1805" y="1936"/>
+                </a:lnTo>
+                <a:lnTo>
+                  <a:pt x="1817" y="1938"/>
+                </a:lnTo>
+                <a:lnTo>
+                  <a:pt x="1830" y="1940"/>
+                </a:lnTo>
+                <a:lnTo>
+                  <a:pt x="1842" y="1943"/>
+                </a:lnTo>
+                <a:lnTo>
+                  <a:pt x="1855" y="1945"/>
+                </a:lnTo>
+                <a:lnTo>
+                  <a:pt x="1867" y="1947"/>
+                </a:lnTo>
+                <a:lnTo>
+                  <a:pt x="1880" y="1949"/>
+                </a:lnTo>
+                <a:lnTo>
+                  <a:pt x="1892" y="1951"/>
+                </a:lnTo>
+                <a:lnTo>
+                  <a:pt x="1905" y="1953"/>
+                </a:lnTo>
+                <a:lnTo>
+                  <a:pt x="1917" y="1954"/>
+                </a:lnTo>
+                <a:lnTo>
+                  <a:pt x="1930" y="1956"/>
+                </a:lnTo>
+                <a:lnTo>
+                  <a:pt x="1942" y="1958"/>
+                </a:lnTo>
+                <a:lnTo>
+                  <a:pt x="1955" y="1959"/>
+                </a:lnTo>
+                <a:lnTo>
+                  <a:pt x="1967" y="1961"/>
+                </a:lnTo>
+                <a:lnTo>
+                  <a:pt x="1980" y="1962"/>
+                </a:lnTo>
+                <a:lnTo>
+                  <a:pt x="1992" y="1963"/>
+                </a:lnTo>
+                <a:lnTo>
+                  <a:pt x="2005" y="1965"/>
+                </a:lnTo>
+                <a:lnTo>
+                  <a:pt x="2018" y="1966"/>
+                </a:lnTo>
+                <a:lnTo>
+                  <a:pt x="2030" y="1967"/>
+                </a:lnTo>
+                <a:lnTo>
+                  <a:pt x="2043" y="1968"/>
+                </a:lnTo>
+                <a:lnTo>
+                  <a:pt x="2055" y="1969"/>
+                </a:lnTo>
+                <a:lnTo>
+                  <a:pt x="2068" y="1970"/>
+                </a:lnTo>
+                <a:lnTo>
+                  <a:pt x="2080" y="1970"/>
+                </a:lnTo>
+                <a:lnTo>
+                  <a:pt x="2093" y="1971"/>
+                </a:lnTo>
+                <a:lnTo>
+                  <a:pt x="2105" y="1972"/>
+                </a:lnTo>
+                <a:lnTo>
+                  <a:pt x="2118" y="1972"/>
+                </a:lnTo>
+                <a:lnTo>
+                  <a:pt x="2130" y="1973"/>
+                </a:lnTo>
+                <a:lnTo>
+                  <a:pt x="2143" y="1973"/>
+                </a:lnTo>
+                <a:lnTo>
+                  <a:pt x="2155" y="1973"/>
+                </a:lnTo>
+                <a:lnTo>
+                  <a:pt x="2168" y="1974"/>
+                </a:lnTo>
+                <a:lnTo>
+                  <a:pt x="2180" y="1974"/>
+                </a:lnTo>
+                <a:lnTo>
+                  <a:pt x="2193" y="1974"/>
+                </a:lnTo>
+                <a:lnTo>
+                  <a:pt x="2206" y="1974"/>
+                </a:lnTo>
+                <a:lnTo>
+                  <a:pt x="2218" y="1974"/>
+                </a:lnTo>
+                <a:lnTo>
+                  <a:pt x="2231" y="1973"/>
+                </a:lnTo>
+                <a:lnTo>
+                  <a:pt x="2243" y="1973"/>
+                </a:lnTo>
+                <a:lnTo>
+                  <a:pt x="2256" y="1973"/>
+                </a:lnTo>
+                <a:lnTo>
+                  <a:pt x="2268" y="1972"/>
+                </a:lnTo>
+                <a:lnTo>
+                  <a:pt x="2281" y="1972"/>
+                </a:lnTo>
+                <a:lnTo>
+                  <a:pt x="2293" y="1971"/>
+                </a:lnTo>
+                <a:lnTo>
+                  <a:pt x="2306" y="1971"/>
+                </a:lnTo>
+                <a:lnTo>
+                  <a:pt x="2318" y="1970"/>
+                </a:lnTo>
+                <a:lnTo>
+                  <a:pt x="2331" y="1969"/>
+                </a:lnTo>
+                <a:lnTo>
+                  <a:pt x="2343" y="1968"/>
+                </a:lnTo>
+                <a:lnTo>
+                  <a:pt x="2356" y="1967"/>
+                </a:lnTo>
+                <a:lnTo>
+                  <a:pt x="2368" y="1966"/>
+                </a:lnTo>
+                <a:lnTo>
+                  <a:pt x="2381" y="1965"/>
+                </a:lnTo>
+                <a:lnTo>
+                  <a:pt x="2393" y="1964"/>
+                </a:lnTo>
+                <a:lnTo>
+                  <a:pt x="2406" y="1962"/>
+                </a:lnTo>
+                <a:lnTo>
+                  <a:pt x="2419" y="1961"/>
+                </a:lnTo>
+                <a:lnTo>
+                  <a:pt x="2431" y="1960"/>
+                </a:lnTo>
+                <a:lnTo>
+                  <a:pt x="2444" y="1958"/>
+                </a:lnTo>
+                <a:lnTo>
+                  <a:pt x="2456" y="1956"/>
+                </a:lnTo>
+                <a:lnTo>
+                  <a:pt x="2469" y="1955"/>
+                </a:lnTo>
+                <a:lnTo>
+                  <a:pt x="2481" y="1953"/>
+                </a:lnTo>
+                <a:lnTo>
+                  <a:pt x="2494" y="1951"/>
+                </a:lnTo>
+                <a:lnTo>
+                  <a:pt x="2506" y="1949"/>
+                </a:lnTo>
+                <a:lnTo>
+                  <a:pt x="2519" y="1947"/>
+                </a:lnTo>
+                <a:lnTo>
+                  <a:pt x="2531" y="1945"/>
+                </a:lnTo>
+                <a:lnTo>
+                  <a:pt x="2544" y="1943"/>
+                </a:lnTo>
+                <a:lnTo>
+                  <a:pt x="2556" y="1941"/>
+                </a:lnTo>
+                <a:lnTo>
+                  <a:pt x="2569" y="1938"/>
+                </a:lnTo>
+                <a:lnTo>
+                  <a:pt x="2581" y="1936"/>
+                </a:lnTo>
+                <a:lnTo>
+                  <a:pt x="2594" y="1934"/>
+                </a:lnTo>
+                <a:lnTo>
+                  <a:pt x="2607" y="1931"/>
+                </a:lnTo>
+                <a:lnTo>
+                  <a:pt x="2619" y="1928"/>
+                </a:lnTo>
+                <a:lnTo>
+                  <a:pt x="2632" y="1926"/>
+                </a:lnTo>
+                <a:lnTo>
+                  <a:pt x="2644" y="1923"/>
+                </a:lnTo>
+                <a:lnTo>
+                  <a:pt x="2657" y="1920"/>
+                </a:lnTo>
+                <a:lnTo>
+                  <a:pt x="2669" y="1917"/>
+                </a:lnTo>
+                <a:lnTo>
+                  <a:pt x="2682" y="1914"/>
+                </a:lnTo>
+                <a:lnTo>
+                  <a:pt x="2694" y="1911"/>
+                </a:lnTo>
+                <a:lnTo>
+                  <a:pt x="2707" y="1908"/>
+                </a:lnTo>
+                <a:lnTo>
+                  <a:pt x="2719" y="1905"/>
+                </a:lnTo>
+                <a:lnTo>
+                  <a:pt x="2732" y="1901"/>
+                </a:lnTo>
+                <a:lnTo>
+                  <a:pt x="2744" y="1898"/>
+                </a:lnTo>
+                <a:lnTo>
+                  <a:pt x="2757" y="1894"/>
+                </a:lnTo>
+                <a:lnTo>
+                  <a:pt x="2769" y="1891"/>
+                </a:lnTo>
+                <a:lnTo>
+                  <a:pt x="2782" y="1887"/>
+                </a:lnTo>
+                <a:lnTo>
+                  <a:pt x="2794" y="1883"/>
+                </a:lnTo>
+                <a:lnTo>
+                  <a:pt x="2807" y="1880"/>
+                </a:lnTo>
+                <a:lnTo>
+                  <a:pt x="2820" y="1876"/>
+                </a:lnTo>
+                <a:lnTo>
+                  <a:pt x="2832" y="1872"/>
+                </a:lnTo>
+                <a:lnTo>
+                  <a:pt x="2845" y="1868"/>
+                </a:lnTo>
+                <a:lnTo>
+                  <a:pt x="2857" y="1864"/>
+                </a:lnTo>
+                <a:lnTo>
+                  <a:pt x="2870" y="1859"/>
+                </a:lnTo>
+                <a:lnTo>
+                  <a:pt x="2882" y="1855"/>
+                </a:lnTo>
+                <a:lnTo>
+                  <a:pt x="2895" y="1851"/>
+                </a:lnTo>
+                <a:lnTo>
+                  <a:pt x="2907" y="1846"/>
+                </a:lnTo>
+                <a:lnTo>
+                  <a:pt x="2920" y="1842"/>
+                </a:lnTo>
+                <a:lnTo>
+                  <a:pt x="2932" y="1837"/>
+                </a:lnTo>
+                <a:lnTo>
+                  <a:pt x="2945" y="1832"/>
+                </a:lnTo>
+                <a:lnTo>
+                  <a:pt x="2957" y="1828"/>
+                </a:lnTo>
+                <a:lnTo>
+                  <a:pt x="2970" y="1823"/>
+                </a:lnTo>
+                <a:lnTo>
+                  <a:pt x="2982" y="1818"/>
+                </a:lnTo>
+                <a:lnTo>
+                  <a:pt x="2995" y="1813"/>
+                </a:lnTo>
+                <a:lnTo>
+                  <a:pt x="3008" y="1808"/>
+                </a:lnTo>
+                <a:lnTo>
+                  <a:pt x="3020" y="1803"/>
+                </a:lnTo>
+                <a:lnTo>
+                  <a:pt x="3033" y="1797"/>
+                </a:lnTo>
+                <a:lnTo>
+                  <a:pt x="3045" y="1792"/>
+                </a:lnTo>
+                <a:lnTo>
+                  <a:pt x="3058" y="1787"/>
+                </a:lnTo>
+                <a:lnTo>
+                  <a:pt x="3070" y="1781"/>
+                </a:lnTo>
+                <a:lnTo>
+                  <a:pt x="3083" y="1776"/>
+                </a:lnTo>
+                <a:lnTo>
+                  <a:pt x="3095" y="1770"/>
+                </a:lnTo>
+                <a:lnTo>
+                  <a:pt x="3108" y="1764"/>
+                </a:lnTo>
+                <a:lnTo>
+                  <a:pt x="3120" y="1759"/>
+                </a:lnTo>
+                <a:lnTo>
+                  <a:pt x="3133" y="1753"/>
+                </a:lnTo>
+                <a:lnTo>
+                  <a:pt x="3145" y="1747"/>
+                </a:lnTo>
+                <a:lnTo>
+                  <a:pt x="3158" y="1741"/>
+                </a:lnTo>
+                <a:lnTo>
+                  <a:pt x="3170" y="1735"/>
+                </a:lnTo>
+                <a:lnTo>
+                  <a:pt x="3183" y="1729"/>
+                </a:lnTo>
+                <a:lnTo>
+                  <a:pt x="3195" y="1722"/>
+                </a:lnTo>
+                <a:lnTo>
+                  <a:pt x="3208" y="1716"/>
+                </a:lnTo>
+                <a:lnTo>
+                  <a:pt x="3221" y="1710"/>
+                </a:lnTo>
+                <a:lnTo>
+                  <a:pt x="3233" y="1703"/>
+                </a:lnTo>
+                <a:lnTo>
+                  <a:pt x="3246" y="1697"/>
+                </a:lnTo>
+                <a:lnTo>
+                  <a:pt x="3258" y="1690"/>
+                </a:lnTo>
+                <a:lnTo>
+                  <a:pt x="3271" y="1683"/>
+                </a:lnTo>
+                <a:lnTo>
+                  <a:pt x="3283" y="1676"/>
+                </a:lnTo>
+                <a:lnTo>
+                  <a:pt x="3296" y="1669"/>
+                </a:lnTo>
+                <a:lnTo>
+                  <a:pt x="3308" y="1663"/>
+                </a:lnTo>
+                <a:lnTo>
+                  <a:pt x="3321" y="1655"/>
+                </a:lnTo>
+                <a:lnTo>
+                  <a:pt x="3333" y="1648"/>
+                </a:lnTo>
+                <a:lnTo>
+                  <a:pt x="3346" y="1641"/>
+                </a:lnTo>
+                <a:lnTo>
+                  <a:pt x="3358" y="1634"/>
+                </a:lnTo>
+                <a:lnTo>
+                  <a:pt x="3371" y="1627"/>
+                </a:lnTo>
+                <a:lnTo>
+                  <a:pt x="3383" y="1619"/>
+                </a:lnTo>
+                <a:lnTo>
+                  <a:pt x="3396" y="1612"/>
+                </a:lnTo>
+                <a:lnTo>
+                  <a:pt x="3409" y="1604"/>
+                </a:lnTo>
+                <a:lnTo>
+                  <a:pt x="3421" y="1596"/>
+                </a:lnTo>
+                <a:lnTo>
+                  <a:pt x="3434" y="1589"/>
+                </a:lnTo>
+                <a:lnTo>
+                  <a:pt x="3446" y="1581"/>
+                </a:lnTo>
+                <a:lnTo>
+                  <a:pt x="3459" y="1573"/>
+                </a:lnTo>
+                <a:lnTo>
+                  <a:pt x="3471" y="1565"/>
+                </a:lnTo>
+                <a:lnTo>
+                  <a:pt x="3484" y="1557"/>
+                </a:lnTo>
+                <a:lnTo>
+                  <a:pt x="3496" y="1549"/>
+                </a:lnTo>
+                <a:lnTo>
+                  <a:pt x="3509" y="1540"/>
+                </a:lnTo>
+                <a:lnTo>
+                  <a:pt x="3521" y="1532"/>
+                </a:lnTo>
+                <a:lnTo>
+                  <a:pt x="3534" y="1524"/>
+                </a:lnTo>
+                <a:lnTo>
+                  <a:pt x="3546" y="1515"/>
+                </a:lnTo>
+                <a:lnTo>
+                  <a:pt x="3559" y="1507"/>
+                </a:lnTo>
+                <a:lnTo>
+                  <a:pt x="3571" y="1498"/>
+                </a:lnTo>
+                <a:lnTo>
+                  <a:pt x="3584" y="1489"/>
+                </a:lnTo>
+                <a:lnTo>
+                  <a:pt x="3596" y="1481"/>
+                </a:lnTo>
+                <a:lnTo>
+                  <a:pt x="3609" y="1472"/>
+                </a:lnTo>
+                <a:lnTo>
+                  <a:pt x="3622" y="1463"/>
+                </a:lnTo>
+                <a:lnTo>
+                  <a:pt x="3634" y="1454"/>
+                </a:lnTo>
+                <a:lnTo>
+                  <a:pt x="3647" y="1445"/>
+                </a:lnTo>
+                <a:lnTo>
+                  <a:pt x="3659" y="1436"/>
+                </a:lnTo>
+                <a:lnTo>
+                  <a:pt x="3672" y="1426"/>
+                </a:lnTo>
+                <a:lnTo>
+                  <a:pt x="3684" y="1417"/>
+                </a:lnTo>
+                <a:lnTo>
+                  <a:pt x="3697" y="1408"/>
+                </a:lnTo>
+                <a:lnTo>
+                  <a:pt x="3709" y="1398"/>
+                </a:lnTo>
+                <a:lnTo>
+                  <a:pt x="3722" y="1389"/>
+                </a:lnTo>
+                <a:lnTo>
+                  <a:pt x="3734" y="1379"/>
+                </a:lnTo>
+                <a:lnTo>
+                  <a:pt x="3747" y="1369"/>
+                </a:lnTo>
+                <a:lnTo>
+                  <a:pt x="3759" y="1359"/>
+                </a:lnTo>
+                <a:lnTo>
+                  <a:pt x="3772" y="1350"/>
+                </a:lnTo>
+                <a:lnTo>
+                  <a:pt x="3784" y="1340"/>
+                </a:lnTo>
+                <a:lnTo>
+                  <a:pt x="3797" y="1330"/>
+                </a:lnTo>
+                <a:lnTo>
+                  <a:pt x="3810" y="1319"/>
+                </a:lnTo>
+                <a:lnTo>
+                  <a:pt x="3822" y="1309"/>
+                </a:lnTo>
+                <a:lnTo>
+                  <a:pt x="3835" y="1299"/>
+                </a:lnTo>
+                <a:lnTo>
+                  <a:pt x="3847" y="1289"/>
+                </a:lnTo>
+                <a:lnTo>
+                  <a:pt x="3860" y="1278"/>
+                </a:lnTo>
+                <a:lnTo>
+                  <a:pt x="3872" y="1268"/>
+                </a:lnTo>
+                <a:lnTo>
+                  <a:pt x="3885" y="1257"/>
+                </a:lnTo>
+                <a:lnTo>
+                  <a:pt x="3897" y="1246"/>
+                </a:lnTo>
+                <a:lnTo>
+                  <a:pt x="3910" y="1236"/>
+                </a:lnTo>
+                <a:lnTo>
+                  <a:pt x="3922" y="1225"/>
+                </a:lnTo>
+                <a:lnTo>
+                  <a:pt x="3935" y="1214"/>
+                </a:lnTo>
+                <a:lnTo>
+                  <a:pt x="3947" y="1203"/>
+                </a:lnTo>
+                <a:lnTo>
+                  <a:pt x="3960" y="1192"/>
+                </a:lnTo>
+                <a:lnTo>
+                  <a:pt x="3972" y="1181"/>
+                </a:lnTo>
+                <a:lnTo>
+                  <a:pt x="3985" y="1170"/>
+                </a:lnTo>
+                <a:lnTo>
+                  <a:pt x="3997" y="1158"/>
+                </a:lnTo>
+                <a:lnTo>
+                  <a:pt x="4010" y="1147"/>
+                </a:lnTo>
+                <a:lnTo>
+                  <a:pt x="4023" y="1136"/>
+                </a:lnTo>
+                <a:lnTo>
+                  <a:pt x="4035" y="1124"/>
+                </a:lnTo>
+                <a:lnTo>
+                  <a:pt x="4048" y="1112"/>
+                </a:lnTo>
+                <a:lnTo>
+                  <a:pt x="4060" y="1101"/>
+                </a:lnTo>
+                <a:lnTo>
+                  <a:pt x="4073" y="1089"/>
+                </a:lnTo>
+                <a:lnTo>
+                  <a:pt x="4085" y="1077"/>
+                </a:lnTo>
+                <a:lnTo>
+                  <a:pt x="4098" y="1065"/>
+                </a:lnTo>
+                <a:lnTo>
+                  <a:pt x="4110" y="1053"/>
+                </a:lnTo>
+                <a:lnTo>
+                  <a:pt x="4123" y="1041"/>
+                </a:lnTo>
+                <a:lnTo>
+                  <a:pt x="4135" y="1029"/>
+                </a:lnTo>
+                <a:lnTo>
+                  <a:pt x="4148" y="1017"/>
+                </a:lnTo>
+                <a:lnTo>
+                  <a:pt x="4160" y="1004"/>
+                </a:lnTo>
+                <a:lnTo>
+                  <a:pt x="4173" y="992"/>
+                </a:lnTo>
+                <a:lnTo>
+                  <a:pt x="4185" y="980"/>
+                </a:lnTo>
+                <a:lnTo>
+                  <a:pt x="4198" y="967"/>
+                </a:lnTo>
+                <a:lnTo>
+                  <a:pt x="4211" y="954"/>
+                </a:lnTo>
+                <a:lnTo>
+                  <a:pt x="4223" y="942"/>
+                </a:lnTo>
+                <a:lnTo>
+                  <a:pt x="4236" y="929"/>
+                </a:lnTo>
+                <a:lnTo>
+                  <a:pt x="4248" y="916"/>
+                </a:lnTo>
+                <a:lnTo>
+                  <a:pt x="4261" y="903"/>
+                </a:lnTo>
+                <a:lnTo>
+                  <a:pt x="4273" y="890"/>
+                </a:lnTo>
+                <a:lnTo>
+                  <a:pt x="4286" y="877"/>
+                </a:lnTo>
+                <a:lnTo>
+                  <a:pt x="4298" y="864"/>
+                </a:lnTo>
+                <a:lnTo>
+                  <a:pt x="4311" y="850"/>
+                </a:lnTo>
+                <a:lnTo>
+                  <a:pt x="4323" y="837"/>
+                </a:lnTo>
+                <a:lnTo>
+                  <a:pt x="4336" y="824"/>
+                </a:lnTo>
+                <a:lnTo>
+                  <a:pt x="4348" y="810"/>
+                </a:lnTo>
+                <a:lnTo>
+                  <a:pt x="4361" y="797"/>
+                </a:lnTo>
+                <a:lnTo>
+                  <a:pt x="4373" y="783"/>
+                </a:lnTo>
+                <a:lnTo>
+                  <a:pt x="4386" y="769"/>
+                </a:lnTo>
+                <a:lnTo>
+                  <a:pt x="4398" y="755"/>
+                </a:lnTo>
+                <a:lnTo>
+                  <a:pt x="4411" y="742"/>
+                </a:lnTo>
+                <a:lnTo>
+                  <a:pt x="4424" y="728"/>
+                </a:lnTo>
+                <a:lnTo>
+                  <a:pt x="4436" y="713"/>
+                </a:lnTo>
+                <a:lnTo>
+                  <a:pt x="4449" y="699"/>
+                </a:lnTo>
+                <a:lnTo>
+                  <a:pt x="4461" y="685"/>
+                </a:lnTo>
+                <a:lnTo>
+                  <a:pt x="4474" y="671"/>
+                </a:lnTo>
+                <a:lnTo>
+                  <a:pt x="4486" y="656"/>
+                </a:lnTo>
+                <a:lnTo>
+                  <a:pt x="4499" y="642"/>
+                </a:lnTo>
+                <a:lnTo>
+                  <a:pt x="4511" y="628"/>
+                </a:lnTo>
+                <a:lnTo>
+                  <a:pt x="4524" y="613"/>
+                </a:lnTo>
+                <a:lnTo>
+                  <a:pt x="4536" y="598"/>
+                </a:lnTo>
+                <a:lnTo>
+                  <a:pt x="4549" y="583"/>
+                </a:lnTo>
+                <a:lnTo>
+                  <a:pt x="4561" y="569"/>
+                </a:lnTo>
+                <a:lnTo>
+                  <a:pt x="4574" y="554"/>
+                </a:lnTo>
+                <a:lnTo>
+                  <a:pt x="4586" y="539"/>
+                </a:lnTo>
+                <a:lnTo>
+                  <a:pt x="4599" y="524"/>
+                </a:lnTo>
+                <a:lnTo>
+                  <a:pt x="4612" y="509"/>
+                </a:lnTo>
+                <a:lnTo>
+                  <a:pt x="4624" y="493"/>
+                </a:lnTo>
+                <a:lnTo>
+                  <a:pt x="4637" y="478"/>
+                </a:lnTo>
+                <a:lnTo>
+                  <a:pt x="4649" y="463"/>
+                </a:lnTo>
+                <a:lnTo>
+                  <a:pt x="4662" y="447"/>
+                </a:lnTo>
+                <a:lnTo>
+                  <a:pt x="4674" y="432"/>
+                </a:lnTo>
+                <a:lnTo>
+                  <a:pt x="4687" y="416"/>
+                </a:lnTo>
+                <a:lnTo>
+                  <a:pt x="4699" y="400"/>
+                </a:lnTo>
+                <a:lnTo>
+                  <a:pt x="4712" y="384"/>
+                </a:lnTo>
+                <a:lnTo>
+                  <a:pt x="4724" y="369"/>
+                </a:lnTo>
+                <a:lnTo>
+                  <a:pt x="4737" y="353"/>
+                </a:lnTo>
+                <a:lnTo>
+                  <a:pt x="4749" y="337"/>
+                </a:lnTo>
+                <a:lnTo>
+                  <a:pt x="4762" y="321"/>
+                </a:lnTo>
+                <a:lnTo>
+                  <a:pt x="4774" y="304"/>
+                </a:lnTo>
+                <a:lnTo>
+                  <a:pt x="4787" y="288"/>
+                </a:lnTo>
+                <a:lnTo>
+                  <a:pt x="4799" y="272"/>
+                </a:lnTo>
+                <a:lnTo>
+                  <a:pt x="4812" y="255"/>
+                </a:lnTo>
+                <a:lnTo>
+                  <a:pt x="4825" y="239"/>
+                </a:lnTo>
+                <a:lnTo>
+                  <a:pt x="4837" y="222"/>
+                </a:lnTo>
+                <a:lnTo>
+                  <a:pt x="4850" y="206"/>
+                </a:lnTo>
+                <a:lnTo>
+                  <a:pt x="4862" y="189"/>
+                </a:lnTo>
+                <a:lnTo>
+                  <a:pt x="4875" y="172"/>
+                </a:lnTo>
+                <a:lnTo>
+                  <a:pt x="4887" y="155"/>
+                </a:lnTo>
+                <a:lnTo>
+                  <a:pt x="4900" y="138"/>
+                </a:lnTo>
+                <a:lnTo>
+                  <a:pt x="4912" y="121"/>
+                </a:lnTo>
+                <a:lnTo>
+                  <a:pt x="4925" y="104"/>
+                </a:lnTo>
+                <a:lnTo>
+                  <a:pt x="4937" y="87"/>
+                </a:lnTo>
+                <a:lnTo>
+                  <a:pt x="4950" y="70"/>
+                </a:lnTo>
+                <a:lnTo>
+                  <a:pt x="4962" y="52"/>
+                </a:lnTo>
+                <a:lnTo>
+                  <a:pt x="4975" y="35"/>
+                </a:lnTo>
+                <a:lnTo>
+                  <a:pt x="4987" y="17"/>
+                </a:lnTo>
+                <a:lnTo>
+                  <a:pt x="5000" y="0"/>
+                </a:lnTo>
+              </a:path>
+            </a:pathLst>
+          </a:custGeom>
           <a:noFill/>
+          <a:ln w="38100">
+            <a:solidFill>
+              <a:srgbClr val="C65326"/>
+            </a:solidFill>
+          </a:ln>
         </p:spPr>
+        <p:style>
+          <a:lnRef idx="1">
+            <a:schemeClr val="accent1"/>
+          </a:lnRef>
+          <a:fillRef idx="3">
+            <a:schemeClr val="accent1"/>
+          </a:fillRef>
+          <a:effectRef idx="0">
+            <a:schemeClr val="accent1"/>
+          </a:effectRef>
+          <a:fontRef idx="minor">
+            <a:schemeClr val="lt1"/>
+          </a:fontRef>
+        </p:style>
         <p:txBody>
-          <a:bodyPr wrap="square" lIns="0" rIns="0" tIns="0" bIns="0">
-            <a:spAutoFit/>
-          </a:bodyPr>
+          <a:bodyPr rtlCol="0" anchor="ctr"/>
           <a:lstStyle/>
           <a:p>
-            <a:pPr>
-              <a:spcAft>
-                <a:spcPts val="0"/>
-              </a:spcAft>
-              <a:defRPr sz="1600" b="0">
-                <a:solidFill>
-                  <a:srgbClr val="686C66"/>
-                </a:solidFill>
-                <a:latin typeface="Arial"/>
-              </a:defRPr>
-            </a:pPr>
-            <a:r>
-              <a:t>Underfit</a:t>
-            </a:r>
+            <a:pPr algn="ctr"/>
           </a:p>
         </p:txBody>
       </p:sp>
       <p:sp>
         <p:nvSpPr>
-          <p:cNvPr id="14" name="TextBox 13"/>
-          <p:cNvSpPr txBox="1"/>
+          <p:cNvPr id="37" name="Oval 36"/>
+          <p:cNvSpPr/>
           <p:nvPr/>
         </p:nvSpPr>
         <p:spPr>
           <a:xfrm>
-            <a:off x="3657600" y="2377440"/>
-            <a:ext cx="1828800" cy="320040"/>
+            <a:off x="10831758" y="3291393"/>
+            <a:ext cx="82296" cy="82296"/>
           </a:xfrm>
-          <a:prstGeom prst="rect">
+          <a:prstGeom prst="ellipse">
             <a:avLst/>
           </a:prstGeom>
-          <a:noFill/>
+          <a:solidFill>
+            <a:srgbClr val="F5F5F4"/>
+          </a:solidFill>
+          <a:ln w="19050">
+            <a:solidFill>
+              <a:srgbClr val="7963AF"/>
+            </a:solidFill>
+          </a:ln>
         </p:spPr>
+        <p:style>
+          <a:lnRef idx="1">
+            <a:schemeClr val="accent1"/>
+          </a:lnRef>
+          <a:fillRef idx="3">
+            <a:schemeClr val="accent1"/>
+          </a:fillRef>
+          <a:effectRef idx="0">
+            <a:schemeClr val="accent1"/>
+          </a:effectRef>
+          <a:fontRef idx="minor">
+            <a:schemeClr val="lt1"/>
+          </a:fontRef>
+        </p:style>
         <p:txBody>
-          <a:bodyPr wrap="square" lIns="0" rIns="0" tIns="0" bIns="0">
-            <a:spAutoFit/>
-          </a:bodyPr>
+          <a:bodyPr rtlCol="0" anchor="ctr"/>
           <a:lstStyle/>
           <a:p>
-            <a:pPr>
-              <a:spcAft>
-                <a:spcPts val="0"/>
-              </a:spcAft>
-              <a:defRPr sz="1600" b="0">
-                <a:solidFill>
-                  <a:srgbClr val="181D16"/>
-                </a:solidFill>
-                <a:latin typeface="Arial"/>
-              </a:defRPr>
-            </a:pPr>
-            <a:r>
-              <a:t>Balance</a:t>
-            </a:r>
+            <a:pPr algn="ctr"/>
           </a:p>
         </p:txBody>
       </p:sp>
       <p:sp>
         <p:nvSpPr>
-          <p:cNvPr id="15" name="TextBox 14"/>
-          <p:cNvSpPr txBox="1"/>
+          <p:cNvPr id="38" name="Oval 37"/>
+          <p:cNvSpPr/>
           <p:nvPr/>
         </p:nvSpPr>
         <p:spPr>
           <a:xfrm>
-            <a:off x="6163056" y="2377440"/>
-            <a:ext cx="1828800" cy="320040"/>
+            <a:off x="9980365" y="4456609"/>
+            <a:ext cx="82296" cy="82296"/>
           </a:xfrm>
-          <a:prstGeom prst="rect">
+          <a:prstGeom prst="ellipse">
             <a:avLst/>
           </a:prstGeom>
-          <a:noFill/>
+          <a:solidFill>
+            <a:srgbClr val="F5F5F4"/>
+          </a:solidFill>
+          <a:ln w="19050">
+            <a:solidFill>
+              <a:srgbClr val="7963AF"/>
+            </a:solidFill>
+          </a:ln>
         </p:spPr>
+        <p:style>
+          <a:lnRef idx="1">
+            <a:schemeClr val="accent1"/>
+          </a:lnRef>
+          <a:fillRef idx="3">
+            <a:schemeClr val="accent1"/>
+          </a:fillRef>
+          <a:effectRef idx="0">
+            <a:schemeClr val="accent1"/>
+          </a:effectRef>
+          <a:fontRef idx="minor">
+            <a:schemeClr val="lt1"/>
+          </a:fontRef>
+        </p:style>
         <p:txBody>
-          <a:bodyPr wrap="square" lIns="0" rIns="0" tIns="0" bIns="0">
-            <a:spAutoFit/>
-          </a:bodyPr>
+          <a:bodyPr rtlCol="0" anchor="ctr"/>
           <a:lstStyle/>
           <a:p>
-            <a:pPr>
-              <a:spcAft>
-                <a:spcPts val="0"/>
-              </a:spcAft>
-              <a:defRPr sz="1600" b="0">
-                <a:solidFill>
-                  <a:srgbClr val="686C66"/>
-                </a:solidFill>
-                <a:latin typeface="Arial"/>
-              </a:defRPr>
-            </a:pPr>
-            <a:r>
-              <a:t>Overfit</a:t>
-            </a:r>
+            <a:pPr algn="ctr"/>
           </a:p>
         </p:txBody>
       </p:sp>
       <p:sp>
         <p:nvSpPr>
-          <p:cNvPr id="16" name="TextBox 15"/>
-          <p:cNvSpPr txBox="1"/>
+          <p:cNvPr id="39" name="Oval 38"/>
+          <p:cNvSpPr/>
           <p:nvPr/>
         </p:nvSpPr>
         <p:spPr>
           <a:xfrm>
-            <a:off x="8275320" y="3401568"/>
-            <a:ext cx="3200400" cy="1280160"/>
+            <a:off x="7045318" y="3988549"/>
+            <a:ext cx="82296" cy="82296"/>
           </a:xfrm>
-          <a:prstGeom prst="rect">
+          <a:prstGeom prst="ellipse">
             <a:avLst/>
           </a:prstGeom>
-          <a:noFill/>
-        </p:spPr>
-        <p:txBody>
-          <a:bodyPr wrap="square" lIns="0" rIns="0" tIns="0" bIns="0">
-            <a:spAutoFit/>
-          </a:bodyPr>
-          <a:lstStyle/>
-          <a:p>
-            <a:pPr>
-              <a:spcAft>
-                <a:spcPts val="0"/>
-              </a:spcAft>
-              <a:defRPr sz="2800" b="0">
-                <a:solidFill>
-                  <a:srgbClr val="181D16"/>
-                </a:solidFill>
-                <a:latin typeface="Arial"/>
-              </a:defRPr>
-            </a:pPr>
-            <a:r>
-              <a:t>Choose using</a:t>
-            </a:r>
-          </a:p>
-          <a:p>
-            <a:pPr>
-              <a:spcAft>
-                <a:spcPts val="0"/>
-              </a:spcAft>
-              <a:defRPr sz="2800" b="0">
-                <a:solidFill>
-                  <a:srgbClr val="181D16"/>
-                </a:solidFill>
-                <a:latin typeface="Arial"/>
-              </a:defRPr>
-            </a:pPr>
-            <a:r>
-              <a:t>validation data.</a:t>
-            </a:r>
-          </a:p>
-        </p:txBody>
-      </p:sp>
-      <p:cxnSp>
-        <p:nvCxnSpPr>
-          <p:cNvPr id="17" name="Connector 16"/>
-          <p:cNvCxnSpPr/>
-          <p:nvPr/>
-        </p:nvCxnSpPr>
-        <p:spPr>
-          <a:xfrm>
-            <a:off x="841248" y="5989320"/>
-            <a:ext cx="256032" cy="0"/>
-          </a:xfrm>
-          <a:prstGeom prst="line">
-            <a:avLst/>
-          </a:prstGeom>
-          <a:ln w="25400">
+          <a:solidFill>
+            <a:srgbClr val="F5F5F4"/>
+          </a:solidFill>
+          <a:ln w="19050">
             <a:solidFill>
-              <a:srgbClr val="686C66"/>
+              <a:srgbClr val="7963AF"/>
             </a:solidFill>
           </a:ln>
         </p:spPr>
         <p:style>
-          <a:lnRef idx="2">
+          <a:lnRef idx="1">
             <a:schemeClr val="accent1"/>
           </a:lnRef>
-          <a:fillRef idx="0">
+          <a:fillRef idx="3">
             <a:schemeClr val="accent1"/>
           </a:fillRef>
           <a:effectRef idx="0">
             <a:schemeClr val="accent1"/>
           </a:effectRef>
           <a:fontRef idx="minor">
-            <a:schemeClr val="tx1"/>
+            <a:schemeClr val="lt1"/>
           </a:fontRef>
         </p:style>
-      </p:cxnSp>
+        <p:txBody>
+          <a:bodyPr rtlCol="0" anchor="ctr"/>
+          <a:lstStyle/>
+          <a:p>
+            <a:pPr algn="ctr"/>
+          </a:p>
+        </p:txBody>
+      </p:sp>
       <p:sp>
         <p:nvSpPr>
-          <p:cNvPr id="18" name="TextBox 17"/>
+          <p:cNvPr id="40" name="Oval 39"/>
+          <p:cNvSpPr/>
+          <p:nvPr/>
+        </p:nvSpPr>
+        <p:spPr>
+          <a:xfrm>
+            <a:off x="10250369" y="3597323"/>
+            <a:ext cx="82296" cy="82296"/>
+          </a:xfrm>
+          <a:prstGeom prst="ellipse">
+            <a:avLst/>
+          </a:prstGeom>
+          <a:solidFill>
+            <a:srgbClr val="F5F5F4"/>
+          </a:solidFill>
+          <a:ln w="19050">
+            <a:solidFill>
+              <a:srgbClr val="7963AF"/>
+            </a:solidFill>
+          </a:ln>
+        </p:spPr>
+        <p:style>
+          <a:lnRef idx="1">
+            <a:schemeClr val="accent1"/>
+          </a:lnRef>
+          <a:fillRef idx="3">
+            <a:schemeClr val="accent1"/>
+          </a:fillRef>
+          <a:effectRef idx="0">
+            <a:schemeClr val="accent1"/>
+          </a:effectRef>
+          <a:fontRef idx="minor">
+            <a:schemeClr val="lt1"/>
+          </a:fontRef>
+        </p:style>
+        <p:txBody>
+          <a:bodyPr rtlCol="0" anchor="ctr"/>
+          <a:lstStyle/>
+          <a:p>
+            <a:pPr algn="ctr"/>
+          </a:p>
+        </p:txBody>
+      </p:sp>
+      <p:sp>
+        <p:nvSpPr>
+          <p:cNvPr id="41" name="Oval 40"/>
+          <p:cNvSpPr/>
+          <p:nvPr/>
+        </p:nvSpPr>
+        <p:spPr>
+          <a:xfrm>
+            <a:off x="10351337" y="4489544"/>
+            <a:ext cx="82296" cy="82296"/>
+          </a:xfrm>
+          <a:prstGeom prst="ellipse">
+            <a:avLst/>
+          </a:prstGeom>
+          <a:solidFill>
+            <a:srgbClr val="F5F5F4"/>
+          </a:solidFill>
+          <a:ln w="19050">
+            <a:solidFill>
+              <a:srgbClr val="7963AF"/>
+            </a:solidFill>
+          </a:ln>
+        </p:spPr>
+        <p:style>
+          <a:lnRef idx="1">
+            <a:schemeClr val="accent1"/>
+          </a:lnRef>
+          <a:fillRef idx="3">
+            <a:schemeClr val="accent1"/>
+          </a:fillRef>
+          <a:effectRef idx="0">
+            <a:schemeClr val="accent1"/>
+          </a:effectRef>
+          <a:fontRef idx="minor">
+            <a:schemeClr val="lt1"/>
+          </a:fontRef>
+        </p:style>
+        <p:txBody>
+          <a:bodyPr rtlCol="0" anchor="ctr"/>
+          <a:lstStyle/>
+          <a:p>
+            <a:pPr algn="ctr"/>
+          </a:p>
+        </p:txBody>
+      </p:sp>
+      <p:sp>
+        <p:nvSpPr>
+          <p:cNvPr id="42" name="Oval 41"/>
+          <p:cNvSpPr/>
+          <p:nvPr/>
+        </p:nvSpPr>
+        <p:spPr>
+          <a:xfrm>
+            <a:off x="8068587" y="5041164"/>
+            <a:ext cx="82296" cy="82296"/>
+          </a:xfrm>
+          <a:prstGeom prst="ellipse">
+            <a:avLst/>
+          </a:prstGeom>
+          <a:solidFill>
+            <a:srgbClr val="F5F5F4"/>
+          </a:solidFill>
+          <a:ln w="19050">
+            <a:solidFill>
+              <a:srgbClr val="7963AF"/>
+            </a:solidFill>
+          </a:ln>
+        </p:spPr>
+        <p:style>
+          <a:lnRef idx="1">
+            <a:schemeClr val="accent1"/>
+          </a:lnRef>
+          <a:fillRef idx="3">
+            <a:schemeClr val="accent1"/>
+          </a:fillRef>
+          <a:effectRef idx="0">
+            <a:schemeClr val="accent1"/>
+          </a:effectRef>
+          <a:fontRef idx="minor">
+            <a:schemeClr val="lt1"/>
+          </a:fontRef>
+        </p:style>
+        <p:txBody>
+          <a:bodyPr rtlCol="0" anchor="ctr"/>
+          <a:lstStyle/>
+          <a:p>
+            <a:pPr algn="ctr"/>
+          </a:p>
+        </p:txBody>
+      </p:sp>
+      <p:sp>
+        <p:nvSpPr>
+          <p:cNvPr id="43" name="Oval 42"/>
+          <p:cNvSpPr/>
+          <p:nvPr/>
+        </p:nvSpPr>
+        <p:spPr>
+          <a:xfrm>
+            <a:off x="8807543" y="4549676"/>
+            <a:ext cx="82296" cy="82296"/>
+          </a:xfrm>
+          <a:prstGeom prst="ellipse">
+            <a:avLst/>
+          </a:prstGeom>
+          <a:solidFill>
+            <a:srgbClr val="F5F5F4"/>
+          </a:solidFill>
+          <a:ln w="19050">
+            <a:solidFill>
+              <a:srgbClr val="7963AF"/>
+            </a:solidFill>
+          </a:ln>
+        </p:spPr>
+        <p:style>
+          <a:lnRef idx="1">
+            <a:schemeClr val="accent1"/>
+          </a:lnRef>
+          <a:fillRef idx="3">
+            <a:schemeClr val="accent1"/>
+          </a:fillRef>
+          <a:effectRef idx="0">
+            <a:schemeClr val="accent1"/>
+          </a:effectRef>
+          <a:fontRef idx="minor">
+            <a:schemeClr val="lt1"/>
+          </a:fontRef>
+        </p:style>
+        <p:txBody>
+          <a:bodyPr rtlCol="0" anchor="ctr"/>
+          <a:lstStyle/>
+          <a:p>
+            <a:pPr algn="ctr"/>
+          </a:p>
+        </p:txBody>
+      </p:sp>
+      <p:sp>
+        <p:nvSpPr>
+          <p:cNvPr id="44" name="Oval 43"/>
+          <p:cNvSpPr/>
+          <p:nvPr/>
+        </p:nvSpPr>
+        <p:spPr>
+          <a:xfrm>
+            <a:off x="9224009" y="4592386"/>
+            <a:ext cx="82296" cy="82296"/>
+          </a:xfrm>
+          <a:prstGeom prst="ellipse">
+            <a:avLst/>
+          </a:prstGeom>
+          <a:solidFill>
+            <a:srgbClr val="F5F5F4"/>
+          </a:solidFill>
+          <a:ln w="19050">
+            <a:solidFill>
+              <a:srgbClr val="7963AF"/>
+            </a:solidFill>
+          </a:ln>
+        </p:spPr>
+        <p:style>
+          <a:lnRef idx="1">
+            <a:schemeClr val="accent1"/>
+          </a:lnRef>
+          <a:fillRef idx="3">
+            <a:schemeClr val="accent1"/>
+          </a:fillRef>
+          <a:effectRef idx="0">
+            <a:schemeClr val="accent1"/>
+          </a:effectRef>
+          <a:fontRef idx="minor">
+            <a:schemeClr val="lt1"/>
+          </a:fontRef>
+        </p:style>
+        <p:txBody>
+          <a:bodyPr rtlCol="0" anchor="ctr"/>
+          <a:lstStyle/>
+          <a:p>
+            <a:pPr algn="ctr"/>
+          </a:p>
+        </p:txBody>
+      </p:sp>
+      <p:sp>
+        <p:nvSpPr>
+          <p:cNvPr id="45" name="Oval 44"/>
+          <p:cNvSpPr/>
+          <p:nvPr/>
+        </p:nvSpPr>
+        <p:spPr>
+          <a:xfrm>
+            <a:off x="8018537" y="4601400"/>
+            <a:ext cx="82296" cy="82296"/>
+          </a:xfrm>
+          <a:prstGeom prst="ellipse">
+            <a:avLst/>
+          </a:prstGeom>
+          <a:solidFill>
+            <a:srgbClr val="F5F5F4"/>
+          </a:solidFill>
+          <a:ln w="19050">
+            <a:solidFill>
+              <a:srgbClr val="7963AF"/>
+            </a:solidFill>
+          </a:ln>
+        </p:spPr>
+        <p:style>
+          <a:lnRef idx="1">
+            <a:schemeClr val="accent1"/>
+          </a:lnRef>
+          <a:fillRef idx="3">
+            <a:schemeClr val="accent1"/>
+          </a:fillRef>
+          <a:effectRef idx="0">
+            <a:schemeClr val="accent1"/>
+          </a:effectRef>
+          <a:fontRef idx="minor">
+            <a:schemeClr val="lt1"/>
+          </a:fontRef>
+        </p:style>
+        <p:txBody>
+          <a:bodyPr rtlCol="0" anchor="ctr"/>
+          <a:lstStyle/>
+          <a:p>
+            <a:pPr algn="ctr"/>
+          </a:p>
+        </p:txBody>
+      </p:sp>
+      <p:sp>
+        <p:nvSpPr>
+          <p:cNvPr id="46" name="Oval 45"/>
+          <p:cNvSpPr/>
+          <p:nvPr/>
+        </p:nvSpPr>
+        <p:spPr>
+          <a:xfrm>
+            <a:off x="9312278" y="4740978"/>
+            <a:ext cx="82296" cy="82296"/>
+          </a:xfrm>
+          <a:prstGeom prst="ellipse">
+            <a:avLst/>
+          </a:prstGeom>
+          <a:solidFill>
+            <a:srgbClr val="F5F5F4"/>
+          </a:solidFill>
+          <a:ln w="19050">
+            <a:solidFill>
+              <a:srgbClr val="7963AF"/>
+            </a:solidFill>
+          </a:ln>
+        </p:spPr>
+        <p:style>
+          <a:lnRef idx="1">
+            <a:schemeClr val="accent1"/>
+          </a:lnRef>
+          <a:fillRef idx="3">
+            <a:schemeClr val="accent1"/>
+          </a:fillRef>
+          <a:effectRef idx="0">
+            <a:schemeClr val="accent1"/>
+          </a:effectRef>
+          <a:fontRef idx="minor">
+            <a:schemeClr val="lt1"/>
+          </a:fontRef>
+        </p:style>
+        <p:txBody>
+          <a:bodyPr rtlCol="0" anchor="ctr"/>
+          <a:lstStyle/>
+          <a:p>
+            <a:pPr algn="ctr"/>
+          </a:p>
+        </p:txBody>
+      </p:sp>
+      <p:sp>
+        <p:nvSpPr>
+          <p:cNvPr id="47" name="Oval 46"/>
+          <p:cNvSpPr/>
+          <p:nvPr/>
+        </p:nvSpPr>
+        <p:spPr>
+          <a:xfrm>
+            <a:off x="9818299" y="3912574"/>
+            <a:ext cx="82296" cy="82296"/>
+          </a:xfrm>
+          <a:prstGeom prst="ellipse">
+            <a:avLst/>
+          </a:prstGeom>
+          <a:solidFill>
+            <a:srgbClr val="F5F5F4"/>
+          </a:solidFill>
+          <a:ln w="19050">
+            <a:solidFill>
+              <a:srgbClr val="7963AF"/>
+            </a:solidFill>
+          </a:ln>
+        </p:spPr>
+        <p:style>
+          <a:lnRef idx="1">
+            <a:schemeClr val="accent1"/>
+          </a:lnRef>
+          <a:fillRef idx="3">
+            <a:schemeClr val="accent1"/>
+          </a:fillRef>
+          <a:effectRef idx="0">
+            <a:schemeClr val="accent1"/>
+          </a:effectRef>
+          <a:fontRef idx="minor">
+            <a:schemeClr val="lt1"/>
+          </a:fontRef>
+        </p:style>
+        <p:txBody>
+          <a:bodyPr rtlCol="0" anchor="ctr"/>
+          <a:lstStyle/>
+          <a:p>
+            <a:pPr algn="ctr"/>
+          </a:p>
+        </p:txBody>
+      </p:sp>
+      <p:sp>
+        <p:nvSpPr>
+          <p:cNvPr id="48" name="Oval 47"/>
+          <p:cNvSpPr/>
+          <p:nvPr/>
+        </p:nvSpPr>
+        <p:spPr>
+          <a:xfrm>
+            <a:off x="10406275" y="3526555"/>
+            <a:ext cx="82296" cy="82296"/>
+          </a:xfrm>
+          <a:prstGeom prst="ellipse">
+            <a:avLst/>
+          </a:prstGeom>
+          <a:solidFill>
+            <a:srgbClr val="F5F5F4"/>
+          </a:solidFill>
+          <a:ln w="19050">
+            <a:solidFill>
+              <a:srgbClr val="7963AF"/>
+            </a:solidFill>
+          </a:ln>
+        </p:spPr>
+        <p:style>
+          <a:lnRef idx="1">
+            <a:schemeClr val="accent1"/>
+          </a:lnRef>
+          <a:fillRef idx="3">
+            <a:schemeClr val="accent1"/>
+          </a:fillRef>
+          <a:effectRef idx="0">
+            <a:schemeClr val="accent1"/>
+          </a:effectRef>
+          <a:fontRef idx="minor">
+            <a:schemeClr val="lt1"/>
+          </a:fontRef>
+        </p:style>
+        <p:txBody>
+          <a:bodyPr rtlCol="0" anchor="ctr"/>
+          <a:lstStyle/>
+          <a:p>
+            <a:pPr algn="ctr"/>
+          </a:p>
+        </p:txBody>
+      </p:sp>
+      <p:sp>
+        <p:nvSpPr>
+          <p:cNvPr id="49" name="Oval 48"/>
+          <p:cNvSpPr/>
+          <p:nvPr/>
+        </p:nvSpPr>
+        <p:spPr>
+          <a:xfrm>
+            <a:off x="8013913" y="4572798"/>
+            <a:ext cx="82296" cy="82296"/>
+          </a:xfrm>
+          <a:prstGeom prst="ellipse">
+            <a:avLst/>
+          </a:prstGeom>
+          <a:solidFill>
+            <a:srgbClr val="F5F5F4"/>
+          </a:solidFill>
+          <a:ln w="19050">
+            <a:solidFill>
+              <a:srgbClr val="7963AF"/>
+            </a:solidFill>
+          </a:ln>
+        </p:spPr>
+        <p:style>
+          <a:lnRef idx="1">
+            <a:schemeClr val="accent1"/>
+          </a:lnRef>
+          <a:fillRef idx="3">
+            <a:schemeClr val="accent1"/>
+          </a:fillRef>
+          <a:effectRef idx="0">
+            <a:schemeClr val="accent1"/>
+          </a:effectRef>
+          <a:fontRef idx="minor">
+            <a:schemeClr val="lt1"/>
+          </a:fontRef>
+        </p:style>
+        <p:txBody>
+          <a:bodyPr rtlCol="0" anchor="ctr"/>
+          <a:lstStyle/>
+          <a:p>
+            <a:pPr algn="ctr"/>
+          </a:p>
+        </p:txBody>
+      </p:sp>
+      <p:sp>
+        <p:nvSpPr>
+          <p:cNvPr id="50" name="Oval 49"/>
+          <p:cNvSpPr/>
+          <p:nvPr/>
+        </p:nvSpPr>
+        <p:spPr>
+          <a:xfrm>
+            <a:off x="8432090" y="4247554"/>
+            <a:ext cx="82296" cy="82296"/>
+          </a:xfrm>
+          <a:prstGeom prst="ellipse">
+            <a:avLst/>
+          </a:prstGeom>
+          <a:solidFill>
+            <a:srgbClr val="F5F5F4"/>
+          </a:solidFill>
+          <a:ln w="19050">
+            <a:solidFill>
+              <a:srgbClr val="7963AF"/>
+            </a:solidFill>
+          </a:ln>
+        </p:spPr>
+        <p:style>
+          <a:lnRef idx="1">
+            <a:schemeClr val="accent1"/>
+          </a:lnRef>
+          <a:fillRef idx="3">
+            <a:schemeClr val="accent1"/>
+          </a:fillRef>
+          <a:effectRef idx="0">
+            <a:schemeClr val="accent1"/>
+          </a:effectRef>
+          <a:fontRef idx="minor">
+            <a:schemeClr val="lt1"/>
+          </a:fontRef>
+        </p:style>
+        <p:txBody>
+          <a:bodyPr rtlCol="0" anchor="ctr"/>
+          <a:lstStyle/>
+          <a:p>
+            <a:pPr algn="ctr"/>
+          </a:p>
+        </p:txBody>
+      </p:sp>
+      <p:sp>
+        <p:nvSpPr>
+          <p:cNvPr id="51" name="Oval 50"/>
+          <p:cNvSpPr/>
+          <p:nvPr/>
+        </p:nvSpPr>
+        <p:spPr>
+          <a:xfrm>
+            <a:off x="9185977" y="4341586"/>
+            <a:ext cx="82296" cy="82296"/>
+          </a:xfrm>
+          <a:prstGeom prst="ellipse">
+            <a:avLst/>
+          </a:prstGeom>
+          <a:solidFill>
+            <a:srgbClr val="F5F5F4"/>
+          </a:solidFill>
+          <a:ln w="19050">
+            <a:solidFill>
+              <a:srgbClr val="7963AF"/>
+            </a:solidFill>
+          </a:ln>
+        </p:spPr>
+        <p:style>
+          <a:lnRef idx="1">
+            <a:schemeClr val="accent1"/>
+          </a:lnRef>
+          <a:fillRef idx="3">
+            <a:schemeClr val="accent1"/>
+          </a:fillRef>
+          <a:effectRef idx="0">
+            <a:schemeClr val="accent1"/>
+          </a:effectRef>
+          <a:fontRef idx="minor">
+            <a:schemeClr val="lt1"/>
+          </a:fontRef>
+        </p:style>
+        <p:txBody>
+          <a:bodyPr rtlCol="0" anchor="ctr"/>
+          <a:lstStyle/>
+          <a:p>
+            <a:pPr algn="ctr"/>
+          </a:p>
+        </p:txBody>
+      </p:sp>
+      <p:sp>
+        <p:nvSpPr>
+          <p:cNvPr id="52" name="Oval 51"/>
+          <p:cNvSpPr/>
+          <p:nvPr/>
+        </p:nvSpPr>
+        <p:spPr>
+          <a:xfrm>
+            <a:off x="10930179" y="3580829"/>
+            <a:ext cx="82296" cy="82296"/>
+          </a:xfrm>
+          <a:prstGeom prst="ellipse">
+            <a:avLst/>
+          </a:prstGeom>
+          <a:solidFill>
+            <a:srgbClr val="F5F5F4"/>
+          </a:solidFill>
+          <a:ln w="19050">
+            <a:solidFill>
+              <a:srgbClr val="7963AF"/>
+            </a:solidFill>
+          </a:ln>
+        </p:spPr>
+        <p:style>
+          <a:lnRef idx="1">
+            <a:schemeClr val="accent1"/>
+          </a:lnRef>
+          <a:fillRef idx="3">
+            <a:schemeClr val="accent1"/>
+          </a:fillRef>
+          <a:effectRef idx="0">
+            <a:schemeClr val="accent1"/>
+          </a:effectRef>
+          <a:fontRef idx="minor">
+            <a:schemeClr val="lt1"/>
+          </a:fontRef>
+        </p:style>
+        <p:txBody>
+          <a:bodyPr rtlCol="0" anchor="ctr"/>
+          <a:lstStyle/>
+          <a:p>
+            <a:pPr algn="ctr"/>
+          </a:p>
+        </p:txBody>
+      </p:sp>
+      <p:sp>
+        <p:nvSpPr>
+          <p:cNvPr id="53" name="Oval 52"/>
+          <p:cNvSpPr/>
+          <p:nvPr/>
+        </p:nvSpPr>
+        <p:spPr>
+          <a:xfrm>
+            <a:off x="10711597" y="3388871"/>
+            <a:ext cx="82296" cy="82296"/>
+          </a:xfrm>
+          <a:prstGeom prst="ellipse">
+            <a:avLst/>
+          </a:prstGeom>
+          <a:solidFill>
+            <a:srgbClr val="F5F5F4"/>
+          </a:solidFill>
+          <a:ln w="19050">
+            <a:solidFill>
+              <a:srgbClr val="7963AF"/>
+            </a:solidFill>
+          </a:ln>
+        </p:spPr>
+        <p:style>
+          <a:lnRef idx="1">
+            <a:schemeClr val="accent1"/>
+          </a:lnRef>
+          <a:fillRef idx="3">
+            <a:schemeClr val="accent1"/>
+          </a:fillRef>
+          <a:effectRef idx="0">
+            <a:schemeClr val="accent1"/>
+          </a:effectRef>
+          <a:fontRef idx="minor">
+            <a:schemeClr val="lt1"/>
+          </a:fontRef>
+        </p:style>
+        <p:txBody>
+          <a:bodyPr rtlCol="0" anchor="ctr"/>
+          <a:lstStyle/>
+          <a:p>
+            <a:pPr algn="ctr"/>
+          </a:p>
+        </p:txBody>
+      </p:sp>
+      <p:sp>
+        <p:nvSpPr>
+          <p:cNvPr id="54" name="Oval 53"/>
+          <p:cNvSpPr/>
+          <p:nvPr/>
+        </p:nvSpPr>
+        <p:spPr>
+          <a:xfrm>
+            <a:off x="6736761" y="4368120"/>
+            <a:ext cx="82296" cy="82296"/>
+          </a:xfrm>
+          <a:prstGeom prst="ellipse">
+            <a:avLst/>
+          </a:prstGeom>
+          <a:solidFill>
+            <a:srgbClr val="F5F5F4"/>
+          </a:solidFill>
+          <a:ln w="19050">
+            <a:solidFill>
+              <a:srgbClr val="7963AF"/>
+            </a:solidFill>
+          </a:ln>
+        </p:spPr>
+        <p:style>
+          <a:lnRef idx="1">
+            <a:schemeClr val="accent1"/>
+          </a:lnRef>
+          <a:fillRef idx="3">
+            <a:schemeClr val="accent1"/>
+          </a:fillRef>
+          <a:effectRef idx="0">
+            <a:schemeClr val="accent1"/>
+          </a:effectRef>
+          <a:fontRef idx="minor">
+            <a:schemeClr val="lt1"/>
+          </a:fontRef>
+        </p:style>
+        <p:txBody>
+          <a:bodyPr rtlCol="0" anchor="ctr"/>
+          <a:lstStyle/>
+          <a:p>
+            <a:pPr algn="ctr"/>
+          </a:p>
+        </p:txBody>
+      </p:sp>
+      <p:sp>
+        <p:nvSpPr>
+          <p:cNvPr id="55" name="Oval 54"/>
+          <p:cNvSpPr/>
+          <p:nvPr/>
+        </p:nvSpPr>
+        <p:spPr>
+          <a:xfrm>
+            <a:off x="9967059" y="3820248"/>
+            <a:ext cx="82296" cy="82296"/>
+          </a:xfrm>
+          <a:prstGeom prst="ellipse">
+            <a:avLst/>
+          </a:prstGeom>
+          <a:solidFill>
+            <a:srgbClr val="F5F5F4"/>
+          </a:solidFill>
+          <a:ln w="19050">
+            <a:solidFill>
+              <a:srgbClr val="7963AF"/>
+            </a:solidFill>
+          </a:ln>
+        </p:spPr>
+        <p:style>
+          <a:lnRef idx="1">
+            <a:schemeClr val="accent1"/>
+          </a:lnRef>
+          <a:fillRef idx="3">
+            <a:schemeClr val="accent1"/>
+          </a:fillRef>
+          <a:effectRef idx="0">
+            <a:schemeClr val="accent1"/>
+          </a:effectRef>
+          <a:fontRef idx="minor">
+            <a:schemeClr val="lt1"/>
+          </a:fontRef>
+        </p:style>
+        <p:txBody>
+          <a:bodyPr rtlCol="0" anchor="ctr"/>
+          <a:lstStyle/>
+          <a:p>
+            <a:pPr algn="ctr"/>
+          </a:p>
+        </p:txBody>
+      </p:sp>
+      <p:sp>
+        <p:nvSpPr>
+          <p:cNvPr id="56" name="Oval 55"/>
+          <p:cNvSpPr/>
+          <p:nvPr/>
+        </p:nvSpPr>
+        <p:spPr>
+          <a:xfrm>
+            <a:off x="7189676" y="4335344"/>
+            <a:ext cx="82296" cy="82296"/>
+          </a:xfrm>
+          <a:prstGeom prst="ellipse">
+            <a:avLst/>
+          </a:prstGeom>
+          <a:solidFill>
+            <a:srgbClr val="F5F5F4"/>
+          </a:solidFill>
+          <a:ln w="19050">
+            <a:solidFill>
+              <a:srgbClr val="7963AF"/>
+            </a:solidFill>
+          </a:ln>
+        </p:spPr>
+        <p:style>
+          <a:lnRef idx="1">
+            <a:schemeClr val="accent1"/>
+          </a:lnRef>
+          <a:fillRef idx="3">
+            <a:schemeClr val="accent1"/>
+          </a:fillRef>
+          <a:effectRef idx="0">
+            <a:schemeClr val="accent1"/>
+          </a:effectRef>
+          <a:fontRef idx="minor">
+            <a:schemeClr val="lt1"/>
+          </a:fontRef>
+        </p:style>
+        <p:txBody>
+          <a:bodyPr rtlCol="0" anchor="ctr"/>
+          <a:lstStyle/>
+          <a:p>
+            <a:pPr algn="ctr"/>
+          </a:p>
+        </p:txBody>
+      </p:sp>
+      <p:sp>
+        <p:nvSpPr>
+          <p:cNvPr id="57" name="Oval 56"/>
+          <p:cNvSpPr/>
+          <p:nvPr/>
+        </p:nvSpPr>
+        <p:spPr>
+          <a:xfrm>
+            <a:off x="7738303" y="4596347"/>
+            <a:ext cx="82296" cy="82296"/>
+          </a:xfrm>
+          <a:prstGeom prst="ellipse">
+            <a:avLst/>
+          </a:prstGeom>
+          <a:solidFill>
+            <a:srgbClr val="F5F5F4"/>
+          </a:solidFill>
+          <a:ln w="19050">
+            <a:solidFill>
+              <a:srgbClr val="7963AF"/>
+            </a:solidFill>
+          </a:ln>
+        </p:spPr>
+        <p:style>
+          <a:lnRef idx="1">
+            <a:schemeClr val="accent1"/>
+          </a:lnRef>
+          <a:fillRef idx="3">
+            <a:schemeClr val="accent1"/>
+          </a:fillRef>
+          <a:effectRef idx="0">
+            <a:schemeClr val="accent1"/>
+          </a:effectRef>
+          <a:fontRef idx="minor">
+            <a:schemeClr val="lt1"/>
+          </a:fontRef>
+        </p:style>
+        <p:txBody>
+          <a:bodyPr rtlCol="0" anchor="ctr"/>
+          <a:lstStyle/>
+          <a:p>
+            <a:pPr algn="ctr"/>
+          </a:p>
+        </p:txBody>
+      </p:sp>
+      <p:sp>
+        <p:nvSpPr>
+          <p:cNvPr id="58" name="Oval 57"/>
+          <p:cNvSpPr/>
+          <p:nvPr/>
+        </p:nvSpPr>
+        <p:spPr>
+          <a:xfrm>
+            <a:off x="9137783" y="4743046"/>
+            <a:ext cx="82296" cy="82296"/>
+          </a:xfrm>
+          <a:prstGeom prst="ellipse">
+            <a:avLst/>
+          </a:prstGeom>
+          <a:solidFill>
+            <a:srgbClr val="F5F5F4"/>
+          </a:solidFill>
+          <a:ln w="19050">
+            <a:solidFill>
+              <a:srgbClr val="7963AF"/>
+            </a:solidFill>
+          </a:ln>
+        </p:spPr>
+        <p:style>
+          <a:lnRef idx="1">
+            <a:schemeClr val="accent1"/>
+          </a:lnRef>
+          <a:fillRef idx="3">
+            <a:schemeClr val="accent1"/>
+          </a:fillRef>
+          <a:effectRef idx="0">
+            <a:schemeClr val="accent1"/>
+          </a:effectRef>
+          <a:fontRef idx="minor">
+            <a:schemeClr val="lt1"/>
+          </a:fontRef>
+        </p:style>
+        <p:txBody>
+          <a:bodyPr rtlCol="0" anchor="ctr"/>
+          <a:lstStyle/>
+          <a:p>
+            <a:pPr algn="ctr"/>
+          </a:p>
+        </p:txBody>
+      </p:sp>
+      <p:sp>
+        <p:nvSpPr>
+          <p:cNvPr id="59" name="Oval 58"/>
+          <p:cNvSpPr/>
+          <p:nvPr/>
+        </p:nvSpPr>
+        <p:spPr>
+          <a:xfrm>
+            <a:off x="10032782" y="3660664"/>
+            <a:ext cx="82296" cy="82296"/>
+          </a:xfrm>
+          <a:prstGeom prst="ellipse">
+            <a:avLst/>
+          </a:prstGeom>
+          <a:solidFill>
+            <a:srgbClr val="F5F5F4"/>
+          </a:solidFill>
+          <a:ln w="19050">
+            <a:solidFill>
+              <a:srgbClr val="7963AF"/>
+            </a:solidFill>
+          </a:ln>
+        </p:spPr>
+        <p:style>
+          <a:lnRef idx="1">
+            <a:schemeClr val="accent1"/>
+          </a:lnRef>
+          <a:fillRef idx="3">
+            <a:schemeClr val="accent1"/>
+          </a:fillRef>
+          <a:effectRef idx="0">
+            <a:schemeClr val="accent1"/>
+          </a:effectRef>
+          <a:fontRef idx="minor">
+            <a:schemeClr val="lt1"/>
+          </a:fontRef>
+        </p:style>
+        <p:txBody>
+          <a:bodyPr rtlCol="0" anchor="ctr"/>
+          <a:lstStyle/>
+          <a:p>
+            <a:pPr algn="ctr"/>
+          </a:p>
+        </p:txBody>
+      </p:sp>
+      <p:sp>
+        <p:nvSpPr>
+          <p:cNvPr id="60" name="Oval 59"/>
+          <p:cNvSpPr/>
+          <p:nvPr/>
+        </p:nvSpPr>
+        <p:spPr>
+          <a:xfrm>
+            <a:off x="7262192" y="4406240"/>
+            <a:ext cx="82296" cy="82296"/>
+          </a:xfrm>
+          <a:prstGeom prst="ellipse">
+            <a:avLst/>
+          </a:prstGeom>
+          <a:solidFill>
+            <a:srgbClr val="F5F5F4"/>
+          </a:solidFill>
+          <a:ln w="19050">
+            <a:solidFill>
+              <a:srgbClr val="7963AF"/>
+            </a:solidFill>
+          </a:ln>
+        </p:spPr>
+        <p:style>
+          <a:lnRef idx="1">
+            <a:schemeClr val="accent1"/>
+          </a:lnRef>
+          <a:fillRef idx="3">
+            <a:schemeClr val="accent1"/>
+          </a:fillRef>
+          <a:effectRef idx="0">
+            <a:schemeClr val="accent1"/>
+          </a:effectRef>
+          <a:fontRef idx="minor">
+            <a:schemeClr val="lt1"/>
+          </a:fontRef>
+        </p:style>
+        <p:txBody>
+          <a:bodyPr rtlCol="0" anchor="ctr"/>
+          <a:lstStyle/>
+          <a:p>
+            <a:pPr algn="ctr"/>
+          </a:p>
+        </p:txBody>
+      </p:sp>
+      <p:sp>
+        <p:nvSpPr>
+          <p:cNvPr id="61" name="Oval 60"/>
+          <p:cNvSpPr/>
+          <p:nvPr/>
+        </p:nvSpPr>
+        <p:spPr>
+          <a:xfrm>
+            <a:off x="10706184" y="3662118"/>
+            <a:ext cx="82296" cy="82296"/>
+          </a:xfrm>
+          <a:prstGeom prst="ellipse">
+            <a:avLst/>
+          </a:prstGeom>
+          <a:solidFill>
+            <a:srgbClr val="F5F5F4"/>
+          </a:solidFill>
+          <a:ln w="19050">
+            <a:solidFill>
+              <a:srgbClr val="7963AF"/>
+            </a:solidFill>
+          </a:ln>
+        </p:spPr>
+        <p:style>
+          <a:lnRef idx="1">
+            <a:schemeClr val="accent1"/>
+          </a:lnRef>
+          <a:fillRef idx="3">
+            <a:schemeClr val="accent1"/>
+          </a:fillRef>
+          <a:effectRef idx="0">
+            <a:schemeClr val="accent1"/>
+          </a:effectRef>
+          <a:fontRef idx="minor">
+            <a:schemeClr val="lt1"/>
+          </a:fontRef>
+        </p:style>
+        <p:txBody>
+          <a:bodyPr rtlCol="0" anchor="ctr"/>
+          <a:lstStyle/>
+          <a:p>
+            <a:pPr algn="ctr"/>
+          </a:p>
+        </p:txBody>
+      </p:sp>
+      <p:sp>
+        <p:nvSpPr>
+          <p:cNvPr id="62" name="Oval 61"/>
+          <p:cNvSpPr/>
+          <p:nvPr/>
+        </p:nvSpPr>
+        <p:spPr>
+          <a:xfrm>
+            <a:off x="864108" y="5948172"/>
+            <a:ext cx="82296" cy="82296"/>
+          </a:xfrm>
+          <a:prstGeom prst="ellipse">
+            <a:avLst/>
+          </a:prstGeom>
+          <a:solidFill>
+            <a:srgbClr val="181D16"/>
+          </a:solidFill>
+          <a:ln w="19050">
+            <a:solidFill>
+              <a:srgbClr val="181D16"/>
+            </a:solidFill>
+          </a:ln>
+        </p:spPr>
+        <p:style>
+          <a:lnRef idx="1">
+            <a:schemeClr val="accent1"/>
+          </a:lnRef>
+          <a:fillRef idx="3">
+            <a:schemeClr val="accent1"/>
+          </a:fillRef>
+          <a:effectRef idx="0">
+            <a:schemeClr val="accent1"/>
+          </a:effectRef>
+          <a:fontRef idx="minor">
+            <a:schemeClr val="lt1"/>
+          </a:fontRef>
+        </p:style>
+        <p:txBody>
+          <a:bodyPr rtlCol="0" anchor="ctr"/>
+          <a:lstStyle/>
+          <a:p>
+            <a:pPr algn="ctr"/>
+          </a:p>
+        </p:txBody>
+      </p:sp>
+      <p:sp>
+        <p:nvSpPr>
+          <p:cNvPr id="63" name="TextBox 62"/>
           <p:cNvSpPr txBox="1"/>
           <p:nvPr/>
         </p:nvSpPr>
@@ -51333,49 +54427,59 @@
               </a:defRPr>
             </a:pPr>
             <a:r>
-              <a:t>training loss</a:t>
+              <a:t>training observations</a:t>
             </a:r>
           </a:p>
         </p:txBody>
       </p:sp>
-      <p:cxnSp>
-        <p:nvCxnSpPr>
-          <p:cNvPr id="19" name="Connector 18"/>
-          <p:cNvCxnSpPr/>
+      <p:sp>
+        <p:nvSpPr>
+          <p:cNvPr id="64" name="Oval 63"/>
+          <p:cNvSpPr/>
           <p:nvPr/>
-        </p:nvCxnSpPr>
+        </p:nvSpPr>
         <p:spPr>
           <a:xfrm>
-            <a:off x="3621024" y="5989320"/>
-            <a:ext cx="256032" cy="0"/>
+            <a:off x="3643884" y="5948172"/>
+            <a:ext cx="82296" cy="82296"/>
           </a:xfrm>
-          <a:prstGeom prst="line">
+          <a:prstGeom prst="ellipse">
             <a:avLst/>
           </a:prstGeom>
-          <a:ln w="25400">
+          <a:solidFill>
+            <a:srgbClr val="F5F5F4"/>
+          </a:solidFill>
+          <a:ln w="19050">
             <a:solidFill>
-              <a:srgbClr val="C65326"/>
+              <a:srgbClr val="7963AF"/>
             </a:solidFill>
           </a:ln>
         </p:spPr>
         <p:style>
-          <a:lnRef idx="2">
+          <a:lnRef idx="1">
             <a:schemeClr val="accent1"/>
           </a:lnRef>
-          <a:fillRef idx="0">
+          <a:fillRef idx="3">
             <a:schemeClr val="accent1"/>
           </a:fillRef>
           <a:effectRef idx="0">
             <a:schemeClr val="accent1"/>
           </a:effectRef>
           <a:fontRef idx="minor">
-            <a:schemeClr val="tx1"/>
+            <a:schemeClr val="lt1"/>
           </a:fontRef>
         </p:style>
-      </p:cxnSp>
+        <p:txBody>
+          <a:bodyPr rtlCol="0" anchor="ctr"/>
+          <a:lstStyle/>
+          <a:p>
+            <a:pPr algn="ctr"/>
+          </a:p>
+        </p:txBody>
+      </p:sp>
       <p:sp>
         <p:nvSpPr>
-          <p:cNvPr id="20" name="TextBox 19"/>
+          <p:cNvPr id="65" name="TextBox 64"/>
           <p:cNvSpPr txBox="1"/>
           <p:nvPr/>
         </p:nvSpPr>
@@ -51407,21 +54511,56 @@
               </a:defRPr>
             </a:pPr>
             <a:r>
-              <a:t>expected test loss</a:t>
+              <a:t>unseen observations</a:t>
             </a:r>
           </a:p>
         </p:txBody>
       </p:sp>
+      <p:cxnSp>
+        <p:nvCxnSpPr>
+          <p:cNvPr id="66" name="Connector 65"/>
+          <p:cNvCxnSpPr/>
+          <p:nvPr/>
+        </p:nvCxnSpPr>
+        <p:spPr>
+          <a:xfrm>
+            <a:off x="6400800" y="5989320"/>
+            <a:ext cx="256032" cy="0"/>
+          </a:xfrm>
+          <a:prstGeom prst="line">
+            <a:avLst/>
+          </a:prstGeom>
+          <a:ln w="25400">
+            <a:solidFill>
+              <a:srgbClr val="C65326"/>
+            </a:solidFill>
+          </a:ln>
+        </p:spPr>
+        <p:style>
+          <a:lnRef idx="2">
+            <a:schemeClr val="accent1"/>
+          </a:lnRef>
+          <a:fillRef idx="0">
+            <a:schemeClr val="accent1"/>
+          </a:fillRef>
+          <a:effectRef idx="0">
+            <a:schemeClr val="accent1"/>
+          </a:effectRef>
+          <a:fontRef idx="minor">
+            <a:schemeClr val="tx1"/>
+          </a:fontRef>
+        </p:style>
+      </p:cxnSp>
       <p:sp>
         <p:nvSpPr>
-          <p:cNvPr id="21" name="TextBox 20"/>
+          <p:cNvPr id="67" name="TextBox 66"/>
           <p:cNvSpPr txBox="1"/>
           <p:nvPr/>
         </p:nvSpPr>
         <p:spPr>
           <a:xfrm>
-            <a:off x="8266175" y="5888736"/>
-            <a:ext cx="3108960" cy="274320"/>
+            <a:off x="6757416" y="5870448"/>
+            <a:ext cx="2468880" cy="320040"/>
           </a:xfrm>
           <a:prstGeom prst="rect">
             <a:avLst/>
@@ -51438,7 +54577,7 @@
               <a:spcAft>
                 <a:spcPts val="0"/>
               </a:spcAft>
-              <a:defRPr sz="1200" b="0">
+              <a:defRPr sz="1300" b="0">
                 <a:solidFill>
                   <a:srgbClr val="686C66"/>
                 </a:solidFill>
@@ -51446,7 +54585,7 @@
               </a:defRPr>
             </a:pPr>
             <a:r>
-              <a:t>Schematic, not measured</a:t>
+              <a:t>same model</a:t>
             </a:r>
           </a:p>
         </p:txBody>

--- a/cmpsc-448/presentation/bias-variance-tradeoff.pptx
+++ b/cmpsc-448/presentation/bias-variance-tradeoff.pptx
@@ -4000,7 +4000,7 @@
               </a:defRPr>
             </a:pPr>
             <a:r>
-              <a:t>Same problem. Different training samples.</a:t>
+              <a:t>New data, same underlying pattern</a:t>
             </a:r>
           </a:p>
         </p:txBody>
@@ -6386,7 +6386,7 @@
               </a:defRPr>
             </a:pPr>
             <a:r>
-              <a:t>Train again. Does the prediction change?</a:t>
+              <a:t>Different training data changes the model</a:t>
             </a:r>
           </a:p>
         </p:txBody>
@@ -11588,7 +11588,7 @@
               </a:defRPr>
             </a:pPr>
             <a:r>
-              <a:t>Variance is sensitivity to the sample.</a:t>
+              <a:t>High variance: predictions change a lot</a:t>
             </a:r>
           </a:p>
         </p:txBody>
@@ -34771,7 +34771,7 @@
               </a:defRPr>
             </a:pPr>
             <a:r>
-              <a:t>Consistency is not enough.</a:t>
+              <a:t>High bias: predictions are consistently off</a:t>
             </a:r>
           </a:p>
         </p:txBody>
@@ -48000,7 +48000,7 @@
               </a:defRPr>
             </a:pPr>
             <a:r>
-              <a:t>Close to the truth. Stable across samples.</a:t>
+              <a:t>A good model stays close to the truth</a:t>
             </a:r>
           </a:p>
         </p:txBody>
@@ -61062,7 +61062,7 @@
               </a:defRPr>
             </a:pPr>
             <a:r>
-              <a:t>Three sources of prediction error.</a:t>
+              <a:t>Even good models make errors</a:t>
             </a:r>
           </a:p>
         </p:txBody>
@@ -61736,7 +61736,7 @@
               </a:defRPr>
             </a:pPr>
             <a:r>
-              <a:t>Learn accurately. Predict consistently.</a:t>
+              <a:t>We want accurate, stable predictions</a:t>
             </a:r>
           </a:p>
         </p:txBody>

--- a/cmpsc-448/presentation/bias-variance-tradeoff.pptx
+++ b/cmpsc-448/presentation/bias-variance-tradeoff.pptx
@@ -11,7 +11,6 @@
     <p:sldId id="259" r:id="rId11"/>
     <p:sldId id="260" r:id="rId12"/>
     <p:sldId id="261" r:id="rId13"/>
-    <p:sldId id="262" r:id="rId14"/>
   </p:sldIdLst>
   <p:sldSz cx="12191999" cy="6858000" type="screen4x3"/>
   <p:notesSz cx="6858000" cy="9144000"/>
@@ -508,7 +507,7 @@
           <a:lstStyle/>
           <a:p>
             <a:r>
-              <a:t>Open with a question: If we collected our training data again, would we get exactly the same observations? Both panels use the same 20 x positions and the same underlying relationship, y = 0.3 + 0.4x + 1.3x² + noise. Only the independent Gaussian output noise changes, with standard deviation 0.4. Sample A is the original fixed-seed dataset; sample B is another draw. This is a controlled thought experiment, not train versus test and not distribution shift. We have not fitted a model yet. The other presentation explains underfitting and overfitting; our focus is what changes across training samples and why it matters for prediction.</a:t>
+              <a:t>Samples A and B come from the same quadratic relationship at the same 20 x positions, with independent Gaussian output noise of standard deviation 0.4. These are two training samples, not training versus test data. Fit the same degree-12 polynomial procedure separately to each. Keep the inputs, model family, and fitting method fixed. At x = 0.5, A predicts 0.96 and B predicts 0.40. The vertical guides mark that identical input. The orange dots are model predictions, not additional observations. Retraining changed the prediction even though the underlying problem did not change. Two samples illustrate the idea; they do not estimate population variance reliably. We now repeat the experiment eight times.</a:t>
             </a:r>
           </a:p>
         </p:txBody>
@@ -578,7 +577,7 @@
           <a:lstStyle/>
           <a:p>
             <a:r>
-              <a:t>Use the exact same samples A and B from slide 1, and fit the same degree-12 polynomial procedure separately to each. Keep the inputs, model family, and fitting method fixed. At x = 0.5, A predicts 0.96 and B predicts 0.40. The vertical guides mark that identical input. The orange dots are model predictions, not additional observations. Retraining changed the prediction even though the underlying problem did not change. Two samples illustrate the idea; they do not estimate population variance reliably. We now repeat the experiment eight times.</a:t>
+              <a:t>Each pale curve is a model fitted to one of eight training samples, including A and B. Every degree sees exactly the same eight samples. The orange curve is the pointwise arithmetic average of those eight predictions, not a ninth fit and not the true relationship. At any fixed input, variance describes the spread of predictions around their average across training samples. The degree-12 procedure is more sensitive here; the degree-2 procedure is more stable. Wiggliness by itself is not the definition of variance, and variance is not the scatter of the raw data. Eight curves are a teaching illustration, not a precise population estimate. Axis limits are identical; curve portions outside the visible range are omitted. Flexibility need not produce high variance in every setting; sample size and regularization also matter.</a:t>
             </a:r>
           </a:p>
         </p:txBody>
@@ -648,7 +647,7 @@
           <a:lstStyle/>
           <a:p>
             <a:r>
-              <a:t>Each pale curve is a model fitted to one of eight training samples, including A and B. Every degree sees exactly the same eight samples. The orange curve is the pointwise arithmetic average of those eight predictions, not a ninth fit and not the true relationship. At any fixed input, variance describes the spread of predictions around their average across training samples. The degree-12 procedure is more sensitive here; the degree-2 procedure is more stable. Wiggliness by itself is not the definition of variance, and variance is not the scatter of the raw data. Eight curves are a teaching illustration, not a precise population estimate. Axis limits are identical; curve portions outside the visible range are omitted. Flexibility need not produce high variance in every setting; sample size and regularization also matter.</a:t>
+              <a:t>Now reveal the true regression function, shown as the dashed curve. We know it because this is synthetic data; it is usually unknown in practice. These are degree-1 fits to the same eight samples. They cluster, yet their average misses the curved relationship. At x = 0 the average shown predicts 0.79, while the true mean output is 0.30; the vertical segment marks that gap. Bias at a fixed input is the expected model prediction over training samples minus the true regression function at that input. The displayed eight-fit average is only a finite-sample approximation to that expectation. Bias is not a single model's residual against one noisy observation. Low variance does not guarantee low bias. A straight-line family is too restrictive for this quadratic relationship, connecting briefly to the other student's underfitting example.</a:t>
             </a:r>
           </a:p>
         </p:txBody>
@@ -718,7 +717,7 @@
           <a:lstStyle/>
           <a:p>
             <a:r>
-              <a:t>Now reveal the true regression function, shown as the dashed curve. We know it because this is synthetic data; it is usually unknown in practice. These are degree-1 fits to the same eight samples. They cluster, yet their average misses the curved relationship. At x = 0 the average shown predicts 0.79, while the true mean output is 0.30; the vertical segment marks that gap. Bias at a fixed input is the expected model prediction over training samples minus the true regression function at that input. The displayed eight-fit average is only a finite-sample approximation to that expectation. Bias is not a single model's residual against one noisy observation. Low variance does not guarantee low bias. A straight-line family is too restrictive for this quadratic relationship, connecting briefly to the other student's underfitting example.</a:t>
+              <a:t>Return to the degree-2 fits from slide 2, now with the true pattern revealed. All data, noise levels, and axes remain unchanged. Their average is close to the true relationship, unlike the degree-1 average; their spread is smaller than the degree-12 spread. Low bias and low variance are relative descriptions for this controlled example, not claims of zero prediction error. Because the quadratic family contains the true function and noise has mean zero, fixed-design least squares is unbiased here in expectation. The eight-fit average need not equal truth exactly. Increasing flexibility from a line to a quadratic reduces systematic error; increasing it further can add sensitivity without useful signal. That is the tradeoff, not a universal requirement that bias and variance must always move in opposite directions.</a:t>
             </a:r>
           </a:p>
         </p:txBody>
@@ -788,7 +787,7 @@
           <a:lstStyle/>
           <a:p>
             <a:r>
-              <a:t>Return to the degree-2 fits from slide 3, now with the true pattern revealed. All data, noise levels, and axes remain unchanged. Their average is close to the true relationship, unlike the degree-1 average; their spread is smaller than the degree-12 spread. Low bias and low variance are relative descriptions for this controlled example, not claims of zero prediction error. Because the quadratic family contains the true function and noise has mean zero, fixed-design least squares is unbiased here in expectation. The eight-fit average need not equal truth exactly. Increasing flexibility from a line to a quadratic reduces systematic error; increasing it further can add sensitivity without useful signal. That is the tradeoff, not a universal requirement that bias and variance must always move in opposite directions.</a:t>
+              <a:t>This equality is the squared-error decomposition at a fixed input x: E[(f_hat_D(x) - Y_new)²] = (E_D[f_hat_D(x)] - f(x))² + Var_D[f_hat_D(x)] + Var(Y_new | x). Average over random training datasets D and independent fresh output noise, with Y_new = f(x) + epsilon and E[epsilon | x] = 0. The noise term is conditional variance, not standard deviation; here it is 0.4² = 0.16. Even a predictor equal to the true mean function cannot predict the random noise in a fresh observation. The decomposition is not a formula for one observed residual or one training loss, and is not generally valid in this form for classification error or every loss function. Noise is irreducible relative to the information available to the model; better measurements or extra informative features can change that information. The build checks the finite-ensemble squared-error identity numerically. Do not imply the displayed eight curves are the full population expectation.</a:t>
             </a:r>
           </a:p>
         </p:txBody>
@@ -814,76 +813,6 @@
 </file>
 
 <file path=ppt/notesSlides/notesSlide6.xml><?xml version="1.0" encoding="utf-8"?>
-<p:notes xmlns:a="http://schemas.openxmlformats.org/drawingml/2006/main" xmlns:p="http://schemas.openxmlformats.org/presentationml/2006/main" xmlns:r="http://schemas.openxmlformats.org/officeDocument/2006/relationships">
-  <p:cSld>
-    <p:spTree>
-      <p:nvGrpSpPr>
-        <p:cNvPr id="1" name=""/>
-        <p:cNvGrpSpPr/>
-        <p:nvPr/>
-      </p:nvGrpSpPr>
-      <p:grpSpPr>
-        <a:xfrm>
-          <a:off x="0" y="0"/>
-          <a:ext cx="0" cy="0"/>
-          <a:chOff x="0" y="0"/>
-          <a:chExt cx="0" cy="0"/>
-        </a:xfrm>
-      </p:grpSpPr>
-      <p:sp>
-        <p:nvSpPr>
-          <p:cNvPr id="2" name="Slide Image Placeholder 1"/>
-          <p:cNvSpPr>
-            <a:spLocks noGrp="1"/>
-          </p:cNvSpPr>
-          <p:nvPr>
-            <p:ph type="sldImg" idx="2"/>
-          </p:nvPr>
-        </p:nvSpPr>
-        <p:spPr/>
-      </p:sp>
-      <p:sp>
-        <p:nvSpPr>
-          <p:cNvPr id="3" name="Notes Placeholder 2"/>
-          <p:cNvSpPr>
-            <a:spLocks noGrp="1"/>
-          </p:cNvSpPr>
-          <p:nvPr>
-            <p:ph type="body" idx="3" sz="quarter"/>
-          </p:nvPr>
-        </p:nvSpPr>
-        <p:spPr/>
-        <p:txBody>
-          <a:bodyPr/>
-          <a:lstStyle/>
-          <a:p>
-            <a:r>
-              <a:t>This equality is the squared-error decomposition at a fixed input x: E[(f_hat_D(x) - Y_new)²] = (E_D[f_hat_D(x)] - f(x))² + Var_D[f_hat_D(x)] + Var(Y_new | x). Average over random training datasets D and independent fresh output noise, with Y_new = f(x) + epsilon and E[epsilon | x] = 0. The noise term is conditional variance, not standard deviation; here it is 0.4² = 0.16. Even a predictor equal to the true mean function cannot predict the random noise in a fresh observation. The decomposition is not a formula for one observed residual or one training loss, and is not generally valid in this form for classification error or every loss function. Noise is irreducible relative to the information available to the model; better measurements or extra informative features can change that information. The build checks the finite-ensemble squared-error identity numerically. Do not imply the displayed eight curves are the full population expectation.</a:t>
-            </a:r>
-          </a:p>
-        </p:txBody>
-      </p:sp>
-      <p:sp>
-        <p:nvSpPr>
-          <p:cNvPr id="4" name="Slide Number Placeholder 3"/>
-          <p:cNvSpPr>
-            <a:spLocks noGrp="1"/>
-          </p:cNvSpPr>
-          <p:nvPr>
-            <p:ph type="sldNum" idx="5" sz="quarter"/>
-          </p:nvPr>
-        </p:nvSpPr>
-        <p:spPr/>
-      </p:sp>
-    </p:spTree>
-  </p:cSld>
-  <p:clrMapOvr>
-    <a:masterClrMapping/>
-  </p:clrMapOvr>
-</p:notes>
-</file>
-
-<file path=ppt/notesSlides/notesSlide7.xml><?xml version="1.0" encoding="utf-8"?>
 <p:notes xmlns:a="http://schemas.openxmlformats.org/drawingml/2006/main" xmlns:p="http://schemas.openxmlformats.org/presentationml/2006/main" xmlns:r="http://schemas.openxmlformats.org/officeDocument/2006/relationships">
   <p:cSld>
     <p:spTree>
@@ -4000,2392 +3929,6 @@
               </a:defRPr>
             </a:pPr>
             <a:r>
-              <a:t>New data, same underlying pattern</a:t>
-            </a:r>
-          </a:p>
-        </p:txBody>
-      </p:sp>
-      <p:sp>
-        <p:nvSpPr>
-          <p:cNvPr id="4" name="TextBox 3"/>
-          <p:cNvSpPr txBox="1"/>
-          <p:nvPr/>
-        </p:nvSpPr>
-        <p:spPr>
-          <a:xfrm>
-            <a:off x="10917936" y="6510528"/>
-            <a:ext cx="685800" cy="201168"/>
-          </a:xfrm>
-          <a:prstGeom prst="rect">
-            <a:avLst/>
-          </a:prstGeom>
-          <a:noFill/>
-        </p:spPr>
-        <p:txBody>
-          <a:bodyPr wrap="square" lIns="0" rIns="0" tIns="0" bIns="0">
-            <a:spAutoFit/>
-          </a:bodyPr>
-          <a:lstStyle/>
-          <a:p>
-            <a:pPr>
-              <a:spcAft>
-                <a:spcPts val="0"/>
-              </a:spcAft>
-              <a:defRPr sz="1100" b="0">
-                <a:solidFill>
-                  <a:srgbClr val="686C66"/>
-                </a:solidFill>
-                <a:latin typeface="Arial"/>
-              </a:defRPr>
-            </a:pPr>
-            <a:r>
-              <a:t>01/07</a:t>
-            </a:r>
-          </a:p>
-        </p:txBody>
-      </p:sp>
-      <p:sp>
-        <p:nvSpPr>
-          <p:cNvPr id="5" name="TextBox 4"/>
-          <p:cNvSpPr txBox="1"/>
-          <p:nvPr/>
-        </p:nvSpPr>
-        <p:spPr>
-          <a:xfrm>
-            <a:off x="896112" y="2423160"/>
-            <a:ext cx="4480560" cy="274320"/>
-          </a:xfrm>
-          <a:prstGeom prst="rect">
-            <a:avLst/>
-          </a:prstGeom>
-          <a:noFill/>
-        </p:spPr>
-        <p:txBody>
-          <a:bodyPr wrap="square" lIns="0" rIns="0" tIns="0" bIns="0">
-            <a:spAutoFit/>
-          </a:bodyPr>
-          <a:lstStyle/>
-          <a:p>
-            <a:pPr>
-              <a:spcAft>
-                <a:spcPts val="0"/>
-              </a:spcAft>
-              <a:defRPr sz="1600" b="0">
-                <a:solidFill>
-                  <a:srgbClr val="181D16"/>
-                </a:solidFill>
-                <a:latin typeface="Arial"/>
-              </a:defRPr>
-            </a:pPr>
-            <a:r>
-              <a:t>Sample A</a:t>
-            </a:r>
-          </a:p>
-        </p:txBody>
-      </p:sp>
-      <p:cxnSp>
-        <p:nvCxnSpPr>
-          <p:cNvPr id="6" name="Connector 5"/>
-          <p:cNvCxnSpPr/>
-          <p:nvPr/>
-        </p:nvCxnSpPr>
-        <p:spPr>
-          <a:xfrm>
-            <a:off x="896112" y="5440680"/>
-            <a:ext cx="4572000" cy="0"/>
-          </a:xfrm>
-          <a:prstGeom prst="line">
-            <a:avLst/>
-          </a:prstGeom>
-          <a:ln w="12700">
-            <a:solidFill>
-              <a:srgbClr val="D4D6D0"/>
-            </a:solidFill>
-          </a:ln>
-        </p:spPr>
-        <p:style>
-          <a:lnRef idx="2">
-            <a:schemeClr val="accent1"/>
-          </a:lnRef>
-          <a:fillRef idx="0">
-            <a:schemeClr val="accent1"/>
-          </a:fillRef>
-          <a:effectRef idx="0">
-            <a:schemeClr val="accent1"/>
-          </a:effectRef>
-          <a:fontRef idx="minor">
-            <a:schemeClr val="tx1"/>
-          </a:fontRef>
-        </p:style>
-      </p:cxnSp>
-      <p:cxnSp>
-        <p:nvCxnSpPr>
-          <p:cNvPr id="7" name="Connector 6"/>
-          <p:cNvCxnSpPr/>
-          <p:nvPr/>
-        </p:nvCxnSpPr>
-        <p:spPr>
-          <a:xfrm>
-            <a:off x="896112" y="2834640"/>
-            <a:ext cx="0" cy="2606040"/>
-          </a:xfrm>
-          <a:prstGeom prst="line">
-            <a:avLst/>
-          </a:prstGeom>
-          <a:ln w="12700">
-            <a:solidFill>
-              <a:srgbClr val="D4D6D0"/>
-            </a:solidFill>
-          </a:ln>
-        </p:spPr>
-        <p:style>
-          <a:lnRef idx="2">
-            <a:schemeClr val="accent1"/>
-          </a:lnRef>
-          <a:fillRef idx="0">
-            <a:schemeClr val="accent1"/>
-          </a:fillRef>
-          <a:effectRef idx="0">
-            <a:schemeClr val="accent1"/>
-          </a:effectRef>
-          <a:fontRef idx="minor">
-            <a:schemeClr val="tx1"/>
-          </a:fontRef>
-        </p:style>
-      </p:cxnSp>
-      <p:sp>
-        <p:nvSpPr>
-          <p:cNvPr id="8" name="TextBox 7"/>
-          <p:cNvSpPr txBox="1"/>
-          <p:nvPr/>
-        </p:nvSpPr>
-        <p:spPr>
-          <a:xfrm>
-            <a:off x="5376672" y="5532120"/>
-            <a:ext cx="640080" cy="274320"/>
-          </a:xfrm>
-          <a:prstGeom prst="rect">
-            <a:avLst/>
-          </a:prstGeom>
-          <a:noFill/>
-        </p:spPr>
-        <p:txBody>
-          <a:bodyPr wrap="square" lIns="0" rIns="0" tIns="0" bIns="0">
-            <a:spAutoFit/>
-          </a:bodyPr>
-          <a:lstStyle/>
-          <a:p>
-            <a:pPr>
-              <a:spcAft>
-                <a:spcPts val="0"/>
-              </a:spcAft>
-              <a:defRPr sz="1400" b="0">
-                <a:solidFill>
-                  <a:srgbClr val="686C66"/>
-                </a:solidFill>
-                <a:latin typeface="Arial"/>
-              </a:defRPr>
-            </a:pPr>
-            <a:r>
-              <a:t>x</a:t>
-            </a:r>
-          </a:p>
-        </p:txBody>
-      </p:sp>
-      <p:sp>
-        <p:nvSpPr>
-          <p:cNvPr id="9" name="TextBox 8"/>
-          <p:cNvSpPr txBox="1"/>
-          <p:nvPr/>
-        </p:nvSpPr>
-        <p:spPr>
-          <a:xfrm>
-            <a:off x="621792" y="2651760"/>
-            <a:ext cx="914400" cy="274320"/>
-          </a:xfrm>
-          <a:prstGeom prst="rect">
-            <a:avLst/>
-          </a:prstGeom>
-          <a:noFill/>
-        </p:spPr>
-        <p:txBody>
-          <a:bodyPr wrap="square" lIns="0" rIns="0" tIns="0" bIns="0">
-            <a:spAutoFit/>
-          </a:bodyPr>
-          <a:lstStyle/>
-          <a:p>
-            <a:pPr>
-              <a:spcAft>
-                <a:spcPts val="0"/>
-              </a:spcAft>
-              <a:defRPr sz="1400" b="0">
-                <a:solidFill>
-                  <a:srgbClr val="686C66"/>
-                </a:solidFill>
-                <a:latin typeface="Arial"/>
-              </a:defRPr>
-            </a:pPr>
-            <a:r>
-              <a:t>y</a:t>
-            </a:r>
-          </a:p>
-        </p:txBody>
-      </p:sp>
-      <p:sp>
-        <p:nvSpPr>
-          <p:cNvPr id="10" name="Oval 9"/>
-          <p:cNvSpPr/>
-          <p:nvPr/>
-        </p:nvSpPr>
-        <p:spPr>
-          <a:xfrm>
-            <a:off x="854964" y="3846610"/>
-            <a:ext cx="82296" cy="82296"/>
-          </a:xfrm>
-          <a:prstGeom prst="ellipse">
-            <a:avLst/>
-          </a:prstGeom>
-          <a:solidFill>
-            <a:srgbClr val="181D16"/>
-          </a:solidFill>
-          <a:ln w="19050">
-            <a:solidFill>
-              <a:srgbClr val="181D16"/>
-            </a:solidFill>
-          </a:ln>
-        </p:spPr>
-        <p:style>
-          <a:lnRef idx="1">
-            <a:schemeClr val="accent1"/>
-          </a:lnRef>
-          <a:fillRef idx="3">
-            <a:schemeClr val="accent1"/>
-          </a:fillRef>
-          <a:effectRef idx="0">
-            <a:schemeClr val="accent1"/>
-          </a:effectRef>
-          <a:fontRef idx="minor">
-            <a:schemeClr val="lt1"/>
-          </a:fontRef>
-        </p:style>
-        <p:txBody>
-          <a:bodyPr rtlCol="0" anchor="ctr"/>
-          <a:lstStyle/>
-          <a:p>
-            <a:pPr algn="ctr"/>
-          </a:p>
-        </p:txBody>
-      </p:sp>
-      <p:sp>
-        <p:nvSpPr>
-          <p:cNvPr id="11" name="Oval 10"/>
-          <p:cNvSpPr/>
-          <p:nvPr/>
-        </p:nvSpPr>
-        <p:spPr>
-          <a:xfrm>
-            <a:off x="1095595" y="3675104"/>
-            <a:ext cx="82296" cy="82296"/>
-          </a:xfrm>
-          <a:prstGeom prst="ellipse">
-            <a:avLst/>
-          </a:prstGeom>
-          <a:solidFill>
-            <a:srgbClr val="181D16"/>
-          </a:solidFill>
-          <a:ln w="19050">
-            <a:solidFill>
-              <a:srgbClr val="181D16"/>
-            </a:solidFill>
-          </a:ln>
-        </p:spPr>
-        <p:style>
-          <a:lnRef idx="1">
-            <a:schemeClr val="accent1"/>
-          </a:lnRef>
-          <a:fillRef idx="3">
-            <a:schemeClr val="accent1"/>
-          </a:fillRef>
-          <a:effectRef idx="0">
-            <a:schemeClr val="accent1"/>
-          </a:effectRef>
-          <a:fontRef idx="minor">
-            <a:schemeClr val="lt1"/>
-          </a:fontRef>
-        </p:style>
-        <p:txBody>
-          <a:bodyPr rtlCol="0" anchor="ctr"/>
-          <a:lstStyle/>
-          <a:p>
-            <a:pPr algn="ctr"/>
-          </a:p>
-        </p:txBody>
-      </p:sp>
-      <p:sp>
-        <p:nvSpPr>
-          <p:cNvPr id="12" name="Oval 11"/>
-          <p:cNvSpPr/>
-          <p:nvPr/>
-        </p:nvSpPr>
-        <p:spPr>
-          <a:xfrm>
-            <a:off x="1336227" y="3935866"/>
-            <a:ext cx="82296" cy="82296"/>
-          </a:xfrm>
-          <a:prstGeom prst="ellipse">
-            <a:avLst/>
-          </a:prstGeom>
-          <a:solidFill>
-            <a:srgbClr val="181D16"/>
-          </a:solidFill>
-          <a:ln w="19050">
-            <a:solidFill>
-              <a:srgbClr val="181D16"/>
-            </a:solidFill>
-          </a:ln>
-        </p:spPr>
-        <p:style>
-          <a:lnRef idx="1">
-            <a:schemeClr val="accent1"/>
-          </a:lnRef>
-          <a:fillRef idx="3">
-            <a:schemeClr val="accent1"/>
-          </a:fillRef>
-          <a:effectRef idx="0">
-            <a:schemeClr val="accent1"/>
-          </a:effectRef>
-          <a:fontRef idx="minor">
-            <a:schemeClr val="lt1"/>
-          </a:fontRef>
-        </p:style>
-        <p:txBody>
-          <a:bodyPr rtlCol="0" anchor="ctr"/>
-          <a:lstStyle/>
-          <a:p>
-            <a:pPr algn="ctr"/>
-          </a:p>
-        </p:txBody>
-      </p:sp>
-      <p:sp>
-        <p:nvSpPr>
-          <p:cNvPr id="13" name="Oval 12"/>
-          <p:cNvSpPr/>
-          <p:nvPr/>
-        </p:nvSpPr>
-        <p:spPr>
-          <a:xfrm>
-            <a:off x="1576858" y="4075927"/>
-            <a:ext cx="82296" cy="82296"/>
-          </a:xfrm>
-          <a:prstGeom prst="ellipse">
-            <a:avLst/>
-          </a:prstGeom>
-          <a:solidFill>
-            <a:srgbClr val="181D16"/>
-          </a:solidFill>
-          <a:ln w="19050">
-            <a:solidFill>
-              <a:srgbClr val="181D16"/>
-            </a:solidFill>
-          </a:ln>
-        </p:spPr>
-        <p:style>
-          <a:lnRef idx="1">
-            <a:schemeClr val="accent1"/>
-          </a:lnRef>
-          <a:fillRef idx="3">
-            <a:schemeClr val="accent1"/>
-          </a:fillRef>
-          <a:effectRef idx="0">
-            <a:schemeClr val="accent1"/>
-          </a:effectRef>
-          <a:fontRef idx="minor">
-            <a:schemeClr val="lt1"/>
-          </a:fontRef>
-        </p:style>
-        <p:txBody>
-          <a:bodyPr rtlCol="0" anchor="ctr"/>
-          <a:lstStyle/>
-          <a:p>
-            <a:pPr algn="ctr"/>
-          </a:p>
-        </p:txBody>
-      </p:sp>
-      <p:sp>
-        <p:nvSpPr>
-          <p:cNvPr id="14" name="Oval 13"/>
-          <p:cNvSpPr/>
-          <p:nvPr/>
-        </p:nvSpPr>
-        <p:spPr>
-          <a:xfrm>
-            <a:off x="1817490" y="3884947"/>
-            <a:ext cx="82296" cy="82296"/>
-          </a:xfrm>
-          <a:prstGeom prst="ellipse">
-            <a:avLst/>
-          </a:prstGeom>
-          <a:solidFill>
-            <a:srgbClr val="181D16"/>
-          </a:solidFill>
-          <a:ln w="19050">
-            <a:solidFill>
-              <a:srgbClr val="181D16"/>
-            </a:solidFill>
-          </a:ln>
-        </p:spPr>
-        <p:style>
-          <a:lnRef idx="1">
-            <a:schemeClr val="accent1"/>
-          </a:lnRef>
-          <a:fillRef idx="3">
-            <a:schemeClr val="accent1"/>
-          </a:fillRef>
-          <a:effectRef idx="0">
-            <a:schemeClr val="accent1"/>
-          </a:effectRef>
-          <a:fontRef idx="minor">
-            <a:schemeClr val="lt1"/>
-          </a:fontRef>
-        </p:style>
-        <p:txBody>
-          <a:bodyPr rtlCol="0" anchor="ctr"/>
-          <a:lstStyle/>
-          <a:p>
-            <a:pPr algn="ctr"/>
-          </a:p>
-        </p:txBody>
-      </p:sp>
-      <p:sp>
-        <p:nvSpPr>
-          <p:cNvPr id="15" name="Oval 14"/>
-          <p:cNvSpPr/>
-          <p:nvPr/>
-        </p:nvSpPr>
-        <p:spPr>
-          <a:xfrm>
-            <a:off x="2058121" y="4920362"/>
-            <a:ext cx="82296" cy="82296"/>
-          </a:xfrm>
-          <a:prstGeom prst="ellipse">
-            <a:avLst/>
-          </a:prstGeom>
-          <a:solidFill>
-            <a:srgbClr val="181D16"/>
-          </a:solidFill>
-          <a:ln w="19050">
-            <a:solidFill>
-              <a:srgbClr val="181D16"/>
-            </a:solidFill>
-          </a:ln>
-        </p:spPr>
-        <p:style>
-          <a:lnRef idx="1">
-            <a:schemeClr val="accent1"/>
-          </a:lnRef>
-          <a:fillRef idx="3">
-            <a:schemeClr val="accent1"/>
-          </a:fillRef>
-          <a:effectRef idx="0">
-            <a:schemeClr val="accent1"/>
-          </a:effectRef>
-          <a:fontRef idx="minor">
-            <a:schemeClr val="lt1"/>
-          </a:fontRef>
-        </p:style>
-        <p:txBody>
-          <a:bodyPr rtlCol="0" anchor="ctr"/>
-          <a:lstStyle/>
-          <a:p>
-            <a:pPr algn="ctr"/>
-          </a:p>
-        </p:txBody>
-      </p:sp>
-      <p:sp>
-        <p:nvSpPr>
-          <p:cNvPr id="16" name="Oval 15"/>
-          <p:cNvSpPr/>
-          <p:nvPr/>
-        </p:nvSpPr>
-        <p:spPr>
-          <a:xfrm>
-            <a:off x="2298753" y="4787277"/>
-            <a:ext cx="82296" cy="82296"/>
-          </a:xfrm>
-          <a:prstGeom prst="ellipse">
-            <a:avLst/>
-          </a:prstGeom>
-          <a:solidFill>
-            <a:srgbClr val="181D16"/>
-          </a:solidFill>
-          <a:ln w="19050">
-            <a:solidFill>
-              <a:srgbClr val="181D16"/>
-            </a:solidFill>
-          </a:ln>
-        </p:spPr>
-        <p:style>
-          <a:lnRef idx="1">
-            <a:schemeClr val="accent1"/>
-          </a:lnRef>
-          <a:fillRef idx="3">
-            <a:schemeClr val="accent1"/>
-          </a:fillRef>
-          <a:effectRef idx="0">
-            <a:schemeClr val="accent1"/>
-          </a:effectRef>
-          <a:fontRef idx="minor">
-            <a:schemeClr val="lt1"/>
-          </a:fontRef>
-        </p:style>
-        <p:txBody>
-          <a:bodyPr rtlCol="0" anchor="ctr"/>
-          <a:lstStyle/>
-          <a:p>
-            <a:pPr algn="ctr"/>
-          </a:p>
-        </p:txBody>
-      </p:sp>
-      <p:sp>
-        <p:nvSpPr>
-          <p:cNvPr id="17" name="Oval 16"/>
-          <p:cNvSpPr/>
-          <p:nvPr/>
-        </p:nvSpPr>
-        <p:spPr>
-          <a:xfrm>
-            <a:off x="2539385" y="5057805"/>
-            <a:ext cx="82296" cy="82296"/>
-          </a:xfrm>
-          <a:prstGeom prst="ellipse">
-            <a:avLst/>
-          </a:prstGeom>
-          <a:solidFill>
-            <a:srgbClr val="181D16"/>
-          </a:solidFill>
-          <a:ln w="19050">
-            <a:solidFill>
-              <a:srgbClr val="181D16"/>
-            </a:solidFill>
-          </a:ln>
-        </p:spPr>
-        <p:style>
-          <a:lnRef idx="1">
-            <a:schemeClr val="accent1"/>
-          </a:lnRef>
-          <a:fillRef idx="3">
-            <a:schemeClr val="accent1"/>
-          </a:fillRef>
-          <a:effectRef idx="0">
-            <a:schemeClr val="accent1"/>
-          </a:effectRef>
-          <a:fontRef idx="minor">
-            <a:schemeClr val="lt1"/>
-          </a:fontRef>
-        </p:style>
-        <p:txBody>
-          <a:bodyPr rtlCol="0" anchor="ctr"/>
-          <a:lstStyle/>
-          <a:p>
-            <a:pPr algn="ctr"/>
-          </a:p>
-        </p:txBody>
-      </p:sp>
-      <p:sp>
-        <p:nvSpPr>
-          <p:cNvPr id="18" name="Oval 17"/>
-          <p:cNvSpPr/>
-          <p:nvPr/>
-        </p:nvSpPr>
-        <p:spPr>
-          <a:xfrm>
-            <a:off x="2780016" y="4662988"/>
-            <a:ext cx="82296" cy="82296"/>
-          </a:xfrm>
-          <a:prstGeom prst="ellipse">
-            <a:avLst/>
-          </a:prstGeom>
-          <a:solidFill>
-            <a:srgbClr val="181D16"/>
-          </a:solidFill>
-          <a:ln w="19050">
-            <a:solidFill>
-              <a:srgbClr val="181D16"/>
-            </a:solidFill>
-          </a:ln>
-        </p:spPr>
-        <p:style>
-          <a:lnRef idx="1">
-            <a:schemeClr val="accent1"/>
-          </a:lnRef>
-          <a:fillRef idx="3">
-            <a:schemeClr val="accent1"/>
-          </a:fillRef>
-          <a:effectRef idx="0">
-            <a:schemeClr val="accent1"/>
-          </a:effectRef>
-          <a:fontRef idx="minor">
-            <a:schemeClr val="lt1"/>
-          </a:fontRef>
-        </p:style>
-        <p:txBody>
-          <a:bodyPr rtlCol="0" anchor="ctr"/>
-          <a:lstStyle/>
-          <a:p>
-            <a:pPr algn="ctr"/>
-          </a:p>
-        </p:txBody>
-      </p:sp>
-      <p:sp>
-        <p:nvSpPr>
-          <p:cNvPr id="19" name="Oval 18"/>
-          <p:cNvSpPr/>
-          <p:nvPr/>
-        </p:nvSpPr>
-        <p:spPr>
-          <a:xfrm>
-            <a:off x="3020648" y="4279730"/>
-            <a:ext cx="82296" cy="82296"/>
-          </a:xfrm>
-          <a:prstGeom prst="ellipse">
-            <a:avLst/>
-          </a:prstGeom>
-          <a:solidFill>
-            <a:srgbClr val="181D16"/>
-          </a:solidFill>
-          <a:ln w="19050">
-            <a:solidFill>
-              <a:srgbClr val="181D16"/>
-            </a:solidFill>
-          </a:ln>
-        </p:spPr>
-        <p:style>
-          <a:lnRef idx="1">
-            <a:schemeClr val="accent1"/>
-          </a:lnRef>
-          <a:fillRef idx="3">
-            <a:schemeClr val="accent1"/>
-          </a:fillRef>
-          <a:effectRef idx="0">
-            <a:schemeClr val="accent1"/>
-          </a:effectRef>
-          <a:fontRef idx="minor">
-            <a:schemeClr val="lt1"/>
-          </a:fontRef>
-        </p:style>
-        <p:txBody>
-          <a:bodyPr rtlCol="0" anchor="ctr"/>
-          <a:lstStyle/>
-          <a:p>
-            <a:pPr algn="ctr"/>
-          </a:p>
-        </p:txBody>
-      </p:sp>
-      <p:sp>
-        <p:nvSpPr>
-          <p:cNvPr id="20" name="Oval 19"/>
-          <p:cNvSpPr/>
-          <p:nvPr/>
-        </p:nvSpPr>
-        <p:spPr>
-          <a:xfrm>
-            <a:off x="3261279" y="4587561"/>
-            <a:ext cx="82296" cy="82296"/>
-          </a:xfrm>
-          <a:prstGeom prst="ellipse">
-            <a:avLst/>
-          </a:prstGeom>
-          <a:solidFill>
-            <a:srgbClr val="181D16"/>
-          </a:solidFill>
-          <a:ln w="19050">
-            <a:solidFill>
-              <a:srgbClr val="181D16"/>
-            </a:solidFill>
-          </a:ln>
-        </p:spPr>
-        <p:style>
-          <a:lnRef idx="1">
-            <a:schemeClr val="accent1"/>
-          </a:lnRef>
-          <a:fillRef idx="3">
-            <a:schemeClr val="accent1"/>
-          </a:fillRef>
-          <a:effectRef idx="0">
-            <a:schemeClr val="accent1"/>
-          </a:effectRef>
-          <a:fontRef idx="minor">
-            <a:schemeClr val="lt1"/>
-          </a:fontRef>
-        </p:style>
-        <p:txBody>
-          <a:bodyPr rtlCol="0" anchor="ctr"/>
-          <a:lstStyle/>
-          <a:p>
-            <a:pPr algn="ctr"/>
-          </a:p>
-        </p:txBody>
-      </p:sp>
-      <p:sp>
-        <p:nvSpPr>
-          <p:cNvPr id="21" name="Oval 20"/>
-          <p:cNvSpPr/>
-          <p:nvPr/>
-        </p:nvSpPr>
-        <p:spPr>
-          <a:xfrm>
-            <a:off x="3501911" y="4353820"/>
-            <a:ext cx="82296" cy="82296"/>
-          </a:xfrm>
-          <a:prstGeom prst="ellipse">
-            <a:avLst/>
-          </a:prstGeom>
-          <a:solidFill>
-            <a:srgbClr val="181D16"/>
-          </a:solidFill>
-          <a:ln w="19050">
-            <a:solidFill>
-              <a:srgbClr val="181D16"/>
-            </a:solidFill>
-          </a:ln>
-        </p:spPr>
-        <p:style>
-          <a:lnRef idx="1">
-            <a:schemeClr val="accent1"/>
-          </a:lnRef>
-          <a:fillRef idx="3">
-            <a:schemeClr val="accent1"/>
-          </a:fillRef>
-          <a:effectRef idx="0">
-            <a:schemeClr val="accent1"/>
-          </a:effectRef>
-          <a:fontRef idx="minor">
-            <a:schemeClr val="lt1"/>
-          </a:fontRef>
-        </p:style>
-        <p:txBody>
-          <a:bodyPr rtlCol="0" anchor="ctr"/>
-          <a:lstStyle/>
-          <a:p>
-            <a:pPr algn="ctr"/>
-          </a:p>
-        </p:txBody>
-      </p:sp>
-      <p:sp>
-        <p:nvSpPr>
-          <p:cNvPr id="22" name="Oval 21"/>
-          <p:cNvSpPr/>
-          <p:nvPr/>
-        </p:nvSpPr>
-        <p:spPr>
-          <a:xfrm>
-            <a:off x="3742542" y="5079255"/>
-            <a:ext cx="82296" cy="82296"/>
-          </a:xfrm>
-          <a:prstGeom prst="ellipse">
-            <a:avLst/>
-          </a:prstGeom>
-          <a:solidFill>
-            <a:srgbClr val="181D16"/>
-          </a:solidFill>
-          <a:ln w="19050">
-            <a:solidFill>
-              <a:srgbClr val="181D16"/>
-            </a:solidFill>
-          </a:ln>
-        </p:spPr>
-        <p:style>
-          <a:lnRef idx="1">
-            <a:schemeClr val="accent1"/>
-          </a:lnRef>
-          <a:fillRef idx="3">
-            <a:schemeClr val="accent1"/>
-          </a:fillRef>
-          <a:effectRef idx="0">
-            <a:schemeClr val="accent1"/>
-          </a:effectRef>
-          <a:fontRef idx="minor">
-            <a:schemeClr val="lt1"/>
-          </a:fontRef>
-        </p:style>
-        <p:txBody>
-          <a:bodyPr rtlCol="0" anchor="ctr"/>
-          <a:lstStyle/>
-          <a:p>
-            <a:pPr algn="ctr"/>
-          </a:p>
-        </p:txBody>
-      </p:sp>
-      <p:sp>
-        <p:nvSpPr>
-          <p:cNvPr id="23" name="Oval 22"/>
-          <p:cNvSpPr/>
-          <p:nvPr/>
-        </p:nvSpPr>
-        <p:spPr>
-          <a:xfrm>
-            <a:off x="3983174" y="4279230"/>
-            <a:ext cx="82296" cy="82296"/>
-          </a:xfrm>
-          <a:prstGeom prst="ellipse">
-            <a:avLst/>
-          </a:prstGeom>
-          <a:solidFill>
-            <a:srgbClr val="181D16"/>
-          </a:solidFill>
-          <a:ln w="19050">
-            <a:solidFill>
-              <a:srgbClr val="181D16"/>
-            </a:solidFill>
-          </a:ln>
-        </p:spPr>
-        <p:style>
-          <a:lnRef idx="1">
-            <a:schemeClr val="accent1"/>
-          </a:lnRef>
-          <a:fillRef idx="3">
-            <a:schemeClr val="accent1"/>
-          </a:fillRef>
-          <a:effectRef idx="0">
-            <a:schemeClr val="accent1"/>
-          </a:effectRef>
-          <a:fontRef idx="minor">
-            <a:schemeClr val="lt1"/>
-          </a:fontRef>
-        </p:style>
-        <p:txBody>
-          <a:bodyPr rtlCol="0" anchor="ctr"/>
-          <a:lstStyle/>
-          <a:p>
-            <a:pPr algn="ctr"/>
-          </a:p>
-        </p:txBody>
-      </p:sp>
-      <p:sp>
-        <p:nvSpPr>
-          <p:cNvPr id="24" name="Oval 23"/>
-          <p:cNvSpPr/>
-          <p:nvPr/>
-        </p:nvSpPr>
-        <p:spPr>
-          <a:xfrm>
-            <a:off x="4223806" y="4501384"/>
-            <a:ext cx="82296" cy="82296"/>
-          </a:xfrm>
-          <a:prstGeom prst="ellipse">
-            <a:avLst/>
-          </a:prstGeom>
-          <a:solidFill>
-            <a:srgbClr val="181D16"/>
-          </a:solidFill>
-          <a:ln w="19050">
-            <a:solidFill>
-              <a:srgbClr val="181D16"/>
-            </a:solidFill>
-          </a:ln>
-        </p:spPr>
-        <p:style>
-          <a:lnRef idx="1">
-            <a:schemeClr val="accent1"/>
-          </a:lnRef>
-          <a:fillRef idx="3">
-            <a:schemeClr val="accent1"/>
-          </a:fillRef>
-          <a:effectRef idx="0">
-            <a:schemeClr val="accent1"/>
-          </a:effectRef>
-          <a:fontRef idx="minor">
-            <a:schemeClr val="lt1"/>
-          </a:fontRef>
-        </p:style>
-        <p:txBody>
-          <a:bodyPr rtlCol="0" anchor="ctr"/>
-          <a:lstStyle/>
-          <a:p>
-            <a:pPr algn="ctr"/>
-          </a:p>
-        </p:txBody>
-      </p:sp>
-      <p:sp>
-        <p:nvSpPr>
-          <p:cNvPr id="25" name="Oval 24"/>
-          <p:cNvSpPr/>
-          <p:nvPr/>
-        </p:nvSpPr>
-        <p:spPr>
-          <a:xfrm>
-            <a:off x="4464437" y="3442926"/>
-            <a:ext cx="82296" cy="82296"/>
-          </a:xfrm>
-          <a:prstGeom prst="ellipse">
-            <a:avLst/>
-          </a:prstGeom>
-          <a:solidFill>
-            <a:srgbClr val="181D16"/>
-          </a:solidFill>
-          <a:ln w="19050">
-            <a:solidFill>
-              <a:srgbClr val="181D16"/>
-            </a:solidFill>
-          </a:ln>
-        </p:spPr>
-        <p:style>
-          <a:lnRef idx="1">
-            <a:schemeClr val="accent1"/>
-          </a:lnRef>
-          <a:fillRef idx="3">
-            <a:schemeClr val="accent1"/>
-          </a:fillRef>
-          <a:effectRef idx="0">
-            <a:schemeClr val="accent1"/>
-          </a:effectRef>
-          <a:fontRef idx="minor">
-            <a:schemeClr val="lt1"/>
-          </a:fontRef>
-        </p:style>
-        <p:txBody>
-          <a:bodyPr rtlCol="0" anchor="ctr"/>
-          <a:lstStyle/>
-          <a:p>
-            <a:pPr algn="ctr"/>
-          </a:p>
-        </p:txBody>
-      </p:sp>
-      <p:sp>
-        <p:nvSpPr>
-          <p:cNvPr id="26" name="Oval 25"/>
-          <p:cNvSpPr/>
-          <p:nvPr/>
-        </p:nvSpPr>
-        <p:spPr>
-          <a:xfrm>
-            <a:off x="4705069" y="3561003"/>
-            <a:ext cx="82296" cy="82296"/>
-          </a:xfrm>
-          <a:prstGeom prst="ellipse">
-            <a:avLst/>
-          </a:prstGeom>
-          <a:solidFill>
-            <a:srgbClr val="181D16"/>
-          </a:solidFill>
-          <a:ln w="19050">
-            <a:solidFill>
-              <a:srgbClr val="181D16"/>
-            </a:solidFill>
-          </a:ln>
-        </p:spPr>
-        <p:style>
-          <a:lnRef idx="1">
-            <a:schemeClr val="accent1"/>
-          </a:lnRef>
-          <a:fillRef idx="3">
-            <a:schemeClr val="accent1"/>
-          </a:fillRef>
-          <a:effectRef idx="0">
-            <a:schemeClr val="accent1"/>
-          </a:effectRef>
-          <a:fontRef idx="minor">
-            <a:schemeClr val="lt1"/>
-          </a:fontRef>
-        </p:style>
-        <p:txBody>
-          <a:bodyPr rtlCol="0" anchor="ctr"/>
-          <a:lstStyle/>
-          <a:p>
-            <a:pPr algn="ctr"/>
-          </a:p>
-        </p:txBody>
-      </p:sp>
-      <p:sp>
-        <p:nvSpPr>
-          <p:cNvPr id="27" name="Oval 26"/>
-          <p:cNvSpPr/>
-          <p:nvPr/>
-        </p:nvSpPr>
-        <p:spPr>
-          <a:xfrm>
-            <a:off x="4945700" y="3335061"/>
-            <a:ext cx="82296" cy="82296"/>
-          </a:xfrm>
-          <a:prstGeom prst="ellipse">
-            <a:avLst/>
-          </a:prstGeom>
-          <a:solidFill>
-            <a:srgbClr val="181D16"/>
-          </a:solidFill>
-          <a:ln w="19050">
-            <a:solidFill>
-              <a:srgbClr val="181D16"/>
-            </a:solidFill>
-          </a:ln>
-        </p:spPr>
-        <p:style>
-          <a:lnRef idx="1">
-            <a:schemeClr val="accent1"/>
-          </a:lnRef>
-          <a:fillRef idx="3">
-            <a:schemeClr val="accent1"/>
-          </a:fillRef>
-          <a:effectRef idx="0">
-            <a:schemeClr val="accent1"/>
-          </a:effectRef>
-          <a:fontRef idx="minor">
-            <a:schemeClr val="lt1"/>
-          </a:fontRef>
-        </p:style>
-        <p:txBody>
-          <a:bodyPr rtlCol="0" anchor="ctr"/>
-          <a:lstStyle/>
-          <a:p>
-            <a:pPr algn="ctr"/>
-          </a:p>
-        </p:txBody>
-      </p:sp>
-      <p:sp>
-        <p:nvSpPr>
-          <p:cNvPr id="28" name="Oval 27"/>
-          <p:cNvSpPr/>
-          <p:nvPr/>
-        </p:nvSpPr>
-        <p:spPr>
-          <a:xfrm>
-            <a:off x="5186332" y="3444604"/>
-            <a:ext cx="82296" cy="82296"/>
-          </a:xfrm>
-          <a:prstGeom prst="ellipse">
-            <a:avLst/>
-          </a:prstGeom>
-          <a:solidFill>
-            <a:srgbClr val="181D16"/>
-          </a:solidFill>
-          <a:ln w="19050">
-            <a:solidFill>
-              <a:srgbClr val="181D16"/>
-            </a:solidFill>
-          </a:ln>
-        </p:spPr>
-        <p:style>
-          <a:lnRef idx="1">
-            <a:schemeClr val="accent1"/>
-          </a:lnRef>
-          <a:fillRef idx="3">
-            <a:schemeClr val="accent1"/>
-          </a:fillRef>
-          <a:effectRef idx="0">
-            <a:schemeClr val="accent1"/>
-          </a:effectRef>
-          <a:fontRef idx="minor">
-            <a:schemeClr val="lt1"/>
-          </a:fontRef>
-        </p:style>
-        <p:txBody>
-          <a:bodyPr rtlCol="0" anchor="ctr"/>
-          <a:lstStyle/>
-          <a:p>
-            <a:pPr algn="ctr"/>
-          </a:p>
-        </p:txBody>
-      </p:sp>
-      <p:sp>
-        <p:nvSpPr>
-          <p:cNvPr id="29" name="Oval 28"/>
-          <p:cNvSpPr/>
-          <p:nvPr/>
-        </p:nvSpPr>
-        <p:spPr>
-          <a:xfrm>
-            <a:off x="5426964" y="2965705"/>
-            <a:ext cx="82296" cy="82296"/>
-          </a:xfrm>
-          <a:prstGeom prst="ellipse">
-            <a:avLst/>
-          </a:prstGeom>
-          <a:solidFill>
-            <a:srgbClr val="181D16"/>
-          </a:solidFill>
-          <a:ln w="19050">
-            <a:solidFill>
-              <a:srgbClr val="181D16"/>
-            </a:solidFill>
-          </a:ln>
-        </p:spPr>
-        <p:style>
-          <a:lnRef idx="1">
-            <a:schemeClr val="accent1"/>
-          </a:lnRef>
-          <a:fillRef idx="3">
-            <a:schemeClr val="accent1"/>
-          </a:fillRef>
-          <a:effectRef idx="0">
-            <a:schemeClr val="accent1"/>
-          </a:effectRef>
-          <a:fontRef idx="minor">
-            <a:schemeClr val="lt1"/>
-          </a:fontRef>
-        </p:style>
-        <p:txBody>
-          <a:bodyPr rtlCol="0" anchor="ctr"/>
-          <a:lstStyle/>
-          <a:p>
-            <a:pPr algn="ctr"/>
-          </a:p>
-        </p:txBody>
-      </p:sp>
-      <p:sp>
-        <p:nvSpPr>
-          <p:cNvPr id="30" name="TextBox 29"/>
-          <p:cNvSpPr txBox="1"/>
-          <p:nvPr/>
-        </p:nvSpPr>
-        <p:spPr>
-          <a:xfrm>
-            <a:off x="6510528" y="2423160"/>
-            <a:ext cx="4480560" cy="274320"/>
-          </a:xfrm>
-          <a:prstGeom prst="rect">
-            <a:avLst/>
-          </a:prstGeom>
-          <a:noFill/>
-        </p:spPr>
-        <p:txBody>
-          <a:bodyPr wrap="square" lIns="0" rIns="0" tIns="0" bIns="0">
-            <a:spAutoFit/>
-          </a:bodyPr>
-          <a:lstStyle/>
-          <a:p>
-            <a:pPr>
-              <a:spcAft>
-                <a:spcPts val="0"/>
-              </a:spcAft>
-              <a:defRPr sz="1600" b="0">
-                <a:solidFill>
-                  <a:srgbClr val="181D16"/>
-                </a:solidFill>
-                <a:latin typeface="Arial"/>
-              </a:defRPr>
-            </a:pPr>
-            <a:r>
-              <a:t>Sample B</a:t>
-            </a:r>
-          </a:p>
-        </p:txBody>
-      </p:sp>
-      <p:cxnSp>
-        <p:nvCxnSpPr>
-          <p:cNvPr id="31" name="Connector 30"/>
-          <p:cNvCxnSpPr/>
-          <p:nvPr/>
-        </p:nvCxnSpPr>
-        <p:spPr>
-          <a:xfrm>
-            <a:off x="6510528" y="5440680"/>
-            <a:ext cx="4572000" cy="0"/>
-          </a:xfrm>
-          <a:prstGeom prst="line">
-            <a:avLst/>
-          </a:prstGeom>
-          <a:ln w="12700">
-            <a:solidFill>
-              <a:srgbClr val="D4D6D0"/>
-            </a:solidFill>
-          </a:ln>
-        </p:spPr>
-        <p:style>
-          <a:lnRef idx="2">
-            <a:schemeClr val="accent1"/>
-          </a:lnRef>
-          <a:fillRef idx="0">
-            <a:schemeClr val="accent1"/>
-          </a:fillRef>
-          <a:effectRef idx="0">
-            <a:schemeClr val="accent1"/>
-          </a:effectRef>
-          <a:fontRef idx="minor">
-            <a:schemeClr val="tx1"/>
-          </a:fontRef>
-        </p:style>
-      </p:cxnSp>
-      <p:cxnSp>
-        <p:nvCxnSpPr>
-          <p:cNvPr id="32" name="Connector 31"/>
-          <p:cNvCxnSpPr/>
-          <p:nvPr/>
-        </p:nvCxnSpPr>
-        <p:spPr>
-          <a:xfrm>
-            <a:off x="6510528" y="2834640"/>
-            <a:ext cx="0" cy="2606040"/>
-          </a:xfrm>
-          <a:prstGeom prst="line">
-            <a:avLst/>
-          </a:prstGeom>
-          <a:ln w="12700">
-            <a:solidFill>
-              <a:srgbClr val="D4D6D0"/>
-            </a:solidFill>
-          </a:ln>
-        </p:spPr>
-        <p:style>
-          <a:lnRef idx="2">
-            <a:schemeClr val="accent1"/>
-          </a:lnRef>
-          <a:fillRef idx="0">
-            <a:schemeClr val="accent1"/>
-          </a:fillRef>
-          <a:effectRef idx="0">
-            <a:schemeClr val="accent1"/>
-          </a:effectRef>
-          <a:fontRef idx="minor">
-            <a:schemeClr val="tx1"/>
-          </a:fontRef>
-        </p:style>
-      </p:cxnSp>
-      <p:sp>
-        <p:nvSpPr>
-          <p:cNvPr id="33" name="TextBox 32"/>
-          <p:cNvSpPr txBox="1"/>
-          <p:nvPr/>
-        </p:nvSpPr>
-        <p:spPr>
-          <a:xfrm>
-            <a:off x="10991088" y="5532120"/>
-            <a:ext cx="640080" cy="274320"/>
-          </a:xfrm>
-          <a:prstGeom prst="rect">
-            <a:avLst/>
-          </a:prstGeom>
-          <a:noFill/>
-        </p:spPr>
-        <p:txBody>
-          <a:bodyPr wrap="square" lIns="0" rIns="0" tIns="0" bIns="0">
-            <a:spAutoFit/>
-          </a:bodyPr>
-          <a:lstStyle/>
-          <a:p>
-            <a:pPr>
-              <a:spcAft>
-                <a:spcPts val="0"/>
-              </a:spcAft>
-              <a:defRPr sz="1400" b="0">
-                <a:solidFill>
-                  <a:srgbClr val="686C66"/>
-                </a:solidFill>
-                <a:latin typeface="Arial"/>
-              </a:defRPr>
-            </a:pPr>
-            <a:r>
-              <a:t>x</a:t>
-            </a:r>
-          </a:p>
-        </p:txBody>
-      </p:sp>
-      <p:sp>
-        <p:nvSpPr>
-          <p:cNvPr id="34" name="TextBox 33"/>
-          <p:cNvSpPr txBox="1"/>
-          <p:nvPr/>
-        </p:nvSpPr>
-        <p:spPr>
-          <a:xfrm>
-            <a:off x="6236208" y="2651760"/>
-            <a:ext cx="914400" cy="274320"/>
-          </a:xfrm>
-          <a:prstGeom prst="rect">
-            <a:avLst/>
-          </a:prstGeom>
-          <a:noFill/>
-        </p:spPr>
-        <p:txBody>
-          <a:bodyPr wrap="square" lIns="0" rIns="0" tIns="0" bIns="0">
-            <a:spAutoFit/>
-          </a:bodyPr>
-          <a:lstStyle/>
-          <a:p>
-            <a:pPr>
-              <a:spcAft>
-                <a:spcPts val="0"/>
-              </a:spcAft>
-              <a:defRPr sz="1400" b="0">
-                <a:solidFill>
-                  <a:srgbClr val="686C66"/>
-                </a:solidFill>
-                <a:latin typeface="Arial"/>
-              </a:defRPr>
-            </a:pPr>
-            <a:r>
-              <a:t>y</a:t>
-            </a:r>
-          </a:p>
-        </p:txBody>
-      </p:sp>
-      <p:sp>
-        <p:nvSpPr>
-          <p:cNvPr id="35" name="Oval 34"/>
-          <p:cNvSpPr/>
-          <p:nvPr/>
-        </p:nvSpPr>
-        <p:spPr>
-          <a:xfrm>
-            <a:off x="6469380" y="3965257"/>
-            <a:ext cx="82296" cy="82296"/>
-          </a:xfrm>
-          <a:prstGeom prst="ellipse">
-            <a:avLst/>
-          </a:prstGeom>
-          <a:solidFill>
-            <a:srgbClr val="181D16"/>
-          </a:solidFill>
-          <a:ln w="19050">
-            <a:solidFill>
-              <a:srgbClr val="181D16"/>
-            </a:solidFill>
-          </a:ln>
-        </p:spPr>
-        <p:style>
-          <a:lnRef idx="1">
-            <a:schemeClr val="accent1"/>
-          </a:lnRef>
-          <a:fillRef idx="3">
-            <a:schemeClr val="accent1"/>
-          </a:fillRef>
-          <a:effectRef idx="0">
-            <a:schemeClr val="accent1"/>
-          </a:effectRef>
-          <a:fontRef idx="minor">
-            <a:schemeClr val="lt1"/>
-          </a:fontRef>
-        </p:style>
-        <p:txBody>
-          <a:bodyPr rtlCol="0" anchor="ctr"/>
-          <a:lstStyle/>
-          <a:p>
-            <a:pPr algn="ctr"/>
-          </a:p>
-        </p:txBody>
-      </p:sp>
-      <p:sp>
-        <p:nvSpPr>
-          <p:cNvPr id="36" name="Oval 35"/>
-          <p:cNvSpPr/>
-          <p:nvPr/>
-        </p:nvSpPr>
-        <p:spPr>
-          <a:xfrm>
-            <a:off x="6710011" y="3622132"/>
-            <a:ext cx="82296" cy="82296"/>
-          </a:xfrm>
-          <a:prstGeom prst="ellipse">
-            <a:avLst/>
-          </a:prstGeom>
-          <a:solidFill>
-            <a:srgbClr val="181D16"/>
-          </a:solidFill>
-          <a:ln w="19050">
-            <a:solidFill>
-              <a:srgbClr val="181D16"/>
-            </a:solidFill>
-          </a:ln>
-        </p:spPr>
-        <p:style>
-          <a:lnRef idx="1">
-            <a:schemeClr val="accent1"/>
-          </a:lnRef>
-          <a:fillRef idx="3">
-            <a:schemeClr val="accent1"/>
-          </a:fillRef>
-          <a:effectRef idx="0">
-            <a:schemeClr val="accent1"/>
-          </a:effectRef>
-          <a:fontRef idx="minor">
-            <a:schemeClr val="lt1"/>
-          </a:fontRef>
-        </p:style>
-        <p:txBody>
-          <a:bodyPr rtlCol="0" anchor="ctr"/>
-          <a:lstStyle/>
-          <a:p>
-            <a:pPr algn="ctr"/>
-          </a:p>
-        </p:txBody>
-      </p:sp>
-      <p:sp>
-        <p:nvSpPr>
-          <p:cNvPr id="37" name="Oval 36"/>
-          <p:cNvSpPr/>
-          <p:nvPr/>
-        </p:nvSpPr>
-        <p:spPr>
-          <a:xfrm>
-            <a:off x="6950643" y="3715519"/>
-            <a:ext cx="82296" cy="82296"/>
-          </a:xfrm>
-          <a:prstGeom prst="ellipse">
-            <a:avLst/>
-          </a:prstGeom>
-          <a:solidFill>
-            <a:srgbClr val="181D16"/>
-          </a:solidFill>
-          <a:ln w="19050">
-            <a:solidFill>
-              <a:srgbClr val="181D16"/>
-            </a:solidFill>
-          </a:ln>
-        </p:spPr>
-        <p:style>
-          <a:lnRef idx="1">
-            <a:schemeClr val="accent1"/>
-          </a:lnRef>
-          <a:fillRef idx="3">
-            <a:schemeClr val="accent1"/>
-          </a:fillRef>
-          <a:effectRef idx="0">
-            <a:schemeClr val="accent1"/>
-          </a:effectRef>
-          <a:fontRef idx="minor">
-            <a:schemeClr val="lt1"/>
-          </a:fontRef>
-        </p:style>
-        <p:txBody>
-          <a:bodyPr rtlCol="0" anchor="ctr"/>
-          <a:lstStyle/>
-          <a:p>
-            <a:pPr algn="ctr"/>
-          </a:p>
-        </p:txBody>
-      </p:sp>
-      <p:sp>
-        <p:nvSpPr>
-          <p:cNvPr id="38" name="Oval 37"/>
-          <p:cNvSpPr/>
-          <p:nvPr/>
-        </p:nvSpPr>
-        <p:spPr>
-          <a:xfrm>
-            <a:off x="7191274" y="4212693"/>
-            <a:ext cx="82296" cy="82296"/>
-          </a:xfrm>
-          <a:prstGeom prst="ellipse">
-            <a:avLst/>
-          </a:prstGeom>
-          <a:solidFill>
-            <a:srgbClr val="181D16"/>
-          </a:solidFill>
-          <a:ln w="19050">
-            <a:solidFill>
-              <a:srgbClr val="181D16"/>
-            </a:solidFill>
-          </a:ln>
-        </p:spPr>
-        <p:style>
-          <a:lnRef idx="1">
-            <a:schemeClr val="accent1"/>
-          </a:lnRef>
-          <a:fillRef idx="3">
-            <a:schemeClr val="accent1"/>
-          </a:fillRef>
-          <a:effectRef idx="0">
-            <a:schemeClr val="accent1"/>
-          </a:effectRef>
-          <a:fontRef idx="minor">
-            <a:schemeClr val="lt1"/>
-          </a:fontRef>
-        </p:style>
-        <p:txBody>
-          <a:bodyPr rtlCol="0" anchor="ctr"/>
-          <a:lstStyle/>
-          <a:p>
-            <a:pPr algn="ctr"/>
-          </a:p>
-        </p:txBody>
-      </p:sp>
-      <p:sp>
-        <p:nvSpPr>
-          <p:cNvPr id="39" name="Oval 38"/>
-          <p:cNvSpPr/>
-          <p:nvPr/>
-        </p:nvSpPr>
-        <p:spPr>
-          <a:xfrm>
-            <a:off x="7431906" y="4290024"/>
-            <a:ext cx="82296" cy="82296"/>
-          </a:xfrm>
-          <a:prstGeom prst="ellipse">
-            <a:avLst/>
-          </a:prstGeom>
-          <a:solidFill>
-            <a:srgbClr val="181D16"/>
-          </a:solidFill>
-          <a:ln w="19050">
-            <a:solidFill>
-              <a:srgbClr val="181D16"/>
-            </a:solidFill>
-          </a:ln>
-        </p:spPr>
-        <p:style>
-          <a:lnRef idx="1">
-            <a:schemeClr val="accent1"/>
-          </a:lnRef>
-          <a:fillRef idx="3">
-            <a:schemeClr val="accent1"/>
-          </a:fillRef>
-          <a:effectRef idx="0">
-            <a:schemeClr val="accent1"/>
-          </a:effectRef>
-          <a:fontRef idx="minor">
-            <a:schemeClr val="lt1"/>
-          </a:fontRef>
-        </p:style>
-        <p:txBody>
-          <a:bodyPr rtlCol="0" anchor="ctr"/>
-          <a:lstStyle/>
-          <a:p>
-            <a:pPr algn="ctr"/>
-          </a:p>
-        </p:txBody>
-      </p:sp>
-      <p:sp>
-        <p:nvSpPr>
-          <p:cNvPr id="40" name="Oval 39"/>
-          <p:cNvSpPr/>
-          <p:nvPr/>
-        </p:nvSpPr>
-        <p:spPr>
-          <a:xfrm>
-            <a:off x="7672537" y="4679595"/>
-            <a:ext cx="82296" cy="82296"/>
-          </a:xfrm>
-          <a:prstGeom prst="ellipse">
-            <a:avLst/>
-          </a:prstGeom>
-          <a:solidFill>
-            <a:srgbClr val="181D16"/>
-          </a:solidFill>
-          <a:ln w="19050">
-            <a:solidFill>
-              <a:srgbClr val="181D16"/>
-            </a:solidFill>
-          </a:ln>
-        </p:spPr>
-        <p:style>
-          <a:lnRef idx="1">
-            <a:schemeClr val="accent1"/>
-          </a:lnRef>
-          <a:fillRef idx="3">
-            <a:schemeClr val="accent1"/>
-          </a:fillRef>
-          <a:effectRef idx="0">
-            <a:schemeClr val="accent1"/>
-          </a:effectRef>
-          <a:fontRef idx="minor">
-            <a:schemeClr val="lt1"/>
-          </a:fontRef>
-        </p:style>
-        <p:txBody>
-          <a:bodyPr rtlCol="0" anchor="ctr"/>
-          <a:lstStyle/>
-          <a:p>
-            <a:pPr algn="ctr"/>
-          </a:p>
-        </p:txBody>
-      </p:sp>
-      <p:sp>
-        <p:nvSpPr>
-          <p:cNvPr id="41" name="Oval 40"/>
-          <p:cNvSpPr/>
-          <p:nvPr/>
-        </p:nvSpPr>
-        <p:spPr>
-          <a:xfrm>
-            <a:off x="7913169" y="4883840"/>
-            <a:ext cx="82296" cy="82296"/>
-          </a:xfrm>
-          <a:prstGeom prst="ellipse">
-            <a:avLst/>
-          </a:prstGeom>
-          <a:solidFill>
-            <a:srgbClr val="181D16"/>
-          </a:solidFill>
-          <a:ln w="19050">
-            <a:solidFill>
-              <a:srgbClr val="181D16"/>
-            </a:solidFill>
-          </a:ln>
-        </p:spPr>
-        <p:style>
-          <a:lnRef idx="1">
-            <a:schemeClr val="accent1"/>
-          </a:lnRef>
-          <a:fillRef idx="3">
-            <a:schemeClr val="accent1"/>
-          </a:fillRef>
-          <a:effectRef idx="0">
-            <a:schemeClr val="accent1"/>
-          </a:effectRef>
-          <a:fontRef idx="minor">
-            <a:schemeClr val="lt1"/>
-          </a:fontRef>
-        </p:style>
-        <p:txBody>
-          <a:bodyPr rtlCol="0" anchor="ctr"/>
-          <a:lstStyle/>
-          <a:p>
-            <a:pPr algn="ctr"/>
-          </a:p>
-        </p:txBody>
-      </p:sp>
-      <p:sp>
-        <p:nvSpPr>
-          <p:cNvPr id="42" name="Oval 41"/>
-          <p:cNvSpPr/>
-          <p:nvPr/>
-        </p:nvSpPr>
-        <p:spPr>
-          <a:xfrm>
-            <a:off x="8153801" y="4916472"/>
-            <a:ext cx="82296" cy="82296"/>
-          </a:xfrm>
-          <a:prstGeom prst="ellipse">
-            <a:avLst/>
-          </a:prstGeom>
-          <a:solidFill>
-            <a:srgbClr val="181D16"/>
-          </a:solidFill>
-          <a:ln w="19050">
-            <a:solidFill>
-              <a:srgbClr val="181D16"/>
-            </a:solidFill>
-          </a:ln>
-        </p:spPr>
-        <p:style>
-          <a:lnRef idx="1">
-            <a:schemeClr val="accent1"/>
-          </a:lnRef>
-          <a:fillRef idx="3">
-            <a:schemeClr val="accent1"/>
-          </a:fillRef>
-          <a:effectRef idx="0">
-            <a:schemeClr val="accent1"/>
-          </a:effectRef>
-          <a:fontRef idx="minor">
-            <a:schemeClr val="lt1"/>
-          </a:fontRef>
-        </p:style>
-        <p:txBody>
-          <a:bodyPr rtlCol="0" anchor="ctr"/>
-          <a:lstStyle/>
-          <a:p>
-            <a:pPr algn="ctr"/>
-          </a:p>
-        </p:txBody>
-      </p:sp>
-      <p:sp>
-        <p:nvSpPr>
-          <p:cNvPr id="43" name="Oval 42"/>
-          <p:cNvSpPr/>
-          <p:nvPr/>
-        </p:nvSpPr>
-        <p:spPr>
-          <a:xfrm>
-            <a:off x="8394432" y="4962491"/>
-            <a:ext cx="82296" cy="82296"/>
-          </a:xfrm>
-          <a:prstGeom prst="ellipse">
-            <a:avLst/>
-          </a:prstGeom>
-          <a:solidFill>
-            <a:srgbClr val="181D16"/>
-          </a:solidFill>
-          <a:ln w="19050">
-            <a:solidFill>
-              <a:srgbClr val="181D16"/>
-            </a:solidFill>
-          </a:ln>
-        </p:spPr>
-        <p:style>
-          <a:lnRef idx="1">
-            <a:schemeClr val="accent1"/>
-          </a:lnRef>
-          <a:fillRef idx="3">
-            <a:schemeClr val="accent1"/>
-          </a:fillRef>
-          <a:effectRef idx="0">
-            <a:schemeClr val="accent1"/>
-          </a:effectRef>
-          <a:fontRef idx="minor">
-            <a:schemeClr val="lt1"/>
-          </a:fontRef>
-        </p:style>
-        <p:txBody>
-          <a:bodyPr rtlCol="0" anchor="ctr"/>
-          <a:lstStyle/>
-          <a:p>
-            <a:pPr algn="ctr"/>
-          </a:p>
-        </p:txBody>
-      </p:sp>
-      <p:sp>
-        <p:nvSpPr>
-          <p:cNvPr id="44" name="Oval 43"/>
-          <p:cNvSpPr/>
-          <p:nvPr/>
-        </p:nvSpPr>
-        <p:spPr>
-          <a:xfrm>
-            <a:off x="8635064" y="4303120"/>
-            <a:ext cx="82296" cy="82296"/>
-          </a:xfrm>
-          <a:prstGeom prst="ellipse">
-            <a:avLst/>
-          </a:prstGeom>
-          <a:solidFill>
-            <a:srgbClr val="181D16"/>
-          </a:solidFill>
-          <a:ln w="19050">
-            <a:solidFill>
-              <a:srgbClr val="181D16"/>
-            </a:solidFill>
-          </a:ln>
-        </p:spPr>
-        <p:style>
-          <a:lnRef idx="1">
-            <a:schemeClr val="accent1"/>
-          </a:lnRef>
-          <a:fillRef idx="3">
-            <a:schemeClr val="accent1"/>
-          </a:fillRef>
-          <a:effectRef idx="0">
-            <a:schemeClr val="accent1"/>
-          </a:effectRef>
-          <a:fontRef idx="minor">
-            <a:schemeClr val="lt1"/>
-          </a:fontRef>
-        </p:style>
-        <p:txBody>
-          <a:bodyPr rtlCol="0" anchor="ctr"/>
-          <a:lstStyle/>
-          <a:p>
-            <a:pPr algn="ctr"/>
-          </a:p>
-        </p:txBody>
-      </p:sp>
-      <p:sp>
-        <p:nvSpPr>
-          <p:cNvPr id="45" name="Oval 44"/>
-          <p:cNvSpPr/>
-          <p:nvPr/>
-        </p:nvSpPr>
-        <p:spPr>
-          <a:xfrm>
-            <a:off x="8875695" y="4599110"/>
-            <a:ext cx="82296" cy="82296"/>
-          </a:xfrm>
-          <a:prstGeom prst="ellipse">
-            <a:avLst/>
-          </a:prstGeom>
-          <a:solidFill>
-            <a:srgbClr val="181D16"/>
-          </a:solidFill>
-          <a:ln w="19050">
-            <a:solidFill>
-              <a:srgbClr val="181D16"/>
-            </a:solidFill>
-          </a:ln>
-        </p:spPr>
-        <p:style>
-          <a:lnRef idx="1">
-            <a:schemeClr val="accent1"/>
-          </a:lnRef>
-          <a:fillRef idx="3">
-            <a:schemeClr val="accent1"/>
-          </a:fillRef>
-          <a:effectRef idx="0">
-            <a:schemeClr val="accent1"/>
-          </a:effectRef>
-          <a:fontRef idx="minor">
-            <a:schemeClr val="lt1"/>
-          </a:fontRef>
-        </p:style>
-        <p:txBody>
-          <a:bodyPr rtlCol="0" anchor="ctr"/>
-          <a:lstStyle/>
-          <a:p>
-            <a:pPr algn="ctr"/>
-          </a:p>
-        </p:txBody>
-      </p:sp>
-      <p:sp>
-        <p:nvSpPr>
-          <p:cNvPr id="46" name="Oval 45"/>
-          <p:cNvSpPr/>
-          <p:nvPr/>
-        </p:nvSpPr>
-        <p:spPr>
-          <a:xfrm>
-            <a:off x="9116327" y="4477431"/>
-            <a:ext cx="82296" cy="82296"/>
-          </a:xfrm>
-          <a:prstGeom prst="ellipse">
-            <a:avLst/>
-          </a:prstGeom>
-          <a:solidFill>
-            <a:srgbClr val="181D16"/>
-          </a:solidFill>
-          <a:ln w="19050">
-            <a:solidFill>
-              <a:srgbClr val="181D16"/>
-            </a:solidFill>
-          </a:ln>
-        </p:spPr>
-        <p:style>
-          <a:lnRef idx="1">
-            <a:schemeClr val="accent1"/>
-          </a:lnRef>
-          <a:fillRef idx="3">
-            <a:schemeClr val="accent1"/>
-          </a:fillRef>
-          <a:effectRef idx="0">
-            <a:schemeClr val="accent1"/>
-          </a:effectRef>
-          <a:fontRef idx="minor">
-            <a:schemeClr val="lt1"/>
-          </a:fontRef>
-        </p:style>
-        <p:txBody>
-          <a:bodyPr rtlCol="0" anchor="ctr"/>
-          <a:lstStyle/>
-          <a:p>
-            <a:pPr algn="ctr"/>
-          </a:p>
-        </p:txBody>
-      </p:sp>
-      <p:sp>
-        <p:nvSpPr>
-          <p:cNvPr id="47" name="Oval 46"/>
-          <p:cNvSpPr/>
-          <p:nvPr/>
-        </p:nvSpPr>
-        <p:spPr>
-          <a:xfrm>
-            <a:off x="9356958" y="4651932"/>
-            <a:ext cx="82296" cy="82296"/>
-          </a:xfrm>
-          <a:prstGeom prst="ellipse">
-            <a:avLst/>
-          </a:prstGeom>
-          <a:solidFill>
-            <a:srgbClr val="181D16"/>
-          </a:solidFill>
-          <a:ln w="19050">
-            <a:solidFill>
-              <a:srgbClr val="181D16"/>
-            </a:solidFill>
-          </a:ln>
-        </p:spPr>
-        <p:style>
-          <a:lnRef idx="1">
-            <a:schemeClr val="accent1"/>
-          </a:lnRef>
-          <a:fillRef idx="3">
-            <a:schemeClr val="accent1"/>
-          </a:fillRef>
-          <a:effectRef idx="0">
-            <a:schemeClr val="accent1"/>
-          </a:effectRef>
-          <a:fontRef idx="minor">
-            <a:schemeClr val="lt1"/>
-          </a:fontRef>
-        </p:style>
-        <p:txBody>
-          <a:bodyPr rtlCol="0" anchor="ctr"/>
-          <a:lstStyle/>
-          <a:p>
-            <a:pPr algn="ctr"/>
-          </a:p>
-        </p:txBody>
-      </p:sp>
-      <p:sp>
-        <p:nvSpPr>
-          <p:cNvPr id="48" name="Oval 47"/>
-          <p:cNvSpPr/>
-          <p:nvPr/>
-        </p:nvSpPr>
-        <p:spPr>
-          <a:xfrm>
-            <a:off x="9597590" y="4694475"/>
-            <a:ext cx="82296" cy="82296"/>
-          </a:xfrm>
-          <a:prstGeom prst="ellipse">
-            <a:avLst/>
-          </a:prstGeom>
-          <a:solidFill>
-            <a:srgbClr val="181D16"/>
-          </a:solidFill>
-          <a:ln w="19050">
-            <a:solidFill>
-              <a:srgbClr val="181D16"/>
-            </a:solidFill>
-          </a:ln>
-        </p:spPr>
-        <p:style>
-          <a:lnRef idx="1">
-            <a:schemeClr val="accent1"/>
-          </a:lnRef>
-          <a:fillRef idx="3">
-            <a:schemeClr val="accent1"/>
-          </a:fillRef>
-          <a:effectRef idx="0">
-            <a:schemeClr val="accent1"/>
-          </a:effectRef>
-          <a:fontRef idx="minor">
-            <a:schemeClr val="lt1"/>
-          </a:fontRef>
-        </p:style>
-        <p:txBody>
-          <a:bodyPr rtlCol="0" anchor="ctr"/>
-          <a:lstStyle/>
-          <a:p>
-            <a:pPr algn="ctr"/>
-          </a:p>
-        </p:txBody>
-      </p:sp>
-      <p:sp>
-        <p:nvSpPr>
-          <p:cNvPr id="49" name="Oval 48"/>
-          <p:cNvSpPr/>
-          <p:nvPr/>
-        </p:nvSpPr>
-        <p:spPr>
-          <a:xfrm>
-            <a:off x="9838222" y="4600585"/>
-            <a:ext cx="82296" cy="82296"/>
-          </a:xfrm>
-          <a:prstGeom prst="ellipse">
-            <a:avLst/>
-          </a:prstGeom>
-          <a:solidFill>
-            <a:srgbClr val="181D16"/>
-          </a:solidFill>
-          <a:ln w="19050">
-            <a:solidFill>
-              <a:srgbClr val="181D16"/>
-            </a:solidFill>
-          </a:ln>
-        </p:spPr>
-        <p:style>
-          <a:lnRef idx="1">
-            <a:schemeClr val="accent1"/>
-          </a:lnRef>
-          <a:fillRef idx="3">
-            <a:schemeClr val="accent1"/>
-          </a:fillRef>
-          <a:effectRef idx="0">
-            <a:schemeClr val="accent1"/>
-          </a:effectRef>
-          <a:fontRef idx="minor">
-            <a:schemeClr val="lt1"/>
-          </a:fontRef>
-        </p:style>
-        <p:txBody>
-          <a:bodyPr rtlCol="0" anchor="ctr"/>
-          <a:lstStyle/>
-          <a:p>
-            <a:pPr algn="ctr"/>
-          </a:p>
-        </p:txBody>
-      </p:sp>
-      <p:sp>
-        <p:nvSpPr>
-          <p:cNvPr id="50" name="Oval 49"/>
-          <p:cNvSpPr/>
-          <p:nvPr/>
-        </p:nvSpPr>
-        <p:spPr>
-          <a:xfrm>
-            <a:off x="10078853" y="4322913"/>
-            <a:ext cx="82296" cy="82296"/>
-          </a:xfrm>
-          <a:prstGeom prst="ellipse">
-            <a:avLst/>
-          </a:prstGeom>
-          <a:solidFill>
-            <a:srgbClr val="181D16"/>
-          </a:solidFill>
-          <a:ln w="19050">
-            <a:solidFill>
-              <a:srgbClr val="181D16"/>
-            </a:solidFill>
-          </a:ln>
-        </p:spPr>
-        <p:style>
-          <a:lnRef idx="1">
-            <a:schemeClr val="accent1"/>
-          </a:lnRef>
-          <a:fillRef idx="3">
-            <a:schemeClr val="accent1"/>
-          </a:fillRef>
-          <a:effectRef idx="0">
-            <a:schemeClr val="accent1"/>
-          </a:effectRef>
-          <a:fontRef idx="minor">
-            <a:schemeClr val="lt1"/>
-          </a:fontRef>
-        </p:style>
-        <p:txBody>
-          <a:bodyPr rtlCol="0" anchor="ctr"/>
-          <a:lstStyle/>
-          <a:p>
-            <a:pPr algn="ctr"/>
-          </a:p>
-        </p:txBody>
-      </p:sp>
-      <p:sp>
-        <p:nvSpPr>
-          <p:cNvPr id="51" name="Oval 50"/>
-          <p:cNvSpPr/>
-          <p:nvPr/>
-        </p:nvSpPr>
-        <p:spPr>
-          <a:xfrm>
-            <a:off x="10319485" y="3657743"/>
-            <a:ext cx="82296" cy="82296"/>
-          </a:xfrm>
-          <a:prstGeom prst="ellipse">
-            <a:avLst/>
-          </a:prstGeom>
-          <a:solidFill>
-            <a:srgbClr val="181D16"/>
-          </a:solidFill>
-          <a:ln w="19050">
-            <a:solidFill>
-              <a:srgbClr val="181D16"/>
-            </a:solidFill>
-          </a:ln>
-        </p:spPr>
-        <p:style>
-          <a:lnRef idx="1">
-            <a:schemeClr val="accent1"/>
-          </a:lnRef>
-          <a:fillRef idx="3">
-            <a:schemeClr val="accent1"/>
-          </a:fillRef>
-          <a:effectRef idx="0">
-            <a:schemeClr val="accent1"/>
-          </a:effectRef>
-          <a:fontRef idx="minor">
-            <a:schemeClr val="lt1"/>
-          </a:fontRef>
-        </p:style>
-        <p:txBody>
-          <a:bodyPr rtlCol="0" anchor="ctr"/>
-          <a:lstStyle/>
-          <a:p>
-            <a:pPr algn="ctr"/>
-          </a:p>
-        </p:txBody>
-      </p:sp>
-      <p:sp>
-        <p:nvSpPr>
-          <p:cNvPr id="52" name="Oval 51"/>
-          <p:cNvSpPr/>
-          <p:nvPr/>
-        </p:nvSpPr>
-        <p:spPr>
-          <a:xfrm>
-            <a:off x="10560116" y="3648092"/>
-            <a:ext cx="82296" cy="82296"/>
-          </a:xfrm>
-          <a:prstGeom prst="ellipse">
-            <a:avLst/>
-          </a:prstGeom>
-          <a:solidFill>
-            <a:srgbClr val="181D16"/>
-          </a:solidFill>
-          <a:ln w="19050">
-            <a:solidFill>
-              <a:srgbClr val="181D16"/>
-            </a:solidFill>
-          </a:ln>
-        </p:spPr>
-        <p:style>
-          <a:lnRef idx="1">
-            <a:schemeClr val="accent1"/>
-          </a:lnRef>
-          <a:fillRef idx="3">
-            <a:schemeClr val="accent1"/>
-          </a:fillRef>
-          <a:effectRef idx="0">
-            <a:schemeClr val="accent1"/>
-          </a:effectRef>
-          <a:fontRef idx="minor">
-            <a:schemeClr val="lt1"/>
-          </a:fontRef>
-        </p:style>
-        <p:txBody>
-          <a:bodyPr rtlCol="0" anchor="ctr"/>
-          <a:lstStyle/>
-          <a:p>
-            <a:pPr algn="ctr"/>
-          </a:p>
-        </p:txBody>
-      </p:sp>
-      <p:sp>
-        <p:nvSpPr>
-          <p:cNvPr id="53" name="Oval 52"/>
-          <p:cNvSpPr/>
-          <p:nvPr/>
-        </p:nvSpPr>
-        <p:spPr>
-          <a:xfrm>
-            <a:off x="10800748" y="3578745"/>
-            <a:ext cx="82296" cy="82296"/>
-          </a:xfrm>
-          <a:prstGeom prst="ellipse">
-            <a:avLst/>
-          </a:prstGeom>
-          <a:solidFill>
-            <a:srgbClr val="181D16"/>
-          </a:solidFill>
-          <a:ln w="19050">
-            <a:solidFill>
-              <a:srgbClr val="181D16"/>
-            </a:solidFill>
-          </a:ln>
-        </p:spPr>
-        <p:style>
-          <a:lnRef idx="1">
-            <a:schemeClr val="accent1"/>
-          </a:lnRef>
-          <a:fillRef idx="3">
-            <a:schemeClr val="accent1"/>
-          </a:fillRef>
-          <a:effectRef idx="0">
-            <a:schemeClr val="accent1"/>
-          </a:effectRef>
-          <a:fontRef idx="minor">
-            <a:schemeClr val="lt1"/>
-          </a:fontRef>
-        </p:style>
-        <p:txBody>
-          <a:bodyPr rtlCol="0" anchor="ctr"/>
-          <a:lstStyle/>
-          <a:p>
-            <a:pPr algn="ctr"/>
-          </a:p>
-        </p:txBody>
-      </p:sp>
-      <p:sp>
-        <p:nvSpPr>
-          <p:cNvPr id="54" name="Oval 53"/>
-          <p:cNvSpPr/>
-          <p:nvPr/>
-        </p:nvSpPr>
-        <p:spPr>
-          <a:xfrm>
-            <a:off x="11041380" y="3252248"/>
-            <a:ext cx="82296" cy="82296"/>
-          </a:xfrm>
-          <a:prstGeom prst="ellipse">
-            <a:avLst/>
-          </a:prstGeom>
-          <a:solidFill>
-            <a:srgbClr val="181D16"/>
-          </a:solidFill>
-          <a:ln w="19050">
-            <a:solidFill>
-              <a:srgbClr val="181D16"/>
-            </a:solidFill>
-          </a:ln>
-        </p:spPr>
-        <p:style>
-          <a:lnRef idx="1">
-            <a:schemeClr val="accent1"/>
-          </a:lnRef>
-          <a:fillRef idx="3">
-            <a:schemeClr val="accent1"/>
-          </a:fillRef>
-          <a:effectRef idx="0">
-            <a:schemeClr val="accent1"/>
-          </a:effectRef>
-          <a:fontRef idx="minor">
-            <a:schemeClr val="lt1"/>
-          </a:fontRef>
-        </p:style>
-        <p:txBody>
-          <a:bodyPr rtlCol="0" anchor="ctr"/>
-          <a:lstStyle/>
-          <a:p>
-            <a:pPr algn="ctr"/>
-          </a:p>
-        </p:txBody>
-      </p:sp>
-      <p:sp>
-        <p:nvSpPr>
-          <p:cNvPr id="55" name="Oval 54"/>
-          <p:cNvSpPr/>
-          <p:nvPr/>
-        </p:nvSpPr>
-        <p:spPr>
-          <a:xfrm>
-            <a:off x="864108" y="5948172"/>
-            <a:ext cx="82296" cy="82296"/>
-          </a:xfrm>
-          <a:prstGeom prst="ellipse">
-            <a:avLst/>
-          </a:prstGeom>
-          <a:solidFill>
-            <a:srgbClr val="181D16"/>
-          </a:solidFill>
-          <a:ln w="19050">
-            <a:solidFill>
-              <a:srgbClr val="181D16"/>
-            </a:solidFill>
-          </a:ln>
-        </p:spPr>
-        <p:style>
-          <a:lnRef idx="1">
-            <a:schemeClr val="accent1"/>
-          </a:lnRef>
-          <a:fillRef idx="3">
-            <a:schemeClr val="accent1"/>
-          </a:fillRef>
-          <a:effectRef idx="0">
-            <a:schemeClr val="accent1"/>
-          </a:effectRef>
-          <a:fontRef idx="minor">
-            <a:schemeClr val="lt1"/>
-          </a:fontRef>
-        </p:style>
-        <p:txBody>
-          <a:bodyPr rtlCol="0" anchor="ctr"/>
-          <a:lstStyle/>
-          <a:p>
-            <a:pPr algn="ctr"/>
-          </a:p>
-        </p:txBody>
-      </p:sp>
-      <p:sp>
-        <p:nvSpPr>
-          <p:cNvPr id="56" name="TextBox 55"/>
-          <p:cNvSpPr txBox="1"/>
-          <p:nvPr/>
-        </p:nvSpPr>
-        <p:spPr>
-          <a:xfrm>
-            <a:off x="1197864" y="5870448"/>
-            <a:ext cx="2468880" cy="320040"/>
-          </a:xfrm>
-          <a:prstGeom prst="rect">
-            <a:avLst/>
-          </a:prstGeom>
-          <a:noFill/>
-        </p:spPr>
-        <p:txBody>
-          <a:bodyPr wrap="square" lIns="0" rIns="0" tIns="0" bIns="0">
-            <a:spAutoFit/>
-          </a:bodyPr>
-          <a:lstStyle/>
-          <a:p>
-            <a:pPr>
-              <a:spcAft>
-                <a:spcPts val="0"/>
-              </a:spcAft>
-              <a:defRPr sz="1300" b="0">
-                <a:solidFill>
-                  <a:srgbClr val="686C66"/>
-                </a:solidFill>
-                <a:latin typeface="Arial"/>
-              </a:defRPr>
-            </a:pPr>
-            <a:r>
-              <a:t>training observations</a:t>
-            </a:r>
-          </a:p>
-        </p:txBody>
-      </p:sp>
-    </p:spTree>
-  </p:cSld>
-  <p:clrMapOvr>
-    <a:masterClrMapping/>
-  </p:clrMapOvr>
-</p:sld>
-</file>
-
-<file path=ppt/slides/slide2.xml><?xml version="1.0" encoding="utf-8"?>
-<p:sld xmlns:a="http://schemas.openxmlformats.org/drawingml/2006/main" xmlns:p="http://schemas.openxmlformats.org/presentationml/2006/main" xmlns:r="http://schemas.openxmlformats.org/officeDocument/2006/relationships">
-  <p:cSld>
-    <p:bg>
-      <p:bgPr>
-        <a:solidFill>
-          <a:srgbClr val="F5F5F4"/>
-        </a:solidFill>
-        <a:effectLst/>
-      </p:bgPr>
-    </p:bg>
-    <p:spTree>
-      <p:nvGrpSpPr>
-        <p:cNvPr id="1" name=""/>
-        <p:cNvGrpSpPr/>
-        <p:nvPr/>
-      </p:nvGrpSpPr>
-      <p:grpSpPr/>
-      <p:pic>
-        <p:nvPicPr>
-          <p:cNvPr id="2" name="Picture 1" descr="image.png"/>
-          <p:cNvPicPr>
-            <a:picLocks noChangeAspect="1"/>
-          </p:cNvPicPr>
-          <p:nvPr/>
-        </p:nvPicPr>
-        <p:blipFill>
-          <a:blip r:embed="rId2"/>
-          <a:stretch>
-            <a:fillRect/>
-          </a:stretch>
-        </p:blipFill>
-        <p:spPr>
-          <a:xfrm>
-            <a:off x="11768328" y="201168"/>
-            <a:ext cx="219456" cy="6455664"/>
-          </a:xfrm>
-          <a:prstGeom prst="rect">
-            <a:avLst/>
-          </a:prstGeom>
-        </p:spPr>
-      </p:pic>
-      <p:sp>
-        <p:nvSpPr>
-          <p:cNvPr id="3" name="TextBox 2"/>
-          <p:cNvSpPr txBox="1"/>
-          <p:nvPr/>
-        </p:nvSpPr>
-        <p:spPr>
-          <a:xfrm>
-            <a:off x="566928" y="960120"/>
-            <a:ext cx="10972800" cy="731520"/>
-          </a:xfrm>
-          <a:prstGeom prst="rect">
-            <a:avLst/>
-          </a:prstGeom>
-          <a:noFill/>
-        </p:spPr>
-        <p:txBody>
-          <a:bodyPr wrap="square" lIns="0" rIns="0" tIns="0" bIns="0">
-            <a:spAutoFit/>
-          </a:bodyPr>
-          <a:lstStyle/>
-          <a:p>
-            <a:pPr>
-              <a:spcAft>
-                <a:spcPts val="0"/>
-              </a:spcAft>
-              <a:defRPr sz="3800" b="0">
-                <a:solidFill>
-                  <a:srgbClr val="181D16"/>
-                </a:solidFill>
-                <a:latin typeface="Arial"/>
-              </a:defRPr>
-            </a:pPr>
-            <a:r>
               <a:t>Different training data changes the model</a:t>
             </a:r>
           </a:p>
@@ -6425,7 +3968,7 @@
               </a:defRPr>
             </a:pPr>
             <a:r>
-              <a:t>02/07</a:t>
+              <a:t>01/06</a:t>
             </a:r>
           </a:p>
         </p:txBody>
@@ -11512,7 +9055,7 @@
 </p:sld>
 </file>
 
-<file path=ppt/slides/slide3.xml><?xml version="1.0" encoding="utf-8"?>
+<file path=ppt/slides/slide2.xml><?xml version="1.0" encoding="utf-8"?>
 <p:sld xmlns:a="http://schemas.openxmlformats.org/drawingml/2006/main" xmlns:p="http://schemas.openxmlformats.org/presentationml/2006/main" xmlns:r="http://schemas.openxmlformats.org/officeDocument/2006/relationships">
   <p:cSld>
     <p:bg>
@@ -11627,7 +9170,7 @@
               </a:defRPr>
             </a:pPr>
             <a:r>
-              <a:t>03/07</a:t>
+              <a:t>02/06</a:t>
             </a:r>
           </a:p>
         </p:txBody>
@@ -34695,7 +32238,7 @@
 </p:sld>
 </file>
 
-<file path=ppt/slides/slide4.xml><?xml version="1.0" encoding="utf-8"?>
+<file path=ppt/slides/slide3.xml><?xml version="1.0" encoding="utf-8"?>
 <p:sld xmlns:a="http://schemas.openxmlformats.org/drawingml/2006/main" xmlns:p="http://schemas.openxmlformats.org/presentationml/2006/main" xmlns:r="http://schemas.openxmlformats.org/officeDocument/2006/relationships">
   <p:cSld>
     <p:bg>
@@ -34810,7 +32353,7 @@
               </a:defRPr>
             </a:pPr>
             <a:r>
-              <a:t>04/07</a:t>
+              <a:t>03/06</a:t>
             </a:r>
           </a:p>
         </p:txBody>
@@ -47924,7 +45467,7 @@
 </p:sld>
 </file>
 
-<file path=ppt/slides/slide5.xml><?xml version="1.0" encoding="utf-8"?>
+<file path=ppt/slides/slide4.xml><?xml version="1.0" encoding="utf-8"?>
 <p:sld xmlns:a="http://schemas.openxmlformats.org/drawingml/2006/main" xmlns:p="http://schemas.openxmlformats.org/presentationml/2006/main" xmlns:r="http://schemas.openxmlformats.org/officeDocument/2006/relationships">
   <p:cSld>
     <p:bg>
@@ -48039,7 +45582,7 @@
               </a:defRPr>
             </a:pPr>
             <a:r>
-              <a:t>05/07</a:t>
+              <a:t>04/06</a:t>
             </a:r>
           </a:p>
         </p:txBody>
@@ -60986,7 +58529,7 @@
 </p:sld>
 </file>
 
-<file path=ppt/slides/slide6.xml><?xml version="1.0" encoding="utf-8"?>
+<file path=ppt/slides/slide5.xml><?xml version="1.0" encoding="utf-8"?>
 <p:sld xmlns:a="http://schemas.openxmlformats.org/drawingml/2006/main" xmlns:p="http://schemas.openxmlformats.org/presentationml/2006/main" xmlns:r="http://schemas.openxmlformats.org/officeDocument/2006/relationships">
   <p:cSld>
     <p:bg>
@@ -61101,7 +58644,7 @@
               </a:defRPr>
             </a:pPr>
             <a:r>
-              <a:t>06/07</a:t>
+              <a:t>05/06</a:t>
             </a:r>
           </a:p>
         </p:txBody>
@@ -61660,7 +59203,7 @@
 </p:sld>
 </file>
 
-<file path=ppt/slides/slide7.xml><?xml version="1.0" encoding="utf-8"?>
+<file path=ppt/slides/slide6.xml><?xml version="1.0" encoding="utf-8"?>
 <p:sld xmlns:a="http://schemas.openxmlformats.org/drawingml/2006/main" xmlns:p="http://schemas.openxmlformats.org/presentationml/2006/main" xmlns:r="http://schemas.openxmlformats.org/officeDocument/2006/relationships">
   <p:cSld>
     <p:bg>
@@ -61775,7 +59318,7 @@
               </a:defRPr>
             </a:pPr>
             <a:r>
-              <a:t>07/07</a:t>
+              <a:t>06/06</a:t>
             </a:r>
           </a:p>
         </p:txBody>

--- a/cmpsc-448/presentation/bias-variance-tradeoff.pptx
+++ b/cmpsc-448/presentation/bias-variance-tradeoff.pptx
@@ -11,6 +11,7 @@
     <p:sldId id="259" r:id="rId11"/>
     <p:sldId id="260" r:id="rId12"/>
     <p:sldId id="261" r:id="rId13"/>
+    <p:sldId id="262" r:id="rId14"/>
   </p:sldIdLst>
   <p:sldSz cx="12191999" cy="6858000" type="screen4x3"/>
   <p:notesSz cx="6858000" cy="9144000"/>
@@ -507,7 +508,7 @@
           <a:lstStyle/>
           <a:p>
             <a:r>
-              <a:t>Samples A and B come from the same quadratic relationship at the same 20 x positions, with independent Gaussian output noise of standard deviation 0.4. These are two training samples, not training versus test data. Fit the same degree-12 polynomial procedure separately to each. Keep the inputs, model family, and fitting method fixed. At x = 0.5, A predicts 0.96 and B predicts 0.40. The vertical guides mark that identical input. The orange dots are model predictions, not additional observations. Retraining changed the prediction even though the underlying problem did not change. Two samples illustrate the idea; they do not estimate population variance reliably. We now repeat the experiment eight times.</a:t>
+              <a:t>Begin with no assumed machine-learning background. A model is a rule learned from examples so that we can predict an output for a new input. On these graphs, x is the input and y is the output; black dots are observed examples, and the orange line is the model's prediction. Training means choosing the model's parameters using those examples. All three panels use the exact same 20 noisy observations and identical axes. Underfitting means the model is too simple to capture the relationship: this straight line misses the broad curve. The middle model learns that curve without hitting every dot. Overfitting means treating random fluctuations in the training examples as a pattern that will repeat: the flexible curve chases the noise. Noise means unpredictable variation in observations, not necessarily a mistake in the data. These pictures illustrate the concepts; how well a model predicts genuinely new observations is what ultimately matters. Transition: What happens when we train these models on different examples? That is where bias and variance help us understand the errors.</a:t>
             </a:r>
           </a:p>
         </p:txBody>
@@ -577,7 +578,7 @@
           <a:lstStyle/>
           <a:p>
             <a:r>
-              <a:t>Each pale curve is a model fitted to one of eight training samples, including A and B. Every degree sees exactly the same eight samples. The orange curve is the pointwise arithmetic average of those eight predictions, not a ninth fit and not the true relationship. At any fixed input, variance describes the spread of predictions around their average across training samples. The degree-12 procedure is more sensitive here; the degree-2 procedure is more stable. Wiggliness by itself is not the definition of variance, and variance is not the scatter of the raw data. Eight curves are a teaching illustration, not a precise population estimate. Axis limits are identical; curve portions outside the visible range are omitted. Flexibility need not produce high variance in every setting; sample size and regularization also matter.</a:t>
+              <a:t>Samples A and B come from the same quadratic relationship at the same 20 x positions, with independent Gaussian output noise of standard deviation 0.4. These are two training samples, not training versus test data. Fit the same degree-12 polynomial procedure separately to each. Keep the inputs, model family, and fitting method fixed. At x = 0.5, A predicts 0.96 and B predicts 0.40. The vertical guides mark that identical input. The orange dots are model predictions, not additional observations. Retraining changed the prediction even though the underlying problem did not change. Two samples illustrate the idea; they do not estimate population variance reliably. We now repeat the experiment eight times.</a:t>
             </a:r>
           </a:p>
         </p:txBody>
@@ -647,7 +648,7 @@
           <a:lstStyle/>
           <a:p>
             <a:r>
-              <a:t>Now reveal the true regression function, shown as the dashed curve. We know it because this is synthetic data; it is usually unknown in practice. These are degree-1 fits to the same eight samples. They cluster, yet their average misses the curved relationship. At x = 0 the average shown predicts 0.79, while the true mean output is 0.30; the vertical segment marks that gap. Bias at a fixed input is the expected model prediction over training samples minus the true regression function at that input. The displayed eight-fit average is only a finite-sample approximation to that expectation. Bias is not a single model's residual against one noisy observation. Low variance does not guarantee low bias. A straight-line family is too restrictive for this quadratic relationship, connecting briefly to the other student's underfitting example.</a:t>
+              <a:t>Each pale curve is a model fitted to one of eight training samples, including A and B. Every degree sees exactly the same eight samples. The orange curve is the pointwise arithmetic average of those eight predictions, not a ninth fit and not the true relationship. At any fixed input, variance describes the spread of predictions around their average across training samples. The degree-12 procedure is more sensitive here; the degree-2 procedure is more stable. Wiggliness by itself is not the definition of variance, and variance is not the scatter of the raw data. Eight curves are a teaching illustration, not a precise population estimate. Axis limits are identical; curve portions outside the visible range are omitted. Flexibility need not produce high variance in every setting; sample size and regularization also matter.</a:t>
             </a:r>
           </a:p>
         </p:txBody>
@@ -717,7 +718,7 @@
           <a:lstStyle/>
           <a:p>
             <a:r>
-              <a:t>Return to the degree-2 fits from slide 2, now with the true pattern revealed. All data, noise levels, and axes remain unchanged. Their average is close to the true relationship, unlike the degree-1 average; their spread is smaller than the degree-12 spread. Low bias and low variance are relative descriptions for this controlled example, not claims of zero prediction error. Because the quadratic family contains the true function and noise has mean zero, fixed-design least squares is unbiased here in expectation. The eight-fit average need not equal truth exactly. Increasing flexibility from a line to a quadratic reduces systematic error; increasing it further can add sensitivity without useful signal. That is the tradeoff, not a universal requirement that bias and variance must always move in opposite directions.</a:t>
+              <a:t>Now reveal the true regression function, shown as the dashed curve. We know it because this is synthetic data; it is usually unknown in practice. These are degree-1 fits to the same eight samples. They cluster, yet their average misses the curved relationship. At x = 0 the average shown predicts 0.79, while the true mean output is 0.30; the vertical segment marks that gap. Bias at a fixed input is the expected model prediction over training samples minus the true regression function at that input. The displayed eight-fit average is only a finite-sample approximation to that expectation. Bias is not a single model's residual against one noisy observation. Low variance does not guarantee low bias. A straight-line family is too restrictive for this quadratic relationship, connecting briefly to the other student's underfitting example.</a:t>
             </a:r>
           </a:p>
         </p:txBody>
@@ -787,6 +788,76 @@
           <a:lstStyle/>
           <a:p>
             <a:r>
+              <a:t>Return to the degree-2 fits from slide 3, now with the true pattern revealed. All data, noise levels, and axes remain unchanged. Their average is close to the true relationship, unlike the degree-1 average; their spread is smaller than the degree-12 spread. Low bias and low variance are relative descriptions for this controlled example, not claims of zero prediction error. Because the quadratic family contains the true function and noise has mean zero, fixed-design least squares is unbiased here in expectation. The eight-fit average need not equal truth exactly. Increasing flexibility from a line to a quadratic reduces systematic error; increasing it further can add sensitivity without useful signal. That is the tradeoff, not a universal requirement that bias and variance must always move in opposite directions.</a:t>
+            </a:r>
+          </a:p>
+        </p:txBody>
+      </p:sp>
+      <p:sp>
+        <p:nvSpPr>
+          <p:cNvPr id="4" name="Slide Number Placeholder 3"/>
+          <p:cNvSpPr>
+            <a:spLocks noGrp="1"/>
+          </p:cNvSpPr>
+          <p:nvPr>
+            <p:ph type="sldNum" idx="5" sz="quarter"/>
+          </p:nvPr>
+        </p:nvSpPr>
+        <p:spPr/>
+      </p:sp>
+    </p:spTree>
+  </p:cSld>
+  <p:clrMapOvr>
+    <a:masterClrMapping/>
+  </p:clrMapOvr>
+</p:notes>
+</file>
+
+<file path=ppt/notesSlides/notesSlide6.xml><?xml version="1.0" encoding="utf-8"?>
+<p:notes xmlns:a="http://schemas.openxmlformats.org/drawingml/2006/main" xmlns:p="http://schemas.openxmlformats.org/presentationml/2006/main" xmlns:r="http://schemas.openxmlformats.org/officeDocument/2006/relationships">
+  <p:cSld>
+    <p:spTree>
+      <p:nvGrpSpPr>
+        <p:cNvPr id="1" name=""/>
+        <p:cNvGrpSpPr/>
+        <p:nvPr/>
+      </p:nvGrpSpPr>
+      <p:grpSpPr>
+        <a:xfrm>
+          <a:off x="0" y="0"/>
+          <a:ext cx="0" cy="0"/>
+          <a:chOff x="0" y="0"/>
+          <a:chExt cx="0" cy="0"/>
+        </a:xfrm>
+      </p:grpSpPr>
+      <p:sp>
+        <p:nvSpPr>
+          <p:cNvPr id="2" name="Slide Image Placeholder 1"/>
+          <p:cNvSpPr>
+            <a:spLocks noGrp="1"/>
+          </p:cNvSpPr>
+          <p:nvPr>
+            <p:ph type="sldImg" idx="2"/>
+          </p:nvPr>
+        </p:nvSpPr>
+        <p:spPr/>
+      </p:sp>
+      <p:sp>
+        <p:nvSpPr>
+          <p:cNvPr id="3" name="Notes Placeholder 2"/>
+          <p:cNvSpPr>
+            <a:spLocks noGrp="1"/>
+          </p:cNvSpPr>
+          <p:nvPr>
+            <p:ph type="body" idx="3" sz="quarter"/>
+          </p:nvPr>
+        </p:nvSpPr>
+        <p:spPr/>
+        <p:txBody>
+          <a:bodyPr/>
+          <a:lstStyle/>
+          <a:p>
+            <a:r>
               <a:t>This equality is the squared-error decomposition at a fixed input x: E[(f_hat_D(x) - Y_new)²] = (E_D[f_hat_D(x)] - f(x))² + Var_D[f_hat_D(x)] + Var(Y_new | x). Average over random training datasets D and independent fresh output noise, with Y_new = f(x) + epsilon and E[epsilon | x] = 0. The noise term is conditional variance, not standard deviation; here it is 0.4² = 0.16. Even a predictor equal to the true mean function cannot predict the random noise in a fresh observation. The decomposition is not a formula for one observed residual or one training loss, and is not generally valid in this form for classification error or every loss function. Noise is irreducible relative to the information available to the model; better measurements or extra informative features can change that information. The build checks the finite-ensemble squared-error identity numerically. Do not imply the displayed eight curves are the full population expectation.</a:t>
             </a:r>
           </a:p>
@@ -812,7 +883,7 @@
 </p:notes>
 </file>
 
-<file path=ppt/notesSlides/notesSlide6.xml><?xml version="1.0" encoding="utf-8"?>
+<file path=ppt/notesSlides/notesSlide7.xml><?xml version="1.0" encoding="utf-8"?>
 <p:notes xmlns:a="http://schemas.openxmlformats.org/drawingml/2006/main" xmlns:p="http://schemas.openxmlformats.org/presentationml/2006/main" xmlns:r="http://schemas.openxmlformats.org/officeDocument/2006/relationships">
   <p:cSld>
     <p:spTree>
@@ -3929,6 +4000,7471 @@
               </a:defRPr>
             </a:pPr>
             <a:r>
+              <a:t>A model learns a pattern from examples</a:t>
+            </a:r>
+          </a:p>
+        </p:txBody>
+      </p:sp>
+      <p:sp>
+        <p:nvSpPr>
+          <p:cNvPr id="4" name="TextBox 3"/>
+          <p:cNvSpPr txBox="1"/>
+          <p:nvPr/>
+        </p:nvSpPr>
+        <p:spPr>
+          <a:xfrm>
+            <a:off x="10917936" y="6510528"/>
+            <a:ext cx="685800" cy="201168"/>
+          </a:xfrm>
+          <a:prstGeom prst="rect">
+            <a:avLst/>
+          </a:prstGeom>
+          <a:noFill/>
+        </p:spPr>
+        <p:txBody>
+          <a:bodyPr wrap="square" lIns="0" rIns="0" tIns="0" bIns="0">
+            <a:spAutoFit/>
+          </a:bodyPr>
+          <a:lstStyle/>
+          <a:p>
+            <a:pPr>
+              <a:spcAft>
+                <a:spcPts val="0"/>
+              </a:spcAft>
+              <a:defRPr sz="1100" b="0">
+                <a:solidFill>
+                  <a:srgbClr val="686C66"/>
+                </a:solidFill>
+                <a:latin typeface="Arial"/>
+              </a:defRPr>
+            </a:pPr>
+            <a:r>
+              <a:t>01/07</a:t>
+            </a:r>
+          </a:p>
+        </p:txBody>
+      </p:sp>
+      <p:sp>
+        <p:nvSpPr>
+          <p:cNvPr id="5" name="TextBox 4"/>
+          <p:cNvSpPr txBox="1"/>
+          <p:nvPr/>
+        </p:nvSpPr>
+        <p:spPr>
+          <a:xfrm>
+            <a:off x="896112" y="2148840"/>
+            <a:ext cx="3108960" cy="365760"/>
+          </a:xfrm>
+          <a:prstGeom prst="rect">
+            <a:avLst/>
+          </a:prstGeom>
+          <a:noFill/>
+        </p:spPr>
+        <p:txBody>
+          <a:bodyPr wrap="square" lIns="0" rIns="0" tIns="0" bIns="0">
+            <a:spAutoFit/>
+          </a:bodyPr>
+          <a:lstStyle/>
+          <a:p>
+            <a:pPr>
+              <a:spcAft>
+                <a:spcPts val="0"/>
+              </a:spcAft>
+              <a:defRPr sz="2100" b="0">
+                <a:solidFill>
+                  <a:srgbClr val="181D16"/>
+                </a:solidFill>
+                <a:latin typeface="Arial"/>
+              </a:defRPr>
+            </a:pPr>
+            <a:r>
+              <a:t>Underfitting</a:t>
+            </a:r>
+          </a:p>
+        </p:txBody>
+      </p:sp>
+      <p:cxnSp>
+        <p:nvCxnSpPr>
+          <p:cNvPr id="6" name="Connector 5"/>
+          <p:cNvCxnSpPr/>
+          <p:nvPr/>
+        </p:nvCxnSpPr>
+        <p:spPr>
+          <a:xfrm>
+            <a:off x="896112" y="4846320"/>
+            <a:ext cx="3063240" cy="0"/>
+          </a:xfrm>
+          <a:prstGeom prst="line">
+            <a:avLst/>
+          </a:prstGeom>
+          <a:ln w="12700">
+            <a:solidFill>
+              <a:srgbClr val="D4D6D0"/>
+            </a:solidFill>
+          </a:ln>
+        </p:spPr>
+        <p:style>
+          <a:lnRef idx="2">
+            <a:schemeClr val="accent1"/>
+          </a:lnRef>
+          <a:fillRef idx="0">
+            <a:schemeClr val="accent1"/>
+          </a:fillRef>
+          <a:effectRef idx="0">
+            <a:schemeClr val="accent1"/>
+          </a:effectRef>
+          <a:fontRef idx="minor">
+            <a:schemeClr val="tx1"/>
+          </a:fontRef>
+        </p:style>
+      </p:cxnSp>
+      <p:cxnSp>
+        <p:nvCxnSpPr>
+          <p:cNvPr id="7" name="Connector 6"/>
+          <p:cNvCxnSpPr/>
+          <p:nvPr/>
+        </p:nvCxnSpPr>
+        <p:spPr>
+          <a:xfrm>
+            <a:off x="896112" y="2606040"/>
+            <a:ext cx="0" cy="2240280"/>
+          </a:xfrm>
+          <a:prstGeom prst="line">
+            <a:avLst/>
+          </a:prstGeom>
+          <a:ln w="12700">
+            <a:solidFill>
+              <a:srgbClr val="D4D6D0"/>
+            </a:solidFill>
+          </a:ln>
+        </p:spPr>
+        <p:style>
+          <a:lnRef idx="2">
+            <a:schemeClr val="accent1"/>
+          </a:lnRef>
+          <a:fillRef idx="0">
+            <a:schemeClr val="accent1"/>
+          </a:fillRef>
+          <a:effectRef idx="0">
+            <a:schemeClr val="accent1"/>
+          </a:effectRef>
+          <a:fontRef idx="minor">
+            <a:schemeClr val="tx1"/>
+          </a:fontRef>
+        </p:style>
+      </p:cxnSp>
+      <p:sp>
+        <p:nvSpPr>
+          <p:cNvPr id="8" name="TextBox 7"/>
+          <p:cNvSpPr txBox="1"/>
+          <p:nvPr/>
+        </p:nvSpPr>
+        <p:spPr>
+          <a:xfrm>
+            <a:off x="3867912" y="4937760"/>
+            <a:ext cx="640080" cy="274320"/>
+          </a:xfrm>
+          <a:prstGeom prst="rect">
+            <a:avLst/>
+          </a:prstGeom>
+          <a:noFill/>
+        </p:spPr>
+        <p:txBody>
+          <a:bodyPr wrap="square" lIns="0" rIns="0" tIns="0" bIns="0">
+            <a:spAutoFit/>
+          </a:bodyPr>
+          <a:lstStyle/>
+          <a:p>
+            <a:pPr>
+              <a:spcAft>
+                <a:spcPts val="0"/>
+              </a:spcAft>
+              <a:defRPr sz="1400" b="0">
+                <a:solidFill>
+                  <a:srgbClr val="686C66"/>
+                </a:solidFill>
+                <a:latin typeface="Arial"/>
+              </a:defRPr>
+            </a:pPr>
+            <a:r>
+              <a:t>x</a:t>
+            </a:r>
+          </a:p>
+        </p:txBody>
+      </p:sp>
+      <p:sp>
+        <p:nvSpPr>
+          <p:cNvPr id="9" name="TextBox 8"/>
+          <p:cNvSpPr txBox="1"/>
+          <p:nvPr/>
+        </p:nvSpPr>
+        <p:spPr>
+          <a:xfrm>
+            <a:off x="621792" y="2423160"/>
+            <a:ext cx="914400" cy="274320"/>
+          </a:xfrm>
+          <a:prstGeom prst="rect">
+            <a:avLst/>
+          </a:prstGeom>
+          <a:noFill/>
+        </p:spPr>
+        <p:txBody>
+          <a:bodyPr wrap="square" lIns="0" rIns="0" tIns="0" bIns="0">
+            <a:spAutoFit/>
+          </a:bodyPr>
+          <a:lstStyle/>
+          <a:p>
+            <a:pPr>
+              <a:spcAft>
+                <a:spcPts val="0"/>
+              </a:spcAft>
+              <a:defRPr sz="1400" b="0">
+                <a:solidFill>
+                  <a:srgbClr val="686C66"/>
+                </a:solidFill>
+                <a:latin typeface="Arial"/>
+              </a:defRPr>
+            </a:pPr>
+            <a:r>
+              <a:t>y</a:t>
+            </a:r>
+          </a:p>
+        </p:txBody>
+      </p:sp>
+      <p:sp>
+        <p:nvSpPr>
+          <p:cNvPr id="10" name="Freeform 9"/>
+          <p:cNvSpPr/>
+          <p:nvPr/>
+        </p:nvSpPr>
+        <p:spPr>
+          <a:xfrm>
+            <a:off x="896112" y="3457346"/>
+            <a:ext cx="3063240" cy="602590"/>
+          </a:xfrm>
+          <a:custGeom>
+            <a:avLst/>
+            <a:gdLst/>
+            <a:ahLst/>
+            <a:cxnLst/>
+            <a:rect l="l" t="t" r="r" b="b"/>
+            <a:pathLst>
+              <a:path w="3350" h="659">
+                <a:moveTo>
+                  <a:pt x="0" y="659"/>
+                </a:moveTo>
+                <a:lnTo>
+                  <a:pt x="8" y="657"/>
+                </a:lnTo>
+                <a:lnTo>
+                  <a:pt x="17" y="655"/>
+                </a:lnTo>
+                <a:lnTo>
+                  <a:pt x="25" y="654"/>
+                </a:lnTo>
+                <a:lnTo>
+                  <a:pt x="34" y="652"/>
+                </a:lnTo>
+                <a:lnTo>
+                  <a:pt x="42" y="650"/>
+                </a:lnTo>
+                <a:lnTo>
+                  <a:pt x="50" y="649"/>
+                </a:lnTo>
+                <a:lnTo>
+                  <a:pt x="59" y="647"/>
+                </a:lnTo>
+                <a:lnTo>
+                  <a:pt x="67" y="645"/>
+                </a:lnTo>
+                <a:lnTo>
+                  <a:pt x="76" y="644"/>
+                </a:lnTo>
+                <a:lnTo>
+                  <a:pt x="84" y="642"/>
+                </a:lnTo>
+                <a:lnTo>
+                  <a:pt x="92" y="640"/>
+                </a:lnTo>
+                <a:lnTo>
+                  <a:pt x="101" y="639"/>
+                </a:lnTo>
+                <a:lnTo>
+                  <a:pt x="109" y="637"/>
+                </a:lnTo>
+                <a:lnTo>
+                  <a:pt x="118" y="635"/>
+                </a:lnTo>
+                <a:lnTo>
+                  <a:pt x="126" y="634"/>
+                </a:lnTo>
+                <a:lnTo>
+                  <a:pt x="134" y="632"/>
+                </a:lnTo>
+                <a:lnTo>
+                  <a:pt x="143" y="631"/>
+                </a:lnTo>
+                <a:lnTo>
+                  <a:pt x="151" y="629"/>
+                </a:lnTo>
+                <a:lnTo>
+                  <a:pt x="160" y="627"/>
+                </a:lnTo>
+                <a:lnTo>
+                  <a:pt x="168" y="626"/>
+                </a:lnTo>
+                <a:lnTo>
+                  <a:pt x="176" y="624"/>
+                </a:lnTo>
+                <a:lnTo>
+                  <a:pt x="185" y="622"/>
+                </a:lnTo>
+                <a:lnTo>
+                  <a:pt x="193" y="621"/>
+                </a:lnTo>
+                <a:lnTo>
+                  <a:pt x="202" y="619"/>
+                </a:lnTo>
+                <a:lnTo>
+                  <a:pt x="210" y="617"/>
+                </a:lnTo>
+                <a:lnTo>
+                  <a:pt x="218" y="616"/>
+                </a:lnTo>
+                <a:lnTo>
+                  <a:pt x="227" y="614"/>
+                </a:lnTo>
+                <a:lnTo>
+                  <a:pt x="235" y="612"/>
+                </a:lnTo>
+                <a:lnTo>
+                  <a:pt x="243" y="611"/>
+                </a:lnTo>
+                <a:lnTo>
+                  <a:pt x="252" y="609"/>
+                </a:lnTo>
+                <a:lnTo>
+                  <a:pt x="260" y="607"/>
+                </a:lnTo>
+                <a:lnTo>
+                  <a:pt x="269" y="606"/>
+                </a:lnTo>
+                <a:lnTo>
+                  <a:pt x="277" y="604"/>
+                </a:lnTo>
+                <a:lnTo>
+                  <a:pt x="285" y="602"/>
+                </a:lnTo>
+                <a:lnTo>
+                  <a:pt x="294" y="601"/>
+                </a:lnTo>
+                <a:lnTo>
+                  <a:pt x="302" y="599"/>
+                </a:lnTo>
+                <a:lnTo>
+                  <a:pt x="311" y="597"/>
+                </a:lnTo>
+                <a:lnTo>
+                  <a:pt x="319" y="596"/>
+                </a:lnTo>
+                <a:lnTo>
+                  <a:pt x="327" y="594"/>
+                </a:lnTo>
+                <a:lnTo>
+                  <a:pt x="336" y="593"/>
+                </a:lnTo>
+                <a:lnTo>
+                  <a:pt x="344" y="591"/>
+                </a:lnTo>
+                <a:lnTo>
+                  <a:pt x="353" y="589"/>
+                </a:lnTo>
+                <a:lnTo>
+                  <a:pt x="361" y="588"/>
+                </a:lnTo>
+                <a:lnTo>
+                  <a:pt x="369" y="586"/>
+                </a:lnTo>
+                <a:lnTo>
+                  <a:pt x="378" y="584"/>
+                </a:lnTo>
+                <a:lnTo>
+                  <a:pt x="386" y="583"/>
+                </a:lnTo>
+                <a:lnTo>
+                  <a:pt x="395" y="581"/>
+                </a:lnTo>
+                <a:lnTo>
+                  <a:pt x="403" y="579"/>
+                </a:lnTo>
+                <a:lnTo>
+                  <a:pt x="411" y="578"/>
+                </a:lnTo>
+                <a:lnTo>
+                  <a:pt x="420" y="576"/>
+                </a:lnTo>
+                <a:lnTo>
+                  <a:pt x="428" y="574"/>
+                </a:lnTo>
+                <a:lnTo>
+                  <a:pt x="437" y="573"/>
+                </a:lnTo>
+                <a:lnTo>
+                  <a:pt x="445" y="571"/>
+                </a:lnTo>
+                <a:lnTo>
+                  <a:pt x="453" y="569"/>
+                </a:lnTo>
+                <a:lnTo>
+                  <a:pt x="462" y="568"/>
+                </a:lnTo>
+                <a:lnTo>
+                  <a:pt x="470" y="566"/>
+                </a:lnTo>
+                <a:lnTo>
+                  <a:pt x="479" y="564"/>
+                </a:lnTo>
+                <a:lnTo>
+                  <a:pt x="487" y="563"/>
+                </a:lnTo>
+                <a:lnTo>
+                  <a:pt x="495" y="561"/>
+                </a:lnTo>
+                <a:lnTo>
+                  <a:pt x="504" y="559"/>
+                </a:lnTo>
+                <a:lnTo>
+                  <a:pt x="512" y="558"/>
+                </a:lnTo>
+                <a:lnTo>
+                  <a:pt x="521" y="556"/>
+                </a:lnTo>
+                <a:lnTo>
+                  <a:pt x="529" y="555"/>
+                </a:lnTo>
+                <a:lnTo>
+                  <a:pt x="537" y="553"/>
+                </a:lnTo>
+                <a:lnTo>
+                  <a:pt x="546" y="551"/>
+                </a:lnTo>
+                <a:lnTo>
+                  <a:pt x="554" y="550"/>
+                </a:lnTo>
+                <a:lnTo>
+                  <a:pt x="563" y="548"/>
+                </a:lnTo>
+                <a:lnTo>
+                  <a:pt x="571" y="546"/>
+                </a:lnTo>
+                <a:lnTo>
+                  <a:pt x="579" y="545"/>
+                </a:lnTo>
+                <a:lnTo>
+                  <a:pt x="588" y="543"/>
+                </a:lnTo>
+                <a:lnTo>
+                  <a:pt x="596" y="541"/>
+                </a:lnTo>
+                <a:lnTo>
+                  <a:pt x="605" y="540"/>
+                </a:lnTo>
+                <a:lnTo>
+                  <a:pt x="613" y="538"/>
+                </a:lnTo>
+                <a:lnTo>
+                  <a:pt x="621" y="536"/>
+                </a:lnTo>
+                <a:lnTo>
+                  <a:pt x="630" y="535"/>
+                </a:lnTo>
+                <a:lnTo>
+                  <a:pt x="638" y="533"/>
+                </a:lnTo>
+                <a:lnTo>
+                  <a:pt x="646" y="531"/>
+                </a:lnTo>
+                <a:lnTo>
+                  <a:pt x="655" y="530"/>
+                </a:lnTo>
+                <a:lnTo>
+                  <a:pt x="663" y="528"/>
+                </a:lnTo>
+                <a:lnTo>
+                  <a:pt x="672" y="526"/>
+                </a:lnTo>
+                <a:lnTo>
+                  <a:pt x="680" y="525"/>
+                </a:lnTo>
+                <a:lnTo>
+                  <a:pt x="688" y="523"/>
+                </a:lnTo>
+                <a:lnTo>
+                  <a:pt x="697" y="522"/>
+                </a:lnTo>
+                <a:lnTo>
+                  <a:pt x="705" y="520"/>
+                </a:lnTo>
+                <a:lnTo>
+                  <a:pt x="714" y="518"/>
+                </a:lnTo>
+                <a:lnTo>
+                  <a:pt x="722" y="517"/>
+                </a:lnTo>
+                <a:lnTo>
+                  <a:pt x="730" y="515"/>
+                </a:lnTo>
+                <a:lnTo>
+                  <a:pt x="739" y="513"/>
+                </a:lnTo>
+                <a:lnTo>
+                  <a:pt x="747" y="512"/>
+                </a:lnTo>
+                <a:lnTo>
+                  <a:pt x="756" y="510"/>
+                </a:lnTo>
+                <a:lnTo>
+                  <a:pt x="764" y="508"/>
+                </a:lnTo>
+                <a:lnTo>
+                  <a:pt x="772" y="507"/>
+                </a:lnTo>
+                <a:lnTo>
+                  <a:pt x="781" y="505"/>
+                </a:lnTo>
+                <a:lnTo>
+                  <a:pt x="789" y="503"/>
+                </a:lnTo>
+                <a:lnTo>
+                  <a:pt x="798" y="502"/>
+                </a:lnTo>
+                <a:lnTo>
+                  <a:pt x="806" y="500"/>
+                </a:lnTo>
+                <a:lnTo>
+                  <a:pt x="814" y="498"/>
+                </a:lnTo>
+                <a:lnTo>
+                  <a:pt x="823" y="497"/>
+                </a:lnTo>
+                <a:lnTo>
+                  <a:pt x="831" y="495"/>
+                </a:lnTo>
+                <a:lnTo>
+                  <a:pt x="840" y="493"/>
+                </a:lnTo>
+                <a:lnTo>
+                  <a:pt x="848" y="492"/>
+                </a:lnTo>
+                <a:lnTo>
+                  <a:pt x="856" y="490"/>
+                </a:lnTo>
+                <a:lnTo>
+                  <a:pt x="865" y="488"/>
+                </a:lnTo>
+                <a:lnTo>
+                  <a:pt x="873" y="487"/>
+                </a:lnTo>
+                <a:lnTo>
+                  <a:pt x="882" y="485"/>
+                </a:lnTo>
+                <a:lnTo>
+                  <a:pt x="890" y="484"/>
+                </a:lnTo>
+                <a:lnTo>
+                  <a:pt x="898" y="482"/>
+                </a:lnTo>
+                <a:lnTo>
+                  <a:pt x="907" y="480"/>
+                </a:lnTo>
+                <a:lnTo>
+                  <a:pt x="915" y="479"/>
+                </a:lnTo>
+                <a:lnTo>
+                  <a:pt x="924" y="477"/>
+                </a:lnTo>
+                <a:lnTo>
+                  <a:pt x="932" y="475"/>
+                </a:lnTo>
+                <a:lnTo>
+                  <a:pt x="940" y="474"/>
+                </a:lnTo>
+                <a:lnTo>
+                  <a:pt x="949" y="472"/>
+                </a:lnTo>
+                <a:lnTo>
+                  <a:pt x="957" y="470"/>
+                </a:lnTo>
+                <a:lnTo>
+                  <a:pt x="966" y="469"/>
+                </a:lnTo>
+                <a:lnTo>
+                  <a:pt x="974" y="467"/>
+                </a:lnTo>
+                <a:lnTo>
+                  <a:pt x="982" y="465"/>
+                </a:lnTo>
+                <a:lnTo>
+                  <a:pt x="991" y="464"/>
+                </a:lnTo>
+                <a:lnTo>
+                  <a:pt x="999" y="462"/>
+                </a:lnTo>
+                <a:lnTo>
+                  <a:pt x="1008" y="460"/>
+                </a:lnTo>
+                <a:lnTo>
+                  <a:pt x="1016" y="459"/>
+                </a:lnTo>
+                <a:lnTo>
+                  <a:pt x="1024" y="457"/>
+                </a:lnTo>
+                <a:lnTo>
+                  <a:pt x="1033" y="455"/>
+                </a:lnTo>
+                <a:lnTo>
+                  <a:pt x="1041" y="454"/>
+                </a:lnTo>
+                <a:lnTo>
+                  <a:pt x="1049" y="452"/>
+                </a:lnTo>
+                <a:lnTo>
+                  <a:pt x="1058" y="450"/>
+                </a:lnTo>
+                <a:lnTo>
+                  <a:pt x="1066" y="449"/>
+                </a:lnTo>
+                <a:lnTo>
+                  <a:pt x="1075" y="447"/>
+                </a:lnTo>
+                <a:lnTo>
+                  <a:pt x="1083" y="446"/>
+                </a:lnTo>
+                <a:lnTo>
+                  <a:pt x="1091" y="444"/>
+                </a:lnTo>
+                <a:lnTo>
+                  <a:pt x="1100" y="442"/>
+                </a:lnTo>
+                <a:lnTo>
+                  <a:pt x="1108" y="441"/>
+                </a:lnTo>
+                <a:lnTo>
+                  <a:pt x="1117" y="439"/>
+                </a:lnTo>
+                <a:lnTo>
+                  <a:pt x="1125" y="437"/>
+                </a:lnTo>
+                <a:lnTo>
+                  <a:pt x="1133" y="436"/>
+                </a:lnTo>
+                <a:lnTo>
+                  <a:pt x="1142" y="434"/>
+                </a:lnTo>
+                <a:lnTo>
+                  <a:pt x="1150" y="432"/>
+                </a:lnTo>
+                <a:lnTo>
+                  <a:pt x="1159" y="431"/>
+                </a:lnTo>
+                <a:lnTo>
+                  <a:pt x="1167" y="429"/>
+                </a:lnTo>
+                <a:lnTo>
+                  <a:pt x="1175" y="427"/>
+                </a:lnTo>
+                <a:lnTo>
+                  <a:pt x="1184" y="426"/>
+                </a:lnTo>
+                <a:lnTo>
+                  <a:pt x="1192" y="424"/>
+                </a:lnTo>
+                <a:lnTo>
+                  <a:pt x="1201" y="422"/>
+                </a:lnTo>
+                <a:lnTo>
+                  <a:pt x="1209" y="421"/>
+                </a:lnTo>
+                <a:lnTo>
+                  <a:pt x="1217" y="419"/>
+                </a:lnTo>
+                <a:lnTo>
+                  <a:pt x="1226" y="417"/>
+                </a:lnTo>
+                <a:lnTo>
+                  <a:pt x="1234" y="416"/>
+                </a:lnTo>
+                <a:lnTo>
+                  <a:pt x="1243" y="414"/>
+                </a:lnTo>
+                <a:lnTo>
+                  <a:pt x="1251" y="413"/>
+                </a:lnTo>
+                <a:lnTo>
+                  <a:pt x="1259" y="411"/>
+                </a:lnTo>
+                <a:lnTo>
+                  <a:pt x="1268" y="409"/>
+                </a:lnTo>
+                <a:lnTo>
+                  <a:pt x="1276" y="408"/>
+                </a:lnTo>
+                <a:lnTo>
+                  <a:pt x="1285" y="406"/>
+                </a:lnTo>
+                <a:lnTo>
+                  <a:pt x="1293" y="404"/>
+                </a:lnTo>
+                <a:lnTo>
+                  <a:pt x="1301" y="403"/>
+                </a:lnTo>
+                <a:lnTo>
+                  <a:pt x="1310" y="401"/>
+                </a:lnTo>
+                <a:lnTo>
+                  <a:pt x="1318" y="399"/>
+                </a:lnTo>
+                <a:lnTo>
+                  <a:pt x="1327" y="398"/>
+                </a:lnTo>
+                <a:lnTo>
+                  <a:pt x="1335" y="396"/>
+                </a:lnTo>
+                <a:lnTo>
+                  <a:pt x="1343" y="394"/>
+                </a:lnTo>
+                <a:lnTo>
+                  <a:pt x="1352" y="393"/>
+                </a:lnTo>
+                <a:lnTo>
+                  <a:pt x="1360" y="391"/>
+                </a:lnTo>
+                <a:lnTo>
+                  <a:pt x="1369" y="389"/>
+                </a:lnTo>
+                <a:lnTo>
+                  <a:pt x="1377" y="388"/>
+                </a:lnTo>
+                <a:lnTo>
+                  <a:pt x="1385" y="386"/>
+                </a:lnTo>
+                <a:lnTo>
+                  <a:pt x="1394" y="384"/>
+                </a:lnTo>
+                <a:lnTo>
+                  <a:pt x="1402" y="383"/>
+                </a:lnTo>
+                <a:lnTo>
+                  <a:pt x="1411" y="381"/>
+                </a:lnTo>
+                <a:lnTo>
+                  <a:pt x="1419" y="379"/>
+                </a:lnTo>
+                <a:lnTo>
+                  <a:pt x="1427" y="378"/>
+                </a:lnTo>
+                <a:lnTo>
+                  <a:pt x="1436" y="376"/>
+                </a:lnTo>
+                <a:lnTo>
+                  <a:pt x="1444" y="375"/>
+                </a:lnTo>
+                <a:lnTo>
+                  <a:pt x="1453" y="373"/>
+                </a:lnTo>
+                <a:lnTo>
+                  <a:pt x="1461" y="371"/>
+                </a:lnTo>
+                <a:lnTo>
+                  <a:pt x="1469" y="370"/>
+                </a:lnTo>
+                <a:lnTo>
+                  <a:pt x="1478" y="368"/>
+                </a:lnTo>
+                <a:lnTo>
+                  <a:pt x="1486" y="366"/>
+                </a:lnTo>
+                <a:lnTo>
+                  <a:pt x="1494" y="365"/>
+                </a:lnTo>
+                <a:lnTo>
+                  <a:pt x="1503" y="363"/>
+                </a:lnTo>
+                <a:lnTo>
+                  <a:pt x="1511" y="361"/>
+                </a:lnTo>
+                <a:lnTo>
+                  <a:pt x="1520" y="360"/>
+                </a:lnTo>
+                <a:lnTo>
+                  <a:pt x="1528" y="358"/>
+                </a:lnTo>
+                <a:lnTo>
+                  <a:pt x="1536" y="356"/>
+                </a:lnTo>
+                <a:lnTo>
+                  <a:pt x="1545" y="355"/>
+                </a:lnTo>
+                <a:lnTo>
+                  <a:pt x="1553" y="353"/>
+                </a:lnTo>
+                <a:lnTo>
+                  <a:pt x="1562" y="351"/>
+                </a:lnTo>
+                <a:lnTo>
+                  <a:pt x="1570" y="350"/>
+                </a:lnTo>
+                <a:lnTo>
+                  <a:pt x="1578" y="348"/>
+                </a:lnTo>
+                <a:lnTo>
+                  <a:pt x="1587" y="346"/>
+                </a:lnTo>
+                <a:lnTo>
+                  <a:pt x="1595" y="345"/>
+                </a:lnTo>
+                <a:lnTo>
+                  <a:pt x="1604" y="343"/>
+                </a:lnTo>
+                <a:lnTo>
+                  <a:pt x="1612" y="341"/>
+                </a:lnTo>
+                <a:lnTo>
+                  <a:pt x="1620" y="340"/>
+                </a:lnTo>
+                <a:lnTo>
+                  <a:pt x="1629" y="338"/>
+                </a:lnTo>
+                <a:lnTo>
+                  <a:pt x="1637" y="337"/>
+                </a:lnTo>
+                <a:lnTo>
+                  <a:pt x="1646" y="335"/>
+                </a:lnTo>
+                <a:lnTo>
+                  <a:pt x="1654" y="333"/>
+                </a:lnTo>
+                <a:lnTo>
+                  <a:pt x="1662" y="332"/>
+                </a:lnTo>
+                <a:lnTo>
+                  <a:pt x="1671" y="330"/>
+                </a:lnTo>
+                <a:lnTo>
+                  <a:pt x="1679" y="328"/>
+                </a:lnTo>
+                <a:lnTo>
+                  <a:pt x="1688" y="327"/>
+                </a:lnTo>
+                <a:lnTo>
+                  <a:pt x="1696" y="325"/>
+                </a:lnTo>
+                <a:lnTo>
+                  <a:pt x="1704" y="323"/>
+                </a:lnTo>
+                <a:lnTo>
+                  <a:pt x="1713" y="322"/>
+                </a:lnTo>
+                <a:lnTo>
+                  <a:pt x="1721" y="320"/>
+                </a:lnTo>
+                <a:lnTo>
+                  <a:pt x="1730" y="318"/>
+                </a:lnTo>
+                <a:lnTo>
+                  <a:pt x="1738" y="317"/>
+                </a:lnTo>
+                <a:lnTo>
+                  <a:pt x="1746" y="315"/>
+                </a:lnTo>
+                <a:lnTo>
+                  <a:pt x="1755" y="313"/>
+                </a:lnTo>
+                <a:lnTo>
+                  <a:pt x="1763" y="312"/>
+                </a:lnTo>
+                <a:lnTo>
+                  <a:pt x="1772" y="310"/>
+                </a:lnTo>
+                <a:lnTo>
+                  <a:pt x="1780" y="308"/>
+                </a:lnTo>
+                <a:lnTo>
+                  <a:pt x="1788" y="307"/>
+                </a:lnTo>
+                <a:lnTo>
+                  <a:pt x="1797" y="305"/>
+                </a:lnTo>
+                <a:lnTo>
+                  <a:pt x="1805" y="304"/>
+                </a:lnTo>
+                <a:lnTo>
+                  <a:pt x="1814" y="302"/>
+                </a:lnTo>
+                <a:lnTo>
+                  <a:pt x="1822" y="300"/>
+                </a:lnTo>
+                <a:lnTo>
+                  <a:pt x="1830" y="299"/>
+                </a:lnTo>
+                <a:lnTo>
+                  <a:pt x="1839" y="297"/>
+                </a:lnTo>
+                <a:lnTo>
+                  <a:pt x="1847" y="295"/>
+                </a:lnTo>
+                <a:lnTo>
+                  <a:pt x="1856" y="294"/>
+                </a:lnTo>
+                <a:lnTo>
+                  <a:pt x="1864" y="292"/>
+                </a:lnTo>
+                <a:lnTo>
+                  <a:pt x="1872" y="290"/>
+                </a:lnTo>
+                <a:lnTo>
+                  <a:pt x="1881" y="289"/>
+                </a:lnTo>
+                <a:lnTo>
+                  <a:pt x="1889" y="287"/>
+                </a:lnTo>
+                <a:lnTo>
+                  <a:pt x="1897" y="285"/>
+                </a:lnTo>
+                <a:lnTo>
+                  <a:pt x="1906" y="284"/>
+                </a:lnTo>
+                <a:lnTo>
+                  <a:pt x="1914" y="282"/>
+                </a:lnTo>
+                <a:lnTo>
+                  <a:pt x="1923" y="280"/>
+                </a:lnTo>
+                <a:lnTo>
+                  <a:pt x="1931" y="279"/>
+                </a:lnTo>
+                <a:lnTo>
+                  <a:pt x="1939" y="277"/>
+                </a:lnTo>
+                <a:lnTo>
+                  <a:pt x="1948" y="275"/>
+                </a:lnTo>
+                <a:lnTo>
+                  <a:pt x="1956" y="274"/>
+                </a:lnTo>
+                <a:lnTo>
+                  <a:pt x="1965" y="272"/>
+                </a:lnTo>
+                <a:lnTo>
+                  <a:pt x="1973" y="270"/>
+                </a:lnTo>
+                <a:lnTo>
+                  <a:pt x="1981" y="269"/>
+                </a:lnTo>
+                <a:lnTo>
+                  <a:pt x="1990" y="267"/>
+                </a:lnTo>
+                <a:lnTo>
+                  <a:pt x="1998" y="266"/>
+                </a:lnTo>
+                <a:lnTo>
+                  <a:pt x="2007" y="264"/>
+                </a:lnTo>
+                <a:lnTo>
+                  <a:pt x="2015" y="262"/>
+                </a:lnTo>
+                <a:lnTo>
+                  <a:pt x="2023" y="261"/>
+                </a:lnTo>
+                <a:lnTo>
+                  <a:pt x="2032" y="259"/>
+                </a:lnTo>
+                <a:lnTo>
+                  <a:pt x="2040" y="257"/>
+                </a:lnTo>
+                <a:lnTo>
+                  <a:pt x="2049" y="256"/>
+                </a:lnTo>
+                <a:lnTo>
+                  <a:pt x="2057" y="254"/>
+                </a:lnTo>
+                <a:lnTo>
+                  <a:pt x="2065" y="252"/>
+                </a:lnTo>
+                <a:lnTo>
+                  <a:pt x="2074" y="251"/>
+                </a:lnTo>
+                <a:lnTo>
+                  <a:pt x="2082" y="249"/>
+                </a:lnTo>
+                <a:lnTo>
+                  <a:pt x="2091" y="247"/>
+                </a:lnTo>
+                <a:lnTo>
+                  <a:pt x="2099" y="246"/>
+                </a:lnTo>
+                <a:lnTo>
+                  <a:pt x="2107" y="244"/>
+                </a:lnTo>
+                <a:lnTo>
+                  <a:pt x="2116" y="242"/>
+                </a:lnTo>
+                <a:lnTo>
+                  <a:pt x="2124" y="241"/>
+                </a:lnTo>
+                <a:lnTo>
+                  <a:pt x="2133" y="239"/>
+                </a:lnTo>
+                <a:lnTo>
+                  <a:pt x="2141" y="237"/>
+                </a:lnTo>
+                <a:lnTo>
+                  <a:pt x="2149" y="236"/>
+                </a:lnTo>
+                <a:lnTo>
+                  <a:pt x="2158" y="234"/>
+                </a:lnTo>
+                <a:lnTo>
+                  <a:pt x="2166" y="232"/>
+                </a:lnTo>
+                <a:lnTo>
+                  <a:pt x="2175" y="231"/>
+                </a:lnTo>
+                <a:lnTo>
+                  <a:pt x="2183" y="229"/>
+                </a:lnTo>
+                <a:lnTo>
+                  <a:pt x="2191" y="228"/>
+                </a:lnTo>
+                <a:lnTo>
+                  <a:pt x="2200" y="226"/>
+                </a:lnTo>
+                <a:lnTo>
+                  <a:pt x="2208" y="224"/>
+                </a:lnTo>
+                <a:lnTo>
+                  <a:pt x="2217" y="223"/>
+                </a:lnTo>
+                <a:lnTo>
+                  <a:pt x="2225" y="221"/>
+                </a:lnTo>
+                <a:lnTo>
+                  <a:pt x="2233" y="219"/>
+                </a:lnTo>
+                <a:lnTo>
+                  <a:pt x="2242" y="218"/>
+                </a:lnTo>
+                <a:lnTo>
+                  <a:pt x="2250" y="216"/>
+                </a:lnTo>
+                <a:lnTo>
+                  <a:pt x="2259" y="214"/>
+                </a:lnTo>
+                <a:lnTo>
+                  <a:pt x="2267" y="213"/>
+                </a:lnTo>
+                <a:lnTo>
+                  <a:pt x="2275" y="211"/>
+                </a:lnTo>
+                <a:lnTo>
+                  <a:pt x="2284" y="209"/>
+                </a:lnTo>
+                <a:lnTo>
+                  <a:pt x="2292" y="208"/>
+                </a:lnTo>
+                <a:lnTo>
+                  <a:pt x="2301" y="206"/>
+                </a:lnTo>
+                <a:lnTo>
+                  <a:pt x="2309" y="204"/>
+                </a:lnTo>
+                <a:lnTo>
+                  <a:pt x="2317" y="203"/>
+                </a:lnTo>
+                <a:lnTo>
+                  <a:pt x="2326" y="201"/>
+                </a:lnTo>
+                <a:lnTo>
+                  <a:pt x="2334" y="199"/>
+                </a:lnTo>
+                <a:lnTo>
+                  <a:pt x="2342" y="198"/>
+                </a:lnTo>
+                <a:lnTo>
+                  <a:pt x="2351" y="196"/>
+                </a:lnTo>
+                <a:lnTo>
+                  <a:pt x="2359" y="195"/>
+                </a:lnTo>
+                <a:lnTo>
+                  <a:pt x="2368" y="193"/>
+                </a:lnTo>
+                <a:lnTo>
+                  <a:pt x="2376" y="191"/>
+                </a:lnTo>
+                <a:lnTo>
+                  <a:pt x="2384" y="190"/>
+                </a:lnTo>
+                <a:lnTo>
+                  <a:pt x="2393" y="188"/>
+                </a:lnTo>
+                <a:lnTo>
+                  <a:pt x="2401" y="186"/>
+                </a:lnTo>
+                <a:lnTo>
+                  <a:pt x="2410" y="185"/>
+                </a:lnTo>
+                <a:lnTo>
+                  <a:pt x="2418" y="183"/>
+                </a:lnTo>
+                <a:lnTo>
+                  <a:pt x="2426" y="181"/>
+                </a:lnTo>
+                <a:lnTo>
+                  <a:pt x="2435" y="180"/>
+                </a:lnTo>
+                <a:lnTo>
+                  <a:pt x="2443" y="178"/>
+                </a:lnTo>
+                <a:lnTo>
+                  <a:pt x="2452" y="176"/>
+                </a:lnTo>
+                <a:lnTo>
+                  <a:pt x="2460" y="175"/>
+                </a:lnTo>
+                <a:lnTo>
+                  <a:pt x="2468" y="173"/>
+                </a:lnTo>
+                <a:lnTo>
+                  <a:pt x="2477" y="171"/>
+                </a:lnTo>
+                <a:lnTo>
+                  <a:pt x="2485" y="170"/>
+                </a:lnTo>
+                <a:lnTo>
+                  <a:pt x="2494" y="168"/>
+                </a:lnTo>
+                <a:lnTo>
+                  <a:pt x="2502" y="166"/>
+                </a:lnTo>
+                <a:lnTo>
+                  <a:pt x="2510" y="165"/>
+                </a:lnTo>
+                <a:lnTo>
+                  <a:pt x="2519" y="163"/>
+                </a:lnTo>
+                <a:lnTo>
+                  <a:pt x="2527" y="161"/>
+                </a:lnTo>
+                <a:lnTo>
+                  <a:pt x="2536" y="160"/>
+                </a:lnTo>
+                <a:lnTo>
+                  <a:pt x="2544" y="158"/>
+                </a:lnTo>
+                <a:lnTo>
+                  <a:pt x="2552" y="157"/>
+                </a:lnTo>
+                <a:lnTo>
+                  <a:pt x="2561" y="155"/>
+                </a:lnTo>
+                <a:lnTo>
+                  <a:pt x="2569" y="153"/>
+                </a:lnTo>
+                <a:lnTo>
+                  <a:pt x="2578" y="152"/>
+                </a:lnTo>
+                <a:lnTo>
+                  <a:pt x="2586" y="150"/>
+                </a:lnTo>
+                <a:lnTo>
+                  <a:pt x="2594" y="148"/>
+                </a:lnTo>
+                <a:lnTo>
+                  <a:pt x="2603" y="147"/>
+                </a:lnTo>
+                <a:lnTo>
+                  <a:pt x="2611" y="145"/>
+                </a:lnTo>
+                <a:lnTo>
+                  <a:pt x="2620" y="143"/>
+                </a:lnTo>
+                <a:lnTo>
+                  <a:pt x="2628" y="142"/>
+                </a:lnTo>
+                <a:lnTo>
+                  <a:pt x="2636" y="140"/>
+                </a:lnTo>
+                <a:lnTo>
+                  <a:pt x="2645" y="138"/>
+                </a:lnTo>
+                <a:lnTo>
+                  <a:pt x="2653" y="137"/>
+                </a:lnTo>
+                <a:lnTo>
+                  <a:pt x="2662" y="135"/>
+                </a:lnTo>
+                <a:lnTo>
+                  <a:pt x="2670" y="133"/>
+                </a:lnTo>
+                <a:lnTo>
+                  <a:pt x="2678" y="132"/>
+                </a:lnTo>
+                <a:lnTo>
+                  <a:pt x="2687" y="130"/>
+                </a:lnTo>
+                <a:lnTo>
+                  <a:pt x="2695" y="128"/>
+                </a:lnTo>
+                <a:lnTo>
+                  <a:pt x="2704" y="127"/>
+                </a:lnTo>
+                <a:lnTo>
+                  <a:pt x="2712" y="125"/>
+                </a:lnTo>
+                <a:lnTo>
+                  <a:pt x="2720" y="124"/>
+                </a:lnTo>
+                <a:lnTo>
+                  <a:pt x="2729" y="122"/>
+                </a:lnTo>
+                <a:lnTo>
+                  <a:pt x="2737" y="120"/>
+                </a:lnTo>
+                <a:lnTo>
+                  <a:pt x="2745" y="119"/>
+                </a:lnTo>
+                <a:lnTo>
+                  <a:pt x="2754" y="117"/>
+                </a:lnTo>
+                <a:lnTo>
+                  <a:pt x="2762" y="115"/>
+                </a:lnTo>
+                <a:lnTo>
+                  <a:pt x="2771" y="114"/>
+                </a:lnTo>
+                <a:lnTo>
+                  <a:pt x="2779" y="112"/>
+                </a:lnTo>
+                <a:lnTo>
+                  <a:pt x="2787" y="110"/>
+                </a:lnTo>
+                <a:lnTo>
+                  <a:pt x="2796" y="109"/>
+                </a:lnTo>
+                <a:lnTo>
+                  <a:pt x="2804" y="107"/>
+                </a:lnTo>
+                <a:lnTo>
+                  <a:pt x="2813" y="105"/>
+                </a:lnTo>
+                <a:lnTo>
+                  <a:pt x="2821" y="104"/>
+                </a:lnTo>
+                <a:lnTo>
+                  <a:pt x="2829" y="102"/>
+                </a:lnTo>
+                <a:lnTo>
+                  <a:pt x="2838" y="100"/>
+                </a:lnTo>
+                <a:lnTo>
+                  <a:pt x="2846" y="99"/>
+                </a:lnTo>
+                <a:lnTo>
+                  <a:pt x="2855" y="97"/>
+                </a:lnTo>
+                <a:lnTo>
+                  <a:pt x="2863" y="95"/>
+                </a:lnTo>
+                <a:lnTo>
+                  <a:pt x="2871" y="94"/>
+                </a:lnTo>
+                <a:lnTo>
+                  <a:pt x="2880" y="92"/>
+                </a:lnTo>
+                <a:lnTo>
+                  <a:pt x="2888" y="90"/>
+                </a:lnTo>
+                <a:lnTo>
+                  <a:pt x="2897" y="89"/>
+                </a:lnTo>
+                <a:lnTo>
+                  <a:pt x="2905" y="87"/>
+                </a:lnTo>
+                <a:lnTo>
+                  <a:pt x="2913" y="86"/>
+                </a:lnTo>
+                <a:lnTo>
+                  <a:pt x="2922" y="84"/>
+                </a:lnTo>
+                <a:lnTo>
+                  <a:pt x="2930" y="82"/>
+                </a:lnTo>
+                <a:lnTo>
+                  <a:pt x="2939" y="81"/>
+                </a:lnTo>
+                <a:lnTo>
+                  <a:pt x="2947" y="79"/>
+                </a:lnTo>
+                <a:lnTo>
+                  <a:pt x="2955" y="77"/>
+                </a:lnTo>
+                <a:lnTo>
+                  <a:pt x="2964" y="76"/>
+                </a:lnTo>
+                <a:lnTo>
+                  <a:pt x="2972" y="74"/>
+                </a:lnTo>
+                <a:lnTo>
+                  <a:pt x="2981" y="72"/>
+                </a:lnTo>
+                <a:lnTo>
+                  <a:pt x="2989" y="71"/>
+                </a:lnTo>
+                <a:lnTo>
+                  <a:pt x="2997" y="69"/>
+                </a:lnTo>
+                <a:lnTo>
+                  <a:pt x="3006" y="67"/>
+                </a:lnTo>
+                <a:lnTo>
+                  <a:pt x="3014" y="66"/>
+                </a:lnTo>
+                <a:lnTo>
+                  <a:pt x="3023" y="64"/>
+                </a:lnTo>
+                <a:lnTo>
+                  <a:pt x="3031" y="62"/>
+                </a:lnTo>
+                <a:lnTo>
+                  <a:pt x="3039" y="61"/>
+                </a:lnTo>
+                <a:lnTo>
+                  <a:pt x="3048" y="59"/>
+                </a:lnTo>
+                <a:lnTo>
+                  <a:pt x="3056" y="57"/>
+                </a:lnTo>
+                <a:lnTo>
+                  <a:pt x="3065" y="56"/>
+                </a:lnTo>
+                <a:lnTo>
+                  <a:pt x="3073" y="54"/>
+                </a:lnTo>
+                <a:lnTo>
+                  <a:pt x="3081" y="52"/>
+                </a:lnTo>
+                <a:lnTo>
+                  <a:pt x="3090" y="51"/>
+                </a:lnTo>
+                <a:lnTo>
+                  <a:pt x="3098" y="49"/>
+                </a:lnTo>
+                <a:lnTo>
+                  <a:pt x="3107" y="48"/>
+                </a:lnTo>
+                <a:lnTo>
+                  <a:pt x="3115" y="46"/>
+                </a:lnTo>
+                <a:lnTo>
+                  <a:pt x="3123" y="44"/>
+                </a:lnTo>
+                <a:lnTo>
+                  <a:pt x="3132" y="43"/>
+                </a:lnTo>
+                <a:lnTo>
+                  <a:pt x="3140" y="41"/>
+                </a:lnTo>
+                <a:lnTo>
+                  <a:pt x="3148" y="39"/>
+                </a:lnTo>
+                <a:lnTo>
+                  <a:pt x="3157" y="38"/>
+                </a:lnTo>
+                <a:lnTo>
+                  <a:pt x="3165" y="36"/>
+                </a:lnTo>
+                <a:lnTo>
+                  <a:pt x="3174" y="34"/>
+                </a:lnTo>
+                <a:lnTo>
+                  <a:pt x="3182" y="33"/>
+                </a:lnTo>
+                <a:lnTo>
+                  <a:pt x="3190" y="31"/>
+                </a:lnTo>
+                <a:lnTo>
+                  <a:pt x="3199" y="29"/>
+                </a:lnTo>
+                <a:lnTo>
+                  <a:pt x="3207" y="28"/>
+                </a:lnTo>
+                <a:lnTo>
+                  <a:pt x="3216" y="26"/>
+                </a:lnTo>
+                <a:lnTo>
+                  <a:pt x="3224" y="24"/>
+                </a:lnTo>
+                <a:lnTo>
+                  <a:pt x="3232" y="23"/>
+                </a:lnTo>
+                <a:lnTo>
+                  <a:pt x="3241" y="21"/>
+                </a:lnTo>
+                <a:lnTo>
+                  <a:pt x="3249" y="19"/>
+                </a:lnTo>
+                <a:lnTo>
+                  <a:pt x="3258" y="18"/>
+                </a:lnTo>
+                <a:lnTo>
+                  <a:pt x="3266" y="16"/>
+                </a:lnTo>
+                <a:lnTo>
+                  <a:pt x="3274" y="15"/>
+                </a:lnTo>
+                <a:lnTo>
+                  <a:pt x="3283" y="13"/>
+                </a:lnTo>
+                <a:lnTo>
+                  <a:pt x="3291" y="11"/>
+                </a:lnTo>
+                <a:lnTo>
+                  <a:pt x="3300" y="10"/>
+                </a:lnTo>
+                <a:lnTo>
+                  <a:pt x="3308" y="8"/>
+                </a:lnTo>
+                <a:lnTo>
+                  <a:pt x="3316" y="6"/>
+                </a:lnTo>
+                <a:lnTo>
+                  <a:pt x="3325" y="5"/>
+                </a:lnTo>
+                <a:lnTo>
+                  <a:pt x="3333" y="3"/>
+                </a:lnTo>
+                <a:lnTo>
+                  <a:pt x="3342" y="1"/>
+                </a:lnTo>
+                <a:lnTo>
+                  <a:pt x="3350" y="0"/>
+                </a:lnTo>
+              </a:path>
+            </a:pathLst>
+          </a:custGeom>
+          <a:noFill/>
+          <a:ln w="38100">
+            <a:solidFill>
+              <a:srgbClr val="C65326"/>
+            </a:solidFill>
+          </a:ln>
+        </p:spPr>
+        <p:style>
+          <a:lnRef idx="1">
+            <a:schemeClr val="accent1"/>
+          </a:lnRef>
+          <a:fillRef idx="3">
+            <a:schemeClr val="accent1"/>
+          </a:fillRef>
+          <a:effectRef idx="0">
+            <a:schemeClr val="accent1"/>
+          </a:effectRef>
+          <a:fontRef idx="minor">
+            <a:schemeClr val="lt1"/>
+          </a:fontRef>
+        </p:style>
+        <p:txBody>
+          <a:bodyPr rtlCol="0" anchor="ctr"/>
+          <a:lstStyle/>
+          <a:p>
+            <a:pPr algn="ctr"/>
+          </a:p>
+        </p:txBody>
+      </p:sp>
+      <p:sp>
+        <p:nvSpPr>
+          <p:cNvPr id="11" name="Oval 10"/>
+          <p:cNvSpPr/>
+          <p:nvPr/>
+        </p:nvSpPr>
+        <p:spPr>
+          <a:xfrm>
+            <a:off x="854964" y="3470204"/>
+            <a:ext cx="82296" cy="82296"/>
+          </a:xfrm>
+          <a:prstGeom prst="ellipse">
+            <a:avLst/>
+          </a:prstGeom>
+          <a:solidFill>
+            <a:srgbClr val="181D16"/>
+          </a:solidFill>
+          <a:ln w="19050">
+            <a:solidFill>
+              <a:srgbClr val="181D16"/>
+            </a:solidFill>
+          </a:ln>
+        </p:spPr>
+        <p:style>
+          <a:lnRef idx="1">
+            <a:schemeClr val="accent1"/>
+          </a:lnRef>
+          <a:fillRef idx="3">
+            <a:schemeClr val="accent1"/>
+          </a:fillRef>
+          <a:effectRef idx="0">
+            <a:schemeClr val="accent1"/>
+          </a:effectRef>
+          <a:fontRef idx="minor">
+            <a:schemeClr val="lt1"/>
+          </a:fontRef>
+        </p:style>
+        <p:txBody>
+          <a:bodyPr rtlCol="0" anchor="ctr"/>
+          <a:lstStyle/>
+          <a:p>
+            <a:pPr algn="ctr"/>
+          </a:p>
+        </p:txBody>
+      </p:sp>
+      <p:sp>
+        <p:nvSpPr>
+          <p:cNvPr id="12" name="Oval 11"/>
+          <p:cNvSpPr/>
+          <p:nvPr/>
+        </p:nvSpPr>
+        <p:spPr>
+          <a:xfrm>
+            <a:off x="1016187" y="3322769"/>
+            <a:ext cx="82296" cy="82296"/>
+          </a:xfrm>
+          <a:prstGeom prst="ellipse">
+            <a:avLst/>
+          </a:prstGeom>
+          <a:solidFill>
+            <a:srgbClr val="181D16"/>
+          </a:solidFill>
+          <a:ln w="19050">
+            <a:solidFill>
+              <a:srgbClr val="181D16"/>
+            </a:solidFill>
+          </a:ln>
+        </p:spPr>
+        <p:style>
+          <a:lnRef idx="1">
+            <a:schemeClr val="accent1"/>
+          </a:lnRef>
+          <a:fillRef idx="3">
+            <a:schemeClr val="accent1"/>
+          </a:fillRef>
+          <a:effectRef idx="0">
+            <a:schemeClr val="accent1"/>
+          </a:effectRef>
+          <a:fontRef idx="minor">
+            <a:schemeClr val="lt1"/>
+          </a:fontRef>
+        </p:style>
+        <p:txBody>
+          <a:bodyPr rtlCol="0" anchor="ctr"/>
+          <a:lstStyle/>
+          <a:p>
+            <a:pPr algn="ctr"/>
+          </a:p>
+        </p:txBody>
+      </p:sp>
+      <p:sp>
+        <p:nvSpPr>
+          <p:cNvPr id="13" name="Oval 12"/>
+          <p:cNvSpPr/>
+          <p:nvPr/>
+        </p:nvSpPr>
+        <p:spPr>
+          <a:xfrm>
+            <a:off x="1177410" y="3546933"/>
+            <a:ext cx="82296" cy="82296"/>
+          </a:xfrm>
+          <a:prstGeom prst="ellipse">
+            <a:avLst/>
+          </a:prstGeom>
+          <a:solidFill>
+            <a:srgbClr val="181D16"/>
+          </a:solidFill>
+          <a:ln w="19050">
+            <a:solidFill>
+              <a:srgbClr val="181D16"/>
+            </a:solidFill>
+          </a:ln>
+        </p:spPr>
+        <p:style>
+          <a:lnRef idx="1">
+            <a:schemeClr val="accent1"/>
+          </a:lnRef>
+          <a:fillRef idx="3">
+            <a:schemeClr val="accent1"/>
+          </a:fillRef>
+          <a:effectRef idx="0">
+            <a:schemeClr val="accent1"/>
+          </a:effectRef>
+          <a:fontRef idx="minor">
+            <a:schemeClr val="lt1"/>
+          </a:fontRef>
+        </p:style>
+        <p:txBody>
+          <a:bodyPr rtlCol="0" anchor="ctr"/>
+          <a:lstStyle/>
+          <a:p>
+            <a:pPr algn="ctr"/>
+          </a:p>
+        </p:txBody>
+      </p:sp>
+      <p:sp>
+        <p:nvSpPr>
+          <p:cNvPr id="14" name="Oval 13"/>
+          <p:cNvSpPr/>
+          <p:nvPr/>
+        </p:nvSpPr>
+        <p:spPr>
+          <a:xfrm>
+            <a:off x="1338633" y="3667336"/>
+            <a:ext cx="82296" cy="82296"/>
+          </a:xfrm>
+          <a:prstGeom prst="ellipse">
+            <a:avLst/>
+          </a:prstGeom>
+          <a:solidFill>
+            <a:srgbClr val="181D16"/>
+          </a:solidFill>
+          <a:ln w="19050">
+            <a:solidFill>
+              <a:srgbClr val="181D16"/>
+            </a:solidFill>
+          </a:ln>
+        </p:spPr>
+        <p:style>
+          <a:lnRef idx="1">
+            <a:schemeClr val="accent1"/>
+          </a:lnRef>
+          <a:fillRef idx="3">
+            <a:schemeClr val="accent1"/>
+          </a:fillRef>
+          <a:effectRef idx="0">
+            <a:schemeClr val="accent1"/>
+          </a:effectRef>
+          <a:fontRef idx="minor">
+            <a:schemeClr val="lt1"/>
+          </a:fontRef>
+        </p:style>
+        <p:txBody>
+          <a:bodyPr rtlCol="0" anchor="ctr"/>
+          <a:lstStyle/>
+          <a:p>
+            <a:pPr algn="ctr"/>
+          </a:p>
+        </p:txBody>
+      </p:sp>
+      <p:sp>
+        <p:nvSpPr>
+          <p:cNvPr id="15" name="Oval 14"/>
+          <p:cNvSpPr/>
+          <p:nvPr/>
+        </p:nvSpPr>
+        <p:spPr>
+          <a:xfrm>
+            <a:off x="1499856" y="3503160"/>
+            <a:ext cx="82296" cy="82296"/>
+          </a:xfrm>
+          <a:prstGeom prst="ellipse">
+            <a:avLst/>
+          </a:prstGeom>
+          <a:solidFill>
+            <a:srgbClr val="181D16"/>
+          </a:solidFill>
+          <a:ln w="19050">
+            <a:solidFill>
+              <a:srgbClr val="181D16"/>
+            </a:solidFill>
+          </a:ln>
+        </p:spPr>
+        <p:style>
+          <a:lnRef idx="1">
+            <a:schemeClr val="accent1"/>
+          </a:lnRef>
+          <a:fillRef idx="3">
+            <a:schemeClr val="accent1"/>
+          </a:fillRef>
+          <a:effectRef idx="0">
+            <a:schemeClr val="accent1"/>
+          </a:effectRef>
+          <a:fontRef idx="minor">
+            <a:schemeClr val="lt1"/>
+          </a:fontRef>
+        </p:style>
+        <p:txBody>
+          <a:bodyPr rtlCol="0" anchor="ctr"/>
+          <a:lstStyle/>
+          <a:p>
+            <a:pPr algn="ctr"/>
+          </a:p>
+        </p:txBody>
+      </p:sp>
+      <p:sp>
+        <p:nvSpPr>
+          <p:cNvPr id="16" name="Oval 15"/>
+          <p:cNvSpPr/>
+          <p:nvPr/>
+        </p:nvSpPr>
+        <p:spPr>
+          <a:xfrm>
+            <a:off x="1661079" y="4393254"/>
+            <a:ext cx="82296" cy="82296"/>
+          </a:xfrm>
+          <a:prstGeom prst="ellipse">
+            <a:avLst/>
+          </a:prstGeom>
+          <a:solidFill>
+            <a:srgbClr val="181D16"/>
+          </a:solidFill>
+          <a:ln w="19050">
+            <a:solidFill>
+              <a:srgbClr val="181D16"/>
+            </a:solidFill>
+          </a:ln>
+        </p:spPr>
+        <p:style>
+          <a:lnRef idx="1">
+            <a:schemeClr val="accent1"/>
+          </a:lnRef>
+          <a:fillRef idx="3">
+            <a:schemeClr val="accent1"/>
+          </a:fillRef>
+          <a:effectRef idx="0">
+            <a:schemeClr val="accent1"/>
+          </a:effectRef>
+          <a:fontRef idx="minor">
+            <a:schemeClr val="lt1"/>
+          </a:fontRef>
+        </p:style>
+        <p:txBody>
+          <a:bodyPr rtlCol="0" anchor="ctr"/>
+          <a:lstStyle/>
+          <a:p>
+            <a:pPr algn="ctr"/>
+          </a:p>
+        </p:txBody>
+      </p:sp>
+      <p:sp>
+        <p:nvSpPr>
+          <p:cNvPr id="17" name="Oval 16"/>
+          <p:cNvSpPr/>
+          <p:nvPr/>
+        </p:nvSpPr>
+        <p:spPr>
+          <a:xfrm>
+            <a:off x="1822302" y="4278848"/>
+            <a:ext cx="82296" cy="82296"/>
+          </a:xfrm>
+          <a:prstGeom prst="ellipse">
+            <a:avLst/>
+          </a:prstGeom>
+          <a:solidFill>
+            <a:srgbClr val="181D16"/>
+          </a:solidFill>
+          <a:ln w="19050">
+            <a:solidFill>
+              <a:srgbClr val="181D16"/>
+            </a:solidFill>
+          </a:ln>
+        </p:spPr>
+        <p:style>
+          <a:lnRef idx="1">
+            <a:schemeClr val="accent1"/>
+          </a:lnRef>
+          <a:fillRef idx="3">
+            <a:schemeClr val="accent1"/>
+          </a:fillRef>
+          <a:effectRef idx="0">
+            <a:schemeClr val="accent1"/>
+          </a:effectRef>
+          <a:fontRef idx="minor">
+            <a:schemeClr val="lt1"/>
+          </a:fontRef>
+        </p:style>
+        <p:txBody>
+          <a:bodyPr rtlCol="0" anchor="ctr"/>
+          <a:lstStyle/>
+          <a:p>
+            <a:pPr algn="ctr"/>
+          </a:p>
+        </p:txBody>
+      </p:sp>
+      <p:sp>
+        <p:nvSpPr>
+          <p:cNvPr id="18" name="Oval 17"/>
+          <p:cNvSpPr/>
+          <p:nvPr/>
+        </p:nvSpPr>
+        <p:spPr>
+          <a:xfrm>
+            <a:off x="1983526" y="4511406"/>
+            <a:ext cx="82296" cy="82296"/>
+          </a:xfrm>
+          <a:prstGeom prst="ellipse">
+            <a:avLst/>
+          </a:prstGeom>
+          <a:solidFill>
+            <a:srgbClr val="181D16"/>
+          </a:solidFill>
+          <a:ln w="19050">
+            <a:solidFill>
+              <a:srgbClr val="181D16"/>
+            </a:solidFill>
+          </a:ln>
+        </p:spPr>
+        <p:style>
+          <a:lnRef idx="1">
+            <a:schemeClr val="accent1"/>
+          </a:lnRef>
+          <a:fillRef idx="3">
+            <a:schemeClr val="accent1"/>
+          </a:fillRef>
+          <a:effectRef idx="0">
+            <a:schemeClr val="accent1"/>
+          </a:effectRef>
+          <a:fontRef idx="minor">
+            <a:schemeClr val="lt1"/>
+          </a:fontRef>
+        </p:style>
+        <p:txBody>
+          <a:bodyPr rtlCol="0" anchor="ctr"/>
+          <a:lstStyle/>
+          <a:p>
+            <a:pPr algn="ctr"/>
+          </a:p>
+        </p:txBody>
+      </p:sp>
+      <p:sp>
+        <p:nvSpPr>
+          <p:cNvPr id="19" name="Oval 18"/>
+          <p:cNvSpPr/>
+          <p:nvPr/>
+        </p:nvSpPr>
+        <p:spPr>
+          <a:xfrm>
+            <a:off x="2144749" y="4172003"/>
+            <a:ext cx="82296" cy="82296"/>
+          </a:xfrm>
+          <a:prstGeom prst="ellipse">
+            <a:avLst/>
+          </a:prstGeom>
+          <a:solidFill>
+            <a:srgbClr val="181D16"/>
+          </a:solidFill>
+          <a:ln w="19050">
+            <a:solidFill>
+              <a:srgbClr val="181D16"/>
+            </a:solidFill>
+          </a:ln>
+        </p:spPr>
+        <p:style>
+          <a:lnRef idx="1">
+            <a:schemeClr val="accent1"/>
+          </a:lnRef>
+          <a:fillRef idx="3">
+            <a:schemeClr val="accent1"/>
+          </a:fillRef>
+          <a:effectRef idx="0">
+            <a:schemeClr val="accent1"/>
+          </a:effectRef>
+          <a:fontRef idx="minor">
+            <a:schemeClr val="lt1"/>
+          </a:fontRef>
+        </p:style>
+        <p:txBody>
+          <a:bodyPr rtlCol="0" anchor="ctr"/>
+          <a:lstStyle/>
+          <a:p>
+            <a:pPr algn="ctr"/>
+          </a:p>
+        </p:txBody>
+      </p:sp>
+      <p:sp>
+        <p:nvSpPr>
+          <p:cNvPr id="20" name="Oval 19"/>
+          <p:cNvSpPr/>
+          <p:nvPr/>
+        </p:nvSpPr>
+        <p:spPr>
+          <a:xfrm>
+            <a:off x="2305972" y="3842535"/>
+            <a:ext cx="82296" cy="82296"/>
+          </a:xfrm>
+          <a:prstGeom prst="ellipse">
+            <a:avLst/>
+          </a:prstGeom>
+          <a:solidFill>
+            <a:srgbClr val="181D16"/>
+          </a:solidFill>
+          <a:ln w="19050">
+            <a:solidFill>
+              <a:srgbClr val="181D16"/>
+            </a:solidFill>
+          </a:ln>
+        </p:spPr>
+        <p:style>
+          <a:lnRef idx="1">
+            <a:schemeClr val="accent1"/>
+          </a:lnRef>
+          <a:fillRef idx="3">
+            <a:schemeClr val="accent1"/>
+          </a:fillRef>
+          <a:effectRef idx="0">
+            <a:schemeClr val="accent1"/>
+          </a:effectRef>
+          <a:fontRef idx="minor">
+            <a:schemeClr val="lt1"/>
+          </a:fontRef>
+        </p:style>
+        <p:txBody>
+          <a:bodyPr rtlCol="0" anchor="ctr"/>
+          <a:lstStyle/>
+          <a:p>
+            <a:pPr algn="ctr"/>
+          </a:p>
+        </p:txBody>
+      </p:sp>
+      <p:sp>
+        <p:nvSpPr>
+          <p:cNvPr id="21" name="Oval 20"/>
+          <p:cNvSpPr/>
+          <p:nvPr/>
+        </p:nvSpPr>
+        <p:spPr>
+          <a:xfrm>
+            <a:off x="2467195" y="4107162"/>
+            <a:ext cx="82296" cy="82296"/>
+          </a:xfrm>
+          <a:prstGeom prst="ellipse">
+            <a:avLst/>
+          </a:prstGeom>
+          <a:solidFill>
+            <a:srgbClr val="181D16"/>
+          </a:solidFill>
+          <a:ln w="19050">
+            <a:solidFill>
+              <a:srgbClr val="181D16"/>
+            </a:solidFill>
+          </a:ln>
+        </p:spPr>
+        <p:style>
+          <a:lnRef idx="1">
+            <a:schemeClr val="accent1"/>
+          </a:lnRef>
+          <a:fillRef idx="3">
+            <a:schemeClr val="accent1"/>
+          </a:fillRef>
+          <a:effectRef idx="0">
+            <a:schemeClr val="accent1"/>
+          </a:effectRef>
+          <a:fontRef idx="minor">
+            <a:schemeClr val="lt1"/>
+          </a:fontRef>
+        </p:style>
+        <p:txBody>
+          <a:bodyPr rtlCol="0" anchor="ctr"/>
+          <a:lstStyle/>
+          <a:p>
+            <a:pPr algn="ctr"/>
+          </a:p>
+        </p:txBody>
+      </p:sp>
+      <p:sp>
+        <p:nvSpPr>
+          <p:cNvPr id="22" name="Oval 21"/>
+          <p:cNvSpPr/>
+          <p:nvPr/>
+        </p:nvSpPr>
+        <p:spPr>
+          <a:xfrm>
+            <a:off x="2628418" y="3906227"/>
+            <a:ext cx="82296" cy="82296"/>
+          </a:xfrm>
+          <a:prstGeom prst="ellipse">
+            <a:avLst/>
+          </a:prstGeom>
+          <a:solidFill>
+            <a:srgbClr val="181D16"/>
+          </a:solidFill>
+          <a:ln w="19050">
+            <a:solidFill>
+              <a:srgbClr val="181D16"/>
+            </a:solidFill>
+          </a:ln>
+        </p:spPr>
+        <p:style>
+          <a:lnRef idx="1">
+            <a:schemeClr val="accent1"/>
+          </a:lnRef>
+          <a:fillRef idx="3">
+            <a:schemeClr val="accent1"/>
+          </a:fillRef>
+          <a:effectRef idx="0">
+            <a:schemeClr val="accent1"/>
+          </a:effectRef>
+          <a:fontRef idx="minor">
+            <a:schemeClr val="lt1"/>
+          </a:fontRef>
+        </p:style>
+        <p:txBody>
+          <a:bodyPr rtlCol="0" anchor="ctr"/>
+          <a:lstStyle/>
+          <a:p>
+            <a:pPr algn="ctr"/>
+          </a:p>
+        </p:txBody>
+      </p:sp>
+      <p:sp>
+        <p:nvSpPr>
+          <p:cNvPr id="23" name="Oval 22"/>
+          <p:cNvSpPr/>
+          <p:nvPr/>
+        </p:nvSpPr>
+        <p:spPr>
+          <a:xfrm>
+            <a:off x="2789641" y="4529846"/>
+            <a:ext cx="82296" cy="82296"/>
+          </a:xfrm>
+          <a:prstGeom prst="ellipse">
+            <a:avLst/>
+          </a:prstGeom>
+          <a:solidFill>
+            <a:srgbClr val="181D16"/>
+          </a:solidFill>
+          <a:ln w="19050">
+            <a:solidFill>
+              <a:srgbClr val="181D16"/>
+            </a:solidFill>
+          </a:ln>
+        </p:spPr>
+        <p:style>
+          <a:lnRef idx="1">
+            <a:schemeClr val="accent1"/>
+          </a:lnRef>
+          <a:fillRef idx="3">
+            <a:schemeClr val="accent1"/>
+          </a:fillRef>
+          <a:effectRef idx="0">
+            <a:schemeClr val="accent1"/>
+          </a:effectRef>
+          <a:fontRef idx="minor">
+            <a:schemeClr val="lt1"/>
+          </a:fontRef>
+        </p:style>
+        <p:txBody>
+          <a:bodyPr rtlCol="0" anchor="ctr"/>
+          <a:lstStyle/>
+          <a:p>
+            <a:pPr algn="ctr"/>
+          </a:p>
+        </p:txBody>
+      </p:sp>
+      <p:sp>
+        <p:nvSpPr>
+          <p:cNvPr id="24" name="Oval 23"/>
+          <p:cNvSpPr/>
+          <p:nvPr/>
+        </p:nvSpPr>
+        <p:spPr>
+          <a:xfrm>
+            <a:off x="2950865" y="3842105"/>
+            <a:ext cx="82296" cy="82296"/>
+          </a:xfrm>
+          <a:prstGeom prst="ellipse">
+            <a:avLst/>
+          </a:prstGeom>
+          <a:solidFill>
+            <a:srgbClr val="181D16"/>
+          </a:solidFill>
+          <a:ln w="19050">
+            <a:solidFill>
+              <a:srgbClr val="181D16"/>
+            </a:solidFill>
+          </a:ln>
+        </p:spPr>
+        <p:style>
+          <a:lnRef idx="1">
+            <a:schemeClr val="accent1"/>
+          </a:lnRef>
+          <a:fillRef idx="3">
+            <a:schemeClr val="accent1"/>
+          </a:fillRef>
+          <a:effectRef idx="0">
+            <a:schemeClr val="accent1"/>
+          </a:effectRef>
+          <a:fontRef idx="minor">
+            <a:schemeClr val="lt1"/>
+          </a:fontRef>
+        </p:style>
+        <p:txBody>
+          <a:bodyPr rtlCol="0" anchor="ctr"/>
+          <a:lstStyle/>
+          <a:p>
+            <a:pPr algn="ctr"/>
+          </a:p>
+        </p:txBody>
+      </p:sp>
+      <p:sp>
+        <p:nvSpPr>
+          <p:cNvPr id="25" name="Oval 24"/>
+          <p:cNvSpPr/>
+          <p:nvPr/>
+        </p:nvSpPr>
+        <p:spPr>
+          <a:xfrm>
+            <a:off x="3112088" y="4033080"/>
+            <a:ext cx="82296" cy="82296"/>
+          </a:xfrm>
+          <a:prstGeom prst="ellipse">
+            <a:avLst/>
+          </a:prstGeom>
+          <a:solidFill>
+            <a:srgbClr val="181D16"/>
+          </a:solidFill>
+          <a:ln w="19050">
+            <a:solidFill>
+              <a:srgbClr val="181D16"/>
+            </a:solidFill>
+          </a:ln>
+        </p:spPr>
+        <p:style>
+          <a:lnRef idx="1">
+            <a:schemeClr val="accent1"/>
+          </a:lnRef>
+          <a:fillRef idx="3">
+            <a:schemeClr val="accent1"/>
+          </a:fillRef>
+          <a:effectRef idx="0">
+            <a:schemeClr val="accent1"/>
+          </a:effectRef>
+          <a:fontRef idx="minor">
+            <a:schemeClr val="lt1"/>
+          </a:fontRef>
+        </p:style>
+        <p:txBody>
+          <a:bodyPr rtlCol="0" anchor="ctr"/>
+          <a:lstStyle/>
+          <a:p>
+            <a:pPr algn="ctr"/>
+          </a:p>
+        </p:txBody>
+      </p:sp>
+      <p:sp>
+        <p:nvSpPr>
+          <p:cNvPr id="26" name="Oval 25"/>
+          <p:cNvSpPr/>
+          <p:nvPr/>
+        </p:nvSpPr>
+        <p:spPr>
+          <a:xfrm>
+            <a:off x="3273311" y="3123177"/>
+            <a:ext cx="82296" cy="82296"/>
+          </a:xfrm>
+          <a:prstGeom prst="ellipse">
+            <a:avLst/>
+          </a:prstGeom>
+          <a:solidFill>
+            <a:srgbClr val="181D16"/>
+          </a:solidFill>
+          <a:ln w="19050">
+            <a:solidFill>
+              <a:srgbClr val="181D16"/>
+            </a:solidFill>
+          </a:ln>
+        </p:spPr>
+        <p:style>
+          <a:lnRef idx="1">
+            <a:schemeClr val="accent1"/>
+          </a:lnRef>
+          <a:fillRef idx="3">
+            <a:schemeClr val="accent1"/>
+          </a:fillRef>
+          <a:effectRef idx="0">
+            <a:schemeClr val="accent1"/>
+          </a:effectRef>
+          <a:fontRef idx="minor">
+            <a:schemeClr val="lt1"/>
+          </a:fontRef>
+        </p:style>
+        <p:txBody>
+          <a:bodyPr rtlCol="0" anchor="ctr"/>
+          <a:lstStyle/>
+          <a:p>
+            <a:pPr algn="ctr"/>
+          </a:p>
+        </p:txBody>
+      </p:sp>
+      <p:sp>
+        <p:nvSpPr>
+          <p:cNvPr id="27" name="Oval 26"/>
+          <p:cNvSpPr/>
+          <p:nvPr/>
+        </p:nvSpPr>
+        <p:spPr>
+          <a:xfrm>
+            <a:off x="3434534" y="3224682"/>
+            <a:ext cx="82296" cy="82296"/>
+          </a:xfrm>
+          <a:prstGeom prst="ellipse">
+            <a:avLst/>
+          </a:prstGeom>
+          <a:solidFill>
+            <a:srgbClr val="181D16"/>
+          </a:solidFill>
+          <a:ln w="19050">
+            <a:solidFill>
+              <a:srgbClr val="181D16"/>
+            </a:solidFill>
+          </a:ln>
+        </p:spPr>
+        <p:style>
+          <a:lnRef idx="1">
+            <a:schemeClr val="accent1"/>
+          </a:lnRef>
+          <a:fillRef idx="3">
+            <a:schemeClr val="accent1"/>
+          </a:fillRef>
+          <a:effectRef idx="0">
+            <a:schemeClr val="accent1"/>
+          </a:effectRef>
+          <a:fontRef idx="minor">
+            <a:schemeClr val="lt1"/>
+          </a:fontRef>
+        </p:style>
+        <p:txBody>
+          <a:bodyPr rtlCol="0" anchor="ctr"/>
+          <a:lstStyle/>
+          <a:p>
+            <a:pPr algn="ctr"/>
+          </a:p>
+        </p:txBody>
+      </p:sp>
+      <p:sp>
+        <p:nvSpPr>
+          <p:cNvPr id="28" name="Oval 27"/>
+          <p:cNvSpPr/>
+          <p:nvPr/>
+        </p:nvSpPr>
+        <p:spPr>
+          <a:xfrm>
+            <a:off x="3595757" y="3030452"/>
+            <a:ext cx="82296" cy="82296"/>
+          </a:xfrm>
+          <a:prstGeom prst="ellipse">
+            <a:avLst/>
+          </a:prstGeom>
+          <a:solidFill>
+            <a:srgbClr val="181D16"/>
+          </a:solidFill>
+          <a:ln w="19050">
+            <a:solidFill>
+              <a:srgbClr val="181D16"/>
+            </a:solidFill>
+          </a:ln>
+        </p:spPr>
+        <p:style>
+          <a:lnRef idx="1">
+            <a:schemeClr val="accent1"/>
+          </a:lnRef>
+          <a:fillRef idx="3">
+            <a:schemeClr val="accent1"/>
+          </a:fillRef>
+          <a:effectRef idx="0">
+            <a:schemeClr val="accent1"/>
+          </a:effectRef>
+          <a:fontRef idx="minor">
+            <a:schemeClr val="lt1"/>
+          </a:fontRef>
+        </p:style>
+        <p:txBody>
+          <a:bodyPr rtlCol="0" anchor="ctr"/>
+          <a:lstStyle/>
+          <a:p>
+            <a:pPr algn="ctr"/>
+          </a:p>
+        </p:txBody>
+      </p:sp>
+      <p:sp>
+        <p:nvSpPr>
+          <p:cNvPr id="29" name="Oval 28"/>
+          <p:cNvSpPr/>
+          <p:nvPr/>
+        </p:nvSpPr>
+        <p:spPr>
+          <a:xfrm>
+            <a:off x="3756980" y="3124620"/>
+            <a:ext cx="82296" cy="82296"/>
+          </a:xfrm>
+          <a:prstGeom prst="ellipse">
+            <a:avLst/>
+          </a:prstGeom>
+          <a:solidFill>
+            <a:srgbClr val="181D16"/>
+          </a:solidFill>
+          <a:ln w="19050">
+            <a:solidFill>
+              <a:srgbClr val="181D16"/>
+            </a:solidFill>
+          </a:ln>
+        </p:spPr>
+        <p:style>
+          <a:lnRef idx="1">
+            <a:schemeClr val="accent1"/>
+          </a:lnRef>
+          <a:fillRef idx="3">
+            <a:schemeClr val="accent1"/>
+          </a:fillRef>
+          <a:effectRef idx="0">
+            <a:schemeClr val="accent1"/>
+          </a:effectRef>
+          <a:fontRef idx="minor">
+            <a:schemeClr val="lt1"/>
+          </a:fontRef>
+        </p:style>
+        <p:txBody>
+          <a:bodyPr rtlCol="0" anchor="ctr"/>
+          <a:lstStyle/>
+          <a:p>
+            <a:pPr algn="ctr"/>
+          </a:p>
+        </p:txBody>
+      </p:sp>
+      <p:sp>
+        <p:nvSpPr>
+          <p:cNvPr id="30" name="Oval 29"/>
+          <p:cNvSpPr/>
+          <p:nvPr/>
+        </p:nvSpPr>
+        <p:spPr>
+          <a:xfrm>
+            <a:off x="3918204" y="2712934"/>
+            <a:ext cx="82296" cy="82296"/>
+          </a:xfrm>
+          <a:prstGeom prst="ellipse">
+            <a:avLst/>
+          </a:prstGeom>
+          <a:solidFill>
+            <a:srgbClr val="181D16"/>
+          </a:solidFill>
+          <a:ln w="19050">
+            <a:solidFill>
+              <a:srgbClr val="181D16"/>
+            </a:solidFill>
+          </a:ln>
+        </p:spPr>
+        <p:style>
+          <a:lnRef idx="1">
+            <a:schemeClr val="accent1"/>
+          </a:lnRef>
+          <a:fillRef idx="3">
+            <a:schemeClr val="accent1"/>
+          </a:fillRef>
+          <a:effectRef idx="0">
+            <a:schemeClr val="accent1"/>
+          </a:effectRef>
+          <a:fontRef idx="minor">
+            <a:schemeClr val="lt1"/>
+          </a:fontRef>
+        </p:style>
+        <p:txBody>
+          <a:bodyPr rtlCol="0" anchor="ctr"/>
+          <a:lstStyle/>
+          <a:p>
+            <a:pPr algn="ctr"/>
+          </a:p>
+        </p:txBody>
+      </p:sp>
+      <p:sp>
+        <p:nvSpPr>
+          <p:cNvPr id="31" name="TextBox 30"/>
+          <p:cNvSpPr txBox="1"/>
+          <p:nvPr/>
+        </p:nvSpPr>
+        <p:spPr>
+          <a:xfrm>
+            <a:off x="896112" y="5212080"/>
+            <a:ext cx="3200400" cy="731520"/>
+          </a:xfrm>
+          <a:prstGeom prst="rect">
+            <a:avLst/>
+          </a:prstGeom>
+          <a:noFill/>
+        </p:spPr>
+        <p:txBody>
+          <a:bodyPr wrap="square" lIns="0" rIns="0" tIns="0" bIns="0">
+            <a:spAutoFit/>
+          </a:bodyPr>
+          <a:lstStyle/>
+          <a:p>
+            <a:pPr>
+              <a:spcAft>
+                <a:spcPts val="0"/>
+              </a:spcAft>
+              <a:defRPr sz="1900" b="0">
+                <a:solidFill>
+                  <a:srgbClr val="181D16"/>
+                </a:solidFill>
+                <a:latin typeface="Arial"/>
+              </a:defRPr>
+            </a:pPr>
+            <a:r>
+              <a:t>Too simple.</a:t>
+            </a:r>
+          </a:p>
+          <a:p>
+            <a:pPr>
+              <a:spcAft>
+                <a:spcPts val="0"/>
+              </a:spcAft>
+              <a:defRPr sz="1900" b="0">
+                <a:solidFill>
+                  <a:srgbClr val="181D16"/>
+                </a:solidFill>
+                <a:latin typeface="Arial"/>
+              </a:defRPr>
+            </a:pPr>
+            <a:r>
+              <a:t>Misses the pattern.</a:t>
+            </a:r>
+          </a:p>
+        </p:txBody>
+      </p:sp>
+      <p:sp>
+        <p:nvSpPr>
+          <p:cNvPr id="32" name="TextBox 31"/>
+          <p:cNvSpPr txBox="1"/>
+          <p:nvPr/>
+        </p:nvSpPr>
+        <p:spPr>
+          <a:xfrm>
+            <a:off x="4590288" y="2148840"/>
+            <a:ext cx="3108960" cy="365760"/>
+          </a:xfrm>
+          <a:prstGeom prst="rect">
+            <a:avLst/>
+          </a:prstGeom>
+          <a:noFill/>
+        </p:spPr>
+        <p:txBody>
+          <a:bodyPr wrap="square" lIns="0" rIns="0" tIns="0" bIns="0">
+            <a:spAutoFit/>
+          </a:bodyPr>
+          <a:lstStyle/>
+          <a:p>
+            <a:pPr>
+              <a:spcAft>
+                <a:spcPts val="0"/>
+              </a:spcAft>
+              <a:defRPr sz="2100" b="0">
+                <a:solidFill>
+                  <a:srgbClr val="181D16"/>
+                </a:solidFill>
+                <a:latin typeface="Arial"/>
+              </a:defRPr>
+            </a:pPr>
+            <a:r>
+              <a:t>Good fit</a:t>
+            </a:r>
+          </a:p>
+        </p:txBody>
+      </p:sp>
+      <p:cxnSp>
+        <p:nvCxnSpPr>
+          <p:cNvPr id="33" name="Connector 32"/>
+          <p:cNvCxnSpPr/>
+          <p:nvPr/>
+        </p:nvCxnSpPr>
+        <p:spPr>
+          <a:xfrm>
+            <a:off x="4590288" y="4846320"/>
+            <a:ext cx="3063239" cy="0"/>
+          </a:xfrm>
+          <a:prstGeom prst="line">
+            <a:avLst/>
+          </a:prstGeom>
+          <a:ln w="12700">
+            <a:solidFill>
+              <a:srgbClr val="D4D6D0"/>
+            </a:solidFill>
+          </a:ln>
+        </p:spPr>
+        <p:style>
+          <a:lnRef idx="2">
+            <a:schemeClr val="accent1"/>
+          </a:lnRef>
+          <a:fillRef idx="0">
+            <a:schemeClr val="accent1"/>
+          </a:fillRef>
+          <a:effectRef idx="0">
+            <a:schemeClr val="accent1"/>
+          </a:effectRef>
+          <a:fontRef idx="minor">
+            <a:schemeClr val="tx1"/>
+          </a:fontRef>
+        </p:style>
+      </p:cxnSp>
+      <p:cxnSp>
+        <p:nvCxnSpPr>
+          <p:cNvPr id="34" name="Connector 33"/>
+          <p:cNvCxnSpPr/>
+          <p:nvPr/>
+        </p:nvCxnSpPr>
+        <p:spPr>
+          <a:xfrm>
+            <a:off x="4590288" y="2606040"/>
+            <a:ext cx="0" cy="2240280"/>
+          </a:xfrm>
+          <a:prstGeom prst="line">
+            <a:avLst/>
+          </a:prstGeom>
+          <a:ln w="12700">
+            <a:solidFill>
+              <a:srgbClr val="D4D6D0"/>
+            </a:solidFill>
+          </a:ln>
+        </p:spPr>
+        <p:style>
+          <a:lnRef idx="2">
+            <a:schemeClr val="accent1"/>
+          </a:lnRef>
+          <a:fillRef idx="0">
+            <a:schemeClr val="accent1"/>
+          </a:fillRef>
+          <a:effectRef idx="0">
+            <a:schemeClr val="accent1"/>
+          </a:effectRef>
+          <a:fontRef idx="minor">
+            <a:schemeClr val="tx1"/>
+          </a:fontRef>
+        </p:style>
+      </p:cxnSp>
+      <p:sp>
+        <p:nvSpPr>
+          <p:cNvPr id="35" name="TextBox 34"/>
+          <p:cNvSpPr txBox="1"/>
+          <p:nvPr/>
+        </p:nvSpPr>
+        <p:spPr>
+          <a:xfrm>
+            <a:off x="7562088" y="4937760"/>
+            <a:ext cx="640080" cy="274320"/>
+          </a:xfrm>
+          <a:prstGeom prst="rect">
+            <a:avLst/>
+          </a:prstGeom>
+          <a:noFill/>
+        </p:spPr>
+        <p:txBody>
+          <a:bodyPr wrap="square" lIns="0" rIns="0" tIns="0" bIns="0">
+            <a:spAutoFit/>
+          </a:bodyPr>
+          <a:lstStyle/>
+          <a:p>
+            <a:pPr>
+              <a:spcAft>
+                <a:spcPts val="0"/>
+              </a:spcAft>
+              <a:defRPr sz="1400" b="0">
+                <a:solidFill>
+                  <a:srgbClr val="686C66"/>
+                </a:solidFill>
+                <a:latin typeface="Arial"/>
+              </a:defRPr>
+            </a:pPr>
+            <a:r>
+              <a:t>x</a:t>
+            </a:r>
+          </a:p>
+        </p:txBody>
+      </p:sp>
+      <p:sp>
+        <p:nvSpPr>
+          <p:cNvPr id="36" name="TextBox 35"/>
+          <p:cNvSpPr txBox="1"/>
+          <p:nvPr/>
+        </p:nvSpPr>
+        <p:spPr>
+          <a:xfrm>
+            <a:off x="4315968" y="2423160"/>
+            <a:ext cx="914400" cy="274320"/>
+          </a:xfrm>
+          <a:prstGeom prst="rect">
+            <a:avLst/>
+          </a:prstGeom>
+          <a:noFill/>
+        </p:spPr>
+        <p:txBody>
+          <a:bodyPr wrap="square" lIns="0" rIns="0" tIns="0" bIns="0">
+            <a:spAutoFit/>
+          </a:bodyPr>
+          <a:lstStyle/>
+          <a:p>
+            <a:pPr>
+              <a:spcAft>
+                <a:spcPts val="0"/>
+              </a:spcAft>
+              <a:defRPr sz="1400" b="0">
+                <a:solidFill>
+                  <a:srgbClr val="686C66"/>
+                </a:solidFill>
+                <a:latin typeface="Arial"/>
+              </a:defRPr>
+            </a:pPr>
+            <a:r>
+              <a:t>y</a:t>
+            </a:r>
+          </a:p>
+        </p:txBody>
+      </p:sp>
+      <p:sp>
+        <p:nvSpPr>
+          <p:cNvPr id="37" name="Freeform 36"/>
+          <p:cNvSpPr/>
+          <p:nvPr/>
+        </p:nvSpPr>
+        <p:spPr>
+          <a:xfrm>
+            <a:off x="4590288" y="2679192"/>
+            <a:ext cx="3063240" cy="1551737"/>
+          </a:xfrm>
+          <a:custGeom>
+            <a:avLst/>
+            <a:gdLst/>
+            <a:ahLst/>
+            <a:cxnLst/>
+            <a:rect l="l" t="t" r="r" b="b"/>
+            <a:pathLst>
+              <a:path w="3350" h="1697">
+                <a:moveTo>
+                  <a:pt x="0" y="659"/>
+                </a:moveTo>
+                <a:lnTo>
+                  <a:pt x="8" y="670"/>
+                </a:lnTo>
+                <a:lnTo>
+                  <a:pt x="17" y="682"/>
+                </a:lnTo>
+                <a:lnTo>
+                  <a:pt x="25" y="694"/>
+                </a:lnTo>
+                <a:lnTo>
+                  <a:pt x="34" y="706"/>
+                </a:lnTo>
+                <a:lnTo>
+                  <a:pt x="42" y="717"/>
+                </a:lnTo>
+                <a:lnTo>
+                  <a:pt x="50" y="729"/>
+                </a:lnTo>
+                <a:lnTo>
+                  <a:pt x="59" y="740"/>
+                </a:lnTo>
+                <a:lnTo>
+                  <a:pt x="67" y="751"/>
+                </a:lnTo>
+                <a:lnTo>
+                  <a:pt x="76" y="763"/>
+                </a:lnTo>
+                <a:lnTo>
+                  <a:pt x="84" y="774"/>
+                </a:lnTo>
+                <a:lnTo>
+                  <a:pt x="92" y="785"/>
+                </a:lnTo>
+                <a:lnTo>
+                  <a:pt x="101" y="796"/>
+                </a:lnTo>
+                <a:lnTo>
+                  <a:pt x="109" y="807"/>
+                </a:lnTo>
+                <a:lnTo>
+                  <a:pt x="118" y="818"/>
+                </a:lnTo>
+                <a:lnTo>
+                  <a:pt x="126" y="829"/>
+                </a:lnTo>
+                <a:lnTo>
+                  <a:pt x="134" y="840"/>
+                </a:lnTo>
+                <a:lnTo>
+                  <a:pt x="143" y="850"/>
+                </a:lnTo>
+                <a:lnTo>
+                  <a:pt x="151" y="861"/>
+                </a:lnTo>
+                <a:lnTo>
+                  <a:pt x="160" y="872"/>
+                </a:lnTo>
+                <a:lnTo>
+                  <a:pt x="168" y="882"/>
+                </a:lnTo>
+                <a:lnTo>
+                  <a:pt x="176" y="893"/>
+                </a:lnTo>
+                <a:lnTo>
+                  <a:pt x="185" y="903"/>
+                </a:lnTo>
+                <a:lnTo>
+                  <a:pt x="193" y="913"/>
+                </a:lnTo>
+                <a:lnTo>
+                  <a:pt x="202" y="924"/>
+                </a:lnTo>
+                <a:lnTo>
+                  <a:pt x="210" y="934"/>
+                </a:lnTo>
+                <a:lnTo>
+                  <a:pt x="218" y="944"/>
+                </a:lnTo>
+                <a:lnTo>
+                  <a:pt x="227" y="954"/>
+                </a:lnTo>
+                <a:lnTo>
+                  <a:pt x="235" y="964"/>
+                </a:lnTo>
+                <a:lnTo>
+                  <a:pt x="243" y="974"/>
+                </a:lnTo>
+                <a:lnTo>
+                  <a:pt x="252" y="984"/>
+                </a:lnTo>
+                <a:lnTo>
+                  <a:pt x="260" y="994"/>
+                </a:lnTo>
+                <a:lnTo>
+                  <a:pt x="269" y="1003"/>
+                </a:lnTo>
+                <a:lnTo>
+                  <a:pt x="277" y="1013"/>
+                </a:lnTo>
+                <a:lnTo>
+                  <a:pt x="285" y="1023"/>
+                </a:lnTo>
+                <a:lnTo>
+                  <a:pt x="294" y="1032"/>
+                </a:lnTo>
+                <a:lnTo>
+                  <a:pt x="302" y="1042"/>
+                </a:lnTo>
+                <a:lnTo>
+                  <a:pt x="311" y="1051"/>
+                </a:lnTo>
+                <a:lnTo>
+                  <a:pt x="319" y="1060"/>
+                </a:lnTo>
+                <a:lnTo>
+                  <a:pt x="327" y="1070"/>
+                </a:lnTo>
+                <a:lnTo>
+                  <a:pt x="336" y="1079"/>
+                </a:lnTo>
+                <a:lnTo>
+                  <a:pt x="344" y="1088"/>
+                </a:lnTo>
+                <a:lnTo>
+                  <a:pt x="353" y="1097"/>
+                </a:lnTo>
+                <a:lnTo>
+                  <a:pt x="361" y="1106"/>
+                </a:lnTo>
+                <a:lnTo>
+                  <a:pt x="369" y="1115"/>
+                </a:lnTo>
+                <a:lnTo>
+                  <a:pt x="378" y="1124"/>
+                </a:lnTo>
+                <a:lnTo>
+                  <a:pt x="386" y="1132"/>
+                </a:lnTo>
+                <a:lnTo>
+                  <a:pt x="395" y="1141"/>
+                </a:lnTo>
+                <a:lnTo>
+                  <a:pt x="403" y="1150"/>
+                </a:lnTo>
+                <a:lnTo>
+                  <a:pt x="411" y="1158"/>
+                </a:lnTo>
+                <a:lnTo>
+                  <a:pt x="420" y="1167"/>
+                </a:lnTo>
+                <a:lnTo>
+                  <a:pt x="428" y="1175"/>
+                </a:lnTo>
+                <a:lnTo>
+                  <a:pt x="437" y="1184"/>
+                </a:lnTo>
+                <a:lnTo>
+                  <a:pt x="445" y="1192"/>
+                </a:lnTo>
+                <a:lnTo>
+                  <a:pt x="453" y="1200"/>
+                </a:lnTo>
+                <a:lnTo>
+                  <a:pt x="462" y="1208"/>
+                </a:lnTo>
+                <a:lnTo>
+                  <a:pt x="470" y="1216"/>
+                </a:lnTo>
+                <a:lnTo>
+                  <a:pt x="479" y="1224"/>
+                </a:lnTo>
+                <a:lnTo>
+                  <a:pt x="487" y="1232"/>
+                </a:lnTo>
+                <a:lnTo>
+                  <a:pt x="495" y="1240"/>
+                </a:lnTo>
+                <a:lnTo>
+                  <a:pt x="504" y="1248"/>
+                </a:lnTo>
+                <a:lnTo>
+                  <a:pt x="512" y="1256"/>
+                </a:lnTo>
+                <a:lnTo>
+                  <a:pt x="521" y="1264"/>
+                </a:lnTo>
+                <a:lnTo>
+                  <a:pt x="529" y="1271"/>
+                </a:lnTo>
+                <a:lnTo>
+                  <a:pt x="537" y="1279"/>
+                </a:lnTo>
+                <a:lnTo>
+                  <a:pt x="546" y="1286"/>
+                </a:lnTo>
+                <a:lnTo>
+                  <a:pt x="554" y="1294"/>
+                </a:lnTo>
+                <a:lnTo>
+                  <a:pt x="563" y="1301"/>
+                </a:lnTo>
+                <a:lnTo>
+                  <a:pt x="571" y="1308"/>
+                </a:lnTo>
+                <a:lnTo>
+                  <a:pt x="579" y="1316"/>
+                </a:lnTo>
+                <a:lnTo>
+                  <a:pt x="588" y="1323"/>
+                </a:lnTo>
+                <a:lnTo>
+                  <a:pt x="596" y="1330"/>
+                </a:lnTo>
+                <a:lnTo>
+                  <a:pt x="605" y="1337"/>
+                </a:lnTo>
+                <a:lnTo>
+                  <a:pt x="613" y="1344"/>
+                </a:lnTo>
+                <a:lnTo>
+                  <a:pt x="621" y="1351"/>
+                </a:lnTo>
+                <a:lnTo>
+                  <a:pt x="630" y="1357"/>
+                </a:lnTo>
+                <a:lnTo>
+                  <a:pt x="638" y="1364"/>
+                </a:lnTo>
+                <a:lnTo>
+                  <a:pt x="646" y="1371"/>
+                </a:lnTo>
+                <a:lnTo>
+                  <a:pt x="655" y="1377"/>
+                </a:lnTo>
+                <a:lnTo>
+                  <a:pt x="663" y="1384"/>
+                </a:lnTo>
+                <a:lnTo>
+                  <a:pt x="672" y="1390"/>
+                </a:lnTo>
+                <a:lnTo>
+                  <a:pt x="680" y="1397"/>
+                </a:lnTo>
+                <a:lnTo>
+                  <a:pt x="688" y="1403"/>
+                </a:lnTo>
+                <a:lnTo>
+                  <a:pt x="697" y="1409"/>
+                </a:lnTo>
+                <a:lnTo>
+                  <a:pt x="705" y="1416"/>
+                </a:lnTo>
+                <a:lnTo>
+                  <a:pt x="714" y="1422"/>
+                </a:lnTo>
+                <a:lnTo>
+                  <a:pt x="722" y="1428"/>
+                </a:lnTo>
+                <a:lnTo>
+                  <a:pt x="730" y="1434"/>
+                </a:lnTo>
+                <a:lnTo>
+                  <a:pt x="739" y="1440"/>
+                </a:lnTo>
+                <a:lnTo>
+                  <a:pt x="747" y="1446"/>
+                </a:lnTo>
+                <a:lnTo>
+                  <a:pt x="756" y="1451"/>
+                </a:lnTo>
+                <a:lnTo>
+                  <a:pt x="764" y="1457"/>
+                </a:lnTo>
+                <a:lnTo>
+                  <a:pt x="772" y="1463"/>
+                </a:lnTo>
+                <a:lnTo>
+                  <a:pt x="781" y="1468"/>
+                </a:lnTo>
+                <a:lnTo>
+                  <a:pt x="789" y="1474"/>
+                </a:lnTo>
+                <a:lnTo>
+                  <a:pt x="798" y="1479"/>
+                </a:lnTo>
+                <a:lnTo>
+                  <a:pt x="806" y="1485"/>
+                </a:lnTo>
+                <a:lnTo>
+                  <a:pt x="814" y="1490"/>
+                </a:lnTo>
+                <a:lnTo>
+                  <a:pt x="823" y="1495"/>
+                </a:lnTo>
+                <a:lnTo>
+                  <a:pt x="831" y="1501"/>
+                </a:lnTo>
+                <a:lnTo>
+                  <a:pt x="840" y="1506"/>
+                </a:lnTo>
+                <a:lnTo>
+                  <a:pt x="848" y="1511"/>
+                </a:lnTo>
+                <a:lnTo>
+                  <a:pt x="856" y="1516"/>
+                </a:lnTo>
+                <a:lnTo>
+                  <a:pt x="865" y="1521"/>
+                </a:lnTo>
+                <a:lnTo>
+                  <a:pt x="873" y="1525"/>
+                </a:lnTo>
+                <a:lnTo>
+                  <a:pt x="882" y="1530"/>
+                </a:lnTo>
+                <a:lnTo>
+                  <a:pt x="890" y="1535"/>
+                </a:lnTo>
+                <a:lnTo>
+                  <a:pt x="898" y="1540"/>
+                </a:lnTo>
+                <a:lnTo>
+                  <a:pt x="907" y="1544"/>
+                </a:lnTo>
+                <a:lnTo>
+                  <a:pt x="915" y="1549"/>
+                </a:lnTo>
+                <a:lnTo>
+                  <a:pt x="924" y="1553"/>
+                </a:lnTo>
+                <a:lnTo>
+                  <a:pt x="932" y="1558"/>
+                </a:lnTo>
+                <a:lnTo>
+                  <a:pt x="940" y="1562"/>
+                </a:lnTo>
+                <a:lnTo>
+                  <a:pt x="949" y="1566"/>
+                </a:lnTo>
+                <a:lnTo>
+                  <a:pt x="957" y="1570"/>
+                </a:lnTo>
+                <a:lnTo>
+                  <a:pt x="966" y="1574"/>
+                </a:lnTo>
+                <a:lnTo>
+                  <a:pt x="974" y="1578"/>
+                </a:lnTo>
+                <a:lnTo>
+                  <a:pt x="982" y="1582"/>
+                </a:lnTo>
+                <a:lnTo>
+                  <a:pt x="991" y="1586"/>
+                </a:lnTo>
+                <a:lnTo>
+                  <a:pt x="999" y="1590"/>
+                </a:lnTo>
+                <a:lnTo>
+                  <a:pt x="1008" y="1594"/>
+                </a:lnTo>
+                <a:lnTo>
+                  <a:pt x="1016" y="1598"/>
+                </a:lnTo>
+                <a:lnTo>
+                  <a:pt x="1024" y="1601"/>
+                </a:lnTo>
+                <a:lnTo>
+                  <a:pt x="1033" y="1605"/>
+                </a:lnTo>
+                <a:lnTo>
+                  <a:pt x="1041" y="1608"/>
+                </a:lnTo>
+                <a:lnTo>
+                  <a:pt x="1049" y="1612"/>
+                </a:lnTo>
+                <a:lnTo>
+                  <a:pt x="1058" y="1615"/>
+                </a:lnTo>
+                <a:lnTo>
+                  <a:pt x="1066" y="1618"/>
+                </a:lnTo>
+                <a:lnTo>
+                  <a:pt x="1075" y="1621"/>
+                </a:lnTo>
+                <a:lnTo>
+                  <a:pt x="1083" y="1625"/>
+                </a:lnTo>
+                <a:lnTo>
+                  <a:pt x="1091" y="1628"/>
+                </a:lnTo>
+                <a:lnTo>
+                  <a:pt x="1100" y="1631"/>
+                </a:lnTo>
+                <a:lnTo>
+                  <a:pt x="1108" y="1634"/>
+                </a:lnTo>
+                <a:lnTo>
+                  <a:pt x="1117" y="1637"/>
+                </a:lnTo>
+                <a:lnTo>
+                  <a:pt x="1125" y="1639"/>
+                </a:lnTo>
+                <a:lnTo>
+                  <a:pt x="1133" y="1642"/>
+                </a:lnTo>
+                <a:lnTo>
+                  <a:pt x="1142" y="1645"/>
+                </a:lnTo>
+                <a:lnTo>
+                  <a:pt x="1150" y="1647"/>
+                </a:lnTo>
+                <a:lnTo>
+                  <a:pt x="1159" y="1650"/>
+                </a:lnTo>
+                <a:lnTo>
+                  <a:pt x="1167" y="1652"/>
+                </a:lnTo>
+                <a:lnTo>
+                  <a:pt x="1175" y="1655"/>
+                </a:lnTo>
+                <a:lnTo>
+                  <a:pt x="1184" y="1657"/>
+                </a:lnTo>
+                <a:lnTo>
+                  <a:pt x="1192" y="1660"/>
+                </a:lnTo>
+                <a:lnTo>
+                  <a:pt x="1201" y="1662"/>
+                </a:lnTo>
+                <a:lnTo>
+                  <a:pt x="1209" y="1664"/>
+                </a:lnTo>
+                <a:lnTo>
+                  <a:pt x="1217" y="1666"/>
+                </a:lnTo>
+                <a:lnTo>
+                  <a:pt x="1226" y="1668"/>
+                </a:lnTo>
+                <a:lnTo>
+                  <a:pt x="1234" y="1670"/>
+                </a:lnTo>
+                <a:lnTo>
+                  <a:pt x="1243" y="1672"/>
+                </a:lnTo>
+                <a:lnTo>
+                  <a:pt x="1251" y="1674"/>
+                </a:lnTo>
+                <a:lnTo>
+                  <a:pt x="1259" y="1675"/>
+                </a:lnTo>
+                <a:lnTo>
+                  <a:pt x="1268" y="1677"/>
+                </a:lnTo>
+                <a:lnTo>
+                  <a:pt x="1276" y="1679"/>
+                </a:lnTo>
+                <a:lnTo>
+                  <a:pt x="1285" y="1680"/>
+                </a:lnTo>
+                <a:lnTo>
+                  <a:pt x="1293" y="1682"/>
+                </a:lnTo>
+                <a:lnTo>
+                  <a:pt x="1301" y="1683"/>
+                </a:lnTo>
+                <a:lnTo>
+                  <a:pt x="1310" y="1684"/>
+                </a:lnTo>
+                <a:lnTo>
+                  <a:pt x="1318" y="1686"/>
+                </a:lnTo>
+                <a:lnTo>
+                  <a:pt x="1327" y="1687"/>
+                </a:lnTo>
+                <a:lnTo>
+                  <a:pt x="1335" y="1688"/>
+                </a:lnTo>
+                <a:lnTo>
+                  <a:pt x="1343" y="1689"/>
+                </a:lnTo>
+                <a:lnTo>
+                  <a:pt x="1352" y="1690"/>
+                </a:lnTo>
+                <a:lnTo>
+                  <a:pt x="1360" y="1691"/>
+                </a:lnTo>
+                <a:lnTo>
+                  <a:pt x="1369" y="1692"/>
+                </a:lnTo>
+                <a:lnTo>
+                  <a:pt x="1377" y="1692"/>
+                </a:lnTo>
+                <a:lnTo>
+                  <a:pt x="1385" y="1693"/>
+                </a:lnTo>
+                <a:lnTo>
+                  <a:pt x="1394" y="1694"/>
+                </a:lnTo>
+                <a:lnTo>
+                  <a:pt x="1402" y="1694"/>
+                </a:lnTo>
+                <a:lnTo>
+                  <a:pt x="1411" y="1695"/>
+                </a:lnTo>
+                <a:lnTo>
+                  <a:pt x="1419" y="1695"/>
+                </a:lnTo>
+                <a:lnTo>
+                  <a:pt x="1427" y="1696"/>
+                </a:lnTo>
+                <a:lnTo>
+                  <a:pt x="1436" y="1696"/>
+                </a:lnTo>
+                <a:lnTo>
+                  <a:pt x="1444" y="1696"/>
+                </a:lnTo>
+                <a:lnTo>
+                  <a:pt x="1453" y="1696"/>
+                </a:lnTo>
+                <a:lnTo>
+                  <a:pt x="1461" y="1697"/>
+                </a:lnTo>
+                <a:lnTo>
+                  <a:pt x="1469" y="1697"/>
+                </a:lnTo>
+                <a:lnTo>
+                  <a:pt x="1478" y="1697"/>
+                </a:lnTo>
+                <a:lnTo>
+                  <a:pt x="1486" y="1696"/>
+                </a:lnTo>
+                <a:lnTo>
+                  <a:pt x="1494" y="1696"/>
+                </a:lnTo>
+                <a:lnTo>
+                  <a:pt x="1503" y="1696"/>
+                </a:lnTo>
+                <a:lnTo>
+                  <a:pt x="1511" y="1696"/>
+                </a:lnTo>
+                <a:lnTo>
+                  <a:pt x="1520" y="1695"/>
+                </a:lnTo>
+                <a:lnTo>
+                  <a:pt x="1528" y="1695"/>
+                </a:lnTo>
+                <a:lnTo>
+                  <a:pt x="1536" y="1695"/>
+                </a:lnTo>
+                <a:lnTo>
+                  <a:pt x="1545" y="1694"/>
+                </a:lnTo>
+                <a:lnTo>
+                  <a:pt x="1553" y="1693"/>
+                </a:lnTo>
+                <a:lnTo>
+                  <a:pt x="1562" y="1693"/>
+                </a:lnTo>
+                <a:lnTo>
+                  <a:pt x="1570" y="1692"/>
+                </a:lnTo>
+                <a:lnTo>
+                  <a:pt x="1578" y="1691"/>
+                </a:lnTo>
+                <a:lnTo>
+                  <a:pt x="1587" y="1690"/>
+                </a:lnTo>
+                <a:lnTo>
+                  <a:pt x="1595" y="1689"/>
+                </a:lnTo>
+                <a:lnTo>
+                  <a:pt x="1604" y="1688"/>
+                </a:lnTo>
+                <a:lnTo>
+                  <a:pt x="1612" y="1687"/>
+                </a:lnTo>
+                <a:lnTo>
+                  <a:pt x="1620" y="1686"/>
+                </a:lnTo>
+                <a:lnTo>
+                  <a:pt x="1629" y="1685"/>
+                </a:lnTo>
+                <a:lnTo>
+                  <a:pt x="1637" y="1683"/>
+                </a:lnTo>
+                <a:lnTo>
+                  <a:pt x="1646" y="1682"/>
+                </a:lnTo>
+                <a:lnTo>
+                  <a:pt x="1654" y="1680"/>
+                </a:lnTo>
+                <a:lnTo>
+                  <a:pt x="1662" y="1679"/>
+                </a:lnTo>
+                <a:lnTo>
+                  <a:pt x="1671" y="1677"/>
+                </a:lnTo>
+                <a:lnTo>
+                  <a:pt x="1679" y="1676"/>
+                </a:lnTo>
+                <a:lnTo>
+                  <a:pt x="1688" y="1674"/>
+                </a:lnTo>
+                <a:lnTo>
+                  <a:pt x="1696" y="1672"/>
+                </a:lnTo>
+                <a:lnTo>
+                  <a:pt x="1704" y="1670"/>
+                </a:lnTo>
+                <a:lnTo>
+                  <a:pt x="1713" y="1668"/>
+                </a:lnTo>
+                <a:lnTo>
+                  <a:pt x="1721" y="1666"/>
+                </a:lnTo>
+                <a:lnTo>
+                  <a:pt x="1730" y="1664"/>
+                </a:lnTo>
+                <a:lnTo>
+                  <a:pt x="1738" y="1662"/>
+                </a:lnTo>
+                <a:lnTo>
+                  <a:pt x="1746" y="1660"/>
+                </a:lnTo>
+                <a:lnTo>
+                  <a:pt x="1755" y="1658"/>
+                </a:lnTo>
+                <a:lnTo>
+                  <a:pt x="1763" y="1655"/>
+                </a:lnTo>
+                <a:lnTo>
+                  <a:pt x="1772" y="1653"/>
+                </a:lnTo>
+                <a:lnTo>
+                  <a:pt x="1780" y="1651"/>
+                </a:lnTo>
+                <a:lnTo>
+                  <a:pt x="1788" y="1648"/>
+                </a:lnTo>
+                <a:lnTo>
+                  <a:pt x="1797" y="1645"/>
+                </a:lnTo>
+                <a:lnTo>
+                  <a:pt x="1805" y="1643"/>
+                </a:lnTo>
+                <a:lnTo>
+                  <a:pt x="1814" y="1640"/>
+                </a:lnTo>
+                <a:lnTo>
+                  <a:pt x="1822" y="1637"/>
+                </a:lnTo>
+                <a:lnTo>
+                  <a:pt x="1830" y="1634"/>
+                </a:lnTo>
+                <a:lnTo>
+                  <a:pt x="1839" y="1631"/>
+                </a:lnTo>
+                <a:lnTo>
+                  <a:pt x="1847" y="1628"/>
+                </a:lnTo>
+                <a:lnTo>
+                  <a:pt x="1856" y="1625"/>
+                </a:lnTo>
+                <a:lnTo>
+                  <a:pt x="1864" y="1622"/>
+                </a:lnTo>
+                <a:lnTo>
+                  <a:pt x="1872" y="1619"/>
+                </a:lnTo>
+                <a:lnTo>
+                  <a:pt x="1881" y="1616"/>
+                </a:lnTo>
+                <a:lnTo>
+                  <a:pt x="1889" y="1612"/>
+                </a:lnTo>
+                <a:lnTo>
+                  <a:pt x="1897" y="1609"/>
+                </a:lnTo>
+                <a:lnTo>
+                  <a:pt x="1906" y="1605"/>
+                </a:lnTo>
+                <a:lnTo>
+                  <a:pt x="1914" y="1602"/>
+                </a:lnTo>
+                <a:lnTo>
+                  <a:pt x="1923" y="1598"/>
+                </a:lnTo>
+                <a:lnTo>
+                  <a:pt x="1931" y="1595"/>
+                </a:lnTo>
+                <a:lnTo>
+                  <a:pt x="1939" y="1591"/>
+                </a:lnTo>
+                <a:lnTo>
+                  <a:pt x="1948" y="1587"/>
+                </a:lnTo>
+                <a:lnTo>
+                  <a:pt x="1956" y="1583"/>
+                </a:lnTo>
+                <a:lnTo>
+                  <a:pt x="1965" y="1579"/>
+                </a:lnTo>
+                <a:lnTo>
+                  <a:pt x="1973" y="1575"/>
+                </a:lnTo>
+                <a:lnTo>
+                  <a:pt x="1981" y="1571"/>
+                </a:lnTo>
+                <a:lnTo>
+                  <a:pt x="1990" y="1567"/>
+                </a:lnTo>
+                <a:lnTo>
+                  <a:pt x="1998" y="1563"/>
+                </a:lnTo>
+                <a:lnTo>
+                  <a:pt x="2007" y="1558"/>
+                </a:lnTo>
+                <a:lnTo>
+                  <a:pt x="2015" y="1554"/>
+                </a:lnTo>
+                <a:lnTo>
+                  <a:pt x="2023" y="1550"/>
+                </a:lnTo>
+                <a:lnTo>
+                  <a:pt x="2032" y="1545"/>
+                </a:lnTo>
+                <a:lnTo>
+                  <a:pt x="2040" y="1541"/>
+                </a:lnTo>
+                <a:lnTo>
+                  <a:pt x="2049" y="1536"/>
+                </a:lnTo>
+                <a:lnTo>
+                  <a:pt x="2057" y="1531"/>
+                </a:lnTo>
+                <a:lnTo>
+                  <a:pt x="2065" y="1526"/>
+                </a:lnTo>
+                <a:lnTo>
+                  <a:pt x="2074" y="1522"/>
+                </a:lnTo>
+                <a:lnTo>
+                  <a:pt x="2082" y="1517"/>
+                </a:lnTo>
+                <a:lnTo>
+                  <a:pt x="2091" y="1512"/>
+                </a:lnTo>
+                <a:lnTo>
+                  <a:pt x="2099" y="1507"/>
+                </a:lnTo>
+                <a:lnTo>
+                  <a:pt x="2107" y="1502"/>
+                </a:lnTo>
+                <a:lnTo>
+                  <a:pt x="2116" y="1496"/>
+                </a:lnTo>
+                <a:lnTo>
+                  <a:pt x="2124" y="1491"/>
+                </a:lnTo>
+                <a:lnTo>
+                  <a:pt x="2133" y="1486"/>
+                </a:lnTo>
+                <a:lnTo>
+                  <a:pt x="2141" y="1481"/>
+                </a:lnTo>
+                <a:lnTo>
+                  <a:pt x="2149" y="1475"/>
+                </a:lnTo>
+                <a:lnTo>
+                  <a:pt x="2158" y="1470"/>
+                </a:lnTo>
+                <a:lnTo>
+                  <a:pt x="2166" y="1464"/>
+                </a:lnTo>
+                <a:lnTo>
+                  <a:pt x="2175" y="1458"/>
+                </a:lnTo>
+                <a:lnTo>
+                  <a:pt x="2183" y="1453"/>
+                </a:lnTo>
+                <a:lnTo>
+                  <a:pt x="2191" y="1447"/>
+                </a:lnTo>
+                <a:lnTo>
+                  <a:pt x="2200" y="1441"/>
+                </a:lnTo>
+                <a:lnTo>
+                  <a:pt x="2208" y="1435"/>
+                </a:lnTo>
+                <a:lnTo>
+                  <a:pt x="2217" y="1429"/>
+                </a:lnTo>
+                <a:lnTo>
+                  <a:pt x="2225" y="1423"/>
+                </a:lnTo>
+                <a:lnTo>
+                  <a:pt x="2233" y="1417"/>
+                </a:lnTo>
+                <a:lnTo>
+                  <a:pt x="2242" y="1411"/>
+                </a:lnTo>
+                <a:lnTo>
+                  <a:pt x="2250" y="1405"/>
+                </a:lnTo>
+                <a:lnTo>
+                  <a:pt x="2259" y="1398"/>
+                </a:lnTo>
+                <a:lnTo>
+                  <a:pt x="2267" y="1392"/>
+                </a:lnTo>
+                <a:lnTo>
+                  <a:pt x="2275" y="1385"/>
+                </a:lnTo>
+                <a:lnTo>
+                  <a:pt x="2284" y="1379"/>
+                </a:lnTo>
+                <a:lnTo>
+                  <a:pt x="2292" y="1372"/>
+                </a:lnTo>
+                <a:lnTo>
+                  <a:pt x="2301" y="1366"/>
+                </a:lnTo>
+                <a:lnTo>
+                  <a:pt x="2309" y="1359"/>
+                </a:lnTo>
+                <a:lnTo>
+                  <a:pt x="2317" y="1352"/>
+                </a:lnTo>
+                <a:lnTo>
+                  <a:pt x="2326" y="1345"/>
+                </a:lnTo>
+                <a:lnTo>
+                  <a:pt x="2334" y="1338"/>
+                </a:lnTo>
+                <a:lnTo>
+                  <a:pt x="2342" y="1331"/>
+                </a:lnTo>
+                <a:lnTo>
+                  <a:pt x="2351" y="1324"/>
+                </a:lnTo>
+                <a:lnTo>
+                  <a:pt x="2359" y="1317"/>
+                </a:lnTo>
+                <a:lnTo>
+                  <a:pt x="2368" y="1310"/>
+                </a:lnTo>
+                <a:lnTo>
+                  <a:pt x="2376" y="1303"/>
+                </a:lnTo>
+                <a:lnTo>
+                  <a:pt x="2384" y="1295"/>
+                </a:lnTo>
+                <a:lnTo>
+                  <a:pt x="2393" y="1288"/>
+                </a:lnTo>
+                <a:lnTo>
+                  <a:pt x="2401" y="1280"/>
+                </a:lnTo>
+                <a:lnTo>
+                  <a:pt x="2410" y="1273"/>
+                </a:lnTo>
+                <a:lnTo>
+                  <a:pt x="2418" y="1265"/>
+                </a:lnTo>
+                <a:lnTo>
+                  <a:pt x="2426" y="1258"/>
+                </a:lnTo>
+                <a:lnTo>
+                  <a:pt x="2435" y="1250"/>
+                </a:lnTo>
+                <a:lnTo>
+                  <a:pt x="2443" y="1242"/>
+                </a:lnTo>
+                <a:lnTo>
+                  <a:pt x="2452" y="1234"/>
+                </a:lnTo>
+                <a:lnTo>
+                  <a:pt x="2460" y="1226"/>
+                </a:lnTo>
+                <a:lnTo>
+                  <a:pt x="2468" y="1218"/>
+                </a:lnTo>
+                <a:lnTo>
+                  <a:pt x="2477" y="1210"/>
+                </a:lnTo>
+                <a:lnTo>
+                  <a:pt x="2485" y="1202"/>
+                </a:lnTo>
+                <a:lnTo>
+                  <a:pt x="2494" y="1194"/>
+                </a:lnTo>
+                <a:lnTo>
+                  <a:pt x="2502" y="1185"/>
+                </a:lnTo>
+                <a:lnTo>
+                  <a:pt x="2510" y="1177"/>
+                </a:lnTo>
+                <a:lnTo>
+                  <a:pt x="2519" y="1169"/>
+                </a:lnTo>
+                <a:lnTo>
+                  <a:pt x="2527" y="1160"/>
+                </a:lnTo>
+                <a:lnTo>
+                  <a:pt x="2536" y="1152"/>
+                </a:lnTo>
+                <a:lnTo>
+                  <a:pt x="2544" y="1143"/>
+                </a:lnTo>
+                <a:lnTo>
+                  <a:pt x="2552" y="1134"/>
+                </a:lnTo>
+                <a:lnTo>
+                  <a:pt x="2561" y="1125"/>
+                </a:lnTo>
+                <a:lnTo>
+                  <a:pt x="2569" y="1117"/>
+                </a:lnTo>
+                <a:lnTo>
+                  <a:pt x="2578" y="1108"/>
+                </a:lnTo>
+                <a:lnTo>
+                  <a:pt x="2586" y="1099"/>
+                </a:lnTo>
+                <a:lnTo>
+                  <a:pt x="2594" y="1090"/>
+                </a:lnTo>
+                <a:lnTo>
+                  <a:pt x="2603" y="1081"/>
+                </a:lnTo>
+                <a:lnTo>
+                  <a:pt x="2611" y="1071"/>
+                </a:lnTo>
+                <a:lnTo>
+                  <a:pt x="2620" y="1062"/>
+                </a:lnTo>
+                <a:lnTo>
+                  <a:pt x="2628" y="1053"/>
+                </a:lnTo>
+                <a:lnTo>
+                  <a:pt x="2636" y="1044"/>
+                </a:lnTo>
+                <a:lnTo>
+                  <a:pt x="2645" y="1034"/>
+                </a:lnTo>
+                <a:lnTo>
+                  <a:pt x="2653" y="1025"/>
+                </a:lnTo>
+                <a:lnTo>
+                  <a:pt x="2662" y="1015"/>
+                </a:lnTo>
+                <a:lnTo>
+                  <a:pt x="2670" y="1005"/>
+                </a:lnTo>
+                <a:lnTo>
+                  <a:pt x="2678" y="996"/>
+                </a:lnTo>
+                <a:lnTo>
+                  <a:pt x="2687" y="986"/>
+                </a:lnTo>
+                <a:lnTo>
+                  <a:pt x="2695" y="976"/>
+                </a:lnTo>
+                <a:lnTo>
+                  <a:pt x="2704" y="966"/>
+                </a:lnTo>
+                <a:lnTo>
+                  <a:pt x="2712" y="956"/>
+                </a:lnTo>
+                <a:lnTo>
+                  <a:pt x="2720" y="946"/>
+                </a:lnTo>
+                <a:lnTo>
+                  <a:pt x="2729" y="936"/>
+                </a:lnTo>
+                <a:lnTo>
+                  <a:pt x="2737" y="926"/>
+                </a:lnTo>
+                <a:lnTo>
+                  <a:pt x="2745" y="916"/>
+                </a:lnTo>
+                <a:lnTo>
+                  <a:pt x="2754" y="905"/>
+                </a:lnTo>
+                <a:lnTo>
+                  <a:pt x="2762" y="895"/>
+                </a:lnTo>
+                <a:lnTo>
+                  <a:pt x="2771" y="884"/>
+                </a:lnTo>
+                <a:lnTo>
+                  <a:pt x="2779" y="874"/>
+                </a:lnTo>
+                <a:lnTo>
+                  <a:pt x="2787" y="863"/>
+                </a:lnTo>
+                <a:lnTo>
+                  <a:pt x="2796" y="853"/>
+                </a:lnTo>
+                <a:lnTo>
+                  <a:pt x="2804" y="842"/>
+                </a:lnTo>
+                <a:lnTo>
+                  <a:pt x="2813" y="831"/>
+                </a:lnTo>
+                <a:lnTo>
+                  <a:pt x="2821" y="820"/>
+                </a:lnTo>
+                <a:lnTo>
+                  <a:pt x="2829" y="809"/>
+                </a:lnTo>
+                <a:lnTo>
+                  <a:pt x="2838" y="798"/>
+                </a:lnTo>
+                <a:lnTo>
+                  <a:pt x="2846" y="787"/>
+                </a:lnTo>
+                <a:lnTo>
+                  <a:pt x="2855" y="776"/>
+                </a:lnTo>
+                <a:lnTo>
+                  <a:pt x="2863" y="765"/>
+                </a:lnTo>
+                <a:lnTo>
+                  <a:pt x="2871" y="754"/>
+                </a:lnTo>
+                <a:lnTo>
+                  <a:pt x="2880" y="742"/>
+                </a:lnTo>
+                <a:lnTo>
+                  <a:pt x="2888" y="731"/>
+                </a:lnTo>
+                <a:lnTo>
+                  <a:pt x="2897" y="720"/>
+                </a:lnTo>
+                <a:lnTo>
+                  <a:pt x="2905" y="708"/>
+                </a:lnTo>
+                <a:lnTo>
+                  <a:pt x="2913" y="696"/>
+                </a:lnTo>
+                <a:lnTo>
+                  <a:pt x="2922" y="685"/>
+                </a:lnTo>
+                <a:lnTo>
+                  <a:pt x="2930" y="673"/>
+                </a:lnTo>
+                <a:lnTo>
+                  <a:pt x="2939" y="661"/>
+                </a:lnTo>
+                <a:lnTo>
+                  <a:pt x="2947" y="649"/>
+                </a:lnTo>
+                <a:lnTo>
+                  <a:pt x="2955" y="637"/>
+                </a:lnTo>
+                <a:lnTo>
+                  <a:pt x="2964" y="625"/>
+                </a:lnTo>
+                <a:lnTo>
+                  <a:pt x="2972" y="613"/>
+                </a:lnTo>
+                <a:lnTo>
+                  <a:pt x="2981" y="601"/>
+                </a:lnTo>
+                <a:lnTo>
+                  <a:pt x="2989" y="589"/>
+                </a:lnTo>
+                <a:lnTo>
+                  <a:pt x="2997" y="577"/>
+                </a:lnTo>
+                <a:lnTo>
+                  <a:pt x="3006" y="564"/>
+                </a:lnTo>
+                <a:lnTo>
+                  <a:pt x="3014" y="552"/>
+                </a:lnTo>
+                <a:lnTo>
+                  <a:pt x="3023" y="539"/>
+                </a:lnTo>
+                <a:lnTo>
+                  <a:pt x="3031" y="527"/>
+                </a:lnTo>
+                <a:lnTo>
+                  <a:pt x="3039" y="514"/>
+                </a:lnTo>
+                <a:lnTo>
+                  <a:pt x="3048" y="502"/>
+                </a:lnTo>
+                <a:lnTo>
+                  <a:pt x="3056" y="489"/>
+                </a:lnTo>
+                <a:lnTo>
+                  <a:pt x="3065" y="476"/>
+                </a:lnTo>
+                <a:lnTo>
+                  <a:pt x="3073" y="463"/>
+                </a:lnTo>
+                <a:lnTo>
+                  <a:pt x="3081" y="450"/>
+                </a:lnTo>
+                <a:lnTo>
+                  <a:pt x="3090" y="437"/>
+                </a:lnTo>
+                <a:lnTo>
+                  <a:pt x="3098" y="424"/>
+                </a:lnTo>
+                <a:lnTo>
+                  <a:pt x="3107" y="411"/>
+                </a:lnTo>
+                <a:lnTo>
+                  <a:pt x="3115" y="398"/>
+                </a:lnTo>
+                <a:lnTo>
+                  <a:pt x="3123" y="384"/>
+                </a:lnTo>
+                <a:lnTo>
+                  <a:pt x="3132" y="371"/>
+                </a:lnTo>
+                <a:lnTo>
+                  <a:pt x="3140" y="358"/>
+                </a:lnTo>
+                <a:lnTo>
+                  <a:pt x="3148" y="344"/>
+                </a:lnTo>
+                <a:lnTo>
+                  <a:pt x="3157" y="330"/>
+                </a:lnTo>
+                <a:lnTo>
+                  <a:pt x="3165" y="317"/>
+                </a:lnTo>
+                <a:lnTo>
+                  <a:pt x="3174" y="303"/>
+                </a:lnTo>
+                <a:lnTo>
+                  <a:pt x="3182" y="289"/>
+                </a:lnTo>
+                <a:lnTo>
+                  <a:pt x="3190" y="276"/>
+                </a:lnTo>
+                <a:lnTo>
+                  <a:pt x="3199" y="262"/>
+                </a:lnTo>
+                <a:lnTo>
+                  <a:pt x="3207" y="248"/>
+                </a:lnTo>
+                <a:lnTo>
+                  <a:pt x="3216" y="234"/>
+                </a:lnTo>
+                <a:lnTo>
+                  <a:pt x="3224" y="219"/>
+                </a:lnTo>
+                <a:lnTo>
+                  <a:pt x="3232" y="205"/>
+                </a:lnTo>
+                <a:lnTo>
+                  <a:pt x="3241" y="191"/>
+                </a:lnTo>
+                <a:lnTo>
+                  <a:pt x="3249" y="177"/>
+                </a:lnTo>
+                <a:lnTo>
+                  <a:pt x="3258" y="162"/>
+                </a:lnTo>
+                <a:lnTo>
+                  <a:pt x="3266" y="148"/>
+                </a:lnTo>
+                <a:lnTo>
+                  <a:pt x="3274" y="133"/>
+                </a:lnTo>
+                <a:lnTo>
+                  <a:pt x="3283" y="119"/>
+                </a:lnTo>
+                <a:lnTo>
+                  <a:pt x="3291" y="104"/>
+                </a:lnTo>
+                <a:lnTo>
+                  <a:pt x="3300" y="89"/>
+                </a:lnTo>
+                <a:lnTo>
+                  <a:pt x="3308" y="75"/>
+                </a:lnTo>
+                <a:lnTo>
+                  <a:pt x="3316" y="60"/>
+                </a:lnTo>
+                <a:lnTo>
+                  <a:pt x="3325" y="45"/>
+                </a:lnTo>
+                <a:lnTo>
+                  <a:pt x="3333" y="30"/>
+                </a:lnTo>
+                <a:lnTo>
+                  <a:pt x="3342" y="15"/>
+                </a:lnTo>
+                <a:lnTo>
+                  <a:pt x="3350" y="0"/>
+                </a:lnTo>
+              </a:path>
+            </a:pathLst>
+          </a:custGeom>
+          <a:noFill/>
+          <a:ln w="38100">
+            <a:solidFill>
+              <a:srgbClr val="C65326"/>
+            </a:solidFill>
+          </a:ln>
+        </p:spPr>
+        <p:style>
+          <a:lnRef idx="1">
+            <a:schemeClr val="accent1"/>
+          </a:lnRef>
+          <a:fillRef idx="3">
+            <a:schemeClr val="accent1"/>
+          </a:fillRef>
+          <a:effectRef idx="0">
+            <a:schemeClr val="accent1"/>
+          </a:effectRef>
+          <a:fontRef idx="minor">
+            <a:schemeClr val="lt1"/>
+          </a:fontRef>
+        </p:style>
+        <p:txBody>
+          <a:bodyPr rtlCol="0" anchor="ctr"/>
+          <a:lstStyle/>
+          <a:p>
+            <a:pPr algn="ctr"/>
+          </a:p>
+        </p:txBody>
+      </p:sp>
+      <p:sp>
+        <p:nvSpPr>
+          <p:cNvPr id="38" name="Oval 37"/>
+          <p:cNvSpPr/>
+          <p:nvPr/>
+        </p:nvSpPr>
+        <p:spPr>
+          <a:xfrm>
+            <a:off x="4549140" y="3470204"/>
+            <a:ext cx="82296" cy="82296"/>
+          </a:xfrm>
+          <a:prstGeom prst="ellipse">
+            <a:avLst/>
+          </a:prstGeom>
+          <a:solidFill>
+            <a:srgbClr val="181D16"/>
+          </a:solidFill>
+          <a:ln w="19050">
+            <a:solidFill>
+              <a:srgbClr val="181D16"/>
+            </a:solidFill>
+          </a:ln>
+        </p:spPr>
+        <p:style>
+          <a:lnRef idx="1">
+            <a:schemeClr val="accent1"/>
+          </a:lnRef>
+          <a:fillRef idx="3">
+            <a:schemeClr val="accent1"/>
+          </a:fillRef>
+          <a:effectRef idx="0">
+            <a:schemeClr val="accent1"/>
+          </a:effectRef>
+          <a:fontRef idx="minor">
+            <a:schemeClr val="lt1"/>
+          </a:fontRef>
+        </p:style>
+        <p:txBody>
+          <a:bodyPr rtlCol="0" anchor="ctr"/>
+          <a:lstStyle/>
+          <a:p>
+            <a:pPr algn="ctr"/>
+          </a:p>
+        </p:txBody>
+      </p:sp>
+      <p:sp>
+        <p:nvSpPr>
+          <p:cNvPr id="39" name="Oval 38"/>
+          <p:cNvSpPr/>
+          <p:nvPr/>
+        </p:nvSpPr>
+        <p:spPr>
+          <a:xfrm>
+            <a:off x="4710363" y="3322769"/>
+            <a:ext cx="82296" cy="82296"/>
+          </a:xfrm>
+          <a:prstGeom prst="ellipse">
+            <a:avLst/>
+          </a:prstGeom>
+          <a:solidFill>
+            <a:srgbClr val="181D16"/>
+          </a:solidFill>
+          <a:ln w="19050">
+            <a:solidFill>
+              <a:srgbClr val="181D16"/>
+            </a:solidFill>
+          </a:ln>
+        </p:spPr>
+        <p:style>
+          <a:lnRef idx="1">
+            <a:schemeClr val="accent1"/>
+          </a:lnRef>
+          <a:fillRef idx="3">
+            <a:schemeClr val="accent1"/>
+          </a:fillRef>
+          <a:effectRef idx="0">
+            <a:schemeClr val="accent1"/>
+          </a:effectRef>
+          <a:fontRef idx="minor">
+            <a:schemeClr val="lt1"/>
+          </a:fontRef>
+        </p:style>
+        <p:txBody>
+          <a:bodyPr rtlCol="0" anchor="ctr"/>
+          <a:lstStyle/>
+          <a:p>
+            <a:pPr algn="ctr"/>
+          </a:p>
+        </p:txBody>
+      </p:sp>
+      <p:sp>
+        <p:nvSpPr>
+          <p:cNvPr id="40" name="Oval 39"/>
+          <p:cNvSpPr/>
+          <p:nvPr/>
+        </p:nvSpPr>
+        <p:spPr>
+          <a:xfrm>
+            <a:off x="4871586" y="3546933"/>
+            <a:ext cx="82296" cy="82296"/>
+          </a:xfrm>
+          <a:prstGeom prst="ellipse">
+            <a:avLst/>
+          </a:prstGeom>
+          <a:solidFill>
+            <a:srgbClr val="181D16"/>
+          </a:solidFill>
+          <a:ln w="19050">
+            <a:solidFill>
+              <a:srgbClr val="181D16"/>
+            </a:solidFill>
+          </a:ln>
+        </p:spPr>
+        <p:style>
+          <a:lnRef idx="1">
+            <a:schemeClr val="accent1"/>
+          </a:lnRef>
+          <a:fillRef idx="3">
+            <a:schemeClr val="accent1"/>
+          </a:fillRef>
+          <a:effectRef idx="0">
+            <a:schemeClr val="accent1"/>
+          </a:effectRef>
+          <a:fontRef idx="minor">
+            <a:schemeClr val="lt1"/>
+          </a:fontRef>
+        </p:style>
+        <p:txBody>
+          <a:bodyPr rtlCol="0" anchor="ctr"/>
+          <a:lstStyle/>
+          <a:p>
+            <a:pPr algn="ctr"/>
+          </a:p>
+        </p:txBody>
+      </p:sp>
+      <p:sp>
+        <p:nvSpPr>
+          <p:cNvPr id="41" name="Oval 40"/>
+          <p:cNvSpPr/>
+          <p:nvPr/>
+        </p:nvSpPr>
+        <p:spPr>
+          <a:xfrm>
+            <a:off x="5032809" y="3667336"/>
+            <a:ext cx="82296" cy="82296"/>
+          </a:xfrm>
+          <a:prstGeom prst="ellipse">
+            <a:avLst/>
+          </a:prstGeom>
+          <a:solidFill>
+            <a:srgbClr val="181D16"/>
+          </a:solidFill>
+          <a:ln w="19050">
+            <a:solidFill>
+              <a:srgbClr val="181D16"/>
+            </a:solidFill>
+          </a:ln>
+        </p:spPr>
+        <p:style>
+          <a:lnRef idx="1">
+            <a:schemeClr val="accent1"/>
+          </a:lnRef>
+          <a:fillRef idx="3">
+            <a:schemeClr val="accent1"/>
+          </a:fillRef>
+          <a:effectRef idx="0">
+            <a:schemeClr val="accent1"/>
+          </a:effectRef>
+          <a:fontRef idx="minor">
+            <a:schemeClr val="lt1"/>
+          </a:fontRef>
+        </p:style>
+        <p:txBody>
+          <a:bodyPr rtlCol="0" anchor="ctr"/>
+          <a:lstStyle/>
+          <a:p>
+            <a:pPr algn="ctr"/>
+          </a:p>
+        </p:txBody>
+      </p:sp>
+      <p:sp>
+        <p:nvSpPr>
+          <p:cNvPr id="42" name="Oval 41"/>
+          <p:cNvSpPr/>
+          <p:nvPr/>
+        </p:nvSpPr>
+        <p:spPr>
+          <a:xfrm>
+            <a:off x="5194032" y="3503160"/>
+            <a:ext cx="82296" cy="82296"/>
+          </a:xfrm>
+          <a:prstGeom prst="ellipse">
+            <a:avLst/>
+          </a:prstGeom>
+          <a:solidFill>
+            <a:srgbClr val="181D16"/>
+          </a:solidFill>
+          <a:ln w="19050">
+            <a:solidFill>
+              <a:srgbClr val="181D16"/>
+            </a:solidFill>
+          </a:ln>
+        </p:spPr>
+        <p:style>
+          <a:lnRef idx="1">
+            <a:schemeClr val="accent1"/>
+          </a:lnRef>
+          <a:fillRef idx="3">
+            <a:schemeClr val="accent1"/>
+          </a:fillRef>
+          <a:effectRef idx="0">
+            <a:schemeClr val="accent1"/>
+          </a:effectRef>
+          <a:fontRef idx="minor">
+            <a:schemeClr val="lt1"/>
+          </a:fontRef>
+        </p:style>
+        <p:txBody>
+          <a:bodyPr rtlCol="0" anchor="ctr"/>
+          <a:lstStyle/>
+          <a:p>
+            <a:pPr algn="ctr"/>
+          </a:p>
+        </p:txBody>
+      </p:sp>
+      <p:sp>
+        <p:nvSpPr>
+          <p:cNvPr id="43" name="Oval 42"/>
+          <p:cNvSpPr/>
+          <p:nvPr/>
+        </p:nvSpPr>
+        <p:spPr>
+          <a:xfrm>
+            <a:off x="5355255" y="4393254"/>
+            <a:ext cx="82296" cy="82296"/>
+          </a:xfrm>
+          <a:prstGeom prst="ellipse">
+            <a:avLst/>
+          </a:prstGeom>
+          <a:solidFill>
+            <a:srgbClr val="181D16"/>
+          </a:solidFill>
+          <a:ln w="19050">
+            <a:solidFill>
+              <a:srgbClr val="181D16"/>
+            </a:solidFill>
+          </a:ln>
+        </p:spPr>
+        <p:style>
+          <a:lnRef idx="1">
+            <a:schemeClr val="accent1"/>
+          </a:lnRef>
+          <a:fillRef idx="3">
+            <a:schemeClr val="accent1"/>
+          </a:fillRef>
+          <a:effectRef idx="0">
+            <a:schemeClr val="accent1"/>
+          </a:effectRef>
+          <a:fontRef idx="minor">
+            <a:schemeClr val="lt1"/>
+          </a:fontRef>
+        </p:style>
+        <p:txBody>
+          <a:bodyPr rtlCol="0" anchor="ctr"/>
+          <a:lstStyle/>
+          <a:p>
+            <a:pPr algn="ctr"/>
+          </a:p>
+        </p:txBody>
+      </p:sp>
+      <p:sp>
+        <p:nvSpPr>
+          <p:cNvPr id="44" name="Oval 43"/>
+          <p:cNvSpPr/>
+          <p:nvPr/>
+        </p:nvSpPr>
+        <p:spPr>
+          <a:xfrm>
+            <a:off x="5516478" y="4278848"/>
+            <a:ext cx="82296" cy="82296"/>
+          </a:xfrm>
+          <a:prstGeom prst="ellipse">
+            <a:avLst/>
+          </a:prstGeom>
+          <a:solidFill>
+            <a:srgbClr val="181D16"/>
+          </a:solidFill>
+          <a:ln w="19050">
+            <a:solidFill>
+              <a:srgbClr val="181D16"/>
+            </a:solidFill>
+          </a:ln>
+        </p:spPr>
+        <p:style>
+          <a:lnRef idx="1">
+            <a:schemeClr val="accent1"/>
+          </a:lnRef>
+          <a:fillRef idx="3">
+            <a:schemeClr val="accent1"/>
+          </a:fillRef>
+          <a:effectRef idx="0">
+            <a:schemeClr val="accent1"/>
+          </a:effectRef>
+          <a:fontRef idx="minor">
+            <a:schemeClr val="lt1"/>
+          </a:fontRef>
+        </p:style>
+        <p:txBody>
+          <a:bodyPr rtlCol="0" anchor="ctr"/>
+          <a:lstStyle/>
+          <a:p>
+            <a:pPr algn="ctr"/>
+          </a:p>
+        </p:txBody>
+      </p:sp>
+      <p:sp>
+        <p:nvSpPr>
+          <p:cNvPr id="45" name="Oval 44"/>
+          <p:cNvSpPr/>
+          <p:nvPr/>
+        </p:nvSpPr>
+        <p:spPr>
+          <a:xfrm>
+            <a:off x="5677702" y="4511406"/>
+            <a:ext cx="82296" cy="82296"/>
+          </a:xfrm>
+          <a:prstGeom prst="ellipse">
+            <a:avLst/>
+          </a:prstGeom>
+          <a:solidFill>
+            <a:srgbClr val="181D16"/>
+          </a:solidFill>
+          <a:ln w="19050">
+            <a:solidFill>
+              <a:srgbClr val="181D16"/>
+            </a:solidFill>
+          </a:ln>
+        </p:spPr>
+        <p:style>
+          <a:lnRef idx="1">
+            <a:schemeClr val="accent1"/>
+          </a:lnRef>
+          <a:fillRef idx="3">
+            <a:schemeClr val="accent1"/>
+          </a:fillRef>
+          <a:effectRef idx="0">
+            <a:schemeClr val="accent1"/>
+          </a:effectRef>
+          <a:fontRef idx="minor">
+            <a:schemeClr val="lt1"/>
+          </a:fontRef>
+        </p:style>
+        <p:txBody>
+          <a:bodyPr rtlCol="0" anchor="ctr"/>
+          <a:lstStyle/>
+          <a:p>
+            <a:pPr algn="ctr"/>
+          </a:p>
+        </p:txBody>
+      </p:sp>
+      <p:sp>
+        <p:nvSpPr>
+          <p:cNvPr id="46" name="Oval 45"/>
+          <p:cNvSpPr/>
+          <p:nvPr/>
+        </p:nvSpPr>
+        <p:spPr>
+          <a:xfrm>
+            <a:off x="5838925" y="4172003"/>
+            <a:ext cx="82296" cy="82296"/>
+          </a:xfrm>
+          <a:prstGeom prst="ellipse">
+            <a:avLst/>
+          </a:prstGeom>
+          <a:solidFill>
+            <a:srgbClr val="181D16"/>
+          </a:solidFill>
+          <a:ln w="19050">
+            <a:solidFill>
+              <a:srgbClr val="181D16"/>
+            </a:solidFill>
+          </a:ln>
+        </p:spPr>
+        <p:style>
+          <a:lnRef idx="1">
+            <a:schemeClr val="accent1"/>
+          </a:lnRef>
+          <a:fillRef idx="3">
+            <a:schemeClr val="accent1"/>
+          </a:fillRef>
+          <a:effectRef idx="0">
+            <a:schemeClr val="accent1"/>
+          </a:effectRef>
+          <a:fontRef idx="minor">
+            <a:schemeClr val="lt1"/>
+          </a:fontRef>
+        </p:style>
+        <p:txBody>
+          <a:bodyPr rtlCol="0" anchor="ctr"/>
+          <a:lstStyle/>
+          <a:p>
+            <a:pPr algn="ctr"/>
+          </a:p>
+        </p:txBody>
+      </p:sp>
+      <p:sp>
+        <p:nvSpPr>
+          <p:cNvPr id="47" name="Oval 46"/>
+          <p:cNvSpPr/>
+          <p:nvPr/>
+        </p:nvSpPr>
+        <p:spPr>
+          <a:xfrm>
+            <a:off x="6000148" y="3842535"/>
+            <a:ext cx="82296" cy="82296"/>
+          </a:xfrm>
+          <a:prstGeom prst="ellipse">
+            <a:avLst/>
+          </a:prstGeom>
+          <a:solidFill>
+            <a:srgbClr val="181D16"/>
+          </a:solidFill>
+          <a:ln w="19050">
+            <a:solidFill>
+              <a:srgbClr val="181D16"/>
+            </a:solidFill>
+          </a:ln>
+        </p:spPr>
+        <p:style>
+          <a:lnRef idx="1">
+            <a:schemeClr val="accent1"/>
+          </a:lnRef>
+          <a:fillRef idx="3">
+            <a:schemeClr val="accent1"/>
+          </a:fillRef>
+          <a:effectRef idx="0">
+            <a:schemeClr val="accent1"/>
+          </a:effectRef>
+          <a:fontRef idx="minor">
+            <a:schemeClr val="lt1"/>
+          </a:fontRef>
+        </p:style>
+        <p:txBody>
+          <a:bodyPr rtlCol="0" anchor="ctr"/>
+          <a:lstStyle/>
+          <a:p>
+            <a:pPr algn="ctr"/>
+          </a:p>
+        </p:txBody>
+      </p:sp>
+      <p:sp>
+        <p:nvSpPr>
+          <p:cNvPr id="48" name="Oval 47"/>
+          <p:cNvSpPr/>
+          <p:nvPr/>
+        </p:nvSpPr>
+        <p:spPr>
+          <a:xfrm>
+            <a:off x="6161371" y="4107162"/>
+            <a:ext cx="82296" cy="82296"/>
+          </a:xfrm>
+          <a:prstGeom prst="ellipse">
+            <a:avLst/>
+          </a:prstGeom>
+          <a:solidFill>
+            <a:srgbClr val="181D16"/>
+          </a:solidFill>
+          <a:ln w="19050">
+            <a:solidFill>
+              <a:srgbClr val="181D16"/>
+            </a:solidFill>
+          </a:ln>
+        </p:spPr>
+        <p:style>
+          <a:lnRef idx="1">
+            <a:schemeClr val="accent1"/>
+          </a:lnRef>
+          <a:fillRef idx="3">
+            <a:schemeClr val="accent1"/>
+          </a:fillRef>
+          <a:effectRef idx="0">
+            <a:schemeClr val="accent1"/>
+          </a:effectRef>
+          <a:fontRef idx="minor">
+            <a:schemeClr val="lt1"/>
+          </a:fontRef>
+        </p:style>
+        <p:txBody>
+          <a:bodyPr rtlCol="0" anchor="ctr"/>
+          <a:lstStyle/>
+          <a:p>
+            <a:pPr algn="ctr"/>
+          </a:p>
+        </p:txBody>
+      </p:sp>
+      <p:sp>
+        <p:nvSpPr>
+          <p:cNvPr id="49" name="Oval 48"/>
+          <p:cNvSpPr/>
+          <p:nvPr/>
+        </p:nvSpPr>
+        <p:spPr>
+          <a:xfrm>
+            <a:off x="6322594" y="3906227"/>
+            <a:ext cx="82296" cy="82296"/>
+          </a:xfrm>
+          <a:prstGeom prst="ellipse">
+            <a:avLst/>
+          </a:prstGeom>
+          <a:solidFill>
+            <a:srgbClr val="181D16"/>
+          </a:solidFill>
+          <a:ln w="19050">
+            <a:solidFill>
+              <a:srgbClr val="181D16"/>
+            </a:solidFill>
+          </a:ln>
+        </p:spPr>
+        <p:style>
+          <a:lnRef idx="1">
+            <a:schemeClr val="accent1"/>
+          </a:lnRef>
+          <a:fillRef idx="3">
+            <a:schemeClr val="accent1"/>
+          </a:fillRef>
+          <a:effectRef idx="0">
+            <a:schemeClr val="accent1"/>
+          </a:effectRef>
+          <a:fontRef idx="minor">
+            <a:schemeClr val="lt1"/>
+          </a:fontRef>
+        </p:style>
+        <p:txBody>
+          <a:bodyPr rtlCol="0" anchor="ctr"/>
+          <a:lstStyle/>
+          <a:p>
+            <a:pPr algn="ctr"/>
+          </a:p>
+        </p:txBody>
+      </p:sp>
+      <p:sp>
+        <p:nvSpPr>
+          <p:cNvPr id="50" name="Oval 49"/>
+          <p:cNvSpPr/>
+          <p:nvPr/>
+        </p:nvSpPr>
+        <p:spPr>
+          <a:xfrm>
+            <a:off x="6483817" y="4529846"/>
+            <a:ext cx="82296" cy="82296"/>
+          </a:xfrm>
+          <a:prstGeom prst="ellipse">
+            <a:avLst/>
+          </a:prstGeom>
+          <a:solidFill>
+            <a:srgbClr val="181D16"/>
+          </a:solidFill>
+          <a:ln w="19050">
+            <a:solidFill>
+              <a:srgbClr val="181D16"/>
+            </a:solidFill>
+          </a:ln>
+        </p:spPr>
+        <p:style>
+          <a:lnRef idx="1">
+            <a:schemeClr val="accent1"/>
+          </a:lnRef>
+          <a:fillRef idx="3">
+            <a:schemeClr val="accent1"/>
+          </a:fillRef>
+          <a:effectRef idx="0">
+            <a:schemeClr val="accent1"/>
+          </a:effectRef>
+          <a:fontRef idx="minor">
+            <a:schemeClr val="lt1"/>
+          </a:fontRef>
+        </p:style>
+        <p:txBody>
+          <a:bodyPr rtlCol="0" anchor="ctr"/>
+          <a:lstStyle/>
+          <a:p>
+            <a:pPr algn="ctr"/>
+          </a:p>
+        </p:txBody>
+      </p:sp>
+      <p:sp>
+        <p:nvSpPr>
+          <p:cNvPr id="51" name="Oval 50"/>
+          <p:cNvSpPr/>
+          <p:nvPr/>
+        </p:nvSpPr>
+        <p:spPr>
+          <a:xfrm>
+            <a:off x="6645041" y="3842105"/>
+            <a:ext cx="82296" cy="82296"/>
+          </a:xfrm>
+          <a:prstGeom prst="ellipse">
+            <a:avLst/>
+          </a:prstGeom>
+          <a:solidFill>
+            <a:srgbClr val="181D16"/>
+          </a:solidFill>
+          <a:ln w="19050">
+            <a:solidFill>
+              <a:srgbClr val="181D16"/>
+            </a:solidFill>
+          </a:ln>
+        </p:spPr>
+        <p:style>
+          <a:lnRef idx="1">
+            <a:schemeClr val="accent1"/>
+          </a:lnRef>
+          <a:fillRef idx="3">
+            <a:schemeClr val="accent1"/>
+          </a:fillRef>
+          <a:effectRef idx="0">
+            <a:schemeClr val="accent1"/>
+          </a:effectRef>
+          <a:fontRef idx="minor">
+            <a:schemeClr val="lt1"/>
+          </a:fontRef>
+        </p:style>
+        <p:txBody>
+          <a:bodyPr rtlCol="0" anchor="ctr"/>
+          <a:lstStyle/>
+          <a:p>
+            <a:pPr algn="ctr"/>
+          </a:p>
+        </p:txBody>
+      </p:sp>
+      <p:sp>
+        <p:nvSpPr>
+          <p:cNvPr id="52" name="Oval 51"/>
+          <p:cNvSpPr/>
+          <p:nvPr/>
+        </p:nvSpPr>
+        <p:spPr>
+          <a:xfrm>
+            <a:off x="6806264" y="4033080"/>
+            <a:ext cx="82296" cy="82296"/>
+          </a:xfrm>
+          <a:prstGeom prst="ellipse">
+            <a:avLst/>
+          </a:prstGeom>
+          <a:solidFill>
+            <a:srgbClr val="181D16"/>
+          </a:solidFill>
+          <a:ln w="19050">
+            <a:solidFill>
+              <a:srgbClr val="181D16"/>
+            </a:solidFill>
+          </a:ln>
+        </p:spPr>
+        <p:style>
+          <a:lnRef idx="1">
+            <a:schemeClr val="accent1"/>
+          </a:lnRef>
+          <a:fillRef idx="3">
+            <a:schemeClr val="accent1"/>
+          </a:fillRef>
+          <a:effectRef idx="0">
+            <a:schemeClr val="accent1"/>
+          </a:effectRef>
+          <a:fontRef idx="minor">
+            <a:schemeClr val="lt1"/>
+          </a:fontRef>
+        </p:style>
+        <p:txBody>
+          <a:bodyPr rtlCol="0" anchor="ctr"/>
+          <a:lstStyle/>
+          <a:p>
+            <a:pPr algn="ctr"/>
+          </a:p>
+        </p:txBody>
+      </p:sp>
+      <p:sp>
+        <p:nvSpPr>
+          <p:cNvPr id="53" name="Oval 52"/>
+          <p:cNvSpPr/>
+          <p:nvPr/>
+        </p:nvSpPr>
+        <p:spPr>
+          <a:xfrm>
+            <a:off x="6967487" y="3123177"/>
+            <a:ext cx="82296" cy="82296"/>
+          </a:xfrm>
+          <a:prstGeom prst="ellipse">
+            <a:avLst/>
+          </a:prstGeom>
+          <a:solidFill>
+            <a:srgbClr val="181D16"/>
+          </a:solidFill>
+          <a:ln w="19050">
+            <a:solidFill>
+              <a:srgbClr val="181D16"/>
+            </a:solidFill>
+          </a:ln>
+        </p:spPr>
+        <p:style>
+          <a:lnRef idx="1">
+            <a:schemeClr val="accent1"/>
+          </a:lnRef>
+          <a:fillRef idx="3">
+            <a:schemeClr val="accent1"/>
+          </a:fillRef>
+          <a:effectRef idx="0">
+            <a:schemeClr val="accent1"/>
+          </a:effectRef>
+          <a:fontRef idx="minor">
+            <a:schemeClr val="lt1"/>
+          </a:fontRef>
+        </p:style>
+        <p:txBody>
+          <a:bodyPr rtlCol="0" anchor="ctr"/>
+          <a:lstStyle/>
+          <a:p>
+            <a:pPr algn="ctr"/>
+          </a:p>
+        </p:txBody>
+      </p:sp>
+      <p:sp>
+        <p:nvSpPr>
+          <p:cNvPr id="54" name="Oval 53"/>
+          <p:cNvSpPr/>
+          <p:nvPr/>
+        </p:nvSpPr>
+        <p:spPr>
+          <a:xfrm>
+            <a:off x="7128710" y="3224682"/>
+            <a:ext cx="82296" cy="82296"/>
+          </a:xfrm>
+          <a:prstGeom prst="ellipse">
+            <a:avLst/>
+          </a:prstGeom>
+          <a:solidFill>
+            <a:srgbClr val="181D16"/>
+          </a:solidFill>
+          <a:ln w="19050">
+            <a:solidFill>
+              <a:srgbClr val="181D16"/>
+            </a:solidFill>
+          </a:ln>
+        </p:spPr>
+        <p:style>
+          <a:lnRef idx="1">
+            <a:schemeClr val="accent1"/>
+          </a:lnRef>
+          <a:fillRef idx="3">
+            <a:schemeClr val="accent1"/>
+          </a:fillRef>
+          <a:effectRef idx="0">
+            <a:schemeClr val="accent1"/>
+          </a:effectRef>
+          <a:fontRef idx="minor">
+            <a:schemeClr val="lt1"/>
+          </a:fontRef>
+        </p:style>
+        <p:txBody>
+          <a:bodyPr rtlCol="0" anchor="ctr"/>
+          <a:lstStyle/>
+          <a:p>
+            <a:pPr algn="ctr"/>
+          </a:p>
+        </p:txBody>
+      </p:sp>
+      <p:sp>
+        <p:nvSpPr>
+          <p:cNvPr id="55" name="Oval 54"/>
+          <p:cNvSpPr/>
+          <p:nvPr/>
+        </p:nvSpPr>
+        <p:spPr>
+          <a:xfrm>
+            <a:off x="7289933" y="3030452"/>
+            <a:ext cx="82296" cy="82296"/>
+          </a:xfrm>
+          <a:prstGeom prst="ellipse">
+            <a:avLst/>
+          </a:prstGeom>
+          <a:solidFill>
+            <a:srgbClr val="181D16"/>
+          </a:solidFill>
+          <a:ln w="19050">
+            <a:solidFill>
+              <a:srgbClr val="181D16"/>
+            </a:solidFill>
+          </a:ln>
+        </p:spPr>
+        <p:style>
+          <a:lnRef idx="1">
+            <a:schemeClr val="accent1"/>
+          </a:lnRef>
+          <a:fillRef idx="3">
+            <a:schemeClr val="accent1"/>
+          </a:fillRef>
+          <a:effectRef idx="0">
+            <a:schemeClr val="accent1"/>
+          </a:effectRef>
+          <a:fontRef idx="minor">
+            <a:schemeClr val="lt1"/>
+          </a:fontRef>
+        </p:style>
+        <p:txBody>
+          <a:bodyPr rtlCol="0" anchor="ctr"/>
+          <a:lstStyle/>
+          <a:p>
+            <a:pPr algn="ctr"/>
+          </a:p>
+        </p:txBody>
+      </p:sp>
+      <p:sp>
+        <p:nvSpPr>
+          <p:cNvPr id="56" name="Oval 55"/>
+          <p:cNvSpPr/>
+          <p:nvPr/>
+        </p:nvSpPr>
+        <p:spPr>
+          <a:xfrm>
+            <a:off x="7451156" y="3124620"/>
+            <a:ext cx="82296" cy="82296"/>
+          </a:xfrm>
+          <a:prstGeom prst="ellipse">
+            <a:avLst/>
+          </a:prstGeom>
+          <a:solidFill>
+            <a:srgbClr val="181D16"/>
+          </a:solidFill>
+          <a:ln w="19050">
+            <a:solidFill>
+              <a:srgbClr val="181D16"/>
+            </a:solidFill>
+          </a:ln>
+        </p:spPr>
+        <p:style>
+          <a:lnRef idx="1">
+            <a:schemeClr val="accent1"/>
+          </a:lnRef>
+          <a:fillRef idx="3">
+            <a:schemeClr val="accent1"/>
+          </a:fillRef>
+          <a:effectRef idx="0">
+            <a:schemeClr val="accent1"/>
+          </a:effectRef>
+          <a:fontRef idx="minor">
+            <a:schemeClr val="lt1"/>
+          </a:fontRef>
+        </p:style>
+        <p:txBody>
+          <a:bodyPr rtlCol="0" anchor="ctr"/>
+          <a:lstStyle/>
+          <a:p>
+            <a:pPr algn="ctr"/>
+          </a:p>
+        </p:txBody>
+      </p:sp>
+      <p:sp>
+        <p:nvSpPr>
+          <p:cNvPr id="57" name="Oval 56"/>
+          <p:cNvSpPr/>
+          <p:nvPr/>
+        </p:nvSpPr>
+        <p:spPr>
+          <a:xfrm>
+            <a:off x="7612379" y="2712934"/>
+            <a:ext cx="82296" cy="82296"/>
+          </a:xfrm>
+          <a:prstGeom prst="ellipse">
+            <a:avLst/>
+          </a:prstGeom>
+          <a:solidFill>
+            <a:srgbClr val="181D16"/>
+          </a:solidFill>
+          <a:ln w="19050">
+            <a:solidFill>
+              <a:srgbClr val="181D16"/>
+            </a:solidFill>
+          </a:ln>
+        </p:spPr>
+        <p:style>
+          <a:lnRef idx="1">
+            <a:schemeClr val="accent1"/>
+          </a:lnRef>
+          <a:fillRef idx="3">
+            <a:schemeClr val="accent1"/>
+          </a:fillRef>
+          <a:effectRef idx="0">
+            <a:schemeClr val="accent1"/>
+          </a:effectRef>
+          <a:fontRef idx="minor">
+            <a:schemeClr val="lt1"/>
+          </a:fontRef>
+        </p:style>
+        <p:txBody>
+          <a:bodyPr rtlCol="0" anchor="ctr"/>
+          <a:lstStyle/>
+          <a:p>
+            <a:pPr algn="ctr"/>
+          </a:p>
+        </p:txBody>
+      </p:sp>
+      <p:sp>
+        <p:nvSpPr>
+          <p:cNvPr id="58" name="TextBox 57"/>
+          <p:cNvSpPr txBox="1"/>
+          <p:nvPr/>
+        </p:nvSpPr>
+        <p:spPr>
+          <a:xfrm>
+            <a:off x="4590288" y="5212080"/>
+            <a:ext cx="3200400" cy="731520"/>
+          </a:xfrm>
+          <a:prstGeom prst="rect">
+            <a:avLst/>
+          </a:prstGeom>
+          <a:noFill/>
+        </p:spPr>
+        <p:txBody>
+          <a:bodyPr wrap="square" lIns="0" rIns="0" tIns="0" bIns="0">
+            <a:spAutoFit/>
+          </a:bodyPr>
+          <a:lstStyle/>
+          <a:p>
+            <a:pPr>
+              <a:spcAft>
+                <a:spcPts val="0"/>
+              </a:spcAft>
+              <a:defRPr sz="1900" b="0">
+                <a:solidFill>
+                  <a:srgbClr val="181D16"/>
+                </a:solidFill>
+                <a:latin typeface="Arial"/>
+              </a:defRPr>
+            </a:pPr>
+            <a:r>
+              <a:t>Learns the pattern,</a:t>
+            </a:r>
+          </a:p>
+          <a:p>
+            <a:pPr>
+              <a:spcAft>
+                <a:spcPts val="0"/>
+              </a:spcAft>
+              <a:defRPr sz="1900" b="0">
+                <a:solidFill>
+                  <a:srgbClr val="181D16"/>
+                </a:solidFill>
+                <a:latin typeface="Arial"/>
+              </a:defRPr>
+            </a:pPr>
+            <a:r>
+              <a:t>not every point.</a:t>
+            </a:r>
+          </a:p>
+        </p:txBody>
+      </p:sp>
+      <p:sp>
+        <p:nvSpPr>
+          <p:cNvPr id="59" name="TextBox 58"/>
+          <p:cNvSpPr txBox="1"/>
+          <p:nvPr/>
+        </p:nvSpPr>
+        <p:spPr>
+          <a:xfrm>
+            <a:off x="8284464" y="2148840"/>
+            <a:ext cx="3108960" cy="365760"/>
+          </a:xfrm>
+          <a:prstGeom prst="rect">
+            <a:avLst/>
+          </a:prstGeom>
+          <a:noFill/>
+        </p:spPr>
+        <p:txBody>
+          <a:bodyPr wrap="square" lIns="0" rIns="0" tIns="0" bIns="0">
+            <a:spAutoFit/>
+          </a:bodyPr>
+          <a:lstStyle/>
+          <a:p>
+            <a:pPr>
+              <a:spcAft>
+                <a:spcPts val="0"/>
+              </a:spcAft>
+              <a:defRPr sz="2100" b="0">
+                <a:solidFill>
+                  <a:srgbClr val="181D16"/>
+                </a:solidFill>
+                <a:latin typeface="Arial"/>
+              </a:defRPr>
+            </a:pPr>
+            <a:r>
+              <a:t>Overfitting</a:t>
+            </a:r>
+          </a:p>
+        </p:txBody>
+      </p:sp>
+      <p:cxnSp>
+        <p:nvCxnSpPr>
+          <p:cNvPr id="60" name="Connector 59"/>
+          <p:cNvCxnSpPr/>
+          <p:nvPr/>
+        </p:nvCxnSpPr>
+        <p:spPr>
+          <a:xfrm>
+            <a:off x="8284464" y="4846320"/>
+            <a:ext cx="3063240" cy="0"/>
+          </a:xfrm>
+          <a:prstGeom prst="line">
+            <a:avLst/>
+          </a:prstGeom>
+          <a:ln w="12700">
+            <a:solidFill>
+              <a:srgbClr val="D4D6D0"/>
+            </a:solidFill>
+          </a:ln>
+        </p:spPr>
+        <p:style>
+          <a:lnRef idx="2">
+            <a:schemeClr val="accent1"/>
+          </a:lnRef>
+          <a:fillRef idx="0">
+            <a:schemeClr val="accent1"/>
+          </a:fillRef>
+          <a:effectRef idx="0">
+            <a:schemeClr val="accent1"/>
+          </a:effectRef>
+          <a:fontRef idx="minor">
+            <a:schemeClr val="tx1"/>
+          </a:fontRef>
+        </p:style>
+      </p:cxnSp>
+      <p:cxnSp>
+        <p:nvCxnSpPr>
+          <p:cNvPr id="61" name="Connector 60"/>
+          <p:cNvCxnSpPr/>
+          <p:nvPr/>
+        </p:nvCxnSpPr>
+        <p:spPr>
+          <a:xfrm>
+            <a:off x="8284464" y="2606040"/>
+            <a:ext cx="0" cy="2240280"/>
+          </a:xfrm>
+          <a:prstGeom prst="line">
+            <a:avLst/>
+          </a:prstGeom>
+          <a:ln w="12700">
+            <a:solidFill>
+              <a:srgbClr val="D4D6D0"/>
+            </a:solidFill>
+          </a:ln>
+        </p:spPr>
+        <p:style>
+          <a:lnRef idx="2">
+            <a:schemeClr val="accent1"/>
+          </a:lnRef>
+          <a:fillRef idx="0">
+            <a:schemeClr val="accent1"/>
+          </a:fillRef>
+          <a:effectRef idx="0">
+            <a:schemeClr val="accent1"/>
+          </a:effectRef>
+          <a:fontRef idx="minor">
+            <a:schemeClr val="tx1"/>
+          </a:fontRef>
+        </p:style>
+      </p:cxnSp>
+      <p:sp>
+        <p:nvSpPr>
+          <p:cNvPr id="62" name="TextBox 61"/>
+          <p:cNvSpPr txBox="1"/>
+          <p:nvPr/>
+        </p:nvSpPr>
+        <p:spPr>
+          <a:xfrm>
+            <a:off x="11256264" y="4937760"/>
+            <a:ext cx="640080" cy="274320"/>
+          </a:xfrm>
+          <a:prstGeom prst="rect">
+            <a:avLst/>
+          </a:prstGeom>
+          <a:noFill/>
+        </p:spPr>
+        <p:txBody>
+          <a:bodyPr wrap="square" lIns="0" rIns="0" tIns="0" bIns="0">
+            <a:spAutoFit/>
+          </a:bodyPr>
+          <a:lstStyle/>
+          <a:p>
+            <a:pPr>
+              <a:spcAft>
+                <a:spcPts val="0"/>
+              </a:spcAft>
+              <a:defRPr sz="1400" b="0">
+                <a:solidFill>
+                  <a:srgbClr val="686C66"/>
+                </a:solidFill>
+                <a:latin typeface="Arial"/>
+              </a:defRPr>
+            </a:pPr>
+            <a:r>
+              <a:t>x</a:t>
+            </a:r>
+          </a:p>
+        </p:txBody>
+      </p:sp>
+      <p:sp>
+        <p:nvSpPr>
+          <p:cNvPr id="63" name="TextBox 62"/>
+          <p:cNvSpPr txBox="1"/>
+          <p:nvPr/>
+        </p:nvSpPr>
+        <p:spPr>
+          <a:xfrm>
+            <a:off x="8010144" y="2423160"/>
+            <a:ext cx="914400" cy="274320"/>
+          </a:xfrm>
+          <a:prstGeom prst="rect">
+            <a:avLst/>
+          </a:prstGeom>
+          <a:noFill/>
+        </p:spPr>
+        <p:txBody>
+          <a:bodyPr wrap="square" lIns="0" rIns="0" tIns="0" bIns="0">
+            <a:spAutoFit/>
+          </a:bodyPr>
+          <a:lstStyle/>
+          <a:p>
+            <a:pPr>
+              <a:spcAft>
+                <a:spcPts val="0"/>
+              </a:spcAft>
+              <a:defRPr sz="1400" b="0">
+                <a:solidFill>
+                  <a:srgbClr val="686C66"/>
+                </a:solidFill>
+                <a:latin typeface="Arial"/>
+              </a:defRPr>
+            </a:pPr>
+            <a:r>
+              <a:t>y</a:t>
+            </a:r>
+          </a:p>
+        </p:txBody>
+      </p:sp>
+      <p:sp>
+        <p:nvSpPr>
+          <p:cNvPr id="64" name="Freeform 63"/>
+          <p:cNvSpPr/>
+          <p:nvPr/>
+        </p:nvSpPr>
+        <p:spPr>
+          <a:xfrm>
+            <a:off x="8284464" y="2755087"/>
+            <a:ext cx="3063240" cy="1782166"/>
+          </a:xfrm>
+          <a:custGeom>
+            <a:avLst/>
+            <a:gdLst/>
+            <a:ahLst/>
+            <a:cxnLst/>
+            <a:rect l="l" t="t" r="r" b="b"/>
+            <a:pathLst>
+              <a:path w="3350" h="1949">
+                <a:moveTo>
+                  <a:pt x="0" y="828"/>
+                </a:moveTo>
+                <a:lnTo>
+                  <a:pt x="8" y="736"/>
+                </a:lnTo>
+                <a:lnTo>
+                  <a:pt x="17" y="660"/>
+                </a:lnTo>
+                <a:lnTo>
+                  <a:pt x="25" y="597"/>
+                </a:lnTo>
+                <a:lnTo>
+                  <a:pt x="34" y="547"/>
+                </a:lnTo>
+                <a:lnTo>
+                  <a:pt x="42" y="508"/>
+                </a:lnTo>
+                <a:lnTo>
+                  <a:pt x="50" y="479"/>
+                </a:lnTo>
+                <a:lnTo>
+                  <a:pt x="59" y="459"/>
+                </a:lnTo>
+                <a:lnTo>
+                  <a:pt x="67" y="447"/>
+                </a:lnTo>
+                <a:lnTo>
+                  <a:pt x="76" y="442"/>
+                </a:lnTo>
+                <a:lnTo>
+                  <a:pt x="84" y="442"/>
+                </a:lnTo>
+                <a:lnTo>
+                  <a:pt x="92" y="448"/>
+                </a:lnTo>
+                <a:lnTo>
+                  <a:pt x="101" y="459"/>
+                </a:lnTo>
+                <a:lnTo>
+                  <a:pt x="109" y="473"/>
+                </a:lnTo>
+                <a:lnTo>
+                  <a:pt x="118" y="490"/>
+                </a:lnTo>
+                <a:lnTo>
+                  <a:pt x="126" y="510"/>
+                </a:lnTo>
+                <a:lnTo>
+                  <a:pt x="134" y="532"/>
+                </a:lnTo>
+                <a:lnTo>
+                  <a:pt x="143" y="555"/>
+                </a:lnTo>
+                <a:lnTo>
+                  <a:pt x="151" y="580"/>
+                </a:lnTo>
+                <a:lnTo>
+                  <a:pt x="160" y="605"/>
+                </a:lnTo>
+                <a:lnTo>
+                  <a:pt x="168" y="631"/>
+                </a:lnTo>
+                <a:lnTo>
+                  <a:pt x="176" y="656"/>
+                </a:lnTo>
+                <a:lnTo>
+                  <a:pt x="185" y="682"/>
+                </a:lnTo>
+                <a:lnTo>
+                  <a:pt x="193" y="707"/>
+                </a:lnTo>
+                <a:lnTo>
+                  <a:pt x="202" y="731"/>
+                </a:lnTo>
+                <a:lnTo>
+                  <a:pt x="210" y="755"/>
+                </a:lnTo>
+                <a:lnTo>
+                  <a:pt x="218" y="777"/>
+                </a:lnTo>
+                <a:lnTo>
+                  <a:pt x="227" y="798"/>
+                </a:lnTo>
+                <a:lnTo>
+                  <a:pt x="235" y="819"/>
+                </a:lnTo>
+                <a:lnTo>
+                  <a:pt x="243" y="837"/>
+                </a:lnTo>
+                <a:lnTo>
+                  <a:pt x="252" y="855"/>
+                </a:lnTo>
+                <a:lnTo>
+                  <a:pt x="260" y="871"/>
+                </a:lnTo>
+                <a:lnTo>
+                  <a:pt x="269" y="886"/>
+                </a:lnTo>
+                <a:lnTo>
+                  <a:pt x="277" y="899"/>
+                </a:lnTo>
+                <a:lnTo>
+                  <a:pt x="285" y="911"/>
+                </a:lnTo>
+                <a:lnTo>
+                  <a:pt x="294" y="921"/>
+                </a:lnTo>
+                <a:lnTo>
+                  <a:pt x="302" y="930"/>
+                </a:lnTo>
+                <a:lnTo>
+                  <a:pt x="311" y="938"/>
+                </a:lnTo>
+                <a:lnTo>
+                  <a:pt x="319" y="944"/>
+                </a:lnTo>
+                <a:lnTo>
+                  <a:pt x="327" y="949"/>
+                </a:lnTo>
+                <a:lnTo>
+                  <a:pt x="336" y="953"/>
+                </a:lnTo>
+                <a:lnTo>
+                  <a:pt x="344" y="956"/>
+                </a:lnTo>
+                <a:lnTo>
+                  <a:pt x="353" y="957"/>
+                </a:lnTo>
+                <a:lnTo>
+                  <a:pt x="361" y="958"/>
+                </a:lnTo>
+                <a:lnTo>
+                  <a:pt x="369" y="958"/>
+                </a:lnTo>
+                <a:lnTo>
+                  <a:pt x="378" y="958"/>
+                </a:lnTo>
+                <a:lnTo>
+                  <a:pt x="386" y="956"/>
+                </a:lnTo>
+                <a:lnTo>
+                  <a:pt x="395" y="954"/>
+                </a:lnTo>
+                <a:lnTo>
+                  <a:pt x="403" y="951"/>
+                </a:lnTo>
+                <a:lnTo>
+                  <a:pt x="411" y="949"/>
+                </a:lnTo>
+                <a:lnTo>
+                  <a:pt x="420" y="945"/>
+                </a:lnTo>
+                <a:lnTo>
+                  <a:pt x="428" y="942"/>
+                </a:lnTo>
+                <a:lnTo>
+                  <a:pt x="437" y="938"/>
+                </a:lnTo>
+                <a:lnTo>
+                  <a:pt x="445" y="934"/>
+                </a:lnTo>
+                <a:lnTo>
+                  <a:pt x="453" y="931"/>
+                </a:lnTo>
+                <a:lnTo>
+                  <a:pt x="462" y="927"/>
+                </a:lnTo>
+                <a:lnTo>
+                  <a:pt x="470" y="924"/>
+                </a:lnTo>
+                <a:lnTo>
+                  <a:pt x="479" y="921"/>
+                </a:lnTo>
+                <a:lnTo>
+                  <a:pt x="487" y="918"/>
+                </a:lnTo>
+                <a:lnTo>
+                  <a:pt x="495" y="915"/>
+                </a:lnTo>
+                <a:lnTo>
+                  <a:pt x="504" y="913"/>
+                </a:lnTo>
+                <a:lnTo>
+                  <a:pt x="512" y="912"/>
+                </a:lnTo>
+                <a:lnTo>
+                  <a:pt x="521" y="911"/>
+                </a:lnTo>
+                <a:lnTo>
+                  <a:pt x="529" y="911"/>
+                </a:lnTo>
+                <a:lnTo>
+                  <a:pt x="537" y="911"/>
+                </a:lnTo>
+                <a:lnTo>
+                  <a:pt x="546" y="913"/>
+                </a:lnTo>
+                <a:lnTo>
+                  <a:pt x="554" y="915"/>
+                </a:lnTo>
+                <a:lnTo>
+                  <a:pt x="563" y="917"/>
+                </a:lnTo>
+                <a:lnTo>
+                  <a:pt x="571" y="921"/>
+                </a:lnTo>
+                <a:lnTo>
+                  <a:pt x="579" y="926"/>
+                </a:lnTo>
+                <a:lnTo>
+                  <a:pt x="588" y="931"/>
+                </a:lnTo>
+                <a:lnTo>
+                  <a:pt x="596" y="937"/>
+                </a:lnTo>
+                <a:lnTo>
+                  <a:pt x="605" y="944"/>
+                </a:lnTo>
+                <a:lnTo>
+                  <a:pt x="613" y="952"/>
+                </a:lnTo>
+                <a:lnTo>
+                  <a:pt x="621" y="961"/>
+                </a:lnTo>
+                <a:lnTo>
+                  <a:pt x="630" y="971"/>
+                </a:lnTo>
+                <a:lnTo>
+                  <a:pt x="638" y="982"/>
+                </a:lnTo>
+                <a:lnTo>
+                  <a:pt x="646" y="994"/>
+                </a:lnTo>
+                <a:lnTo>
+                  <a:pt x="655" y="1006"/>
+                </a:lnTo>
+                <a:lnTo>
+                  <a:pt x="663" y="1020"/>
+                </a:lnTo>
+                <a:lnTo>
+                  <a:pt x="672" y="1034"/>
+                </a:lnTo>
+                <a:lnTo>
+                  <a:pt x="680" y="1049"/>
+                </a:lnTo>
+                <a:lnTo>
+                  <a:pt x="688" y="1065"/>
+                </a:lnTo>
+                <a:lnTo>
+                  <a:pt x="697" y="1082"/>
+                </a:lnTo>
+                <a:lnTo>
+                  <a:pt x="705" y="1099"/>
+                </a:lnTo>
+                <a:lnTo>
+                  <a:pt x="714" y="1117"/>
+                </a:lnTo>
+                <a:lnTo>
+                  <a:pt x="722" y="1136"/>
+                </a:lnTo>
+                <a:lnTo>
+                  <a:pt x="730" y="1156"/>
+                </a:lnTo>
+                <a:lnTo>
+                  <a:pt x="739" y="1176"/>
+                </a:lnTo>
+                <a:lnTo>
+                  <a:pt x="747" y="1196"/>
+                </a:lnTo>
+                <a:lnTo>
+                  <a:pt x="756" y="1217"/>
+                </a:lnTo>
+                <a:lnTo>
+                  <a:pt x="764" y="1239"/>
+                </a:lnTo>
+                <a:lnTo>
+                  <a:pt x="772" y="1261"/>
+                </a:lnTo>
+                <a:lnTo>
+                  <a:pt x="781" y="1284"/>
+                </a:lnTo>
+                <a:lnTo>
+                  <a:pt x="789" y="1306"/>
+                </a:lnTo>
+                <a:lnTo>
+                  <a:pt x="798" y="1329"/>
+                </a:lnTo>
+                <a:lnTo>
+                  <a:pt x="806" y="1352"/>
+                </a:lnTo>
+                <a:lnTo>
+                  <a:pt x="814" y="1376"/>
+                </a:lnTo>
+                <a:lnTo>
+                  <a:pt x="823" y="1399"/>
+                </a:lnTo>
+                <a:lnTo>
+                  <a:pt x="831" y="1423"/>
+                </a:lnTo>
+                <a:lnTo>
+                  <a:pt x="840" y="1446"/>
+                </a:lnTo>
+                <a:lnTo>
+                  <a:pt x="848" y="1470"/>
+                </a:lnTo>
+                <a:lnTo>
+                  <a:pt x="856" y="1493"/>
+                </a:lnTo>
+                <a:lnTo>
+                  <a:pt x="865" y="1517"/>
+                </a:lnTo>
+                <a:lnTo>
+                  <a:pt x="873" y="1540"/>
+                </a:lnTo>
+                <a:lnTo>
+                  <a:pt x="882" y="1563"/>
+                </a:lnTo>
+                <a:lnTo>
+                  <a:pt x="890" y="1585"/>
+                </a:lnTo>
+                <a:lnTo>
+                  <a:pt x="898" y="1607"/>
+                </a:lnTo>
+                <a:lnTo>
+                  <a:pt x="907" y="1629"/>
+                </a:lnTo>
+                <a:lnTo>
+                  <a:pt x="915" y="1651"/>
+                </a:lnTo>
+                <a:lnTo>
+                  <a:pt x="924" y="1672"/>
+                </a:lnTo>
+                <a:lnTo>
+                  <a:pt x="932" y="1692"/>
+                </a:lnTo>
+                <a:lnTo>
+                  <a:pt x="940" y="1712"/>
+                </a:lnTo>
+                <a:lnTo>
+                  <a:pt x="949" y="1731"/>
+                </a:lnTo>
+                <a:lnTo>
+                  <a:pt x="957" y="1750"/>
+                </a:lnTo>
+                <a:lnTo>
+                  <a:pt x="966" y="1768"/>
+                </a:lnTo>
+                <a:lnTo>
+                  <a:pt x="974" y="1785"/>
+                </a:lnTo>
+                <a:lnTo>
+                  <a:pt x="982" y="1801"/>
+                </a:lnTo>
+                <a:lnTo>
+                  <a:pt x="991" y="1817"/>
+                </a:lnTo>
+                <a:lnTo>
+                  <a:pt x="999" y="1832"/>
+                </a:lnTo>
+                <a:lnTo>
+                  <a:pt x="1008" y="1846"/>
+                </a:lnTo>
+                <a:lnTo>
+                  <a:pt x="1016" y="1860"/>
+                </a:lnTo>
+                <a:lnTo>
+                  <a:pt x="1024" y="1872"/>
+                </a:lnTo>
+                <a:lnTo>
+                  <a:pt x="1033" y="1883"/>
+                </a:lnTo>
+                <a:lnTo>
+                  <a:pt x="1041" y="1894"/>
+                </a:lnTo>
+                <a:lnTo>
+                  <a:pt x="1049" y="1904"/>
+                </a:lnTo>
+                <a:lnTo>
+                  <a:pt x="1058" y="1913"/>
+                </a:lnTo>
+                <a:lnTo>
+                  <a:pt x="1066" y="1920"/>
+                </a:lnTo>
+                <a:lnTo>
+                  <a:pt x="1075" y="1927"/>
+                </a:lnTo>
+                <a:lnTo>
+                  <a:pt x="1083" y="1933"/>
+                </a:lnTo>
+                <a:lnTo>
+                  <a:pt x="1091" y="1938"/>
+                </a:lnTo>
+                <a:lnTo>
+                  <a:pt x="1100" y="1942"/>
+                </a:lnTo>
+                <a:lnTo>
+                  <a:pt x="1108" y="1945"/>
+                </a:lnTo>
+                <a:lnTo>
+                  <a:pt x="1117" y="1947"/>
+                </a:lnTo>
+                <a:lnTo>
+                  <a:pt x="1125" y="1948"/>
+                </a:lnTo>
+                <a:lnTo>
+                  <a:pt x="1133" y="1949"/>
+                </a:lnTo>
+                <a:lnTo>
+                  <a:pt x="1142" y="1948"/>
+                </a:lnTo>
+                <a:lnTo>
+                  <a:pt x="1150" y="1946"/>
+                </a:lnTo>
+                <a:lnTo>
+                  <a:pt x="1159" y="1944"/>
+                </a:lnTo>
+                <a:lnTo>
+                  <a:pt x="1167" y="1940"/>
+                </a:lnTo>
+                <a:lnTo>
+                  <a:pt x="1175" y="1936"/>
+                </a:lnTo>
+                <a:lnTo>
+                  <a:pt x="1184" y="1931"/>
+                </a:lnTo>
+                <a:lnTo>
+                  <a:pt x="1192" y="1925"/>
+                </a:lnTo>
+                <a:lnTo>
+                  <a:pt x="1201" y="1918"/>
+                </a:lnTo>
+                <a:lnTo>
+                  <a:pt x="1209" y="1911"/>
+                </a:lnTo>
+                <a:lnTo>
+                  <a:pt x="1217" y="1902"/>
+                </a:lnTo>
+                <a:lnTo>
+                  <a:pt x="1226" y="1893"/>
+                </a:lnTo>
+                <a:lnTo>
+                  <a:pt x="1234" y="1884"/>
+                </a:lnTo>
+                <a:lnTo>
+                  <a:pt x="1243" y="1873"/>
+                </a:lnTo>
+                <a:lnTo>
+                  <a:pt x="1251" y="1862"/>
+                </a:lnTo>
+                <a:lnTo>
+                  <a:pt x="1259" y="1851"/>
+                </a:lnTo>
+                <a:lnTo>
+                  <a:pt x="1268" y="1839"/>
+                </a:lnTo>
+                <a:lnTo>
+                  <a:pt x="1276" y="1826"/>
+                </a:lnTo>
+                <a:lnTo>
+                  <a:pt x="1285" y="1813"/>
+                </a:lnTo>
+                <a:lnTo>
+                  <a:pt x="1293" y="1799"/>
+                </a:lnTo>
+                <a:lnTo>
+                  <a:pt x="1301" y="1785"/>
+                </a:lnTo>
+                <a:lnTo>
+                  <a:pt x="1310" y="1771"/>
+                </a:lnTo>
+                <a:lnTo>
+                  <a:pt x="1318" y="1756"/>
+                </a:lnTo>
+                <a:lnTo>
+                  <a:pt x="1327" y="1741"/>
+                </a:lnTo>
+                <a:lnTo>
+                  <a:pt x="1335" y="1726"/>
+                </a:lnTo>
+                <a:lnTo>
+                  <a:pt x="1343" y="1710"/>
+                </a:lnTo>
+                <a:lnTo>
+                  <a:pt x="1352" y="1694"/>
+                </a:lnTo>
+                <a:lnTo>
+                  <a:pt x="1360" y="1679"/>
+                </a:lnTo>
+                <a:lnTo>
+                  <a:pt x="1369" y="1663"/>
+                </a:lnTo>
+                <a:lnTo>
+                  <a:pt x="1377" y="1647"/>
+                </a:lnTo>
+                <a:lnTo>
+                  <a:pt x="1385" y="1630"/>
+                </a:lnTo>
+                <a:lnTo>
+                  <a:pt x="1394" y="1614"/>
+                </a:lnTo>
+                <a:lnTo>
+                  <a:pt x="1402" y="1598"/>
+                </a:lnTo>
+                <a:lnTo>
+                  <a:pt x="1411" y="1583"/>
+                </a:lnTo>
+                <a:lnTo>
+                  <a:pt x="1419" y="1567"/>
+                </a:lnTo>
+                <a:lnTo>
+                  <a:pt x="1427" y="1551"/>
+                </a:lnTo>
+                <a:lnTo>
+                  <a:pt x="1436" y="1536"/>
+                </a:lnTo>
+                <a:lnTo>
+                  <a:pt x="1444" y="1521"/>
+                </a:lnTo>
+                <a:lnTo>
+                  <a:pt x="1453" y="1506"/>
+                </a:lnTo>
+                <a:lnTo>
+                  <a:pt x="1461" y="1491"/>
+                </a:lnTo>
+                <a:lnTo>
+                  <a:pt x="1469" y="1477"/>
+                </a:lnTo>
+                <a:lnTo>
+                  <a:pt x="1478" y="1463"/>
+                </a:lnTo>
+                <a:lnTo>
+                  <a:pt x="1486" y="1450"/>
+                </a:lnTo>
+                <a:lnTo>
+                  <a:pt x="1494" y="1437"/>
+                </a:lnTo>
+                <a:lnTo>
+                  <a:pt x="1503" y="1424"/>
+                </a:lnTo>
+                <a:lnTo>
+                  <a:pt x="1511" y="1412"/>
+                </a:lnTo>
+                <a:lnTo>
+                  <a:pt x="1520" y="1400"/>
+                </a:lnTo>
+                <a:lnTo>
+                  <a:pt x="1528" y="1389"/>
+                </a:lnTo>
+                <a:lnTo>
+                  <a:pt x="1536" y="1379"/>
+                </a:lnTo>
+                <a:lnTo>
+                  <a:pt x="1545" y="1369"/>
+                </a:lnTo>
+                <a:lnTo>
+                  <a:pt x="1553" y="1359"/>
+                </a:lnTo>
+                <a:lnTo>
+                  <a:pt x="1562" y="1351"/>
+                </a:lnTo>
+                <a:lnTo>
+                  <a:pt x="1570" y="1343"/>
+                </a:lnTo>
+                <a:lnTo>
+                  <a:pt x="1578" y="1335"/>
+                </a:lnTo>
+                <a:lnTo>
+                  <a:pt x="1587" y="1328"/>
+                </a:lnTo>
+                <a:lnTo>
+                  <a:pt x="1595" y="1322"/>
+                </a:lnTo>
+                <a:lnTo>
+                  <a:pt x="1604" y="1317"/>
+                </a:lnTo>
+                <a:lnTo>
+                  <a:pt x="1612" y="1312"/>
+                </a:lnTo>
+                <a:lnTo>
+                  <a:pt x="1620" y="1308"/>
+                </a:lnTo>
+                <a:lnTo>
+                  <a:pt x="1629" y="1304"/>
+                </a:lnTo>
+                <a:lnTo>
+                  <a:pt x="1637" y="1302"/>
+                </a:lnTo>
+                <a:lnTo>
+                  <a:pt x="1646" y="1300"/>
+                </a:lnTo>
+                <a:lnTo>
+                  <a:pt x="1654" y="1298"/>
+                </a:lnTo>
+                <a:lnTo>
+                  <a:pt x="1662" y="1298"/>
+                </a:lnTo>
+                <a:lnTo>
+                  <a:pt x="1671" y="1298"/>
+                </a:lnTo>
+                <a:lnTo>
+                  <a:pt x="1679" y="1298"/>
+                </a:lnTo>
+                <a:lnTo>
+                  <a:pt x="1688" y="1300"/>
+                </a:lnTo>
+                <a:lnTo>
+                  <a:pt x="1696" y="1302"/>
+                </a:lnTo>
+                <a:lnTo>
+                  <a:pt x="1704" y="1305"/>
+                </a:lnTo>
+                <a:lnTo>
+                  <a:pt x="1713" y="1308"/>
+                </a:lnTo>
+                <a:lnTo>
+                  <a:pt x="1721" y="1312"/>
+                </a:lnTo>
+                <a:lnTo>
+                  <a:pt x="1730" y="1316"/>
+                </a:lnTo>
+                <a:lnTo>
+                  <a:pt x="1738" y="1321"/>
+                </a:lnTo>
+                <a:lnTo>
+                  <a:pt x="1746" y="1327"/>
+                </a:lnTo>
+                <a:lnTo>
+                  <a:pt x="1755" y="1333"/>
+                </a:lnTo>
+                <a:lnTo>
+                  <a:pt x="1763" y="1340"/>
+                </a:lnTo>
+                <a:lnTo>
+                  <a:pt x="1772" y="1347"/>
+                </a:lnTo>
+                <a:lnTo>
+                  <a:pt x="1780" y="1355"/>
+                </a:lnTo>
+                <a:lnTo>
+                  <a:pt x="1788" y="1363"/>
+                </a:lnTo>
+                <a:lnTo>
+                  <a:pt x="1797" y="1372"/>
+                </a:lnTo>
+                <a:lnTo>
+                  <a:pt x="1805" y="1381"/>
+                </a:lnTo>
+                <a:lnTo>
+                  <a:pt x="1814" y="1390"/>
+                </a:lnTo>
+                <a:lnTo>
+                  <a:pt x="1822" y="1400"/>
+                </a:lnTo>
+                <a:lnTo>
+                  <a:pt x="1830" y="1410"/>
+                </a:lnTo>
+                <a:lnTo>
+                  <a:pt x="1839" y="1420"/>
+                </a:lnTo>
+                <a:lnTo>
+                  <a:pt x="1847" y="1431"/>
+                </a:lnTo>
+                <a:lnTo>
+                  <a:pt x="1856" y="1442"/>
+                </a:lnTo>
+                <a:lnTo>
+                  <a:pt x="1864" y="1453"/>
+                </a:lnTo>
+                <a:lnTo>
+                  <a:pt x="1872" y="1464"/>
+                </a:lnTo>
+                <a:lnTo>
+                  <a:pt x="1881" y="1475"/>
+                </a:lnTo>
+                <a:lnTo>
+                  <a:pt x="1889" y="1486"/>
+                </a:lnTo>
+                <a:lnTo>
+                  <a:pt x="1897" y="1498"/>
+                </a:lnTo>
+                <a:lnTo>
+                  <a:pt x="1906" y="1509"/>
+                </a:lnTo>
+                <a:lnTo>
+                  <a:pt x="1914" y="1520"/>
+                </a:lnTo>
+                <a:lnTo>
+                  <a:pt x="1923" y="1532"/>
+                </a:lnTo>
+                <a:lnTo>
+                  <a:pt x="1931" y="1543"/>
+                </a:lnTo>
+                <a:lnTo>
+                  <a:pt x="1939" y="1554"/>
+                </a:lnTo>
+                <a:lnTo>
+                  <a:pt x="1948" y="1565"/>
+                </a:lnTo>
+                <a:lnTo>
+                  <a:pt x="1956" y="1575"/>
+                </a:lnTo>
+                <a:lnTo>
+                  <a:pt x="1965" y="1586"/>
+                </a:lnTo>
+                <a:lnTo>
+                  <a:pt x="1973" y="1596"/>
+                </a:lnTo>
+                <a:lnTo>
+                  <a:pt x="1981" y="1606"/>
+                </a:lnTo>
+                <a:lnTo>
+                  <a:pt x="1990" y="1615"/>
+                </a:lnTo>
+                <a:lnTo>
+                  <a:pt x="1998" y="1624"/>
+                </a:lnTo>
+                <a:lnTo>
+                  <a:pt x="2007" y="1633"/>
+                </a:lnTo>
+                <a:lnTo>
+                  <a:pt x="2015" y="1642"/>
+                </a:lnTo>
+                <a:lnTo>
+                  <a:pt x="2023" y="1649"/>
+                </a:lnTo>
+                <a:lnTo>
+                  <a:pt x="2032" y="1657"/>
+                </a:lnTo>
+                <a:lnTo>
+                  <a:pt x="2040" y="1664"/>
+                </a:lnTo>
+                <a:lnTo>
+                  <a:pt x="2049" y="1670"/>
+                </a:lnTo>
+                <a:lnTo>
+                  <a:pt x="2057" y="1676"/>
+                </a:lnTo>
+                <a:lnTo>
+                  <a:pt x="2065" y="1681"/>
+                </a:lnTo>
+                <a:lnTo>
+                  <a:pt x="2074" y="1686"/>
+                </a:lnTo>
+                <a:lnTo>
+                  <a:pt x="2082" y="1690"/>
+                </a:lnTo>
+                <a:lnTo>
+                  <a:pt x="2091" y="1693"/>
+                </a:lnTo>
+                <a:lnTo>
+                  <a:pt x="2099" y="1696"/>
+                </a:lnTo>
+                <a:lnTo>
+                  <a:pt x="2107" y="1698"/>
+                </a:lnTo>
+                <a:lnTo>
+                  <a:pt x="2116" y="1699"/>
+                </a:lnTo>
+                <a:lnTo>
+                  <a:pt x="2124" y="1699"/>
+                </a:lnTo>
+                <a:lnTo>
+                  <a:pt x="2133" y="1699"/>
+                </a:lnTo>
+                <a:lnTo>
+                  <a:pt x="2141" y="1698"/>
+                </a:lnTo>
+                <a:lnTo>
+                  <a:pt x="2149" y="1696"/>
+                </a:lnTo>
+                <a:lnTo>
+                  <a:pt x="2158" y="1694"/>
+                </a:lnTo>
+                <a:lnTo>
+                  <a:pt x="2166" y="1691"/>
+                </a:lnTo>
+                <a:lnTo>
+                  <a:pt x="2175" y="1687"/>
+                </a:lnTo>
+                <a:lnTo>
+                  <a:pt x="2183" y="1682"/>
+                </a:lnTo>
+                <a:lnTo>
+                  <a:pt x="2191" y="1676"/>
+                </a:lnTo>
+                <a:lnTo>
+                  <a:pt x="2200" y="1670"/>
+                </a:lnTo>
+                <a:lnTo>
+                  <a:pt x="2208" y="1663"/>
+                </a:lnTo>
+                <a:lnTo>
+                  <a:pt x="2217" y="1655"/>
+                </a:lnTo>
+                <a:lnTo>
+                  <a:pt x="2225" y="1646"/>
+                </a:lnTo>
+                <a:lnTo>
+                  <a:pt x="2233" y="1637"/>
+                </a:lnTo>
+                <a:lnTo>
+                  <a:pt x="2242" y="1627"/>
+                </a:lnTo>
+                <a:lnTo>
+                  <a:pt x="2250" y="1616"/>
+                </a:lnTo>
+                <a:lnTo>
+                  <a:pt x="2259" y="1604"/>
+                </a:lnTo>
+                <a:lnTo>
+                  <a:pt x="2267" y="1592"/>
+                </a:lnTo>
+                <a:lnTo>
+                  <a:pt x="2275" y="1579"/>
+                </a:lnTo>
+                <a:lnTo>
+                  <a:pt x="2284" y="1565"/>
+                </a:lnTo>
+                <a:lnTo>
+                  <a:pt x="2292" y="1550"/>
+                </a:lnTo>
+                <a:lnTo>
+                  <a:pt x="2301" y="1535"/>
+                </a:lnTo>
+                <a:lnTo>
+                  <a:pt x="2309" y="1519"/>
+                </a:lnTo>
+                <a:lnTo>
+                  <a:pt x="2317" y="1503"/>
+                </a:lnTo>
+                <a:lnTo>
+                  <a:pt x="2326" y="1486"/>
+                </a:lnTo>
+                <a:lnTo>
+                  <a:pt x="2334" y="1468"/>
+                </a:lnTo>
+                <a:lnTo>
+                  <a:pt x="2342" y="1450"/>
+                </a:lnTo>
+                <a:lnTo>
+                  <a:pt x="2351" y="1431"/>
+                </a:lnTo>
+                <a:lnTo>
+                  <a:pt x="2359" y="1412"/>
+                </a:lnTo>
+                <a:lnTo>
+                  <a:pt x="2368" y="1393"/>
+                </a:lnTo>
+                <a:lnTo>
+                  <a:pt x="2376" y="1372"/>
+                </a:lnTo>
+                <a:lnTo>
+                  <a:pt x="2384" y="1352"/>
+                </a:lnTo>
+                <a:lnTo>
+                  <a:pt x="2393" y="1331"/>
+                </a:lnTo>
+                <a:lnTo>
+                  <a:pt x="2401" y="1310"/>
+                </a:lnTo>
+                <a:lnTo>
+                  <a:pt x="2410" y="1288"/>
+                </a:lnTo>
+                <a:lnTo>
+                  <a:pt x="2418" y="1266"/>
+                </a:lnTo>
+                <a:lnTo>
+                  <a:pt x="2426" y="1244"/>
+                </a:lnTo>
+                <a:lnTo>
+                  <a:pt x="2435" y="1222"/>
+                </a:lnTo>
+                <a:lnTo>
+                  <a:pt x="2443" y="1200"/>
+                </a:lnTo>
+                <a:lnTo>
+                  <a:pt x="2452" y="1177"/>
+                </a:lnTo>
+                <a:lnTo>
+                  <a:pt x="2460" y="1154"/>
+                </a:lnTo>
+                <a:lnTo>
+                  <a:pt x="2468" y="1131"/>
+                </a:lnTo>
+                <a:lnTo>
+                  <a:pt x="2477" y="1108"/>
+                </a:lnTo>
+                <a:lnTo>
+                  <a:pt x="2485" y="1085"/>
+                </a:lnTo>
+                <a:lnTo>
+                  <a:pt x="2494" y="1062"/>
+                </a:lnTo>
+                <a:lnTo>
+                  <a:pt x="2502" y="1039"/>
+                </a:lnTo>
+                <a:lnTo>
+                  <a:pt x="2510" y="1017"/>
+                </a:lnTo>
+                <a:lnTo>
+                  <a:pt x="2519" y="994"/>
+                </a:lnTo>
+                <a:lnTo>
+                  <a:pt x="2527" y="971"/>
+                </a:lnTo>
+                <a:lnTo>
+                  <a:pt x="2536" y="949"/>
+                </a:lnTo>
+                <a:lnTo>
+                  <a:pt x="2544" y="926"/>
+                </a:lnTo>
+                <a:lnTo>
+                  <a:pt x="2552" y="904"/>
+                </a:lnTo>
+                <a:lnTo>
+                  <a:pt x="2561" y="883"/>
+                </a:lnTo>
+                <a:lnTo>
+                  <a:pt x="2569" y="861"/>
+                </a:lnTo>
+                <a:lnTo>
+                  <a:pt x="2578" y="840"/>
+                </a:lnTo>
+                <a:lnTo>
+                  <a:pt x="2586" y="819"/>
+                </a:lnTo>
+                <a:lnTo>
+                  <a:pt x="2594" y="799"/>
+                </a:lnTo>
+                <a:lnTo>
+                  <a:pt x="2603" y="778"/>
+                </a:lnTo>
+                <a:lnTo>
+                  <a:pt x="2611" y="759"/>
+                </a:lnTo>
+                <a:lnTo>
+                  <a:pt x="2620" y="739"/>
+                </a:lnTo>
+                <a:lnTo>
+                  <a:pt x="2628" y="721"/>
+                </a:lnTo>
+                <a:lnTo>
+                  <a:pt x="2636" y="702"/>
+                </a:lnTo>
+                <a:lnTo>
+                  <a:pt x="2645" y="684"/>
+                </a:lnTo>
+                <a:lnTo>
+                  <a:pt x="2653" y="667"/>
+                </a:lnTo>
+                <a:lnTo>
+                  <a:pt x="2662" y="650"/>
+                </a:lnTo>
+                <a:lnTo>
+                  <a:pt x="2670" y="633"/>
+                </a:lnTo>
+                <a:lnTo>
+                  <a:pt x="2678" y="618"/>
+                </a:lnTo>
+                <a:lnTo>
+                  <a:pt x="2687" y="602"/>
+                </a:lnTo>
+                <a:lnTo>
+                  <a:pt x="2695" y="587"/>
+                </a:lnTo>
+                <a:lnTo>
+                  <a:pt x="2704" y="573"/>
+                </a:lnTo>
+                <a:lnTo>
+                  <a:pt x="2712" y="560"/>
+                </a:lnTo>
+                <a:lnTo>
+                  <a:pt x="2720" y="546"/>
+                </a:lnTo>
+                <a:lnTo>
+                  <a:pt x="2729" y="534"/>
+                </a:lnTo>
+                <a:lnTo>
+                  <a:pt x="2737" y="522"/>
+                </a:lnTo>
+                <a:lnTo>
+                  <a:pt x="2745" y="510"/>
+                </a:lnTo>
+                <a:lnTo>
+                  <a:pt x="2754" y="500"/>
+                </a:lnTo>
+                <a:lnTo>
+                  <a:pt x="2762" y="489"/>
+                </a:lnTo>
+                <a:lnTo>
+                  <a:pt x="2771" y="479"/>
+                </a:lnTo>
+                <a:lnTo>
+                  <a:pt x="2779" y="470"/>
+                </a:lnTo>
+                <a:lnTo>
+                  <a:pt x="2787" y="462"/>
+                </a:lnTo>
+                <a:lnTo>
+                  <a:pt x="2796" y="453"/>
+                </a:lnTo>
+                <a:lnTo>
+                  <a:pt x="2804" y="446"/>
+                </a:lnTo>
+                <a:lnTo>
+                  <a:pt x="2813" y="439"/>
+                </a:lnTo>
+                <a:lnTo>
+                  <a:pt x="2821" y="432"/>
+                </a:lnTo>
+                <a:lnTo>
+                  <a:pt x="2829" y="426"/>
+                </a:lnTo>
+                <a:lnTo>
+                  <a:pt x="2838" y="421"/>
+                </a:lnTo>
+                <a:lnTo>
+                  <a:pt x="2846" y="416"/>
+                </a:lnTo>
+                <a:lnTo>
+                  <a:pt x="2855" y="411"/>
+                </a:lnTo>
+                <a:lnTo>
+                  <a:pt x="2863" y="407"/>
+                </a:lnTo>
+                <a:lnTo>
+                  <a:pt x="2871" y="403"/>
+                </a:lnTo>
+                <a:lnTo>
+                  <a:pt x="2880" y="400"/>
+                </a:lnTo>
+                <a:lnTo>
+                  <a:pt x="2888" y="397"/>
+                </a:lnTo>
+                <a:lnTo>
+                  <a:pt x="2897" y="394"/>
+                </a:lnTo>
+                <a:lnTo>
+                  <a:pt x="2905" y="392"/>
+                </a:lnTo>
+                <a:lnTo>
+                  <a:pt x="2913" y="390"/>
+                </a:lnTo>
+                <a:lnTo>
+                  <a:pt x="2922" y="389"/>
+                </a:lnTo>
+                <a:lnTo>
+                  <a:pt x="2930" y="388"/>
+                </a:lnTo>
+                <a:lnTo>
+                  <a:pt x="2939" y="387"/>
+                </a:lnTo>
+                <a:lnTo>
+                  <a:pt x="2947" y="387"/>
+                </a:lnTo>
+                <a:lnTo>
+                  <a:pt x="2955" y="387"/>
+                </a:lnTo>
+                <a:lnTo>
+                  <a:pt x="2964" y="387"/>
+                </a:lnTo>
+                <a:lnTo>
+                  <a:pt x="2972" y="387"/>
+                </a:lnTo>
+                <a:lnTo>
+                  <a:pt x="2981" y="388"/>
+                </a:lnTo>
+                <a:lnTo>
+                  <a:pt x="2989" y="389"/>
+                </a:lnTo>
+                <a:lnTo>
+                  <a:pt x="2997" y="390"/>
+                </a:lnTo>
+                <a:lnTo>
+                  <a:pt x="3006" y="392"/>
+                </a:lnTo>
+                <a:lnTo>
+                  <a:pt x="3014" y="393"/>
+                </a:lnTo>
+                <a:lnTo>
+                  <a:pt x="3023" y="395"/>
+                </a:lnTo>
+                <a:lnTo>
+                  <a:pt x="3031" y="397"/>
+                </a:lnTo>
+                <a:lnTo>
+                  <a:pt x="3039" y="399"/>
+                </a:lnTo>
+                <a:lnTo>
+                  <a:pt x="3048" y="402"/>
+                </a:lnTo>
+                <a:lnTo>
+                  <a:pt x="3056" y="404"/>
+                </a:lnTo>
+                <a:lnTo>
+                  <a:pt x="3065" y="407"/>
+                </a:lnTo>
+                <a:lnTo>
+                  <a:pt x="3073" y="410"/>
+                </a:lnTo>
+                <a:lnTo>
+                  <a:pt x="3081" y="412"/>
+                </a:lnTo>
+                <a:lnTo>
+                  <a:pt x="3090" y="415"/>
+                </a:lnTo>
+                <a:lnTo>
+                  <a:pt x="3098" y="418"/>
+                </a:lnTo>
+                <a:lnTo>
+                  <a:pt x="3107" y="421"/>
+                </a:lnTo>
+                <a:lnTo>
+                  <a:pt x="3115" y="424"/>
+                </a:lnTo>
+                <a:lnTo>
+                  <a:pt x="3123" y="427"/>
+                </a:lnTo>
+                <a:lnTo>
+                  <a:pt x="3132" y="430"/>
+                </a:lnTo>
+                <a:lnTo>
+                  <a:pt x="3140" y="432"/>
+                </a:lnTo>
+                <a:lnTo>
+                  <a:pt x="3148" y="435"/>
+                </a:lnTo>
+                <a:lnTo>
+                  <a:pt x="3157" y="437"/>
+                </a:lnTo>
+                <a:lnTo>
+                  <a:pt x="3165" y="439"/>
+                </a:lnTo>
+                <a:lnTo>
+                  <a:pt x="3174" y="440"/>
+                </a:lnTo>
+                <a:lnTo>
+                  <a:pt x="3182" y="441"/>
+                </a:lnTo>
+                <a:lnTo>
+                  <a:pt x="3190" y="441"/>
+                </a:lnTo>
+                <a:lnTo>
+                  <a:pt x="3199" y="440"/>
+                </a:lnTo>
+                <a:lnTo>
+                  <a:pt x="3207" y="439"/>
+                </a:lnTo>
+                <a:lnTo>
+                  <a:pt x="3216" y="436"/>
+                </a:lnTo>
+                <a:lnTo>
+                  <a:pt x="3224" y="432"/>
+                </a:lnTo>
+                <a:lnTo>
+                  <a:pt x="3232" y="426"/>
+                </a:lnTo>
+                <a:lnTo>
+                  <a:pt x="3241" y="419"/>
+                </a:lnTo>
+                <a:lnTo>
+                  <a:pt x="3249" y="410"/>
+                </a:lnTo>
+                <a:lnTo>
+                  <a:pt x="3258" y="398"/>
+                </a:lnTo>
+                <a:lnTo>
+                  <a:pt x="3266" y="384"/>
+                </a:lnTo>
+                <a:lnTo>
+                  <a:pt x="3274" y="367"/>
+                </a:lnTo>
+                <a:lnTo>
+                  <a:pt x="3283" y="347"/>
+                </a:lnTo>
+                <a:lnTo>
+                  <a:pt x="3291" y="323"/>
+                </a:lnTo>
+                <a:lnTo>
+                  <a:pt x="3300" y="294"/>
+                </a:lnTo>
+                <a:lnTo>
+                  <a:pt x="3308" y="261"/>
+                </a:lnTo>
+                <a:lnTo>
+                  <a:pt x="3316" y="222"/>
+                </a:lnTo>
+                <a:lnTo>
+                  <a:pt x="3325" y="177"/>
+                </a:lnTo>
+                <a:lnTo>
+                  <a:pt x="3333" y="126"/>
+                </a:lnTo>
+                <a:lnTo>
+                  <a:pt x="3342" y="67"/>
+                </a:lnTo>
+                <a:lnTo>
+                  <a:pt x="3350" y="0"/>
+                </a:lnTo>
+              </a:path>
+            </a:pathLst>
+          </a:custGeom>
+          <a:noFill/>
+          <a:ln w="38100">
+            <a:solidFill>
+              <a:srgbClr val="C65326"/>
+            </a:solidFill>
+          </a:ln>
+        </p:spPr>
+        <p:style>
+          <a:lnRef idx="1">
+            <a:schemeClr val="accent1"/>
+          </a:lnRef>
+          <a:fillRef idx="3">
+            <a:schemeClr val="accent1"/>
+          </a:fillRef>
+          <a:effectRef idx="0">
+            <a:schemeClr val="accent1"/>
+          </a:effectRef>
+          <a:fontRef idx="minor">
+            <a:schemeClr val="lt1"/>
+          </a:fontRef>
+        </p:style>
+        <p:txBody>
+          <a:bodyPr rtlCol="0" anchor="ctr"/>
+          <a:lstStyle/>
+          <a:p>
+            <a:pPr algn="ctr"/>
+          </a:p>
+        </p:txBody>
+      </p:sp>
+      <p:sp>
+        <p:nvSpPr>
+          <p:cNvPr id="65" name="Oval 64"/>
+          <p:cNvSpPr/>
+          <p:nvPr/>
+        </p:nvSpPr>
+        <p:spPr>
+          <a:xfrm>
+            <a:off x="8243316" y="3470204"/>
+            <a:ext cx="82296" cy="82296"/>
+          </a:xfrm>
+          <a:prstGeom prst="ellipse">
+            <a:avLst/>
+          </a:prstGeom>
+          <a:solidFill>
+            <a:srgbClr val="181D16"/>
+          </a:solidFill>
+          <a:ln w="19050">
+            <a:solidFill>
+              <a:srgbClr val="181D16"/>
+            </a:solidFill>
+          </a:ln>
+        </p:spPr>
+        <p:style>
+          <a:lnRef idx="1">
+            <a:schemeClr val="accent1"/>
+          </a:lnRef>
+          <a:fillRef idx="3">
+            <a:schemeClr val="accent1"/>
+          </a:fillRef>
+          <a:effectRef idx="0">
+            <a:schemeClr val="accent1"/>
+          </a:effectRef>
+          <a:fontRef idx="minor">
+            <a:schemeClr val="lt1"/>
+          </a:fontRef>
+        </p:style>
+        <p:txBody>
+          <a:bodyPr rtlCol="0" anchor="ctr"/>
+          <a:lstStyle/>
+          <a:p>
+            <a:pPr algn="ctr"/>
+          </a:p>
+        </p:txBody>
+      </p:sp>
+      <p:sp>
+        <p:nvSpPr>
+          <p:cNvPr id="66" name="Oval 65"/>
+          <p:cNvSpPr/>
+          <p:nvPr/>
+        </p:nvSpPr>
+        <p:spPr>
+          <a:xfrm>
+            <a:off x="8404539" y="3322769"/>
+            <a:ext cx="82296" cy="82296"/>
+          </a:xfrm>
+          <a:prstGeom prst="ellipse">
+            <a:avLst/>
+          </a:prstGeom>
+          <a:solidFill>
+            <a:srgbClr val="181D16"/>
+          </a:solidFill>
+          <a:ln w="19050">
+            <a:solidFill>
+              <a:srgbClr val="181D16"/>
+            </a:solidFill>
+          </a:ln>
+        </p:spPr>
+        <p:style>
+          <a:lnRef idx="1">
+            <a:schemeClr val="accent1"/>
+          </a:lnRef>
+          <a:fillRef idx="3">
+            <a:schemeClr val="accent1"/>
+          </a:fillRef>
+          <a:effectRef idx="0">
+            <a:schemeClr val="accent1"/>
+          </a:effectRef>
+          <a:fontRef idx="minor">
+            <a:schemeClr val="lt1"/>
+          </a:fontRef>
+        </p:style>
+        <p:txBody>
+          <a:bodyPr rtlCol="0" anchor="ctr"/>
+          <a:lstStyle/>
+          <a:p>
+            <a:pPr algn="ctr"/>
+          </a:p>
+        </p:txBody>
+      </p:sp>
+      <p:sp>
+        <p:nvSpPr>
+          <p:cNvPr id="67" name="Oval 66"/>
+          <p:cNvSpPr/>
+          <p:nvPr/>
+        </p:nvSpPr>
+        <p:spPr>
+          <a:xfrm>
+            <a:off x="8565762" y="3546933"/>
+            <a:ext cx="82296" cy="82296"/>
+          </a:xfrm>
+          <a:prstGeom prst="ellipse">
+            <a:avLst/>
+          </a:prstGeom>
+          <a:solidFill>
+            <a:srgbClr val="181D16"/>
+          </a:solidFill>
+          <a:ln w="19050">
+            <a:solidFill>
+              <a:srgbClr val="181D16"/>
+            </a:solidFill>
+          </a:ln>
+        </p:spPr>
+        <p:style>
+          <a:lnRef idx="1">
+            <a:schemeClr val="accent1"/>
+          </a:lnRef>
+          <a:fillRef idx="3">
+            <a:schemeClr val="accent1"/>
+          </a:fillRef>
+          <a:effectRef idx="0">
+            <a:schemeClr val="accent1"/>
+          </a:effectRef>
+          <a:fontRef idx="minor">
+            <a:schemeClr val="lt1"/>
+          </a:fontRef>
+        </p:style>
+        <p:txBody>
+          <a:bodyPr rtlCol="0" anchor="ctr"/>
+          <a:lstStyle/>
+          <a:p>
+            <a:pPr algn="ctr"/>
+          </a:p>
+        </p:txBody>
+      </p:sp>
+      <p:sp>
+        <p:nvSpPr>
+          <p:cNvPr id="68" name="Oval 67"/>
+          <p:cNvSpPr/>
+          <p:nvPr/>
+        </p:nvSpPr>
+        <p:spPr>
+          <a:xfrm>
+            <a:off x="8726985" y="3667336"/>
+            <a:ext cx="82296" cy="82296"/>
+          </a:xfrm>
+          <a:prstGeom prst="ellipse">
+            <a:avLst/>
+          </a:prstGeom>
+          <a:solidFill>
+            <a:srgbClr val="181D16"/>
+          </a:solidFill>
+          <a:ln w="19050">
+            <a:solidFill>
+              <a:srgbClr val="181D16"/>
+            </a:solidFill>
+          </a:ln>
+        </p:spPr>
+        <p:style>
+          <a:lnRef idx="1">
+            <a:schemeClr val="accent1"/>
+          </a:lnRef>
+          <a:fillRef idx="3">
+            <a:schemeClr val="accent1"/>
+          </a:fillRef>
+          <a:effectRef idx="0">
+            <a:schemeClr val="accent1"/>
+          </a:effectRef>
+          <a:fontRef idx="minor">
+            <a:schemeClr val="lt1"/>
+          </a:fontRef>
+        </p:style>
+        <p:txBody>
+          <a:bodyPr rtlCol="0" anchor="ctr"/>
+          <a:lstStyle/>
+          <a:p>
+            <a:pPr algn="ctr"/>
+          </a:p>
+        </p:txBody>
+      </p:sp>
+      <p:sp>
+        <p:nvSpPr>
+          <p:cNvPr id="69" name="Oval 68"/>
+          <p:cNvSpPr/>
+          <p:nvPr/>
+        </p:nvSpPr>
+        <p:spPr>
+          <a:xfrm>
+            <a:off x="8888208" y="3503160"/>
+            <a:ext cx="82296" cy="82296"/>
+          </a:xfrm>
+          <a:prstGeom prst="ellipse">
+            <a:avLst/>
+          </a:prstGeom>
+          <a:solidFill>
+            <a:srgbClr val="181D16"/>
+          </a:solidFill>
+          <a:ln w="19050">
+            <a:solidFill>
+              <a:srgbClr val="181D16"/>
+            </a:solidFill>
+          </a:ln>
+        </p:spPr>
+        <p:style>
+          <a:lnRef idx="1">
+            <a:schemeClr val="accent1"/>
+          </a:lnRef>
+          <a:fillRef idx="3">
+            <a:schemeClr val="accent1"/>
+          </a:fillRef>
+          <a:effectRef idx="0">
+            <a:schemeClr val="accent1"/>
+          </a:effectRef>
+          <a:fontRef idx="minor">
+            <a:schemeClr val="lt1"/>
+          </a:fontRef>
+        </p:style>
+        <p:txBody>
+          <a:bodyPr rtlCol="0" anchor="ctr"/>
+          <a:lstStyle/>
+          <a:p>
+            <a:pPr algn="ctr"/>
+          </a:p>
+        </p:txBody>
+      </p:sp>
+      <p:sp>
+        <p:nvSpPr>
+          <p:cNvPr id="70" name="Oval 69"/>
+          <p:cNvSpPr/>
+          <p:nvPr/>
+        </p:nvSpPr>
+        <p:spPr>
+          <a:xfrm>
+            <a:off x="9049431" y="4393254"/>
+            <a:ext cx="82296" cy="82296"/>
+          </a:xfrm>
+          <a:prstGeom prst="ellipse">
+            <a:avLst/>
+          </a:prstGeom>
+          <a:solidFill>
+            <a:srgbClr val="181D16"/>
+          </a:solidFill>
+          <a:ln w="19050">
+            <a:solidFill>
+              <a:srgbClr val="181D16"/>
+            </a:solidFill>
+          </a:ln>
+        </p:spPr>
+        <p:style>
+          <a:lnRef idx="1">
+            <a:schemeClr val="accent1"/>
+          </a:lnRef>
+          <a:fillRef idx="3">
+            <a:schemeClr val="accent1"/>
+          </a:fillRef>
+          <a:effectRef idx="0">
+            <a:schemeClr val="accent1"/>
+          </a:effectRef>
+          <a:fontRef idx="minor">
+            <a:schemeClr val="lt1"/>
+          </a:fontRef>
+        </p:style>
+        <p:txBody>
+          <a:bodyPr rtlCol="0" anchor="ctr"/>
+          <a:lstStyle/>
+          <a:p>
+            <a:pPr algn="ctr"/>
+          </a:p>
+        </p:txBody>
+      </p:sp>
+      <p:sp>
+        <p:nvSpPr>
+          <p:cNvPr id="71" name="Oval 70"/>
+          <p:cNvSpPr/>
+          <p:nvPr/>
+        </p:nvSpPr>
+        <p:spPr>
+          <a:xfrm>
+            <a:off x="9210654" y="4278848"/>
+            <a:ext cx="82296" cy="82296"/>
+          </a:xfrm>
+          <a:prstGeom prst="ellipse">
+            <a:avLst/>
+          </a:prstGeom>
+          <a:solidFill>
+            <a:srgbClr val="181D16"/>
+          </a:solidFill>
+          <a:ln w="19050">
+            <a:solidFill>
+              <a:srgbClr val="181D16"/>
+            </a:solidFill>
+          </a:ln>
+        </p:spPr>
+        <p:style>
+          <a:lnRef idx="1">
+            <a:schemeClr val="accent1"/>
+          </a:lnRef>
+          <a:fillRef idx="3">
+            <a:schemeClr val="accent1"/>
+          </a:fillRef>
+          <a:effectRef idx="0">
+            <a:schemeClr val="accent1"/>
+          </a:effectRef>
+          <a:fontRef idx="minor">
+            <a:schemeClr val="lt1"/>
+          </a:fontRef>
+        </p:style>
+        <p:txBody>
+          <a:bodyPr rtlCol="0" anchor="ctr"/>
+          <a:lstStyle/>
+          <a:p>
+            <a:pPr algn="ctr"/>
+          </a:p>
+        </p:txBody>
+      </p:sp>
+      <p:sp>
+        <p:nvSpPr>
+          <p:cNvPr id="72" name="Oval 71"/>
+          <p:cNvSpPr/>
+          <p:nvPr/>
+        </p:nvSpPr>
+        <p:spPr>
+          <a:xfrm>
+            <a:off x="9371878" y="4511406"/>
+            <a:ext cx="82296" cy="82296"/>
+          </a:xfrm>
+          <a:prstGeom prst="ellipse">
+            <a:avLst/>
+          </a:prstGeom>
+          <a:solidFill>
+            <a:srgbClr val="181D16"/>
+          </a:solidFill>
+          <a:ln w="19050">
+            <a:solidFill>
+              <a:srgbClr val="181D16"/>
+            </a:solidFill>
+          </a:ln>
+        </p:spPr>
+        <p:style>
+          <a:lnRef idx="1">
+            <a:schemeClr val="accent1"/>
+          </a:lnRef>
+          <a:fillRef idx="3">
+            <a:schemeClr val="accent1"/>
+          </a:fillRef>
+          <a:effectRef idx="0">
+            <a:schemeClr val="accent1"/>
+          </a:effectRef>
+          <a:fontRef idx="minor">
+            <a:schemeClr val="lt1"/>
+          </a:fontRef>
+        </p:style>
+        <p:txBody>
+          <a:bodyPr rtlCol="0" anchor="ctr"/>
+          <a:lstStyle/>
+          <a:p>
+            <a:pPr algn="ctr"/>
+          </a:p>
+        </p:txBody>
+      </p:sp>
+      <p:sp>
+        <p:nvSpPr>
+          <p:cNvPr id="73" name="Oval 72"/>
+          <p:cNvSpPr/>
+          <p:nvPr/>
+        </p:nvSpPr>
+        <p:spPr>
+          <a:xfrm>
+            <a:off x="9533101" y="4172003"/>
+            <a:ext cx="82296" cy="82296"/>
+          </a:xfrm>
+          <a:prstGeom prst="ellipse">
+            <a:avLst/>
+          </a:prstGeom>
+          <a:solidFill>
+            <a:srgbClr val="181D16"/>
+          </a:solidFill>
+          <a:ln w="19050">
+            <a:solidFill>
+              <a:srgbClr val="181D16"/>
+            </a:solidFill>
+          </a:ln>
+        </p:spPr>
+        <p:style>
+          <a:lnRef idx="1">
+            <a:schemeClr val="accent1"/>
+          </a:lnRef>
+          <a:fillRef idx="3">
+            <a:schemeClr val="accent1"/>
+          </a:fillRef>
+          <a:effectRef idx="0">
+            <a:schemeClr val="accent1"/>
+          </a:effectRef>
+          <a:fontRef idx="minor">
+            <a:schemeClr val="lt1"/>
+          </a:fontRef>
+        </p:style>
+        <p:txBody>
+          <a:bodyPr rtlCol="0" anchor="ctr"/>
+          <a:lstStyle/>
+          <a:p>
+            <a:pPr algn="ctr"/>
+          </a:p>
+        </p:txBody>
+      </p:sp>
+      <p:sp>
+        <p:nvSpPr>
+          <p:cNvPr id="74" name="Oval 73"/>
+          <p:cNvSpPr/>
+          <p:nvPr/>
+        </p:nvSpPr>
+        <p:spPr>
+          <a:xfrm>
+            <a:off x="9694324" y="3842535"/>
+            <a:ext cx="82296" cy="82296"/>
+          </a:xfrm>
+          <a:prstGeom prst="ellipse">
+            <a:avLst/>
+          </a:prstGeom>
+          <a:solidFill>
+            <a:srgbClr val="181D16"/>
+          </a:solidFill>
+          <a:ln w="19050">
+            <a:solidFill>
+              <a:srgbClr val="181D16"/>
+            </a:solidFill>
+          </a:ln>
+        </p:spPr>
+        <p:style>
+          <a:lnRef idx="1">
+            <a:schemeClr val="accent1"/>
+          </a:lnRef>
+          <a:fillRef idx="3">
+            <a:schemeClr val="accent1"/>
+          </a:fillRef>
+          <a:effectRef idx="0">
+            <a:schemeClr val="accent1"/>
+          </a:effectRef>
+          <a:fontRef idx="minor">
+            <a:schemeClr val="lt1"/>
+          </a:fontRef>
+        </p:style>
+        <p:txBody>
+          <a:bodyPr rtlCol="0" anchor="ctr"/>
+          <a:lstStyle/>
+          <a:p>
+            <a:pPr algn="ctr"/>
+          </a:p>
+        </p:txBody>
+      </p:sp>
+      <p:sp>
+        <p:nvSpPr>
+          <p:cNvPr id="75" name="Oval 74"/>
+          <p:cNvSpPr/>
+          <p:nvPr/>
+        </p:nvSpPr>
+        <p:spPr>
+          <a:xfrm>
+            <a:off x="9855547" y="4107162"/>
+            <a:ext cx="82296" cy="82296"/>
+          </a:xfrm>
+          <a:prstGeom prst="ellipse">
+            <a:avLst/>
+          </a:prstGeom>
+          <a:solidFill>
+            <a:srgbClr val="181D16"/>
+          </a:solidFill>
+          <a:ln w="19050">
+            <a:solidFill>
+              <a:srgbClr val="181D16"/>
+            </a:solidFill>
+          </a:ln>
+        </p:spPr>
+        <p:style>
+          <a:lnRef idx="1">
+            <a:schemeClr val="accent1"/>
+          </a:lnRef>
+          <a:fillRef idx="3">
+            <a:schemeClr val="accent1"/>
+          </a:fillRef>
+          <a:effectRef idx="0">
+            <a:schemeClr val="accent1"/>
+          </a:effectRef>
+          <a:fontRef idx="minor">
+            <a:schemeClr val="lt1"/>
+          </a:fontRef>
+        </p:style>
+        <p:txBody>
+          <a:bodyPr rtlCol="0" anchor="ctr"/>
+          <a:lstStyle/>
+          <a:p>
+            <a:pPr algn="ctr"/>
+          </a:p>
+        </p:txBody>
+      </p:sp>
+      <p:sp>
+        <p:nvSpPr>
+          <p:cNvPr id="76" name="Oval 75"/>
+          <p:cNvSpPr/>
+          <p:nvPr/>
+        </p:nvSpPr>
+        <p:spPr>
+          <a:xfrm>
+            <a:off x="10016770" y="3906227"/>
+            <a:ext cx="82296" cy="82296"/>
+          </a:xfrm>
+          <a:prstGeom prst="ellipse">
+            <a:avLst/>
+          </a:prstGeom>
+          <a:solidFill>
+            <a:srgbClr val="181D16"/>
+          </a:solidFill>
+          <a:ln w="19050">
+            <a:solidFill>
+              <a:srgbClr val="181D16"/>
+            </a:solidFill>
+          </a:ln>
+        </p:spPr>
+        <p:style>
+          <a:lnRef idx="1">
+            <a:schemeClr val="accent1"/>
+          </a:lnRef>
+          <a:fillRef idx="3">
+            <a:schemeClr val="accent1"/>
+          </a:fillRef>
+          <a:effectRef idx="0">
+            <a:schemeClr val="accent1"/>
+          </a:effectRef>
+          <a:fontRef idx="minor">
+            <a:schemeClr val="lt1"/>
+          </a:fontRef>
+        </p:style>
+        <p:txBody>
+          <a:bodyPr rtlCol="0" anchor="ctr"/>
+          <a:lstStyle/>
+          <a:p>
+            <a:pPr algn="ctr"/>
+          </a:p>
+        </p:txBody>
+      </p:sp>
+      <p:sp>
+        <p:nvSpPr>
+          <p:cNvPr id="77" name="Oval 76"/>
+          <p:cNvSpPr/>
+          <p:nvPr/>
+        </p:nvSpPr>
+        <p:spPr>
+          <a:xfrm>
+            <a:off x="10177993" y="4529846"/>
+            <a:ext cx="82296" cy="82296"/>
+          </a:xfrm>
+          <a:prstGeom prst="ellipse">
+            <a:avLst/>
+          </a:prstGeom>
+          <a:solidFill>
+            <a:srgbClr val="181D16"/>
+          </a:solidFill>
+          <a:ln w="19050">
+            <a:solidFill>
+              <a:srgbClr val="181D16"/>
+            </a:solidFill>
+          </a:ln>
+        </p:spPr>
+        <p:style>
+          <a:lnRef idx="1">
+            <a:schemeClr val="accent1"/>
+          </a:lnRef>
+          <a:fillRef idx="3">
+            <a:schemeClr val="accent1"/>
+          </a:fillRef>
+          <a:effectRef idx="0">
+            <a:schemeClr val="accent1"/>
+          </a:effectRef>
+          <a:fontRef idx="minor">
+            <a:schemeClr val="lt1"/>
+          </a:fontRef>
+        </p:style>
+        <p:txBody>
+          <a:bodyPr rtlCol="0" anchor="ctr"/>
+          <a:lstStyle/>
+          <a:p>
+            <a:pPr algn="ctr"/>
+          </a:p>
+        </p:txBody>
+      </p:sp>
+      <p:sp>
+        <p:nvSpPr>
+          <p:cNvPr id="78" name="Oval 77"/>
+          <p:cNvSpPr/>
+          <p:nvPr/>
+        </p:nvSpPr>
+        <p:spPr>
+          <a:xfrm>
+            <a:off x="10339217" y="3842105"/>
+            <a:ext cx="82296" cy="82296"/>
+          </a:xfrm>
+          <a:prstGeom prst="ellipse">
+            <a:avLst/>
+          </a:prstGeom>
+          <a:solidFill>
+            <a:srgbClr val="181D16"/>
+          </a:solidFill>
+          <a:ln w="19050">
+            <a:solidFill>
+              <a:srgbClr val="181D16"/>
+            </a:solidFill>
+          </a:ln>
+        </p:spPr>
+        <p:style>
+          <a:lnRef idx="1">
+            <a:schemeClr val="accent1"/>
+          </a:lnRef>
+          <a:fillRef idx="3">
+            <a:schemeClr val="accent1"/>
+          </a:fillRef>
+          <a:effectRef idx="0">
+            <a:schemeClr val="accent1"/>
+          </a:effectRef>
+          <a:fontRef idx="minor">
+            <a:schemeClr val="lt1"/>
+          </a:fontRef>
+        </p:style>
+        <p:txBody>
+          <a:bodyPr rtlCol="0" anchor="ctr"/>
+          <a:lstStyle/>
+          <a:p>
+            <a:pPr algn="ctr"/>
+          </a:p>
+        </p:txBody>
+      </p:sp>
+      <p:sp>
+        <p:nvSpPr>
+          <p:cNvPr id="79" name="Oval 78"/>
+          <p:cNvSpPr/>
+          <p:nvPr/>
+        </p:nvSpPr>
+        <p:spPr>
+          <a:xfrm>
+            <a:off x="10500440" y="4033080"/>
+            <a:ext cx="82296" cy="82296"/>
+          </a:xfrm>
+          <a:prstGeom prst="ellipse">
+            <a:avLst/>
+          </a:prstGeom>
+          <a:solidFill>
+            <a:srgbClr val="181D16"/>
+          </a:solidFill>
+          <a:ln w="19050">
+            <a:solidFill>
+              <a:srgbClr val="181D16"/>
+            </a:solidFill>
+          </a:ln>
+        </p:spPr>
+        <p:style>
+          <a:lnRef idx="1">
+            <a:schemeClr val="accent1"/>
+          </a:lnRef>
+          <a:fillRef idx="3">
+            <a:schemeClr val="accent1"/>
+          </a:fillRef>
+          <a:effectRef idx="0">
+            <a:schemeClr val="accent1"/>
+          </a:effectRef>
+          <a:fontRef idx="minor">
+            <a:schemeClr val="lt1"/>
+          </a:fontRef>
+        </p:style>
+        <p:txBody>
+          <a:bodyPr rtlCol="0" anchor="ctr"/>
+          <a:lstStyle/>
+          <a:p>
+            <a:pPr algn="ctr"/>
+          </a:p>
+        </p:txBody>
+      </p:sp>
+      <p:sp>
+        <p:nvSpPr>
+          <p:cNvPr id="80" name="Oval 79"/>
+          <p:cNvSpPr/>
+          <p:nvPr/>
+        </p:nvSpPr>
+        <p:spPr>
+          <a:xfrm>
+            <a:off x="10661663" y="3123177"/>
+            <a:ext cx="82296" cy="82296"/>
+          </a:xfrm>
+          <a:prstGeom prst="ellipse">
+            <a:avLst/>
+          </a:prstGeom>
+          <a:solidFill>
+            <a:srgbClr val="181D16"/>
+          </a:solidFill>
+          <a:ln w="19050">
+            <a:solidFill>
+              <a:srgbClr val="181D16"/>
+            </a:solidFill>
+          </a:ln>
+        </p:spPr>
+        <p:style>
+          <a:lnRef idx="1">
+            <a:schemeClr val="accent1"/>
+          </a:lnRef>
+          <a:fillRef idx="3">
+            <a:schemeClr val="accent1"/>
+          </a:fillRef>
+          <a:effectRef idx="0">
+            <a:schemeClr val="accent1"/>
+          </a:effectRef>
+          <a:fontRef idx="minor">
+            <a:schemeClr val="lt1"/>
+          </a:fontRef>
+        </p:style>
+        <p:txBody>
+          <a:bodyPr rtlCol="0" anchor="ctr"/>
+          <a:lstStyle/>
+          <a:p>
+            <a:pPr algn="ctr"/>
+          </a:p>
+        </p:txBody>
+      </p:sp>
+      <p:sp>
+        <p:nvSpPr>
+          <p:cNvPr id="81" name="Oval 80"/>
+          <p:cNvSpPr/>
+          <p:nvPr/>
+        </p:nvSpPr>
+        <p:spPr>
+          <a:xfrm>
+            <a:off x="10822886" y="3224682"/>
+            <a:ext cx="82296" cy="82296"/>
+          </a:xfrm>
+          <a:prstGeom prst="ellipse">
+            <a:avLst/>
+          </a:prstGeom>
+          <a:solidFill>
+            <a:srgbClr val="181D16"/>
+          </a:solidFill>
+          <a:ln w="19050">
+            <a:solidFill>
+              <a:srgbClr val="181D16"/>
+            </a:solidFill>
+          </a:ln>
+        </p:spPr>
+        <p:style>
+          <a:lnRef idx="1">
+            <a:schemeClr val="accent1"/>
+          </a:lnRef>
+          <a:fillRef idx="3">
+            <a:schemeClr val="accent1"/>
+          </a:fillRef>
+          <a:effectRef idx="0">
+            <a:schemeClr val="accent1"/>
+          </a:effectRef>
+          <a:fontRef idx="minor">
+            <a:schemeClr val="lt1"/>
+          </a:fontRef>
+        </p:style>
+        <p:txBody>
+          <a:bodyPr rtlCol="0" anchor="ctr"/>
+          <a:lstStyle/>
+          <a:p>
+            <a:pPr algn="ctr"/>
+          </a:p>
+        </p:txBody>
+      </p:sp>
+      <p:sp>
+        <p:nvSpPr>
+          <p:cNvPr id="82" name="Oval 81"/>
+          <p:cNvSpPr/>
+          <p:nvPr/>
+        </p:nvSpPr>
+        <p:spPr>
+          <a:xfrm>
+            <a:off x="10984109" y="3030452"/>
+            <a:ext cx="82296" cy="82296"/>
+          </a:xfrm>
+          <a:prstGeom prst="ellipse">
+            <a:avLst/>
+          </a:prstGeom>
+          <a:solidFill>
+            <a:srgbClr val="181D16"/>
+          </a:solidFill>
+          <a:ln w="19050">
+            <a:solidFill>
+              <a:srgbClr val="181D16"/>
+            </a:solidFill>
+          </a:ln>
+        </p:spPr>
+        <p:style>
+          <a:lnRef idx="1">
+            <a:schemeClr val="accent1"/>
+          </a:lnRef>
+          <a:fillRef idx="3">
+            <a:schemeClr val="accent1"/>
+          </a:fillRef>
+          <a:effectRef idx="0">
+            <a:schemeClr val="accent1"/>
+          </a:effectRef>
+          <a:fontRef idx="minor">
+            <a:schemeClr val="lt1"/>
+          </a:fontRef>
+        </p:style>
+        <p:txBody>
+          <a:bodyPr rtlCol="0" anchor="ctr"/>
+          <a:lstStyle/>
+          <a:p>
+            <a:pPr algn="ctr"/>
+          </a:p>
+        </p:txBody>
+      </p:sp>
+      <p:sp>
+        <p:nvSpPr>
+          <p:cNvPr id="83" name="Oval 82"/>
+          <p:cNvSpPr/>
+          <p:nvPr/>
+        </p:nvSpPr>
+        <p:spPr>
+          <a:xfrm>
+            <a:off x="11145332" y="3124620"/>
+            <a:ext cx="82296" cy="82296"/>
+          </a:xfrm>
+          <a:prstGeom prst="ellipse">
+            <a:avLst/>
+          </a:prstGeom>
+          <a:solidFill>
+            <a:srgbClr val="181D16"/>
+          </a:solidFill>
+          <a:ln w="19050">
+            <a:solidFill>
+              <a:srgbClr val="181D16"/>
+            </a:solidFill>
+          </a:ln>
+        </p:spPr>
+        <p:style>
+          <a:lnRef idx="1">
+            <a:schemeClr val="accent1"/>
+          </a:lnRef>
+          <a:fillRef idx="3">
+            <a:schemeClr val="accent1"/>
+          </a:fillRef>
+          <a:effectRef idx="0">
+            <a:schemeClr val="accent1"/>
+          </a:effectRef>
+          <a:fontRef idx="minor">
+            <a:schemeClr val="lt1"/>
+          </a:fontRef>
+        </p:style>
+        <p:txBody>
+          <a:bodyPr rtlCol="0" anchor="ctr"/>
+          <a:lstStyle/>
+          <a:p>
+            <a:pPr algn="ctr"/>
+          </a:p>
+        </p:txBody>
+      </p:sp>
+      <p:sp>
+        <p:nvSpPr>
+          <p:cNvPr id="84" name="Oval 83"/>
+          <p:cNvSpPr/>
+          <p:nvPr/>
+        </p:nvSpPr>
+        <p:spPr>
+          <a:xfrm>
+            <a:off x="11306556" y="2712934"/>
+            <a:ext cx="82296" cy="82296"/>
+          </a:xfrm>
+          <a:prstGeom prst="ellipse">
+            <a:avLst/>
+          </a:prstGeom>
+          <a:solidFill>
+            <a:srgbClr val="181D16"/>
+          </a:solidFill>
+          <a:ln w="19050">
+            <a:solidFill>
+              <a:srgbClr val="181D16"/>
+            </a:solidFill>
+          </a:ln>
+        </p:spPr>
+        <p:style>
+          <a:lnRef idx="1">
+            <a:schemeClr val="accent1"/>
+          </a:lnRef>
+          <a:fillRef idx="3">
+            <a:schemeClr val="accent1"/>
+          </a:fillRef>
+          <a:effectRef idx="0">
+            <a:schemeClr val="accent1"/>
+          </a:effectRef>
+          <a:fontRef idx="minor">
+            <a:schemeClr val="lt1"/>
+          </a:fontRef>
+        </p:style>
+        <p:txBody>
+          <a:bodyPr rtlCol="0" anchor="ctr"/>
+          <a:lstStyle/>
+          <a:p>
+            <a:pPr algn="ctr"/>
+          </a:p>
+        </p:txBody>
+      </p:sp>
+      <p:sp>
+        <p:nvSpPr>
+          <p:cNvPr id="85" name="TextBox 84"/>
+          <p:cNvSpPr txBox="1"/>
+          <p:nvPr/>
+        </p:nvSpPr>
+        <p:spPr>
+          <a:xfrm>
+            <a:off x="8284464" y="5212080"/>
+            <a:ext cx="3200400" cy="731520"/>
+          </a:xfrm>
+          <a:prstGeom prst="rect">
+            <a:avLst/>
+          </a:prstGeom>
+          <a:noFill/>
+        </p:spPr>
+        <p:txBody>
+          <a:bodyPr wrap="square" lIns="0" rIns="0" tIns="0" bIns="0">
+            <a:spAutoFit/>
+          </a:bodyPr>
+          <a:lstStyle/>
+          <a:p>
+            <a:pPr>
+              <a:spcAft>
+                <a:spcPts val="0"/>
+              </a:spcAft>
+              <a:defRPr sz="1900" b="0">
+                <a:solidFill>
+                  <a:srgbClr val="181D16"/>
+                </a:solidFill>
+                <a:latin typeface="Arial"/>
+              </a:defRPr>
+            </a:pPr>
+            <a:r>
+              <a:t>Too flexible.</a:t>
+            </a:r>
+          </a:p>
+          <a:p>
+            <a:pPr>
+              <a:spcAft>
+                <a:spcPts val="0"/>
+              </a:spcAft>
+              <a:defRPr sz="1900" b="0">
+                <a:solidFill>
+                  <a:srgbClr val="181D16"/>
+                </a:solidFill>
+                <a:latin typeface="Arial"/>
+              </a:defRPr>
+            </a:pPr>
+            <a:r>
+              <a:t>Chases the noise.</a:t>
+            </a:r>
+          </a:p>
+        </p:txBody>
+      </p:sp>
+      <p:sp>
+        <p:nvSpPr>
+          <p:cNvPr id="86" name="Oval 85"/>
+          <p:cNvSpPr/>
+          <p:nvPr/>
+        </p:nvSpPr>
+        <p:spPr>
+          <a:xfrm>
+            <a:off x="864108" y="6103620"/>
+            <a:ext cx="82296" cy="82296"/>
+          </a:xfrm>
+          <a:prstGeom prst="ellipse">
+            <a:avLst/>
+          </a:prstGeom>
+          <a:solidFill>
+            <a:srgbClr val="181D16"/>
+          </a:solidFill>
+          <a:ln w="19050">
+            <a:solidFill>
+              <a:srgbClr val="181D16"/>
+            </a:solidFill>
+          </a:ln>
+        </p:spPr>
+        <p:style>
+          <a:lnRef idx="1">
+            <a:schemeClr val="accent1"/>
+          </a:lnRef>
+          <a:fillRef idx="3">
+            <a:schemeClr val="accent1"/>
+          </a:fillRef>
+          <a:effectRef idx="0">
+            <a:schemeClr val="accent1"/>
+          </a:effectRef>
+          <a:fontRef idx="minor">
+            <a:schemeClr val="lt1"/>
+          </a:fontRef>
+        </p:style>
+        <p:txBody>
+          <a:bodyPr rtlCol="0" anchor="ctr"/>
+          <a:lstStyle/>
+          <a:p>
+            <a:pPr algn="ctr"/>
+          </a:p>
+        </p:txBody>
+      </p:sp>
+      <p:sp>
+        <p:nvSpPr>
+          <p:cNvPr id="87" name="TextBox 86"/>
+          <p:cNvSpPr txBox="1"/>
+          <p:nvPr/>
+        </p:nvSpPr>
+        <p:spPr>
+          <a:xfrm>
+            <a:off x="1197864" y="6025896"/>
+            <a:ext cx="2468880" cy="320040"/>
+          </a:xfrm>
+          <a:prstGeom prst="rect">
+            <a:avLst/>
+          </a:prstGeom>
+          <a:noFill/>
+        </p:spPr>
+        <p:txBody>
+          <a:bodyPr wrap="square" lIns="0" rIns="0" tIns="0" bIns="0">
+            <a:spAutoFit/>
+          </a:bodyPr>
+          <a:lstStyle/>
+          <a:p>
+            <a:pPr>
+              <a:spcAft>
+                <a:spcPts val="0"/>
+              </a:spcAft>
+              <a:defRPr sz="1300" b="0">
+                <a:solidFill>
+                  <a:srgbClr val="686C66"/>
+                </a:solidFill>
+                <a:latin typeface="Arial"/>
+              </a:defRPr>
+            </a:pPr>
+            <a:r>
+              <a:t>examples (data)</a:t>
+            </a:r>
+          </a:p>
+        </p:txBody>
+      </p:sp>
+      <p:cxnSp>
+        <p:nvCxnSpPr>
+          <p:cNvPr id="88" name="Connector 87"/>
+          <p:cNvCxnSpPr/>
+          <p:nvPr/>
+        </p:nvCxnSpPr>
+        <p:spPr>
+          <a:xfrm>
+            <a:off x="3621024" y="6144768"/>
+            <a:ext cx="256032" cy="0"/>
+          </a:xfrm>
+          <a:prstGeom prst="line">
+            <a:avLst/>
+          </a:prstGeom>
+          <a:ln w="25400">
+            <a:solidFill>
+              <a:srgbClr val="C65326"/>
+            </a:solidFill>
+          </a:ln>
+        </p:spPr>
+        <p:style>
+          <a:lnRef idx="2">
+            <a:schemeClr val="accent1"/>
+          </a:lnRef>
+          <a:fillRef idx="0">
+            <a:schemeClr val="accent1"/>
+          </a:fillRef>
+          <a:effectRef idx="0">
+            <a:schemeClr val="accent1"/>
+          </a:effectRef>
+          <a:fontRef idx="minor">
+            <a:schemeClr val="tx1"/>
+          </a:fontRef>
+        </p:style>
+      </p:cxnSp>
+      <p:sp>
+        <p:nvSpPr>
+          <p:cNvPr id="89" name="TextBox 88"/>
+          <p:cNvSpPr txBox="1"/>
+          <p:nvPr/>
+        </p:nvSpPr>
+        <p:spPr>
+          <a:xfrm>
+            <a:off x="3977639" y="6025896"/>
+            <a:ext cx="2468880" cy="320040"/>
+          </a:xfrm>
+          <a:prstGeom prst="rect">
+            <a:avLst/>
+          </a:prstGeom>
+          <a:noFill/>
+        </p:spPr>
+        <p:txBody>
+          <a:bodyPr wrap="square" lIns="0" rIns="0" tIns="0" bIns="0">
+            <a:spAutoFit/>
+          </a:bodyPr>
+          <a:lstStyle/>
+          <a:p>
+            <a:pPr>
+              <a:spcAft>
+                <a:spcPts val="0"/>
+              </a:spcAft>
+              <a:defRPr sz="1300" b="0">
+                <a:solidFill>
+                  <a:srgbClr val="686C66"/>
+                </a:solidFill>
+                <a:latin typeface="Arial"/>
+              </a:defRPr>
+            </a:pPr>
+            <a:r>
+              <a:t>learned model</a:t>
+            </a:r>
+          </a:p>
+        </p:txBody>
+      </p:sp>
+    </p:spTree>
+  </p:cSld>
+  <p:clrMapOvr>
+    <a:masterClrMapping/>
+  </p:clrMapOvr>
+</p:sld>
+</file>
+
+<file path=ppt/slides/slide2.xml><?xml version="1.0" encoding="utf-8"?>
+<p:sld xmlns:a="http://schemas.openxmlformats.org/drawingml/2006/main" xmlns:p="http://schemas.openxmlformats.org/presentationml/2006/main" xmlns:r="http://schemas.openxmlformats.org/officeDocument/2006/relationships">
+  <p:cSld>
+    <p:bg>
+      <p:bgPr>
+        <a:solidFill>
+          <a:srgbClr val="F5F5F4"/>
+        </a:solidFill>
+        <a:effectLst/>
+      </p:bgPr>
+    </p:bg>
+    <p:spTree>
+      <p:nvGrpSpPr>
+        <p:cNvPr id="1" name=""/>
+        <p:cNvGrpSpPr/>
+        <p:nvPr/>
+      </p:nvGrpSpPr>
+      <p:grpSpPr/>
+      <p:pic>
+        <p:nvPicPr>
+          <p:cNvPr id="2" name="Picture 1" descr="image.png"/>
+          <p:cNvPicPr>
+            <a:picLocks noChangeAspect="1"/>
+          </p:cNvPicPr>
+          <p:nvPr/>
+        </p:nvPicPr>
+        <p:blipFill>
+          <a:blip r:embed="rId2"/>
+          <a:stretch>
+            <a:fillRect/>
+          </a:stretch>
+        </p:blipFill>
+        <p:spPr>
+          <a:xfrm>
+            <a:off x="11768328" y="201168"/>
+            <a:ext cx="219456" cy="6455664"/>
+          </a:xfrm>
+          <a:prstGeom prst="rect">
+            <a:avLst/>
+          </a:prstGeom>
+        </p:spPr>
+      </p:pic>
+      <p:sp>
+        <p:nvSpPr>
+          <p:cNvPr id="3" name="TextBox 2"/>
+          <p:cNvSpPr txBox="1"/>
+          <p:nvPr/>
+        </p:nvSpPr>
+        <p:spPr>
+          <a:xfrm>
+            <a:off x="566928" y="960120"/>
+            <a:ext cx="10972800" cy="731520"/>
+          </a:xfrm>
+          <a:prstGeom prst="rect">
+            <a:avLst/>
+          </a:prstGeom>
+          <a:noFill/>
+        </p:spPr>
+        <p:txBody>
+          <a:bodyPr wrap="square" lIns="0" rIns="0" tIns="0" bIns="0">
+            <a:spAutoFit/>
+          </a:bodyPr>
+          <a:lstStyle/>
+          <a:p>
+            <a:pPr>
+              <a:spcAft>
+                <a:spcPts val="0"/>
+              </a:spcAft>
+              <a:defRPr sz="3800" b="0">
+                <a:solidFill>
+                  <a:srgbClr val="181D16"/>
+                </a:solidFill>
+                <a:latin typeface="Arial"/>
+              </a:defRPr>
+            </a:pPr>
+            <a:r>
               <a:t>Different training data changes the model</a:t>
             </a:r>
           </a:p>
@@ -3968,7 +11504,7 @@
               </a:defRPr>
             </a:pPr>
             <a:r>
-              <a:t>01/06</a:t>
+              <a:t>02/07</a:t>
             </a:r>
           </a:p>
         </p:txBody>
@@ -9055,7 +16591,7 @@
 </p:sld>
 </file>
 
-<file path=ppt/slides/slide2.xml><?xml version="1.0" encoding="utf-8"?>
+<file path=ppt/slides/slide3.xml><?xml version="1.0" encoding="utf-8"?>
 <p:sld xmlns:a="http://schemas.openxmlformats.org/drawingml/2006/main" xmlns:p="http://schemas.openxmlformats.org/presentationml/2006/main" xmlns:r="http://schemas.openxmlformats.org/officeDocument/2006/relationships">
   <p:cSld>
     <p:bg>
@@ -9170,7 +16706,7 @@
               </a:defRPr>
             </a:pPr>
             <a:r>
-              <a:t>02/06</a:t>
+              <a:t>03/07</a:t>
             </a:r>
           </a:p>
         </p:txBody>
@@ -32238,7 +39774,7 @@
 </p:sld>
 </file>
 
-<file path=ppt/slides/slide3.xml><?xml version="1.0" encoding="utf-8"?>
+<file path=ppt/slides/slide4.xml><?xml version="1.0" encoding="utf-8"?>
 <p:sld xmlns:a="http://schemas.openxmlformats.org/drawingml/2006/main" xmlns:p="http://schemas.openxmlformats.org/presentationml/2006/main" xmlns:r="http://schemas.openxmlformats.org/officeDocument/2006/relationships">
   <p:cSld>
     <p:bg>
@@ -32353,7 +39889,7 @@
               </a:defRPr>
             </a:pPr>
             <a:r>
-              <a:t>03/06</a:t>
+              <a:t>04/07</a:t>
             </a:r>
           </a:p>
         </p:txBody>
@@ -45467,7 +53003,7 @@
 </p:sld>
 </file>
 
-<file path=ppt/slides/slide4.xml><?xml version="1.0" encoding="utf-8"?>
+<file path=ppt/slides/slide5.xml><?xml version="1.0" encoding="utf-8"?>
 <p:sld xmlns:a="http://schemas.openxmlformats.org/drawingml/2006/main" xmlns:p="http://schemas.openxmlformats.org/presentationml/2006/main" xmlns:r="http://schemas.openxmlformats.org/officeDocument/2006/relationships">
   <p:cSld>
     <p:bg>
@@ -45582,7 +53118,7 @@
               </a:defRPr>
             </a:pPr>
             <a:r>
-              <a:t>04/06</a:t>
+              <a:t>05/07</a:t>
             </a:r>
           </a:p>
         </p:txBody>
@@ -58529,7 +66065,7 @@
 </p:sld>
 </file>
 
-<file path=ppt/slides/slide5.xml><?xml version="1.0" encoding="utf-8"?>
+<file path=ppt/slides/slide6.xml><?xml version="1.0" encoding="utf-8"?>
 <p:sld xmlns:a="http://schemas.openxmlformats.org/drawingml/2006/main" xmlns:p="http://schemas.openxmlformats.org/presentationml/2006/main" xmlns:r="http://schemas.openxmlformats.org/officeDocument/2006/relationships">
   <p:cSld>
     <p:bg>
@@ -58644,7 +66180,7 @@
               </a:defRPr>
             </a:pPr>
             <a:r>
-              <a:t>05/06</a:t>
+              <a:t>06/07</a:t>
             </a:r>
           </a:p>
         </p:txBody>
@@ -59203,7 +66739,7 @@
 </p:sld>
 </file>
 
-<file path=ppt/slides/slide6.xml><?xml version="1.0" encoding="utf-8"?>
+<file path=ppt/slides/slide7.xml><?xml version="1.0" encoding="utf-8"?>
 <p:sld xmlns:a="http://schemas.openxmlformats.org/drawingml/2006/main" xmlns:p="http://schemas.openxmlformats.org/presentationml/2006/main" xmlns:r="http://schemas.openxmlformats.org/officeDocument/2006/relationships">
   <p:cSld>
     <p:bg>
@@ -59318,7 +66854,7 @@
               </a:defRPr>
             </a:pPr>
             <a:r>
-              <a:t>06/06</a:t>
+              <a:t>07/07</a:t>
             </a:r>
           </a:p>
         </p:txBody>
